--- a/Bases de Datos II/Clases/Clase 8 - Tuning y transacciones/Presentacion.pptx
+++ b/Bases de Datos II/Clases/Clase 8 - Tuning y transacciones/Presentacion.pptx
@@ -627,17 +627,12 @@
           <a:lstStyle/>
           <a:p>
             <a:r>
-              <a:t>El procedimiento ABORTA la factura completa cuando no hay stock; la funcion INFORMA y deja que el llamador decida.</a:t>
-            </a:r>
-          </a:p>
-          <a:p>
-            <a:r>
-              <a:t>Lo que hay que enfatizar es la linea que separa un caso del otro: una cantidad negativa o cero no es «no hay stock», es una llamada mal hecha, y eso SI es una excepcion; el resultado negativo legitimo se devuelve como dato.</a:t>
-            </a:r>
-          </a:p>
-          <a:p>
-            <a:r>
-              <a:t>Eso aqui no se puede demostrar, porque el motor corre una sola sesion, y ese es el gap que la pregunta 5 pide declarar.</a:t>
+              <a:t>Fuera de la lamina (habla de la practica, no del tema):</a:t>
+            </a:r>
+          </a:p>
+          <a:p>
+            <a:r>
+              <a:t>- Hoy NO se usa, porque la regla del negocio que la actividad implementa es todo o nada, pero conviene nombrarlo para que nadie crea que la unica opcion es abortar la factura completa.</a:t>
             </a:r>
           </a:p>
         </p:txBody>
@@ -707,6 +702,487 @@
           <a:lstStyle/>
           <a:p>
             <a:r>
+              <a:t>Si la excepcion se propaga hasta afuera del procedimiento, el motor deshace TODO lo que ese CALL habia hecho —la cabecera de la factura, las lineas ya insertadas y los descuentos de stock ya aplicados— y nadie escribio ROLLBACK.</a:t>
+            </a:r>
+          </a:p>
+        </p:txBody>
+      </p:sp>
+      <p:sp>
+        <p:nvSpPr>
+          <p:cNvPr id="4" name="Slide Number Placeholder 3"/>
+          <p:cNvSpPr>
+            <a:spLocks noGrp="1"/>
+          </p:cNvSpPr>
+          <p:nvPr>
+            <p:ph type="sldNum" idx="5" sz="quarter"/>
+          </p:nvPr>
+        </p:nvSpPr>
+        <p:spPr/>
+      </p:sp>
+    </p:spTree>
+  </p:cSld>
+  <p:clrMapOvr>
+    <a:masterClrMapping/>
+  </p:clrMapOvr>
+</p:notes>
+</file>
+
+<file path=ppt/notesSlides/notesSlide12.xml><?xml version="1.0" encoding="utf-8"?>
+<p:notes xmlns:a="http://schemas.openxmlformats.org/drawingml/2006/main" xmlns:p="http://schemas.openxmlformats.org/presentationml/2006/main" xmlns:r="http://schemas.openxmlformats.org/officeDocument/2006/relationships">
+  <p:cSld>
+    <p:spTree>
+      <p:nvGrpSpPr>
+        <p:cNvPr id="1" name=""/>
+        <p:cNvGrpSpPr/>
+        <p:nvPr/>
+      </p:nvGrpSpPr>
+      <p:grpSpPr>
+        <a:xfrm>
+          <a:off x="0" y="0"/>
+          <a:ext cx="0" cy="0"/>
+          <a:chOff x="0" y="0"/>
+          <a:chExt cx="0" cy="0"/>
+        </a:xfrm>
+      </p:grpSpPr>
+      <p:sp>
+        <p:nvSpPr>
+          <p:cNvPr id="2" name="Slide Image Placeholder 1"/>
+          <p:cNvSpPr>
+            <a:spLocks noGrp="1"/>
+          </p:cNvSpPr>
+          <p:nvPr>
+            <p:ph type="sldImg" idx="2"/>
+          </p:nvPr>
+        </p:nvSpPr>
+        <p:spPr/>
+      </p:sp>
+      <p:sp>
+        <p:nvSpPr>
+          <p:cNvPr id="3" name="Notes Placeholder 2"/>
+          <p:cNvSpPr>
+            <a:spLocks noGrp="1"/>
+          </p:cNvSpPr>
+          <p:nvPr>
+            <p:ph type="body" idx="3" sz="quarter"/>
+          </p:nvPr>
+        </p:nvSpPr>
+        <p:spPr/>
+        <p:txBody>
+          <a:bodyPr/>
+          <a:lstStyle/>
+          <a:p>
+            <a:r>
+              <a:t>EXCEPTION WHEN...</a:t>
+            </a:r>
+          </a:p>
+          <a:p>
+            <a:r>
+              <a:t>END en PL/pgSQL crea un savepoint implicito al entrar.</a:t>
+            </a:r>
+          </a:p>
+          <a:p>
+            <a:r>
+              <a:t>Por eso, cuando el codigo captura el error, se revierte solo lo hecho DENTRO de ese bloque y el resto de la transaccion sigue vivo.</a:t>
+            </a:r>
+          </a:p>
+          <a:p>
+            <a:r>
+              <a:t>El savepoint implicito de ese DO deshace todo lo que el CALL habia hecho, el mensaje se imprime, y la foto final demuestra que la base quedo igual.</a:t>
+            </a:r>
+          </a:p>
+        </p:txBody>
+      </p:sp>
+      <p:sp>
+        <p:nvSpPr>
+          <p:cNvPr id="4" name="Slide Number Placeholder 3"/>
+          <p:cNvSpPr>
+            <a:spLocks noGrp="1"/>
+          </p:cNvSpPr>
+          <p:nvPr>
+            <p:ph type="sldNum" idx="5" sz="quarter"/>
+          </p:nvPr>
+        </p:nvSpPr>
+        <p:spPr/>
+      </p:sp>
+    </p:spTree>
+  </p:cSld>
+  <p:clrMapOvr>
+    <a:masterClrMapping/>
+  </p:clrMapOvr>
+</p:notes>
+</file>
+
+<file path=ppt/notesSlides/notesSlide13.xml><?xml version="1.0" encoding="utf-8"?>
+<p:notes xmlns:a="http://schemas.openxmlformats.org/drawingml/2006/main" xmlns:p="http://schemas.openxmlformats.org/presentationml/2006/main" xmlns:r="http://schemas.openxmlformats.org/officeDocument/2006/relationships">
+  <p:cSld>
+    <p:spTree>
+      <p:nvGrpSpPr>
+        <p:cNvPr id="1" name=""/>
+        <p:cNvGrpSpPr/>
+        <p:nvPr/>
+      </p:nvGrpSpPr>
+      <p:grpSpPr>
+        <a:xfrm>
+          <a:off x="0" y="0"/>
+          <a:ext cx="0" cy="0"/>
+          <a:chOff x="0" y="0"/>
+          <a:chExt cx="0" cy="0"/>
+        </a:xfrm>
+      </p:grpSpPr>
+      <p:sp>
+        <p:nvSpPr>
+          <p:cNvPr id="2" name="Slide Image Placeholder 1"/>
+          <p:cNvSpPr>
+            <a:spLocks noGrp="1"/>
+          </p:cNvSpPr>
+          <p:nvPr>
+            <p:ph type="sldImg" idx="2"/>
+          </p:nvPr>
+        </p:nvSpPr>
+        <p:spPr/>
+      </p:sp>
+      <p:sp>
+        <p:nvSpPr>
+          <p:cNvPr id="3" name="Notes Placeholder 2"/>
+          <p:cNvSpPr>
+            <a:spLocks noGrp="1"/>
+          </p:cNvSpPr>
+          <p:nvPr>
+            <p:ph type="body" idx="3" sz="quarter"/>
+          </p:nvPr>
+        </p:nvSpPr>
+        <p:spPr/>
+        <p:txBody>
+          <a:bodyPr/>
+          <a:lstStyle/>
+          <a:p>
+            <a:r>
+              <a:t>Fuera de la lamina (habla de la practica, no del tema):</a:t>
+            </a:r>
+          </a:p>
+          <a:p>
+            <a:r>
+              <a:t>- La pregunta 4 vale 10 puntos y es de seleccion unica, asi que conviene que el docente sepa exactamente que se pregunta y por que las otras opciones son falsas.</a:t>
+            </a:r>
+          </a:p>
+        </p:txBody>
+      </p:sp>
+      <p:sp>
+        <p:nvSpPr>
+          <p:cNvPr id="4" name="Slide Number Placeholder 3"/>
+          <p:cNvSpPr>
+            <a:spLocks noGrp="1"/>
+          </p:cNvSpPr>
+          <p:nvPr>
+            <p:ph type="sldNum" idx="5" sz="quarter"/>
+          </p:nvPr>
+        </p:nvSpPr>
+        <p:spPr/>
+      </p:sp>
+    </p:spTree>
+  </p:cSld>
+  <p:clrMapOvr>
+    <a:masterClrMapping/>
+  </p:clrMapOvr>
+</p:notes>
+</file>
+
+<file path=ppt/notesSlides/notesSlide14.xml><?xml version="1.0" encoding="utf-8"?>
+<p:notes xmlns:a="http://schemas.openxmlformats.org/drawingml/2006/main" xmlns:p="http://schemas.openxmlformats.org/presentationml/2006/main" xmlns:r="http://schemas.openxmlformats.org/officeDocument/2006/relationships">
+  <p:cSld>
+    <p:spTree>
+      <p:nvGrpSpPr>
+        <p:cNvPr id="1" name=""/>
+        <p:cNvGrpSpPr/>
+        <p:nvPr/>
+      </p:nvGrpSpPr>
+      <p:grpSpPr>
+        <a:xfrm>
+          <a:off x="0" y="0"/>
+          <a:ext cx="0" cy="0"/>
+          <a:chOff x="0" y="0"/>
+          <a:chExt cx="0" cy="0"/>
+        </a:xfrm>
+      </p:grpSpPr>
+      <p:sp>
+        <p:nvSpPr>
+          <p:cNvPr id="2" name="Slide Image Placeholder 1"/>
+          <p:cNvSpPr>
+            <a:spLocks noGrp="1"/>
+          </p:cNvSpPr>
+          <p:nvPr>
+            <p:ph type="sldImg" idx="2"/>
+          </p:nvPr>
+        </p:nvSpPr>
+        <p:spPr/>
+      </p:sp>
+      <p:sp>
+        <p:nvSpPr>
+          <p:cNvPr id="3" name="Notes Placeholder 2"/>
+          <p:cNvSpPr>
+            <a:spLocks noGrp="1"/>
+          </p:cNvSpPr>
+          <p:nvPr>
+            <p:ph type="body" idx="3" sz="quarter"/>
+          </p:nvPr>
+        </p:nvSpPr>
+        <p:spPr/>
+        <p:txBody>
+          <a:bodyPr/>
+          <a:lstStyle/>
+          <a:p>
+            <a:r>
+              <a:t>El procedimiento ABORTA la factura completa cuando no hay stock; la funcion INFORMA y deja que el llamador decida.</a:t>
+            </a:r>
+          </a:p>
+          <a:p>
+            <a:r>
+              <a:t>Lo que hay que enfatizar es la linea que separa un caso del otro: una cantidad negativa o cero no es «no hay stock», es una llamada mal hecha, y eso SI es una excepcion; el resultado negativo legitimo se devuelve como dato.</a:t>
+            </a:r>
+          </a:p>
+          <a:p>
+            <a:r>
+              <a:t>Eso aqui no se puede demostrar, porque el motor corre una sola sesion, y ese es el gap que la pregunta 5 pide declarar.</a:t>
+            </a:r>
+          </a:p>
+        </p:txBody>
+      </p:sp>
+      <p:sp>
+        <p:nvSpPr>
+          <p:cNvPr id="4" name="Slide Number Placeholder 3"/>
+          <p:cNvSpPr>
+            <a:spLocks noGrp="1"/>
+          </p:cNvSpPr>
+          <p:nvPr>
+            <p:ph type="sldNum" idx="5" sz="quarter"/>
+          </p:nvPr>
+        </p:nvSpPr>
+        <p:spPr/>
+      </p:sp>
+    </p:spTree>
+  </p:cSld>
+  <p:clrMapOvr>
+    <a:masterClrMapping/>
+  </p:clrMapOvr>
+</p:notes>
+</file>
+
+<file path=ppt/notesSlides/notesSlide15.xml><?xml version="1.0" encoding="utf-8"?>
+<p:notes xmlns:a="http://schemas.openxmlformats.org/drawingml/2006/main" xmlns:p="http://schemas.openxmlformats.org/presentationml/2006/main" xmlns:r="http://schemas.openxmlformats.org/officeDocument/2006/relationships">
+  <p:cSld>
+    <p:spTree>
+      <p:nvGrpSpPr>
+        <p:cNvPr id="1" name=""/>
+        <p:cNvGrpSpPr/>
+        <p:nvPr/>
+      </p:nvGrpSpPr>
+      <p:grpSpPr>
+        <a:xfrm>
+          <a:off x="0" y="0"/>
+          <a:ext cx="0" cy="0"/>
+          <a:chOff x="0" y="0"/>
+          <a:chExt cx="0" cy="0"/>
+        </a:xfrm>
+      </p:grpSpPr>
+      <p:sp>
+        <p:nvSpPr>
+          <p:cNvPr id="2" name="Slide Image Placeholder 1"/>
+          <p:cNvSpPr>
+            <a:spLocks noGrp="1"/>
+          </p:cNvSpPr>
+          <p:nvPr>
+            <p:ph type="sldImg" idx="2"/>
+          </p:nvPr>
+        </p:nvSpPr>
+        <p:spPr/>
+      </p:sp>
+      <p:sp>
+        <p:nvSpPr>
+          <p:cNvPr id="3" name="Notes Placeholder 2"/>
+          <p:cNvSpPr>
+            <a:spLocks noGrp="1"/>
+          </p:cNvSpPr>
+          <p:nvPr>
+            <p:ph type="body" idx="3" sz="quarter"/>
+          </p:nvPr>
+        </p:nvSpPr>
+        <p:spPr/>
+        <p:txBody>
+          <a:bodyPr/>
+          <a:lstStyle/>
+          <a:p>
+            <a:r>
+              <a:t>Fuera de la lamina (habla de la practica, no del tema):</a:t>
+            </a:r>
+          </a:p>
+          <a:p>
+            <a:r>
+              <a:t>- Esos cuatro habitos, mas el de no usar SELECT asterisco en los reportes, mas los predicados sargables, mas el respaldo con restore probado, son literalmente los siete items del checklist que la pregunta 5 pide llenar</a:t>
+            </a:r>
+          </a:p>
+        </p:txBody>
+      </p:sp>
+      <p:sp>
+        <p:nvSpPr>
+          <p:cNvPr id="4" name="Slide Number Placeholder 3"/>
+          <p:cNvSpPr>
+            <a:spLocks noGrp="1"/>
+          </p:cNvSpPr>
+          <p:nvPr>
+            <p:ph type="sldNum" idx="5" sz="quarter"/>
+          </p:nvPr>
+        </p:nvSpPr>
+        <p:spPr/>
+      </p:sp>
+    </p:spTree>
+  </p:cSld>
+  <p:clrMapOvr>
+    <a:masterClrMapping/>
+  </p:clrMapOvr>
+</p:notes>
+</file>
+
+<file path=ppt/notesSlides/notesSlide16.xml><?xml version="1.0" encoding="utf-8"?>
+<p:notes xmlns:a="http://schemas.openxmlformats.org/drawingml/2006/main" xmlns:p="http://schemas.openxmlformats.org/presentationml/2006/main" xmlns:r="http://schemas.openxmlformats.org/officeDocument/2006/relationships">
+  <p:cSld>
+    <p:spTree>
+      <p:nvGrpSpPr>
+        <p:cNvPr id="1" name=""/>
+        <p:cNvGrpSpPr/>
+        <p:nvPr/>
+      </p:nvGrpSpPr>
+      <p:grpSpPr>
+        <a:xfrm>
+          <a:off x="0" y="0"/>
+          <a:ext cx="0" cy="0"/>
+          <a:chOff x="0" y="0"/>
+          <a:chExt cx="0" cy="0"/>
+        </a:xfrm>
+      </p:grpSpPr>
+      <p:sp>
+        <p:nvSpPr>
+          <p:cNvPr id="2" name="Slide Image Placeholder 1"/>
+          <p:cNvSpPr>
+            <a:spLocks noGrp="1"/>
+          </p:cNvSpPr>
+          <p:nvPr>
+            <p:ph type="sldImg" idx="2"/>
+          </p:nvPr>
+        </p:nvSpPr>
+        <p:spPr/>
+      </p:sp>
+      <p:sp>
+        <p:nvSpPr>
+          <p:cNvPr id="3" name="Notes Placeholder 2"/>
+          <p:cNvSpPr>
+            <a:spLocks noGrp="1"/>
+          </p:cNvSpPr>
+          <p:nvPr>
+            <p:ph type="body" idx="3" sz="quarter"/>
+          </p:nvPr>
+        </p:nvSpPr>
+        <p:spPr/>
+        <p:txBody>
+          <a:bodyPr/>
+          <a:lstStyle/>
+          <a:p>
+            <a:r>
+              <a:t>Fuera de la lamina (habla de la practica, no del tema):</a:t>
+            </a:r>
+          </a:p>
+          <a:p>
+            <a:r>
+              <a:t>- Si el tiempo aprieta, lo que se recorta es el bloque 4, que el estudiante rehace en la pregunta 3 de la clase; lo que NO se recorta es la pareja de fotos del bloque 3.</a:t>
+            </a:r>
+          </a:p>
+        </p:txBody>
+      </p:sp>
+      <p:sp>
+        <p:nvSpPr>
+          <p:cNvPr id="4" name="Slide Number Placeholder 3"/>
+          <p:cNvSpPr>
+            <a:spLocks noGrp="1"/>
+          </p:cNvSpPr>
+          <p:nvPr>
+            <p:ph type="sldNum" idx="5" sz="quarter"/>
+          </p:nvPr>
+        </p:nvSpPr>
+        <p:spPr/>
+      </p:sp>
+    </p:spTree>
+  </p:cSld>
+  <p:clrMapOvr>
+    <a:masterClrMapping/>
+  </p:clrMapOvr>
+</p:notes>
+</file>
+
+<file path=ppt/notesSlides/notesSlide17.xml><?xml version="1.0" encoding="utf-8"?>
+<p:notes xmlns:a="http://schemas.openxmlformats.org/drawingml/2006/main" xmlns:p="http://schemas.openxmlformats.org/presentationml/2006/main" xmlns:r="http://schemas.openxmlformats.org/officeDocument/2006/relationships">
+  <p:cSld>
+    <p:spTree>
+      <p:nvGrpSpPr>
+        <p:cNvPr id="1" name=""/>
+        <p:cNvGrpSpPr/>
+        <p:nvPr/>
+      </p:nvGrpSpPr>
+      <p:grpSpPr>
+        <a:xfrm>
+          <a:off x="0" y="0"/>
+          <a:ext cx="0" cy="0"/>
+          <a:chOff x="0" y="0"/>
+          <a:chExt cx="0" cy="0"/>
+        </a:xfrm>
+      </p:grpSpPr>
+      <p:sp>
+        <p:nvSpPr>
+          <p:cNvPr id="2" name="Slide Image Placeholder 1"/>
+          <p:cNvSpPr>
+            <a:spLocks noGrp="1"/>
+          </p:cNvSpPr>
+          <p:nvPr>
+            <p:ph type="sldImg" idx="2"/>
+          </p:nvPr>
+        </p:nvSpPr>
+        <p:spPr/>
+      </p:sp>
+      <p:sp>
+        <p:nvSpPr>
+          <p:cNvPr id="3" name="Notes Placeholder 2"/>
+          <p:cNvSpPr>
+            <a:spLocks noGrp="1"/>
+          </p:cNvSpPr>
+          <p:nvPr>
+            <p:ph type="body" idx="3" sz="quarter"/>
+          </p:nvPr>
+        </p:nvSpPr>
+        <p:spPr/>
+        <p:txBody>
+          <a:bodyPr/>
+          <a:lstStyle/>
+          <a:p>
+            <a:r>
+              <a:t>Fuera de la lamina (habla de la practica, no del tema):</a:t>
+            </a:r>
+          </a:p>
+          <a:p>
+            <a:r>
+              <a:t>- Las tres preguntas de SQL del dia suman 75 de los 100 puntos y son PL/pgSQL: CALL, GET DIAGNOSTICS...</a:t>
+            </a:r>
+          </a:p>
+          <a:p>
+            <a:r>
+              <a:t>- Nada de eso corre en Oracle Live SQL, asi que Live SQL se queda solamente como el contraste de sintaxis de la pregunta 4.</a:t>
+            </a:r>
+          </a:p>
+          <a:p>
+            <a:r>
+              <a:t>- Sobre el autocommit, que en versiones anteriores de este material era la advertencia central: con la forma del entregable de hoy deja de ser un problema, y conviene explicar por que en lugar de repetir la advertencia.</a:t>
+            </a:r>
+          </a:p>
+          <a:p/>
+          <a:p>
+            <a:r>
               <a:t>Se menciona como diferencia entre motores, no como precaucion del taller.</a:t>
             </a:r>
           </a:p>
@@ -718,6 +1194,156 @@
           <a:p>
             <a:r>
               <a:t>Tampoco se demuestra la durabilidad real, porque nadie puede apagar el servidor.</a:t>
+            </a:r>
+          </a:p>
+        </p:txBody>
+      </p:sp>
+      <p:sp>
+        <p:nvSpPr>
+          <p:cNvPr id="4" name="Slide Number Placeholder 3"/>
+          <p:cNvSpPr>
+            <a:spLocks noGrp="1"/>
+          </p:cNvSpPr>
+          <p:nvPr>
+            <p:ph type="sldNum" idx="5" sz="quarter"/>
+          </p:nvPr>
+        </p:nvSpPr>
+        <p:spPr/>
+      </p:sp>
+    </p:spTree>
+  </p:cSld>
+  <p:clrMapOvr>
+    <a:masterClrMapping/>
+  </p:clrMapOvr>
+</p:notes>
+</file>
+
+<file path=ppt/notesSlides/notesSlide18.xml><?xml version="1.0" encoding="utf-8"?>
+<p:notes xmlns:a="http://schemas.openxmlformats.org/drawingml/2006/main" xmlns:p="http://schemas.openxmlformats.org/presentationml/2006/main" xmlns:r="http://schemas.openxmlformats.org/officeDocument/2006/relationships">
+  <p:cSld>
+    <p:spTree>
+      <p:nvGrpSpPr>
+        <p:cNvPr id="1" name=""/>
+        <p:cNvGrpSpPr/>
+        <p:nvPr/>
+      </p:nvGrpSpPr>
+      <p:grpSpPr>
+        <a:xfrm>
+          <a:off x="0" y="0"/>
+          <a:ext cx="0" cy="0"/>
+          <a:chOff x="0" y="0"/>
+          <a:chExt cx="0" cy="0"/>
+        </a:xfrm>
+      </p:grpSpPr>
+      <p:sp>
+        <p:nvSpPr>
+          <p:cNvPr id="2" name="Slide Image Placeholder 1"/>
+          <p:cNvSpPr>
+            <a:spLocks noGrp="1"/>
+          </p:cNvSpPr>
+          <p:nvPr>
+            <p:ph type="sldImg" idx="2"/>
+          </p:nvPr>
+        </p:nvSpPr>
+        <p:spPr/>
+      </p:sp>
+      <p:sp>
+        <p:nvSpPr>
+          <p:cNvPr id="3" name="Notes Placeholder 2"/>
+          <p:cNvSpPr>
+            <a:spLocks noGrp="1"/>
+          </p:cNvSpPr>
+          <p:nvPr>
+            <p:ph type="body" idx="3" sz="quarter"/>
+          </p:nvPr>
+        </p:nvSpPr>
+        <p:spPr/>
+        <p:txBody>
+          <a:bodyPr/>
+          <a:lstStyle/>
+          <a:p>
+            <a:r>
+              <a:t>Fuera de la lamina (habla de la practica, no del tema):</a:t>
+            </a:r>
+          </a:p>
+          <a:p>
+            <a:r>
+              <a:t>- Es la pregunta 4 de la clase, y la respuesta hay que poder darla sin leer.</a:t>
+            </a:r>
+          </a:p>
+        </p:txBody>
+      </p:sp>
+      <p:sp>
+        <p:nvSpPr>
+          <p:cNvPr id="4" name="Slide Number Placeholder 3"/>
+          <p:cNvSpPr>
+            <a:spLocks noGrp="1"/>
+          </p:cNvSpPr>
+          <p:nvPr>
+            <p:ph type="sldNum" idx="5" sz="quarter"/>
+          </p:nvPr>
+        </p:nvSpPr>
+        <p:spPr/>
+      </p:sp>
+    </p:spTree>
+  </p:cSld>
+  <p:clrMapOvr>
+    <a:masterClrMapping/>
+  </p:clrMapOvr>
+</p:notes>
+</file>
+
+<file path=ppt/notesSlides/notesSlide19.xml><?xml version="1.0" encoding="utf-8"?>
+<p:notes xmlns:a="http://schemas.openxmlformats.org/drawingml/2006/main" xmlns:p="http://schemas.openxmlformats.org/presentationml/2006/main" xmlns:r="http://schemas.openxmlformats.org/officeDocument/2006/relationships">
+  <p:cSld>
+    <p:spTree>
+      <p:nvGrpSpPr>
+        <p:cNvPr id="1" name=""/>
+        <p:cNvGrpSpPr/>
+        <p:nvPr/>
+      </p:nvGrpSpPr>
+      <p:grpSpPr>
+        <a:xfrm>
+          <a:off x="0" y="0"/>
+          <a:ext cx="0" cy="0"/>
+          <a:chOff x="0" y="0"/>
+          <a:chExt cx="0" cy="0"/>
+        </a:xfrm>
+      </p:grpSpPr>
+      <p:sp>
+        <p:nvSpPr>
+          <p:cNvPr id="2" name="Slide Image Placeholder 1"/>
+          <p:cNvSpPr>
+            <a:spLocks noGrp="1"/>
+          </p:cNvSpPr>
+          <p:nvPr>
+            <p:ph type="sldImg" idx="2"/>
+          </p:nvPr>
+        </p:nvSpPr>
+        <p:spPr/>
+      </p:sp>
+      <p:sp>
+        <p:nvSpPr>
+          <p:cNvPr id="3" name="Notes Placeholder 2"/>
+          <p:cNvSpPr>
+            <a:spLocks noGrp="1"/>
+          </p:cNvSpPr>
+          <p:nvPr>
+            <p:ph type="body" idx="3" sz="quarter"/>
+          </p:nvPr>
+        </p:nvSpPr>
+        <p:spPr/>
+        <p:txBody>
+          <a:bodyPr/>
+          <a:lstStyle/>
+          <a:p>
+            <a:r>
+              <a:t>Fuera de la lamina (habla de la practica, no del tema):</a:t>
+            </a:r>
+          </a:p>
+          <a:p>
+            <a:r>
+              <a:t>- Es la pregunta 1 de la clase — 35 de los 100 puntos — y el molde que la pregunta 2 hace fallar a proposito</a:t>
             </a:r>
           </a:p>
         </p:txBody>
@@ -787,17 +1413,162 @@
           <a:lstStyle/>
           <a:p>
             <a:r>
-              <a:t>Sin atomicidad queda una factura cobrando dos productos con una sola linea registrada, y un insumo descontado que nadie entrego.</a:t>
-            </a:r>
-          </a:p>
-          <a:p>
-            <a:r>
-              <a:t>Nadie recibe un error, la clinica cobro, y el dano aparece semanas despues, cuando el inventario fisico no cuadra y ya no hay forma de saber que factura lo desajusto.</a:t>
-            </a:r>
-          </a:p>
-          <a:p>
-            <a:r>
-              <a:t>Esa es la razon por la que el entregable no pide tres sentencias sueltas sino un procedimiento que las agrupa, y por la que la pregunta 2 del taller vale 25 puntos por demostrar con datos —foto inicial y foto final— que el descuento que SI habia alcanzado se deshizo.</a:t>
+              <a:t>Fuera de la lamina (habla de la practica, no del tema):</a:t>
+            </a:r>
+          </a:p>
+          <a:p>
+            <a:r>
+              <a:t>- En PL/pgSQL, cuantas filas afecto la sentencia anterior se pregunta con GET DIAGNOSTICS v_filas = ROW_COUNT; no existe SQL%ROWCOUNT, que es de Oracle, y esa sola diferencia decide si el codigo del entregable compila o no.</a:t>
+            </a:r>
+          </a:p>
+        </p:txBody>
+      </p:sp>
+      <p:sp>
+        <p:nvSpPr>
+          <p:cNvPr id="4" name="Slide Number Placeholder 3"/>
+          <p:cNvSpPr>
+            <a:spLocks noGrp="1"/>
+          </p:cNvSpPr>
+          <p:nvPr>
+            <p:ph type="sldNum" idx="5" sz="quarter"/>
+          </p:nvPr>
+        </p:nvSpPr>
+        <p:spPr/>
+      </p:sp>
+    </p:spTree>
+  </p:cSld>
+  <p:clrMapOvr>
+    <a:masterClrMapping/>
+  </p:clrMapOvr>
+</p:notes>
+</file>
+
+<file path=ppt/notesSlides/notesSlide20.xml><?xml version="1.0" encoding="utf-8"?>
+<p:notes xmlns:a="http://schemas.openxmlformats.org/drawingml/2006/main" xmlns:p="http://schemas.openxmlformats.org/presentationml/2006/main" xmlns:r="http://schemas.openxmlformats.org/officeDocument/2006/relationships">
+  <p:cSld>
+    <p:spTree>
+      <p:nvGrpSpPr>
+        <p:cNvPr id="1" name=""/>
+        <p:cNvGrpSpPr/>
+        <p:nvPr/>
+      </p:nvGrpSpPr>
+      <p:grpSpPr>
+        <a:xfrm>
+          <a:off x="0" y="0"/>
+          <a:ext cx="0" cy="0"/>
+          <a:chOff x="0" y="0"/>
+          <a:chExt cx="0" cy="0"/>
+        </a:xfrm>
+      </p:grpSpPr>
+      <p:sp>
+        <p:nvSpPr>
+          <p:cNvPr id="2" name="Slide Image Placeholder 1"/>
+          <p:cNvSpPr>
+            <a:spLocks noGrp="1"/>
+          </p:cNvSpPr>
+          <p:nvPr>
+            <p:ph type="sldImg" idx="2"/>
+          </p:nvPr>
+        </p:nvSpPr>
+        <p:spPr/>
+      </p:sp>
+      <p:sp>
+        <p:nvSpPr>
+          <p:cNvPr id="3" name="Notes Placeholder 2"/>
+          <p:cNvSpPr>
+            <a:spLocks noGrp="1"/>
+          </p:cNvSpPr>
+          <p:nvPr>
+            <p:ph type="body" idx="3" sz="quarter"/>
+          </p:nvPr>
+        </p:nvSpPr>
+        <p:spPr/>
+        <p:txBody>
+          <a:bodyPr/>
+          <a:lstStyle/>
+          <a:p>
+            <a:r>
+              <a:t>Fuera de la lamina (habla de la practica, no del tema):</a:t>
+            </a:r>
+          </a:p>
+          <a:p>
+            <a:r>
+              <a:t>- Es la pregunta 4 de la clase —10 puntos, seleccion unica— y la explicacion de por que la pregunta 2 sale bien sin escribir un ROLLBACK</a:t>
+            </a:r>
+          </a:p>
+        </p:txBody>
+      </p:sp>
+      <p:sp>
+        <p:nvSpPr>
+          <p:cNvPr id="4" name="Slide Number Placeholder 3"/>
+          <p:cNvSpPr>
+            <a:spLocks noGrp="1"/>
+          </p:cNvSpPr>
+          <p:nvPr>
+            <p:ph type="sldNum" idx="5" sz="quarter"/>
+          </p:nvPr>
+        </p:nvSpPr>
+        <p:spPr/>
+      </p:sp>
+    </p:spTree>
+  </p:cSld>
+  <p:clrMapOvr>
+    <a:masterClrMapping/>
+  </p:clrMapOvr>
+</p:notes>
+</file>
+
+<file path=ppt/notesSlides/notesSlide21.xml><?xml version="1.0" encoding="utf-8"?>
+<p:notes xmlns:a="http://schemas.openxmlformats.org/drawingml/2006/main" xmlns:p="http://schemas.openxmlformats.org/presentationml/2006/main" xmlns:r="http://schemas.openxmlformats.org/officeDocument/2006/relationships">
+  <p:cSld>
+    <p:spTree>
+      <p:nvGrpSpPr>
+        <p:cNvPr id="1" name=""/>
+        <p:cNvGrpSpPr/>
+        <p:nvPr/>
+      </p:nvGrpSpPr>
+      <p:grpSpPr>
+        <a:xfrm>
+          <a:off x="0" y="0"/>
+          <a:ext cx="0" cy="0"/>
+          <a:chOff x="0" y="0"/>
+          <a:chExt cx="0" cy="0"/>
+        </a:xfrm>
+      </p:grpSpPr>
+      <p:sp>
+        <p:nvSpPr>
+          <p:cNvPr id="2" name="Slide Image Placeholder 1"/>
+          <p:cNvSpPr>
+            <a:spLocks noGrp="1"/>
+          </p:cNvSpPr>
+          <p:nvPr>
+            <p:ph type="sldImg" idx="2"/>
+          </p:nvPr>
+        </p:nvSpPr>
+        <p:spPr/>
+      </p:sp>
+      <p:sp>
+        <p:nvSpPr>
+          <p:cNvPr id="3" name="Notes Placeholder 2"/>
+          <p:cNvSpPr>
+            <a:spLocks noGrp="1"/>
+          </p:cNvSpPr>
+          <p:nvPr>
+            <p:ph type="body" idx="3" sz="quarter"/>
+          </p:nvPr>
+        </p:nvSpPr>
+        <p:spPr/>
+        <p:txBody>
+          <a:bodyPr/>
+          <a:lstStyle/>
+          <a:p>
+            <a:r>
+              <a:t>Fuera de la lamina (habla de la practica, no del tema):</a:t>
+            </a:r>
+          </a:p>
+          <a:p>
+            <a:r>
+              <a:t>- Es la pregunta 3 de la clase —15 puntos— y la decision documentada que pide la pregunta 5</a:t>
             </a:r>
           </a:p>
         </p:txBody>
@@ -867,17 +1638,17 @@
           <a:lstStyle/>
           <a:p>
             <a:r>
-              <a:t>Si nadie declaro la restriccion, la transaccion puede ser perfectamente atomica y dejar la base en un estado absurdo.</a:t>
-            </a:r>
-          </a:p>
-          <a:p>
-            <a:r>
-              <a:t>Con eso el mismo UPDATE falla con un error del motor y la transaccion se puede deshacer entera.</a:t>
-            </a:r>
-          </a:p>
-          <a:p>
-            <a:r>
-              <a:t>Conviene notar como se combinan las dos defensas del dia: el CHECK es la red de seguridad declarativa, y el AND stock &gt;= p_cantidad del WHERE es el guardia que evita llegar al error y permite dar un mensaje de negocio en lugar de un error de restriccion.</a:t>
+              <a:t>Sin atomicidad queda una factura cobrando dos productos con una sola linea registrada, y un insumo descontado que nadie entrego.</a:t>
+            </a:r>
+          </a:p>
+          <a:p>
+            <a:r>
+              <a:t>Nadie recibe un error, la clinica cobro, y el dano aparece semanas despues, cuando el inventario fisico no cuadra y ya no hay forma de saber que factura lo desajusto.</a:t>
+            </a:r>
+          </a:p>
+          <a:p>
+            <a:r>
+              <a:t>Esa es la razon por la que el entregable no pide tres sentencias sueltas sino un procedimiento que las agrupa, y por la que la pregunta 2 del taller vale 25 puntos por demostrar con datos —foto inicial y foto final— que el descuento que SI habia alcanzado se deshizo.</a:t>
             </a:r>
           </a:p>
         </p:txBody>
@@ -947,27 +1718,17 @@
           <a:lstStyle/>
           <a:p>
             <a:r>
-              <a:t>Aislamiento significa que dos transacciones concurrentes producen un resultado equivalente al que darian ejecutadas una despues de la otra.</a:t>
-            </a:r>
-          </a:p>
-          <a:p>
-            <a:r>
-              <a:t>Eso se llama actualizacion perdida o lost update, y la primera defensa es de diseno, no de configuracion: no leer y luego escribir con el valor leido, sino dejar que el motor haga la resta en la misma sentencia, UPDATE insumo SET stock = stock - 3 WHERE id_insumo = 2 AND stock &gt;= 3, porque esa sentencia es atomica y toma un bloqueo sobre la fila mientras se ejecuta.</a:t>
-            </a:r>
-          </a:p>
-          <a:p>
-            <a:r>
-              <a:t>Esa es exactamente la decision que la pregunta 5 pide documentar en una frase defendible.</a:t>
-            </a:r>
-          </a:p>
-          <a:p>
-            <a:r>
-              <a:t>Oracle implementa solo dos, READ COMMITTED por omision y SERIALIZABLE</a:t>
-            </a:r>
-          </a:p>
-          <a:p>
-            <a:r>
-              <a:t>MySQL con InnoDB usa REPEATABLE READ por omision, valor distinto que explica diferencias reales al portar un script.</a:t>
+              <a:t>Si nadie declaro la restriccion, la transaccion puede ser perfectamente atomica y dejar la base en un estado absurdo.</a:t>
+            </a:r>
+          </a:p>
+          <a:p>
+            <a:r>
+              <a:t>Con eso el mismo UPDATE falla con un error del motor y la transaccion se puede deshacer entera.</a:t>
+            </a:r>
+          </a:p>
+          <a:p>
+            <a:r>
+              <a:t>Conviene notar como se combinan las dos defensas del dia: el CHECK es la red de seguridad declarativa, y el AND stock &gt;= p_cantidad del WHERE es el guardia que evita llegar al error y permite dar un mensaje de negocio en lugar de un error de restriccion.</a:t>
             </a:r>
           </a:p>
         </p:txBody>
@@ -1037,7 +1798,27 @@
           <a:lstStyle/>
           <a:p>
             <a:r>
-              <a:t>Durabilidad significa que despues de confirmar, el dato sobrevive incluso si el servidor se apaga un segundo mas tarde.</a:t>
+              <a:t>Aislamiento significa que dos transacciones concurrentes producen un resultado equivalente al que darian ejecutadas una despues de la otra.</a:t>
+            </a:r>
+          </a:p>
+          <a:p>
+            <a:r>
+              <a:t>Eso se llama actualizacion perdida o lost update, y la primera defensa es de diseno, no de configuracion: no leer y luego escribir con el valor leido, sino dejar que el motor haga la resta en la misma sentencia, UPDATE insumo SET stock = stock - 3 WHERE id_insumo = 2 AND stock &gt;= 3, porque esa sentencia es atomica y toma un bloqueo sobre la fila mientras se ejecuta.</a:t>
+            </a:r>
+          </a:p>
+          <a:p>
+            <a:r>
+              <a:t>Esa es exactamente la decision que la pregunta 5 pide documentar en una frase defendible.</a:t>
+            </a:r>
+          </a:p>
+          <a:p>
+            <a:r>
+              <a:t>Oracle implementa solo dos, READ COMMITTED por omision y SERIALIZABLE</a:t>
+            </a:r>
+          </a:p>
+          <a:p>
+            <a:r>
+              <a:t>MySQL con InnoDB usa REPEATABLE READ por omision, valor distinto que explica diferencias reales al portar un script.</a:t>
             </a:r>
           </a:p>
         </p:txBody>
@@ -1107,32 +1888,7 @@
           <a:lstStyle/>
           <a:p>
             <a:r>
-              <a:t>Aqui empieza lo que se califica, y la primera cosa que hay que proyectar es la firma exacta, porque no es la que uno escribiria de memoria: LANGUAGE plpgsql AS $proc$... $proc$.</a:t>
-            </a:r>
-          </a:p>
-          <a:p>
-            <a:r>
-              <a:t>Tres observaciones.</a:t>
-            </a:r>
-          </a:p>
-          <a:p>
-            <a:r>
-              <a:t>Segunda, y es la que sorprende, recibe DOS ARREGLOS PARALELOS y no un insumo suelto, porque una factura real tiene varias lineas; se invoca, que significa una unidad del insumo 1, dos del 6 y tres del 5.</a:t>
-            </a:r>
-          </a:p>
-          <a:p>
-            <a:r>
-              <a:t>Tercera, el cuerpo va entre delimitadores de dolar, y conviene usar una etiqueta como $proc$ en lugar de $$ pelado para que no choque con otro bloque anidado.</a:t>
-            </a:r>
-          </a:p>
-          <a:p>
-            <a:r>
-              <a:t>El cuerpo tiene cuatro partes y vale recorrerlas en orden.</a:t>
-            </a:r>
-          </a:p>
-          <a:p>
-            <a:r>
-              <a:t>INTO evita ir a buscar con otro SELECT el identificador que se acaba de generar.</a:t>
+              <a:t>Durabilidad significa que despues de confirmar, el dato sobrevive incluso si el servidor se apaga un segundo mas tarde.</a:t>
             </a:r>
           </a:p>
         </p:txBody>
@@ -1202,17 +1958,12 @@
           <a:lstStyle/>
           <a:p>
             <a:r>
-              <a:t>Hay que separar dos tipos de fallo a mitad de transaccion porque se atienden distinto, y esta distincion es la que ordena todo el procedimiento.</a:t>
-            </a:r>
-          </a:p>
-          <a:p>
-            <a:r>
-              <a:t>De ahi que el procedimiento tenga que convertir el cero filas en una excepcion, con el RAISE EXCEPTION de la seccion anterior, y de ahi tambien que el mensaje deba nombrar el insumo concreto: quien lea el error en la sustentacion tiene que poder decir cual linea fallo.</a:t>
-            </a:r>
-          </a:p>
-          <a:p>
-            <a:r>
-              <a:t>Dos exigencias del entregable salen de aqui.</a:t>
+              <a:t>Fuera de la lamina (habla de la practica, no del tema):</a:t>
+            </a:r>
+          </a:p>
+          <a:p>
+            <a:r>
+              <a:t>- Es tambien el ultimo item del checklist de la pregunta 5, el del restore probado.</a:t>
             </a:r>
           </a:p>
         </p:txBody>
@@ -1282,7 +2033,32 @@
           <a:lstStyle/>
           <a:p>
             <a:r>
-              <a:t>Si la excepcion se propaga hasta afuera del procedimiento, el motor deshace TODO lo que ese CALL habia hecho —la cabecera de la factura, las lineas ya insertadas y los descuentos de stock ya aplicados— y nadie escribio ROLLBACK.</a:t>
+              <a:t>Aqui empieza lo que se califica, y la primera cosa que hay que proyectar es la firma exacta, porque no es la que uno escribiria de memoria: LANGUAGE plpgsql AS $proc$... $proc$.</a:t>
+            </a:r>
+          </a:p>
+          <a:p>
+            <a:r>
+              <a:t>Tres observaciones.</a:t>
+            </a:r>
+          </a:p>
+          <a:p>
+            <a:r>
+              <a:t>Segunda, y es la que sorprende, recibe DOS ARREGLOS PARALELOS y no un insumo suelto, porque una factura real tiene varias lineas; se invoca, que significa una unidad del insumo 1, dos del 6 y tres del 5.</a:t>
+            </a:r>
+          </a:p>
+          <a:p>
+            <a:r>
+              <a:t>Tercera, el cuerpo va entre delimitadores de dolar, y conviene usar una etiqueta como $proc$ en lugar de $$ pelado para que no choque con otro bloque anidado.</a:t>
+            </a:r>
+          </a:p>
+          <a:p>
+            <a:r>
+              <a:t>El cuerpo tiene cuatro partes y vale recorrerlas en orden.</a:t>
+            </a:r>
+          </a:p>
+          <a:p>
+            <a:r>
+              <a:t>INTO evita ir a buscar con otro SELECT el identificador que se acaba de generar.</a:t>
             </a:r>
           </a:p>
         </p:txBody>
@@ -1352,22 +2128,17 @@
           <a:lstStyle/>
           <a:p>
             <a:r>
-              <a:t>EXCEPTION WHEN...</a:t>
-            </a:r>
-          </a:p>
-          <a:p>
-            <a:r>
-              <a:t>END en PL/pgSQL crea un savepoint implicito al entrar.</a:t>
-            </a:r>
-          </a:p>
-          <a:p>
-            <a:r>
-              <a:t>Por eso, cuando el codigo captura el error, se revierte solo lo hecho DENTRO de ese bloque y el resto de la transaccion sigue vivo.</a:t>
-            </a:r>
-          </a:p>
-          <a:p>
-            <a:r>
-              <a:t>El savepoint implicito de ese DO deshace todo lo que el CALL habia hecho, el mensaje se imprime, y la foto final demuestra que la base quedo igual.</a:t>
+              <a:t>Hay que separar dos tipos de fallo a mitad de transaccion porque se atienden distinto, y esta distincion es la que ordena todo el procedimiento.</a:t>
+            </a:r>
+          </a:p>
+          <a:p>
+            <a:r>
+              <a:t>De ahi que el procedimiento tenga que convertir el cero filas en una excepcion, con el RAISE EXCEPTION de la seccion anterior, y de ahi tambien que el mensaje deba nombrar el insumo concreto: quien lea el error en la sustentacion tiene que poder decir cual linea fallo.</a:t>
+            </a:r>
+          </a:p>
+          <a:p>
+            <a:r>
+              <a:t>Dos exigencias del entregable salen de aqui.</a:t>
             </a:r>
           </a:p>
         </p:txBody>
@@ -5854,7 +6625,7 @@
                 </a:solidFill>
                 <a:latin typeface="Calibri"/>
               </a:rPr>
-              <a:t>–   Tambien hay que decir que hoy no se puede demostrar, porque el motor del taller corre una sola sesion.</a:t>
+              <a:t>–   Tambien hay que decir que hoy no se puede demostrar, porque el motor de la clase corre una sola sesion.</a:t>
             </a:r>
           </a:p>
         </p:txBody>
@@ -6377,22 +7148,6 @@
               <a:t>–   Vale decirlo el mismo dia que se explica la reversion, porque conecta con el respaldo de la Clase 4: el respaldo restaura el estado hasta un punto y el log es lo que permite avanzar desde ese punto hasta el instante anterior a la falla.</a:t>
             </a:r>
           </a:p>
-          <a:p>
-            <a:pPr>
-              <a:spcAft>
-                <a:spcPts val="800"/>
-              </a:spcAft>
-            </a:pPr>
-            <a:r>
-              <a:rPr sz="2000" b="0" i="0">
-                <a:solidFill>
-                  <a:srgbClr val="333333"/>
-                </a:solidFill>
-                <a:latin typeface="Calibri"/>
-              </a:rPr>
-              <a:t>–   Es tambien el ultimo item del checklist de la pregunta 5, el del restore probado.</a:t>
-            </a:r>
-          </a:p>
         </p:txBody>
       </p:sp>
       <p:sp>
@@ -7973,7 +8728,7 @@
                 </a:solidFill>
                 <a:latin typeface="Calibri"/>
               </a:rPr>
-              <a:t>PostgreSQL en el navegador</a:t>
+              <a:t>PostgreSQL/PGlite</a:t>
             </a:r>
             <a:r>
               <a:rPr sz="2000" b="0" i="0">
@@ -9563,7 +10318,7 @@
                 </a:solidFill>
                 <a:latin typeface="Calibri"/>
               </a:rPr>
-              <a:t>–   Hoy NO se usa, porque la regla del negocio que la actividad implementa es todo o nada, pero conviene nombrarlo para que nadie crea que la unica opcion es abortar la factura completa.</a:t>
+              <a:t>–   Hoy NO se usa.</a:t>
             </a:r>
           </a:p>
         </p:txBody>
@@ -9783,7 +10538,7 @@
                 </a:solidFill>
                 <a:latin typeface="Calibri"/>
               </a:rPr>
-              <a:t>–   Esta es la diapositiva de la que depende la pregunta 4, y la afirmacion central es corta: un CALL escrito por fuera de cualquier BEGIN es su propia transaccion.</a:t>
+              <a:t>–   La afirmacion central es corta: un CALL escrito por fuera de cualquier BEGIN es su propia transaccion.</a:t>
             </a:r>
           </a:p>
           <a:p>
@@ -9799,23 +10554,7 @@
                 </a:solidFill>
                 <a:latin typeface="Calibri"/>
               </a:rPr>
-              <a:t>–   Es exactamente lo que la pregunta 2 del taller hace demostrar con datos: el descuenta 2 unidades del insumo 3, que tiene 40 y por lo tanto alcanza</a:t>
-            </a:r>
-          </a:p>
-          <a:p>
-            <a:pPr>
-              <a:spcAft>
-                <a:spcPts val="800"/>
-              </a:spcAft>
-            </a:pPr>
-            <a:r>
-              <a:rPr sz="2000" b="0" i="0">
-                <a:solidFill>
-                  <a:srgbClr val="333333"/>
-                </a:solidFill>
-                <a:latin typeface="Calibri"/>
-              </a:rPr>
-              <a:t>–   Y se estrella en el insumo 2, que tiene 3 y no puede dar 10; al final el stock del insumo 3 vuelve a 40 sin intervencion de nadie.</a:t>
+              <a:t>–   Se demuestra con datos: el descuenta 2 unidades del insumo 3, que tiene 40 y por lo tanto alcanza, y se estrella en el insumo 2, que tiene 3 y no puede dar 10; al final el stock del insumo 3 vuelve a 40 sin intervencion de nadie.</a:t>
             </a:r>
           </a:p>
           <a:p>
@@ -10099,7 +10838,7 @@
                 </a:solidFill>
                 <a:latin typeface="Calibri"/>
               </a:rPr>
-              <a:t>–   O sea que la version con ROLLBACK adentro no es solo innecesaria: en el escenario del taller ni siquiera corre.</a:t>
+              <a:t>–   O sea que la version con ROLLBACK adentro no es solo innecesaria: en el escenario de la clase ni siquiera corre.</a:t>
             </a:r>
           </a:p>
         </p:txBody>
@@ -10659,7 +11398,7 @@
                 </a:solidFill>
                 <a:latin typeface="Calibri"/>
               </a:rPr>
-              <a:t>–   El segundo mecanismo que explica el resultado de la pregunta 2 es menos conocido y vale la mitad de la respuesta: un bloque BEGIN...</a:t>
+              <a:t>–   El segundo mecanismo es menos conocido: un bloque BEGIN...</a:t>
             </a:r>
           </a:p>
           <a:p>
@@ -10675,7 +11414,7 @@
                 </a:solidFill>
                 <a:latin typeface="Calibri"/>
               </a:rPr>
-              <a:t>–   Capturar no es lo mismo que dejar propagar, y la diferencia se ve en el taller: el</a:t>
+              <a:t>–   Capturar no es lo mismo que dejar propagar, y la diferencia se ve en la practica: el</a:t>
             </a:r>
           </a:p>
           <a:p>
@@ -10975,7 +11714,7 @@
                 </a:solidFill>
                 <a:latin typeface="Calibri"/>
               </a:rPr>
-              <a:t>–   La regla practica para el entregable: manejadores donde haya una decision que tomar, y en ningun otro sitio.</a:t>
+              <a:t>–   La regla practica: manejadores donde haya una decision que tomar, y en ningun otro sitio.</a:t>
             </a:r>
           </a:p>
         </p:txBody>
@@ -12348,7 +13087,7 @@
                 </a:solidFill>
                 <a:latin typeface="Calibri"/>
               </a:rPr>
-              <a:t>El contraste con Oracle, que es la pregunta 4 (1/3)</a:t>
+              <a:t>El contraste con Oracle (1/3)</a:t>
             </a:r>
           </a:p>
         </p:txBody>
@@ -12387,23 +13126,7 @@
                 </a:solidFill>
                 <a:latin typeface="Calibri"/>
               </a:rPr>
-              <a:t>–   La pregunta 4 vale 10 puntos y es de seleccion unica, asi que conviene que el docente sepa exactamente que se pregunta y por que las otras opciones son falsas.</a:t>
-            </a:r>
-          </a:p>
-          <a:p>
-            <a:pPr>
-              <a:spcAft>
-                <a:spcPts val="800"/>
-              </a:spcAft>
-            </a:pPr>
-            <a:r>
-              <a:rPr sz="2000" b="0" i="0">
-                <a:solidFill>
-                  <a:srgbClr val="333333"/>
-                </a:solidFill>
-                <a:latin typeface="Calibri"/>
-              </a:rPr>
-              <a:t>–   Se pregunta por que la base quedo intacta en la pregunta 2, y la respuesta correcta reune las dos ideas de las dos secciones anteriores: el CALL de nivel superior es su propia transaccion y al propagarse la excepcion se deshace todo, y ademas un bloque con EXCEPTION crea un savepoint implicito.</a:t>
+              <a:t>–   Por que la base quedo intacta: la respuesta correcta reune las dos ideas de las dos secciones anteriores: el CALL de nivel superior es su propia transaccion y al propagarse la excepcion se deshace todo, y ademas un bloque con EXCEPTION crea un savepoint implicito.</a:t>
             </a:r>
           </a:p>
           <a:p>
@@ -12616,7 +13339,7 @@
                 </a:solidFill>
                 <a:latin typeface="Calibri"/>
               </a:rPr>
-              <a:t>El contraste con Oracle, que es la pregunta 4 (2/3)</a:t>
+              <a:t>El contraste con Oracle (2/3)</a:t>
             </a:r>
           </a:p>
         </p:txBody>
@@ -12655,7 +13378,7 @@
                 </a:solidFill>
                 <a:latin typeface="Calibri"/>
               </a:rPr>
-              <a:t>–   Es una respuesta razonable para quien aprendio PL/SQL, y es falsa aqui por dos motivos: el procedimiento del taller no tiene ese bloque, y ese ROLLBACK no es lo que produjo la reversion.</a:t>
+              <a:t>–   Es una respuesta razonable para quien aprendio PL/SQL, y es falsa aqui por dos motivos: el procedimiento de la clase no tiene ese bloque, y ese ROLLBACK no es lo que produjo la reversion.</a:t>
             </a:r>
           </a:p>
           <a:p>
@@ -12687,7 +13410,7 @@
                 </a:solidFill>
                 <a:latin typeface="Calibri"/>
               </a:rPr>
-              <a:t>–   PL/pgSQL no acumula los UPDATE en memoria para escribirlos al final, cada sentencia se aplica cuando se ejecuta y es visible dentro de la misma transaccion; y no hay ningun trigger de stock en el esquema del taller, asi que no pudo deshacer nada.</a:t>
+              <a:t>–   PL/pgSQL no acumula los UPDATE en memoria para escribirlos al final, cada sentencia se aplica cuando se ejecuta y es visible dentro de la misma transaccion; y no hay ningun trigger de stock en el esquema de la clase, asi que no pudo deshacer nada.</a:t>
             </a:r>
           </a:p>
         </p:txBody>
@@ -12868,7 +13591,7 @@
                 </a:solidFill>
                 <a:latin typeface="Calibri"/>
               </a:rPr>
-              <a:t>El contraste con Oracle, que es la pregunta 4 (3/3)</a:t>
+              <a:t>El contraste con Oracle (3/3)</a:t>
             </a:r>
           </a:p>
         </p:txBody>
@@ -13159,7 +13882,7 @@
                 </a:solidFill>
                 <a:latin typeface="Calibri"/>
               </a:rPr>
-              <a:t>–   La pregunta 3 vale 15 puntos y pide el mismo patron de descuento con un contrato distinto, que es una de las distinciones mas utiles del curso.</a:t>
+              <a:t>–   fn_descontar_stock aplica el mismo patron de descuento con un contrato distinto, que es una de las distinciones mas utiles del curso.</a:t>
             </a:r>
           </a:p>
           <a:p>
@@ -14683,7 +15406,7 @@
                 </a:solidFill>
                 <a:latin typeface="Calibri"/>
               </a:rPr>
-              <a:t>–   Esos cuatro habitos, mas el de no usar SELECT asterisco en los reportes, mas los predicados sargables, mas el respaldo con restore probado, son literalmente los siete items del checklist que la pregunta 5 pide llenar</a:t>
+              <a:t>–   Esos cuatro habitos, mas el de no usar SELECT asterisco en los reportes, mas los predicados sargables, mas el respaldo con restore probado.</a:t>
             </a:r>
           </a:p>
           <a:p>
@@ -14699,7 +15422,7 @@
                 </a:solidFill>
                 <a:latin typeface="Calibri"/>
               </a:rPr>
-              <a:t>–   Y la rubrica exige estado Y evidencia concreta —un nombre de indice, un archivo, una consulta— porque siete casillas marcadas sin evidencia no demuestran nada.</a:t>
+              <a:t>–   Y cada item exige estado Y evidencia concreta —un nombre de indice, un archivo, una consulta— porque siete casillas marcadas sin evidencia no demuestran nada.</a:t>
             </a:r>
           </a:p>
         </p:txBody>
@@ -15203,7 +15926,7 @@
                 </a:solidFill>
                 <a:latin typeface="Calibri"/>
               </a:rPr>
-              <a:t>–   La demo es el script Codigo/08_transacciones_vetcare.sql y se corre en la consola de la plataforma del curso.</a:t>
+              <a:t>–   La demo es el script Codigo/08_transacciones_vetcare.sql y se corre.</a:t>
             </a:r>
           </a:p>
           <a:p>
@@ -15567,7 +16290,7 @@
                 </a:solidFill>
                 <a:latin typeface="Calibri"/>
               </a:rPr>
-              <a:t>–   Si el tiempo aprieta, lo que se recorta es el bloque 4, que el estudiante rehace en la pregunta 3 del taller; lo que NO se recorta es la pareja de fotos del bloque 3.</a:t>
+              <a:t>–   Si el tiempo aprieta, lo que se recorta es el bloque 4.</a:t>
             </a:r>
           </a:p>
         </p:txBody>
@@ -16159,7 +16882,7 @@
                 </a:solidFill>
                 <a:latin typeface="Calibri"/>
               </a:rPr>
-              <a:t>–   La herramienta de hoy es la plataforma del curso, que ejecuta PostgreSQL sobre PGlite dentro del navegador, y hay que decirlo sin ambiguedad porque este es el tema donde la herramienta equivocada no da un resultado distinto sino que no compila.</a:t>
+              <a:t>–   La herramienta de hoy es PostgreSQL en el navegador, que ejecuta PostgreSQL sobre PGlite dentro del navegador, y hay que decirlo sin ambiguedad porque este es el tema donde la herramienta equivocada no da un resultado distinto sino que no compila.</a:t>
             </a:r>
           </a:p>
           <a:p>
@@ -16175,7 +16898,7 @@
                 </a:solidFill>
                 <a:latin typeface="Calibri"/>
               </a:rPr>
-              <a:t>–   Las tres preguntas de SQL del dia suman 75 de los 100 puntos y son PL/pgSQL: CALL, GET DIAGNOSTICS...</a:t>
+              <a:t>–   ROW_COUNT, RAISE EXCEPTION con porcentaje y una funcion que devuelve BOOLEAN.</a:t>
             </a:r>
           </a:p>
           <a:p>
@@ -16191,7 +16914,7 @@
                 </a:solidFill>
                 <a:latin typeface="Calibri"/>
               </a:rPr>
-              <a:t>–   ROW_COUNT, RAISE EXCEPTION con porcentaje y una funcion que devuelve BOOLEAN.</a:t>
+              <a:t>–   Nada de eso corre en Oracle Live SQL.</a:t>
             </a:r>
           </a:p>
           <a:p>
@@ -16207,23 +16930,7 @@
                 </a:solidFill>
                 <a:latin typeface="Calibri"/>
               </a:rPr>
-              <a:t>–   Nada de eso corre en Oracle Live SQL, asi que Live SQL se queda solamente como el contraste de sintaxis de la pregunta 4.</a:t>
-            </a:r>
-          </a:p>
-          <a:p>
-            <a:pPr>
-              <a:spcAft>
-                <a:spcPts val="800"/>
-              </a:spcAft>
-            </a:pPr>
-            <a:r>
-              <a:rPr sz="2000" b="0" i="0">
-                <a:solidFill>
-                  <a:srgbClr val="333333"/>
-                </a:solidFill>
-                <a:latin typeface="Calibri"/>
-              </a:rPr>
-              <a:t>–   Sobre el autocommit, que en versiones anteriores de este material era la advertencia central: con la forma del entregable de hoy deja de ser un problema, y conviene explicar por que en lugar de repetir la advertencia.</a:t>
+              <a:t>–   Sobre el autocommit, que en versiones anteriores de este material era la advertencia central.</a:t>
             </a:r>
           </a:p>
         </p:txBody>
@@ -17027,22 +17734,6 @@
                 </a:solidFill>
                 <a:latin typeface="Calibri"/>
               </a:rPr>
-              <a:t>–   Es la pregunta 4 del taller, y la respuesta hay que poder darla sin leer.</a:t>
-            </a:r>
-          </a:p>
-          <a:p>
-            <a:pPr>
-              <a:spcAft>
-                <a:spcPts val="800"/>
-              </a:spcAft>
-            </a:pPr>
-            <a:r>
-              <a:rPr sz="2000" b="0" i="0">
-                <a:solidFill>
-                  <a:srgbClr val="333333"/>
-                </a:solidFill>
-                <a:latin typeface="Calibri"/>
-              </a:rPr>
               <a:t>–   Quinta: entonces nunca se escribe COMMIT en un procedimiento de PostgreSQL.</a:t>
             </a:r>
           </a:p>
@@ -18611,7 +19302,7 @@
                 </a:solidFill>
                 <a:latin typeface="Calibri"/>
               </a:rPr>
-              <a:t>–   En PL/pgSQL, cuantas filas afecto la sentencia anterior se pregunta con GET DIAGNOSTICS v_filas = ROW_COUNT; no existe SQL%ROWCOUNT, que es de Oracle, y esa sola diferencia decide si el codigo del entregable compila o no.</a:t>
+              <a:t>–   En PL/pgSQL, cuantas filas afecto la sentencia anterior se pregunta con GET DIAGNOSTICS v_filas = ROW_COUNT; no existe SQL%ROWCOUNT, que es de Oracle.</a:t>
             </a:r>
           </a:p>
           <a:p>
@@ -18824,7 +19515,7 @@
                 </a:solidFill>
                 <a:latin typeface="Calibri"/>
               </a:rPr>
-              <a:t>El bloque EXCEPTION y la trampa que cuesta puntos</a:t>
+              <a:t>El bloque EXCEPTION</a:t>
             </a:r>
           </a:p>
         </p:txBody>
@@ -19753,7 +20444,7 @@
         <p:spPr>
           <a:xfrm>
             <a:off x="0" y="0"/>
-            <a:ext cx="12191695" cy="1170432"/>
+            <a:ext cx="12191695" cy="960120"/>
           </a:xfrm>
           <a:prstGeom prst="rect">
             <a:avLst/>
@@ -19795,7 +20486,7 @@
         </p:nvSpPr>
         <p:spPr>
           <a:xfrm>
-            <a:off x="0" y="1170432"/>
+            <a:off x="0" y="960120"/>
             <a:ext cx="12191695" cy="41148"/>
           </a:xfrm>
           <a:prstGeom prst="rect">
@@ -19839,7 +20530,7 @@
         <p:spPr>
           <a:xfrm>
             <a:off x="457200" y="164592"/>
-            <a:ext cx="11277295" cy="384048"/>
+            <a:ext cx="11277295" cy="502920"/>
           </a:xfrm>
           <a:prstGeom prst="rect">
             <a:avLst/>
@@ -19859,7 +20550,7 @@
                 </a:solidFill>
                 <a:latin typeface="Calibri"/>
               </a:rPr>
-              <a:t>sp_facturar en PL/pgSQL: el molde que se califica</a:t>
+              <a:t>sp_facturar en PL/pgSQL</a:t>
             </a:r>
           </a:p>
         </p:txBody>
@@ -19872,8 +20563,8 @@
         </p:nvSpPr>
         <p:spPr>
           <a:xfrm>
-            <a:off x="457200" y="566928"/>
-            <a:ext cx="11277295" cy="411480"/>
+            <a:off x="457200" y="1170432"/>
+            <a:ext cx="11277295" cy="5230368"/>
           </a:xfrm>
           <a:prstGeom prst="rect">
             <a:avLst/>
@@ -19886,14 +20577,335 @@
           </a:bodyPr>
           <a:lstStyle/>
           <a:p>
-            <a:r>
-              <a:rPr sz="1400" b="0" i="0">
-                <a:solidFill>
-                  <a:srgbClr val="B8D8EE"/>
-                </a:solidFill>
-                <a:latin typeface="Calibri"/>
-              </a:rPr>
-              <a:t>Es la pregunta 1 del taller — 35 de los 100 puntos — y el molde que la pregunta 2 hace fallar a proposito</a:t>
+            <a:pPr>
+              <a:spcAft>
+                <a:spcPts val="800"/>
+              </a:spcAft>
+            </a:pPr>
+            <a:r>
+              <a:rPr sz="1600" b="0" i="0">
+                <a:solidFill>
+                  <a:srgbClr val="333333"/>
+                </a:solidFill>
+                <a:latin typeface="Calibri"/>
+              </a:rPr>
+              <a:t>–   </a:t>
+            </a:r>
+            <a:r>
+              <a:rPr sz="1600" b="1" i="0">
+                <a:solidFill>
+                  <a:srgbClr val="333333"/>
+                </a:solidFill>
+                <a:latin typeface="Calibri"/>
+              </a:rPr>
+              <a:t>La firma exacta, que se factura por lineas.</a:t>
+            </a:r>
+            <a:r>
+              <a:rPr sz="1600" b="0" i="0">
+                <a:solidFill>
+                  <a:srgbClr val="333333"/>
+                </a:solidFill>
+                <a:latin typeface="Calibri"/>
+              </a:rPr>
+              <a:t> «CREATE PROCEDURE sp_facturar(p_id_consulta INT, p_insumos INT[], p_cantidades INT[]) LANGUAGE plpgsql AS $proc$ ... $proc$;» — </a:t>
+            </a:r>
+            <a:r>
+              <a:rPr sz="1600" b="1" i="0">
+                <a:solidFill>
+                  <a:srgbClr val="333333"/>
+                </a:solidFill>
+                <a:latin typeface="Calibri"/>
+              </a:rPr>
+              <a:t>dos arreglos paralelos</a:t>
+            </a:r>
+            <a:r>
+              <a:rPr sz="1600" b="0" i="0">
+                <a:solidFill>
+                  <a:srgbClr val="333333"/>
+                </a:solidFill>
+                <a:latin typeface="Calibri"/>
+              </a:rPr>
+              <a:t>, no un insumo suelto: una factura tiene varias lineas. Se llama «CALL sp_facturar(4, ARRAY[1,6,5], ARRAY[1,2,3]);». Los tipos son «INT» y «NUMERIC», no «NUMBER». Primera linea del cuerpo: «IF array_length(p_insumos, 1) IS DISTINCT FROM array_length(p_cantidades, 1) THEN RAISE EXCEPTION ...» — dos arreglos de longitud distinta se rechazan </a:t>
+            </a:r>
+            <a:r>
+              <a:rPr sz="1600" b="1" i="0">
+                <a:solidFill>
+                  <a:srgbClr val="333333"/>
+                </a:solidFill>
+                <a:latin typeface="Calibri"/>
+              </a:rPr>
+              <a:t>antes de tocar la base</a:t>
+            </a:r>
+            <a:r>
+              <a:rPr sz="1600" b="0" i="0">
+                <a:solidFill>
+                  <a:srgbClr val="333333"/>
+                </a:solidFill>
+                <a:latin typeface="Calibri"/>
+              </a:rPr>
+              <a:t>.</a:t>
+            </a:r>
+          </a:p>
+          <a:p>
+            <a:pPr>
+              <a:spcAft>
+                <a:spcPts val="800"/>
+              </a:spcAft>
+            </a:pPr>
+            <a:r>
+              <a:rPr sz="1600" b="0" i="0">
+                <a:solidFill>
+                  <a:srgbClr val="333333"/>
+                </a:solidFill>
+                <a:latin typeface="Calibri"/>
+              </a:rPr>
+              <a:t>–   </a:t>
+            </a:r>
+            <a:r>
+              <a:rPr sz="1600" b="1" i="0">
+                <a:solidFill>
+                  <a:srgbClr val="333333"/>
+                </a:solidFill>
+                <a:latin typeface="Calibri"/>
+              </a:rPr>
+              <a:t>La cabecera y el id que se acaba de generar.</a:t>
+            </a:r>
+            <a:r>
+              <a:rPr sz="1600" b="0" i="0">
+                <a:solidFill>
+                  <a:srgbClr val="333333"/>
+                </a:solidFill>
+                <a:latin typeface="Calibri"/>
+              </a:rPr>
+              <a:t> «INSERT INTO factura (id_consulta, total) VALUES (p_id_consulta, 0) RETURNING id_factura INTO v_id_factura;» — el total entra en </a:t>
+            </a:r>
+            <a:r>
+              <a:rPr sz="1600" b="1" i="0">
+                <a:solidFill>
+                  <a:srgbClr val="333333"/>
+                </a:solidFill>
+                <a:latin typeface="Calibri"/>
+              </a:rPr>
+              <a:t>0</a:t>
+            </a:r>
+            <a:r>
+              <a:rPr sz="1600" b="0" i="0">
+                <a:solidFill>
+                  <a:srgbClr val="333333"/>
+                </a:solidFill>
+                <a:latin typeface="Calibri"/>
+              </a:rPr>
+              <a:t> y se corrige al final, porque todavia no se sabe. «RETURNING ... INTO» evita ir a buscarlo con otro «SELECT».</a:t>
+            </a:r>
+          </a:p>
+          <a:p>
+            <a:pPr>
+              <a:spcAft>
+                <a:spcPts val="800"/>
+              </a:spcAft>
+            </a:pPr>
+            <a:r>
+              <a:rPr sz="1600" b="0" i="0">
+                <a:solidFill>
+                  <a:srgbClr val="333333"/>
+                </a:solidFill>
+                <a:latin typeface="Calibri"/>
+              </a:rPr>
+              <a:t>–   </a:t>
+            </a:r>
+            <a:r>
+              <a:rPr sz="1600" b="1" i="0">
+                <a:solidFill>
+                  <a:srgbClr val="333333"/>
+                </a:solidFill>
+                <a:latin typeface="Calibri"/>
+              </a:rPr>
+              <a:t>El bucle, y el guardia que es el corazon del dia.</a:t>
+            </a:r>
+            <a:r>
+              <a:rPr sz="1600" b="0" i="0">
+                <a:solidFill>
+                  <a:srgbClr val="333333"/>
+                </a:solidFill>
+                <a:latin typeface="Calibri"/>
+              </a:rPr>
+              <a:t> «FOR i IN 1 .. array_length(p_insumos, 1) LOOP» y dentro: «UPDATE insumo SET stock = stock - p_cantidades[i] WHERE id_insumo = p_insumos[i] AND </a:t>
+            </a:r>
+            <a:r>
+              <a:rPr sz="1600" b="1" i="0">
+                <a:solidFill>
+                  <a:srgbClr val="333333"/>
+                </a:solidFill>
+                <a:latin typeface="Calibri"/>
+              </a:rPr>
+              <a:t>stock &gt;= p_cantidades[i]</a:t>
+            </a:r>
+            <a:r>
+              <a:rPr sz="1600" b="0" i="0">
+                <a:solidFill>
+                  <a:srgbClr val="333333"/>
+                </a:solidFill>
+                <a:latin typeface="Calibri"/>
+              </a:rPr>
+              <a:t>;» — la comprobacion viaja </a:t>
+            </a:r>
+            <a:r>
+              <a:rPr sz="1600" b="1" i="0">
+                <a:solidFill>
+                  <a:srgbClr val="333333"/>
+                </a:solidFill>
+                <a:latin typeface="Calibri"/>
+              </a:rPr>
+              <a:t>dentro del «WHERE»</a:t>
+            </a:r>
+            <a:r>
+              <a:rPr sz="1600" b="0" i="0">
+                <a:solidFill>
+                  <a:srgbClr val="333333"/>
+                </a:solidFill>
+                <a:latin typeface="Calibri"/>
+              </a:rPr>
+              <a:t>: comprobar y escribir son </a:t>
+            </a:r>
+            <a:r>
+              <a:rPr sz="1600" b="1" i="0">
+                <a:solidFill>
+                  <a:srgbClr val="333333"/>
+                </a:solidFill>
+                <a:latin typeface="Calibri"/>
+              </a:rPr>
+              <a:t>una sola sentencia</a:t>
+            </a:r>
+            <a:r>
+              <a:rPr sz="1600" b="0" i="0">
+                <a:solidFill>
+                  <a:srgbClr val="333333"/>
+                </a:solidFill>
+                <a:latin typeface="Calibri"/>
+              </a:rPr>
+              <a:t> y nadie puede colarse entre las dos.</a:t>
+            </a:r>
+          </a:p>
+          <a:p>
+            <a:pPr>
+              <a:spcAft>
+                <a:spcPts val="800"/>
+              </a:spcAft>
+            </a:pPr>
+            <a:r>
+              <a:rPr sz="1600" b="0" i="0">
+                <a:solidFill>
+                  <a:srgbClr val="333333"/>
+                </a:solidFill>
+                <a:latin typeface="Calibri"/>
+              </a:rPr>
+              <a:t>–   </a:t>
+            </a:r>
+            <a:r>
+              <a:rPr sz="1600" b="1" i="0">
+                <a:solidFill>
+                  <a:srgbClr val="333333"/>
+                </a:solidFill>
+                <a:latin typeface="Calibri"/>
+              </a:rPr>
+              <a:t>Como se sabe si alcanzo, y como se aborta.</a:t>
+            </a:r>
+            <a:r>
+              <a:rPr sz="1600" b="0" i="0">
+                <a:solidFill>
+                  <a:srgbClr val="333333"/>
+                </a:solidFill>
+                <a:latin typeface="Calibri"/>
+              </a:rPr>
+              <a:t> «GET DIAGNOSTICS v_filas = ROW_COUNT;» guarda cuantas filas toco el «UPDATE»: «1» alcanzo, «0» no habia stock. Entonces «IF v_filas = 0 THEN RAISE EXCEPTION 'ERROR: stock insuficiente del insumo %', p_insumos[i]; END IF;». </a:t>
+            </a:r>
+            <a:r>
+              <a:rPr sz="1600" b="1" i="0">
+                <a:solidFill>
+                  <a:srgbClr val="333333"/>
+                </a:solidFill>
+                <a:latin typeface="Calibri"/>
+              </a:rPr>
+              <a:t>No es «SQL%ROWCOUNT» ni «RAISE_APPLICATION_ERROR»</a:t>
+            </a:r>
+            <a:r>
+              <a:rPr sz="1600" b="0" i="0">
+                <a:solidFill>
+                  <a:srgbClr val="333333"/>
+                </a:solidFill>
+                <a:latin typeface="Calibri"/>
+              </a:rPr>
+              <a:t>: eso es Oracle y aqui no existe.</a:t>
+            </a:r>
+          </a:p>
+          <a:p>
+            <a:pPr>
+              <a:spcAft>
+                <a:spcPts val="800"/>
+              </a:spcAft>
+            </a:pPr>
+            <a:r>
+              <a:rPr sz="1600" b="0" i="0">
+                <a:solidFill>
+                  <a:srgbClr val="333333"/>
+                </a:solidFill>
+                <a:latin typeface="Calibri"/>
+              </a:rPr>
+              <a:t>–   </a:t>
+            </a:r>
+            <a:r>
+              <a:rPr sz="1600" b="1" i="0">
+                <a:solidFill>
+                  <a:srgbClr val="333333"/>
+                </a:solidFill>
+                <a:latin typeface="Calibri"/>
+              </a:rPr>
+              <a:t>Y el cierre.</a:t>
+            </a:r>
+            <a:r>
+              <a:rPr sz="1600" b="0" i="0">
+                <a:solidFill>
+                  <a:srgbClr val="333333"/>
+                </a:solidFill>
+                <a:latin typeface="Calibri"/>
+              </a:rPr>
+              <a:t> Cada iteracion inserta su linea en «detalle_factura» con el «precio_unit» </a:t>
+            </a:r>
+            <a:r>
+              <a:rPr sz="1600" b="1" i="0">
+                <a:solidFill>
+                  <a:srgbClr val="333333"/>
+                </a:solidFill>
+                <a:latin typeface="Calibri"/>
+              </a:rPr>
+              <a:t>vigente</a:t>
+            </a:r>
+            <a:r>
+              <a:rPr sz="1600" b="0" i="0">
+                <a:solidFill>
+                  <a:srgbClr val="333333"/>
+                </a:solidFill>
+                <a:latin typeface="Calibri"/>
+              </a:rPr>
+              <a:t> y acumula «v_total := v_total + v_precio * p_cantidades[i];». Al salir del bucle, «UPDATE factura SET total = v_total WHERE id_factura = v_id_factura;». El caso de prueba da </a:t>
+            </a:r>
+            <a:r>
+              <a:rPr sz="1600" b="1" i="0">
+                <a:solidFill>
+                  <a:srgbClr val="333333"/>
+                </a:solidFill>
+                <a:latin typeface="Calibri"/>
+              </a:rPr>
+              <a:t>27.400</a:t>
+            </a:r>
+            <a:r>
+              <a:rPr sz="1600" b="0" i="0">
+                <a:solidFill>
+                  <a:srgbClr val="333333"/>
+                </a:solidFill>
+                <a:latin typeface="Calibri"/>
+              </a:rPr>
+              <a:t> y deja los stocks en 11, 58 y 5.</a:t>
             </a:r>
           </a:p>
         </p:txBody>
@@ -19901,361 +20913,6 @@
       <p:sp>
         <p:nvSpPr>
           <p:cNvPr id="6" name="TextBox 5"/>
-          <p:cNvSpPr txBox="1"/>
-          <p:nvPr/>
-        </p:nvSpPr>
-        <p:spPr>
-          <a:xfrm>
-            <a:off x="457200" y="1380744"/>
-            <a:ext cx="11277295" cy="5020056"/>
-          </a:xfrm>
-          <a:prstGeom prst="rect">
-            <a:avLst/>
-          </a:prstGeom>
-          <a:noFill/>
-        </p:spPr>
-        <p:txBody>
-          <a:bodyPr wrap="square">
-            <a:spAutoFit/>
-          </a:bodyPr>
-          <a:lstStyle/>
-          <a:p>
-            <a:pPr>
-              <a:spcAft>
-                <a:spcPts val="800"/>
-              </a:spcAft>
-            </a:pPr>
-            <a:r>
-              <a:rPr sz="1600" b="0" i="0">
-                <a:solidFill>
-                  <a:srgbClr val="333333"/>
-                </a:solidFill>
-                <a:latin typeface="Calibri"/>
-              </a:rPr>
-              <a:t>–   </a:t>
-            </a:r>
-            <a:r>
-              <a:rPr sz="1600" b="1" i="0">
-                <a:solidFill>
-                  <a:srgbClr val="333333"/>
-                </a:solidFill>
-                <a:latin typeface="Calibri"/>
-              </a:rPr>
-              <a:t>La firma exacta, que se factura por lineas.</a:t>
-            </a:r>
-            <a:r>
-              <a:rPr sz="1600" b="0" i="0">
-                <a:solidFill>
-                  <a:srgbClr val="333333"/>
-                </a:solidFill>
-                <a:latin typeface="Calibri"/>
-              </a:rPr>
-              <a:t> «CREATE PROCEDURE sp_facturar(p_id_consulta INT, p_insumos INT[], p_cantidades INT[]) LANGUAGE plpgsql AS $proc$ ... $proc$;» — </a:t>
-            </a:r>
-            <a:r>
-              <a:rPr sz="1600" b="1" i="0">
-                <a:solidFill>
-                  <a:srgbClr val="333333"/>
-                </a:solidFill>
-                <a:latin typeface="Calibri"/>
-              </a:rPr>
-              <a:t>dos arreglos paralelos</a:t>
-            </a:r>
-            <a:r>
-              <a:rPr sz="1600" b="0" i="0">
-                <a:solidFill>
-                  <a:srgbClr val="333333"/>
-                </a:solidFill>
-                <a:latin typeface="Calibri"/>
-              </a:rPr>
-              <a:t>, no un insumo suelto: una factura tiene varias lineas. Se llama «CALL sp_facturar(4, ARRAY[1,6,5], ARRAY[1,2,3]);». Los tipos son «INT» y «NUMERIC», no «NUMBER». Primera linea del cuerpo: «IF array_length(p_insumos, 1) IS DISTINCT FROM array_length(p_cantidades, 1) THEN RAISE EXCEPTION ...» — dos arreglos de longitud distinta se rechazan </a:t>
-            </a:r>
-            <a:r>
-              <a:rPr sz="1600" b="1" i="0">
-                <a:solidFill>
-                  <a:srgbClr val="333333"/>
-                </a:solidFill>
-                <a:latin typeface="Calibri"/>
-              </a:rPr>
-              <a:t>antes de tocar la base</a:t>
-            </a:r>
-            <a:r>
-              <a:rPr sz="1600" b="0" i="0">
-                <a:solidFill>
-                  <a:srgbClr val="333333"/>
-                </a:solidFill>
-                <a:latin typeface="Calibri"/>
-              </a:rPr>
-              <a:t>.</a:t>
-            </a:r>
-          </a:p>
-          <a:p>
-            <a:pPr>
-              <a:spcAft>
-                <a:spcPts val="800"/>
-              </a:spcAft>
-            </a:pPr>
-            <a:r>
-              <a:rPr sz="1600" b="0" i="0">
-                <a:solidFill>
-                  <a:srgbClr val="333333"/>
-                </a:solidFill>
-                <a:latin typeface="Calibri"/>
-              </a:rPr>
-              <a:t>–   </a:t>
-            </a:r>
-            <a:r>
-              <a:rPr sz="1600" b="1" i="0">
-                <a:solidFill>
-                  <a:srgbClr val="333333"/>
-                </a:solidFill>
-                <a:latin typeface="Calibri"/>
-              </a:rPr>
-              <a:t>La cabecera y el id que se acaba de generar.</a:t>
-            </a:r>
-            <a:r>
-              <a:rPr sz="1600" b="0" i="0">
-                <a:solidFill>
-                  <a:srgbClr val="333333"/>
-                </a:solidFill>
-                <a:latin typeface="Calibri"/>
-              </a:rPr>
-              <a:t> «INSERT INTO factura (id_consulta, total) VALUES (p_id_consulta, 0) RETURNING id_factura INTO v_id_factura;» — el total entra en </a:t>
-            </a:r>
-            <a:r>
-              <a:rPr sz="1600" b="1" i="0">
-                <a:solidFill>
-                  <a:srgbClr val="333333"/>
-                </a:solidFill>
-                <a:latin typeface="Calibri"/>
-              </a:rPr>
-              <a:t>0</a:t>
-            </a:r>
-            <a:r>
-              <a:rPr sz="1600" b="0" i="0">
-                <a:solidFill>
-                  <a:srgbClr val="333333"/>
-                </a:solidFill>
-                <a:latin typeface="Calibri"/>
-              </a:rPr>
-              <a:t> y se corrige al final, porque todavia no se sabe. «RETURNING ... INTO» evita ir a buscarlo con otro «SELECT».</a:t>
-            </a:r>
-          </a:p>
-          <a:p>
-            <a:pPr>
-              <a:spcAft>
-                <a:spcPts val="800"/>
-              </a:spcAft>
-            </a:pPr>
-            <a:r>
-              <a:rPr sz="1600" b="0" i="0">
-                <a:solidFill>
-                  <a:srgbClr val="333333"/>
-                </a:solidFill>
-                <a:latin typeface="Calibri"/>
-              </a:rPr>
-              <a:t>–   </a:t>
-            </a:r>
-            <a:r>
-              <a:rPr sz="1600" b="1" i="0">
-                <a:solidFill>
-                  <a:srgbClr val="333333"/>
-                </a:solidFill>
-                <a:latin typeface="Calibri"/>
-              </a:rPr>
-              <a:t>El bucle, y el guardia que es el corazon del dia.</a:t>
-            </a:r>
-            <a:r>
-              <a:rPr sz="1600" b="0" i="0">
-                <a:solidFill>
-                  <a:srgbClr val="333333"/>
-                </a:solidFill>
-                <a:latin typeface="Calibri"/>
-              </a:rPr>
-              <a:t> «FOR i IN 1 .. array_length(p_insumos, 1) LOOP» y dentro: «UPDATE insumo SET stock = stock - p_cantidades[i] WHERE id_insumo = p_insumos[i] AND </a:t>
-            </a:r>
-            <a:r>
-              <a:rPr sz="1600" b="1" i="0">
-                <a:solidFill>
-                  <a:srgbClr val="333333"/>
-                </a:solidFill>
-                <a:latin typeface="Calibri"/>
-              </a:rPr>
-              <a:t>stock &gt;= p_cantidades[i]</a:t>
-            </a:r>
-            <a:r>
-              <a:rPr sz="1600" b="0" i="0">
-                <a:solidFill>
-                  <a:srgbClr val="333333"/>
-                </a:solidFill>
-                <a:latin typeface="Calibri"/>
-              </a:rPr>
-              <a:t>;» — la comprobacion viaja </a:t>
-            </a:r>
-            <a:r>
-              <a:rPr sz="1600" b="1" i="0">
-                <a:solidFill>
-                  <a:srgbClr val="333333"/>
-                </a:solidFill>
-                <a:latin typeface="Calibri"/>
-              </a:rPr>
-              <a:t>dentro del «WHERE»</a:t>
-            </a:r>
-            <a:r>
-              <a:rPr sz="1600" b="0" i="0">
-                <a:solidFill>
-                  <a:srgbClr val="333333"/>
-                </a:solidFill>
-                <a:latin typeface="Calibri"/>
-              </a:rPr>
-              <a:t>: comprobar y escribir son </a:t>
-            </a:r>
-            <a:r>
-              <a:rPr sz="1600" b="1" i="0">
-                <a:solidFill>
-                  <a:srgbClr val="333333"/>
-                </a:solidFill>
-                <a:latin typeface="Calibri"/>
-              </a:rPr>
-              <a:t>una sola sentencia</a:t>
-            </a:r>
-            <a:r>
-              <a:rPr sz="1600" b="0" i="0">
-                <a:solidFill>
-                  <a:srgbClr val="333333"/>
-                </a:solidFill>
-                <a:latin typeface="Calibri"/>
-              </a:rPr>
-              <a:t> y nadie puede colarse entre las dos.</a:t>
-            </a:r>
-          </a:p>
-          <a:p>
-            <a:pPr>
-              <a:spcAft>
-                <a:spcPts val="800"/>
-              </a:spcAft>
-            </a:pPr>
-            <a:r>
-              <a:rPr sz="1600" b="0" i="0">
-                <a:solidFill>
-                  <a:srgbClr val="333333"/>
-                </a:solidFill>
-                <a:latin typeface="Calibri"/>
-              </a:rPr>
-              <a:t>–   </a:t>
-            </a:r>
-            <a:r>
-              <a:rPr sz="1600" b="1" i="0">
-                <a:solidFill>
-                  <a:srgbClr val="333333"/>
-                </a:solidFill>
-                <a:latin typeface="Calibri"/>
-              </a:rPr>
-              <a:t>Como se sabe si alcanzo, y como se aborta.</a:t>
-            </a:r>
-            <a:r>
-              <a:rPr sz="1600" b="0" i="0">
-                <a:solidFill>
-                  <a:srgbClr val="333333"/>
-                </a:solidFill>
-                <a:latin typeface="Calibri"/>
-              </a:rPr>
-              <a:t> «GET DIAGNOSTICS v_filas = ROW_COUNT;» guarda cuantas filas toco el «UPDATE»: «1» alcanzo, «0» no habia stock. Entonces «IF v_filas = 0 THEN RAISE EXCEPTION 'ERROR: stock insuficiente del insumo %', p_insumos[i]; END IF;». </a:t>
-            </a:r>
-            <a:r>
-              <a:rPr sz="1600" b="1" i="0">
-                <a:solidFill>
-                  <a:srgbClr val="333333"/>
-                </a:solidFill>
-                <a:latin typeface="Calibri"/>
-              </a:rPr>
-              <a:t>No es «SQL%ROWCOUNT» ni «RAISE_APPLICATION_ERROR»</a:t>
-            </a:r>
-            <a:r>
-              <a:rPr sz="1600" b="0" i="0">
-                <a:solidFill>
-                  <a:srgbClr val="333333"/>
-                </a:solidFill>
-                <a:latin typeface="Calibri"/>
-              </a:rPr>
-              <a:t>: eso es Oracle y aqui no existe.</a:t>
-            </a:r>
-          </a:p>
-          <a:p>
-            <a:pPr>
-              <a:spcAft>
-                <a:spcPts val="800"/>
-              </a:spcAft>
-            </a:pPr>
-            <a:r>
-              <a:rPr sz="1600" b="0" i="0">
-                <a:solidFill>
-                  <a:srgbClr val="333333"/>
-                </a:solidFill>
-                <a:latin typeface="Calibri"/>
-              </a:rPr>
-              <a:t>–   </a:t>
-            </a:r>
-            <a:r>
-              <a:rPr sz="1600" b="1" i="0">
-                <a:solidFill>
-                  <a:srgbClr val="333333"/>
-                </a:solidFill>
-                <a:latin typeface="Calibri"/>
-              </a:rPr>
-              <a:t>Y el cierre.</a:t>
-            </a:r>
-            <a:r>
-              <a:rPr sz="1600" b="0" i="0">
-                <a:solidFill>
-                  <a:srgbClr val="333333"/>
-                </a:solidFill>
-                <a:latin typeface="Calibri"/>
-              </a:rPr>
-              <a:t> Cada iteracion inserta su linea en «detalle_factura» con el «precio_unit» </a:t>
-            </a:r>
-            <a:r>
-              <a:rPr sz="1600" b="1" i="0">
-                <a:solidFill>
-                  <a:srgbClr val="333333"/>
-                </a:solidFill>
-                <a:latin typeface="Calibri"/>
-              </a:rPr>
-              <a:t>vigente</a:t>
-            </a:r>
-            <a:r>
-              <a:rPr sz="1600" b="0" i="0">
-                <a:solidFill>
-                  <a:srgbClr val="333333"/>
-                </a:solidFill>
-                <a:latin typeface="Calibri"/>
-              </a:rPr>
-              <a:t> y acumula «v_total := v_total + v_precio * p_cantidades[i];». Al salir del bucle, «UPDATE factura SET total = v_total WHERE id_factura = v_id_factura;». El caso de prueba da </a:t>
-            </a:r>
-            <a:r>
-              <a:rPr sz="1600" b="1" i="0">
-                <a:solidFill>
-                  <a:srgbClr val="333333"/>
-                </a:solidFill>
-                <a:latin typeface="Calibri"/>
-              </a:rPr>
-              <a:t>27.400</a:t>
-            </a:r>
-            <a:r>
-              <a:rPr sz="1600" b="0" i="0">
-                <a:solidFill>
-                  <a:srgbClr val="333333"/>
-                </a:solidFill>
-                <a:latin typeface="Calibri"/>
-              </a:rPr>
-              <a:t> y deja los stocks en 11, 58 y 5.</a:t>
-            </a:r>
-          </a:p>
-        </p:txBody>
-      </p:sp>
-      <p:sp>
-        <p:nvSpPr>
-          <p:cNvPr id="7" name="TextBox 6"/>
           <p:cNvSpPr txBox="1"/>
           <p:nvPr/>
         </p:nvSpPr>
@@ -20323,7 +20980,7 @@
         <p:spPr>
           <a:xfrm>
             <a:off x="0" y="0"/>
-            <a:ext cx="12191695" cy="1170432"/>
+            <a:ext cx="12191695" cy="960120"/>
           </a:xfrm>
           <a:prstGeom prst="rect">
             <a:avLst/>
@@ -20365,7 +21022,7 @@
         </p:nvSpPr>
         <p:spPr>
           <a:xfrm>
-            <a:off x="0" y="1170432"/>
+            <a:off x="0" y="960120"/>
             <a:ext cx="12191695" cy="41148"/>
           </a:xfrm>
           <a:prstGeom prst="rect">
@@ -20409,7 +21066,7 @@
         <p:spPr>
           <a:xfrm>
             <a:off x="457200" y="164592"/>
-            <a:ext cx="11277295" cy="384048"/>
+            <a:ext cx="11277295" cy="502920"/>
           </a:xfrm>
           <a:prstGeom prst="rect">
             <a:avLst/>
@@ -20442,8 +21099,8 @@
         </p:nvSpPr>
         <p:spPr>
           <a:xfrm>
-            <a:off x="457200" y="566928"/>
-            <a:ext cx="11277295" cy="411480"/>
+            <a:off x="457200" y="1170432"/>
+            <a:ext cx="11277295" cy="5230368"/>
           </a:xfrm>
           <a:prstGeom prst="rect">
             <a:avLst/>
@@ -20456,14 +21113,317 @@
           </a:bodyPr>
           <a:lstStyle/>
           <a:p>
-            <a:r>
-              <a:rPr sz="1400" b="0" i="0">
-                <a:solidFill>
-                  <a:srgbClr val="B8D8EE"/>
-                </a:solidFill>
-                <a:latin typeface="Calibri"/>
-              </a:rPr>
-              <a:t>Es la pregunta 4 del taller —10 puntos, seleccion unica— y la explicacion de por que la pregunta 2 sale bien sin escribir un ROLLBACK</a:t>
+            <a:pPr>
+              <a:spcAft>
+                <a:spcPts val="800"/>
+              </a:spcAft>
+            </a:pPr>
+            <a:r>
+              <a:rPr sz="1900" b="0" i="0">
+                <a:solidFill>
+                  <a:srgbClr val="333333"/>
+                </a:solidFill>
+                <a:latin typeface="Calibri"/>
+              </a:rPr>
+              <a:t>–   </a:t>
+            </a:r>
+            <a:r>
+              <a:rPr sz="1900" b="1" i="0">
+                <a:solidFill>
+                  <a:srgbClr val="333333"/>
+                </a:solidFill>
+                <a:latin typeface="Calibri"/>
+              </a:rPr>
+              <a:t>La regla de PostgreSQL.</a:t>
+            </a:r>
+            <a:r>
+              <a:rPr sz="1900" b="0" i="0">
+                <a:solidFill>
+                  <a:srgbClr val="333333"/>
+                </a:solidFill>
+                <a:latin typeface="Calibri"/>
+              </a:rPr>
+              <a:t> Un «CALL» escrito por fuera de cualquier «BEGIN» es </a:t>
+            </a:r>
+            <a:r>
+              <a:rPr sz="1900" b="1" i="0">
+                <a:solidFill>
+                  <a:srgbClr val="333333"/>
+                </a:solidFill>
+                <a:latin typeface="Calibri"/>
+              </a:rPr>
+              <a:t>su propia transaccion</a:t>
+            </a:r>
+            <a:r>
+              <a:rPr sz="1900" b="0" i="0">
+                <a:solidFill>
+                  <a:srgbClr val="333333"/>
+                </a:solidFill>
+                <a:latin typeface="Calibri"/>
+              </a:rPr>
+              <a:t>. Si la excepcion se propaga hasta afuera del procedimiento, el motor deshace </a:t>
+            </a:r>
+            <a:r>
+              <a:rPr sz="1900" b="1" i="0">
+                <a:solidFill>
+                  <a:srgbClr val="333333"/>
+                </a:solidFill>
+                <a:latin typeface="Calibri"/>
+              </a:rPr>
+              <a:t>todo</a:t>
+            </a:r>
+            <a:r>
+              <a:rPr sz="1900" b="0" i="0">
+                <a:solidFill>
+                  <a:srgbClr val="333333"/>
+                </a:solidFill>
+                <a:latin typeface="Calibri"/>
+              </a:rPr>
+              <a:t> lo que ese «CALL» habia hecho: la cabecera de la factura, el detalle y el descuento del primer insumo. </a:t>
+            </a:r>
+            <a:r>
+              <a:rPr sz="1900" b="1" i="0">
+                <a:solidFill>
+                  <a:srgbClr val="333333"/>
+                </a:solidFill>
+                <a:latin typeface="Calibri"/>
+              </a:rPr>
+              <a:t>Nadie escribio ROLLBACK</a:t>
+            </a:r>
+            <a:r>
+              <a:rPr sz="1900" b="0" i="0">
+                <a:solidFill>
+                  <a:srgbClr val="333333"/>
+                </a:solidFill>
+                <a:latin typeface="Calibri"/>
+              </a:rPr>
+              <a:t> y la base queda intacta.</a:t>
+            </a:r>
+          </a:p>
+          <a:p>
+            <a:pPr>
+              <a:spcAft>
+                <a:spcPts val="800"/>
+              </a:spcAft>
+            </a:pPr>
+            <a:r>
+              <a:rPr sz="1900" b="0" i="0">
+                <a:solidFill>
+                  <a:srgbClr val="333333"/>
+                </a:solidFill>
+                <a:latin typeface="Calibri"/>
+              </a:rPr>
+              <a:t>–   </a:t>
+            </a:r>
+            <a:r>
+              <a:rPr sz="1900" b="1" i="0">
+                <a:solidFill>
+                  <a:srgbClr val="333333"/>
+                </a:solidFill>
+                <a:latin typeface="Calibri"/>
+              </a:rPr>
+              <a:t>Y el savepoint que nadie declara.</a:t>
+            </a:r>
+            <a:r>
+              <a:rPr sz="1900" b="0" i="0">
+                <a:solidFill>
+                  <a:srgbClr val="333333"/>
+                </a:solidFill>
+                <a:latin typeface="Calibri"/>
+              </a:rPr>
+              <a:t> Un bloque «BEGIN ... EXCEPTION WHEN ... END» en PL/pgSQL crea un </a:t>
+            </a:r>
+            <a:r>
+              <a:rPr sz="1900" b="1" i="0">
+                <a:solidFill>
+                  <a:srgbClr val="333333"/>
+                </a:solidFill>
+                <a:latin typeface="Calibri"/>
+              </a:rPr>
+              <a:t>savepoint implicito</a:t>
+            </a:r>
+            <a:r>
+              <a:rPr sz="1900" b="0" i="0">
+                <a:solidFill>
+                  <a:srgbClr val="333333"/>
+                </a:solidFill>
+                <a:latin typeface="Calibri"/>
+              </a:rPr>
+              <a:t> al entrar. Por eso, si tu capturas el error, se revierte solo lo hecho </a:t>
+            </a:r>
+            <a:r>
+              <a:rPr sz="1900" b="1" i="0">
+                <a:solidFill>
+                  <a:srgbClr val="333333"/>
+                </a:solidFill>
+                <a:latin typeface="Calibri"/>
+              </a:rPr>
+              <a:t>dentro de ese bloque</a:t>
+            </a:r>
+            <a:r>
+              <a:rPr sz="1900" b="0" i="0">
+                <a:solidFill>
+                  <a:srgbClr val="333333"/>
+                </a:solidFill>
+                <a:latin typeface="Calibri"/>
+              </a:rPr>
+              <a:t> y el resto sigue vivo. Capturar no es lo mismo que dejar propagar.</a:t>
+            </a:r>
+          </a:p>
+          <a:p>
+            <a:pPr>
+              <a:spcAft>
+                <a:spcPts val="800"/>
+              </a:spcAft>
+            </a:pPr>
+            <a:r>
+              <a:rPr sz="1900" b="0" i="0">
+                <a:solidFill>
+                  <a:srgbClr val="333333"/>
+                </a:solidFill>
+                <a:latin typeface="Calibri"/>
+              </a:rPr>
+              <a:t>–   </a:t>
+            </a:r>
+            <a:r>
+              <a:rPr sz="1900" b="1" i="0">
+                <a:solidFill>
+                  <a:srgbClr val="333333"/>
+                </a:solidFill>
+                <a:latin typeface="Calibri"/>
+              </a:rPr>
+              <a:t>El contraste con Oracle, que es lo que se pregunta.</a:t>
+            </a:r>
+            <a:r>
+              <a:rPr sz="1900" b="0" i="0">
+                <a:solidFill>
+                  <a:srgbClr val="333333"/>
+                </a:solidFill>
+                <a:latin typeface="Calibri"/>
+              </a:rPr>
+              <a:t> En Oracle el procedimiento es parte de la transaccion del llamador y ahi si se escribe «EXCEPTION WHEN OTHERS THEN ROLLBACK; RAISE;». En PostgreSQL ese «ROLLBACK» dentro de un procedimiento invocado por un «CALL» de nivel superior </a:t>
+            </a:r>
+            <a:r>
+              <a:rPr sz="1900" b="1" i="0">
+                <a:solidFill>
+                  <a:srgbClr val="333333"/>
+                </a:solidFill>
+                <a:latin typeface="Calibri"/>
+              </a:rPr>
+              <a:t>ni siquiera esta permitido</a:t>
+            </a:r>
+            <a:r>
+              <a:rPr sz="1900" b="0" i="0">
+                <a:solidFill>
+                  <a:srgbClr val="333333"/>
+                </a:solidFill>
+                <a:latin typeface="Calibri"/>
+              </a:rPr>
+              <a:t>.</a:t>
+            </a:r>
+          </a:p>
+          <a:p>
+            <a:pPr>
+              <a:spcAft>
+                <a:spcPts val="800"/>
+              </a:spcAft>
+            </a:pPr>
+            <a:r>
+              <a:rPr sz="1900" b="0" i="0">
+                <a:solidFill>
+                  <a:srgbClr val="333333"/>
+                </a:solidFill>
+                <a:latin typeface="Calibri"/>
+              </a:rPr>
+              <a:t>–   </a:t>
+            </a:r>
+            <a:r>
+              <a:rPr sz="1900" b="1" i="0">
+                <a:solidFill>
+                  <a:srgbClr val="333333"/>
+                </a:solidFill>
+                <a:latin typeface="Calibri"/>
+              </a:rPr>
+              <a:t>La consecuencia practica.</a:t>
+            </a:r>
+            <a:r>
+              <a:rPr sz="1900" b="0" i="0">
+                <a:solidFill>
+                  <a:srgbClr val="333333"/>
+                </a:solidFill>
+                <a:latin typeface="Calibri"/>
+              </a:rPr>
+              <a:t> Quien decide el «COMMIT» es </a:t>
+            </a:r>
+            <a:r>
+              <a:rPr sz="1900" b="1" i="0">
+                <a:solidFill>
+                  <a:srgbClr val="333333"/>
+                </a:solidFill>
+                <a:latin typeface="Calibri"/>
+              </a:rPr>
+              <a:t>uno solo</a:t>
+            </a:r>
+            <a:r>
+              <a:rPr sz="1900" b="0" i="0">
+                <a:solidFill>
+                  <a:srgbClr val="333333"/>
+                </a:solidFill>
+                <a:latin typeface="Calibri"/>
+              </a:rPr>
+              <a:t>: el llamador. Un procedimiento que confirma por su cuenta le quita al llamador la posibilidad de deshacer, y es la fuente numero uno de facturas a medias cuando la Clase 12 conecte la aplicacion.</a:t>
+            </a:r>
+          </a:p>
+          <a:p>
+            <a:pPr>
+              <a:spcAft>
+                <a:spcPts val="800"/>
+              </a:spcAft>
+            </a:pPr>
+            <a:r>
+              <a:rPr sz="1900" b="0" i="0">
+                <a:solidFill>
+                  <a:srgbClr val="333333"/>
+                </a:solidFill>
+                <a:latin typeface="Calibri"/>
+              </a:rPr>
+              <a:t>–   </a:t>
+            </a:r>
+            <a:r>
+              <a:rPr sz="1900" b="1" i="0">
+                <a:solidFill>
+                  <a:srgbClr val="333333"/>
+                </a:solidFill>
+                <a:latin typeface="Calibri"/>
+              </a:rPr>
+              <a:t>El error que no se perdona.</a:t>
+            </a:r>
+            <a:r>
+              <a:rPr sz="1900" b="0" i="0">
+                <a:solidFill>
+                  <a:srgbClr val="333333"/>
+                </a:solidFill>
+                <a:latin typeface="Calibri"/>
+              </a:rPr>
+              <a:t> Capturar la excepcion y no volver a lanzarla. «EXCEPTION WHEN OTHERS THEN NULL;» </a:t>
+            </a:r>
+            <a:r>
+              <a:rPr sz="1900" b="1" i="0">
+                <a:solidFill>
+                  <a:srgbClr val="333333"/>
+                </a:solidFill>
+                <a:latin typeface="Calibri"/>
+              </a:rPr>
+              <a:t>convierte el fallo en silencio</a:t>
+            </a:r>
+            <a:r>
+              <a:rPr sz="1900" b="0" i="0">
+                <a:solidFill>
+                  <a:srgbClr val="333333"/>
+                </a:solidFill>
+                <a:latin typeface="Calibri"/>
+              </a:rPr>
+              <a:t>: la factura queda registrada, el stock no se descuenta y nadie se entera hasta el inventario.</a:t>
             </a:r>
           </a:p>
         </p:txBody>
@@ -20471,343 +21431,6 @@
       <p:sp>
         <p:nvSpPr>
           <p:cNvPr id="6" name="TextBox 5"/>
-          <p:cNvSpPr txBox="1"/>
-          <p:nvPr/>
-        </p:nvSpPr>
-        <p:spPr>
-          <a:xfrm>
-            <a:off x="457200" y="1380744"/>
-            <a:ext cx="11277295" cy="5020056"/>
-          </a:xfrm>
-          <a:prstGeom prst="rect">
-            <a:avLst/>
-          </a:prstGeom>
-          <a:noFill/>
-        </p:spPr>
-        <p:txBody>
-          <a:bodyPr wrap="square">
-            <a:spAutoFit/>
-          </a:bodyPr>
-          <a:lstStyle/>
-          <a:p>
-            <a:pPr>
-              <a:spcAft>
-                <a:spcPts val="800"/>
-              </a:spcAft>
-            </a:pPr>
-            <a:r>
-              <a:rPr sz="1800" b="0" i="0">
-                <a:solidFill>
-                  <a:srgbClr val="333333"/>
-                </a:solidFill>
-                <a:latin typeface="Calibri"/>
-              </a:rPr>
-              <a:t>–   </a:t>
-            </a:r>
-            <a:r>
-              <a:rPr sz="1800" b="1" i="0">
-                <a:solidFill>
-                  <a:srgbClr val="333333"/>
-                </a:solidFill>
-                <a:latin typeface="Calibri"/>
-              </a:rPr>
-              <a:t>La regla de PostgreSQL.</a:t>
-            </a:r>
-            <a:r>
-              <a:rPr sz="1800" b="0" i="0">
-                <a:solidFill>
-                  <a:srgbClr val="333333"/>
-                </a:solidFill>
-                <a:latin typeface="Calibri"/>
-              </a:rPr>
-              <a:t> Un «CALL» escrito por fuera de cualquier «BEGIN» es </a:t>
-            </a:r>
-            <a:r>
-              <a:rPr sz="1800" b="1" i="0">
-                <a:solidFill>
-                  <a:srgbClr val="333333"/>
-                </a:solidFill>
-                <a:latin typeface="Calibri"/>
-              </a:rPr>
-              <a:t>su propia transaccion</a:t>
-            </a:r>
-            <a:r>
-              <a:rPr sz="1800" b="0" i="0">
-                <a:solidFill>
-                  <a:srgbClr val="333333"/>
-                </a:solidFill>
-                <a:latin typeface="Calibri"/>
-              </a:rPr>
-              <a:t>. Si la excepcion se propaga hasta afuera del procedimiento, el motor deshace </a:t>
-            </a:r>
-            <a:r>
-              <a:rPr sz="1800" b="1" i="0">
-                <a:solidFill>
-                  <a:srgbClr val="333333"/>
-                </a:solidFill>
-                <a:latin typeface="Calibri"/>
-              </a:rPr>
-              <a:t>todo</a:t>
-            </a:r>
-            <a:r>
-              <a:rPr sz="1800" b="0" i="0">
-                <a:solidFill>
-                  <a:srgbClr val="333333"/>
-                </a:solidFill>
-                <a:latin typeface="Calibri"/>
-              </a:rPr>
-              <a:t> lo que ese «CALL» habia hecho: la cabecera de la factura, el detalle y el descuento del primer insumo. </a:t>
-            </a:r>
-            <a:r>
-              <a:rPr sz="1800" b="1" i="0">
-                <a:solidFill>
-                  <a:srgbClr val="333333"/>
-                </a:solidFill>
-                <a:latin typeface="Calibri"/>
-              </a:rPr>
-              <a:t>Nadie escribio ROLLBACK</a:t>
-            </a:r>
-            <a:r>
-              <a:rPr sz="1800" b="0" i="0">
-                <a:solidFill>
-                  <a:srgbClr val="333333"/>
-                </a:solidFill>
-                <a:latin typeface="Calibri"/>
-              </a:rPr>
-              <a:t> y la base queda intacta.</a:t>
-            </a:r>
-          </a:p>
-          <a:p>
-            <a:pPr>
-              <a:spcAft>
-                <a:spcPts val="800"/>
-              </a:spcAft>
-            </a:pPr>
-            <a:r>
-              <a:rPr sz="1800" b="0" i="0">
-                <a:solidFill>
-                  <a:srgbClr val="333333"/>
-                </a:solidFill>
-                <a:latin typeface="Calibri"/>
-              </a:rPr>
-              <a:t>–   </a:t>
-            </a:r>
-            <a:r>
-              <a:rPr sz="1800" b="1" i="0">
-                <a:solidFill>
-                  <a:srgbClr val="333333"/>
-                </a:solidFill>
-                <a:latin typeface="Calibri"/>
-              </a:rPr>
-              <a:t>Y el savepoint que nadie declara.</a:t>
-            </a:r>
-            <a:r>
-              <a:rPr sz="1800" b="0" i="0">
-                <a:solidFill>
-                  <a:srgbClr val="333333"/>
-                </a:solidFill>
-                <a:latin typeface="Calibri"/>
-              </a:rPr>
-              <a:t> Un bloque «BEGIN ... EXCEPTION WHEN ... END» en PL/pgSQL crea un </a:t>
-            </a:r>
-            <a:r>
-              <a:rPr sz="1800" b="1" i="0">
-                <a:solidFill>
-                  <a:srgbClr val="333333"/>
-                </a:solidFill>
-                <a:latin typeface="Calibri"/>
-              </a:rPr>
-              <a:t>savepoint implicito</a:t>
-            </a:r>
-            <a:r>
-              <a:rPr sz="1800" b="0" i="0">
-                <a:solidFill>
-                  <a:srgbClr val="333333"/>
-                </a:solidFill>
-                <a:latin typeface="Calibri"/>
-              </a:rPr>
-              <a:t> al entrar. Por eso, si tu capturas el error, se revierte solo lo hecho </a:t>
-            </a:r>
-            <a:r>
-              <a:rPr sz="1800" b="1" i="0">
-                <a:solidFill>
-                  <a:srgbClr val="333333"/>
-                </a:solidFill>
-                <a:latin typeface="Calibri"/>
-              </a:rPr>
-              <a:t>dentro de ese bloque</a:t>
-            </a:r>
-            <a:r>
-              <a:rPr sz="1800" b="0" i="0">
-                <a:solidFill>
-                  <a:srgbClr val="333333"/>
-                </a:solidFill>
-                <a:latin typeface="Calibri"/>
-              </a:rPr>
-              <a:t> y el resto sigue vivo. Capturar no es lo mismo que dejar propagar.</a:t>
-            </a:r>
-          </a:p>
-          <a:p>
-            <a:pPr>
-              <a:spcAft>
-                <a:spcPts val="800"/>
-              </a:spcAft>
-            </a:pPr>
-            <a:r>
-              <a:rPr sz="1800" b="0" i="0">
-                <a:solidFill>
-                  <a:srgbClr val="333333"/>
-                </a:solidFill>
-                <a:latin typeface="Calibri"/>
-              </a:rPr>
-              <a:t>–   </a:t>
-            </a:r>
-            <a:r>
-              <a:rPr sz="1800" b="1" i="0">
-                <a:solidFill>
-                  <a:srgbClr val="333333"/>
-                </a:solidFill>
-                <a:latin typeface="Calibri"/>
-              </a:rPr>
-              <a:t>El contraste con Oracle, que es lo que se pregunta.</a:t>
-            </a:r>
-            <a:r>
-              <a:rPr sz="1800" b="0" i="0">
-                <a:solidFill>
-                  <a:srgbClr val="333333"/>
-                </a:solidFill>
-                <a:latin typeface="Calibri"/>
-              </a:rPr>
-              <a:t> En Oracle el procedimiento es parte de la transaccion del llamador y ahi si se escribe «EXCEPTION WHEN OTHERS THEN ROLLBACK; RAISE;». En PostgreSQL ese «ROLLBACK» dentro de un procedimiento invocado por un «CALL» de nivel superior </a:t>
-            </a:r>
-            <a:r>
-              <a:rPr sz="1800" b="1" i="0">
-                <a:solidFill>
-                  <a:srgbClr val="333333"/>
-                </a:solidFill>
-                <a:latin typeface="Calibri"/>
-              </a:rPr>
-              <a:t>ni siquiera esta permitido</a:t>
-            </a:r>
-            <a:r>
-              <a:rPr sz="1800" b="0" i="0">
-                <a:solidFill>
-                  <a:srgbClr val="333333"/>
-                </a:solidFill>
-                <a:latin typeface="Calibri"/>
-              </a:rPr>
-              <a:t>.</a:t>
-            </a:r>
-          </a:p>
-          <a:p>
-            <a:pPr>
-              <a:spcAft>
-                <a:spcPts val="800"/>
-              </a:spcAft>
-            </a:pPr>
-            <a:r>
-              <a:rPr sz="1800" b="0" i="0">
-                <a:solidFill>
-                  <a:srgbClr val="333333"/>
-                </a:solidFill>
-                <a:latin typeface="Calibri"/>
-              </a:rPr>
-              <a:t>–   </a:t>
-            </a:r>
-            <a:r>
-              <a:rPr sz="1800" b="1" i="0">
-                <a:solidFill>
-                  <a:srgbClr val="333333"/>
-                </a:solidFill>
-                <a:latin typeface="Calibri"/>
-              </a:rPr>
-              <a:t>La consecuencia practica.</a:t>
-            </a:r>
-            <a:r>
-              <a:rPr sz="1800" b="0" i="0">
-                <a:solidFill>
-                  <a:srgbClr val="333333"/>
-                </a:solidFill>
-                <a:latin typeface="Calibri"/>
-              </a:rPr>
-              <a:t> Quien decide el «COMMIT» es </a:t>
-            </a:r>
-            <a:r>
-              <a:rPr sz="1800" b="1" i="0">
-                <a:solidFill>
-                  <a:srgbClr val="333333"/>
-                </a:solidFill>
-                <a:latin typeface="Calibri"/>
-              </a:rPr>
-              <a:t>uno solo</a:t>
-            </a:r>
-            <a:r>
-              <a:rPr sz="1800" b="0" i="0">
-                <a:solidFill>
-                  <a:srgbClr val="333333"/>
-                </a:solidFill>
-                <a:latin typeface="Calibri"/>
-              </a:rPr>
-              <a:t>: el llamador. Un procedimiento que confirma por su cuenta le quita al llamador la posibilidad de deshacer, y es la fuente numero uno de facturas a medias cuando la Clase 12 conecte la aplicacion.</a:t>
-            </a:r>
-          </a:p>
-          <a:p>
-            <a:pPr>
-              <a:spcAft>
-                <a:spcPts val="800"/>
-              </a:spcAft>
-            </a:pPr>
-            <a:r>
-              <a:rPr sz="1800" b="0" i="0">
-                <a:solidFill>
-                  <a:srgbClr val="333333"/>
-                </a:solidFill>
-                <a:latin typeface="Calibri"/>
-              </a:rPr>
-              <a:t>–   </a:t>
-            </a:r>
-            <a:r>
-              <a:rPr sz="1800" b="1" i="0">
-                <a:solidFill>
-                  <a:srgbClr val="333333"/>
-                </a:solidFill>
-                <a:latin typeface="Calibri"/>
-              </a:rPr>
-              <a:t>El error que no se perdona.</a:t>
-            </a:r>
-            <a:r>
-              <a:rPr sz="1800" b="0" i="0">
-                <a:solidFill>
-                  <a:srgbClr val="333333"/>
-                </a:solidFill>
-                <a:latin typeface="Calibri"/>
-              </a:rPr>
-              <a:t> Capturar la excepcion y no volver a lanzarla. «EXCEPTION WHEN OTHERS THEN NULL;» </a:t>
-            </a:r>
-            <a:r>
-              <a:rPr sz="1800" b="1" i="0">
-                <a:solidFill>
-                  <a:srgbClr val="333333"/>
-                </a:solidFill>
-                <a:latin typeface="Calibri"/>
-              </a:rPr>
-              <a:t>convierte el fallo en silencio</a:t>
-            </a:r>
-            <a:r>
-              <a:rPr sz="1800" b="0" i="0">
-                <a:solidFill>
-                  <a:srgbClr val="333333"/>
-                </a:solidFill>
-                <a:latin typeface="Calibri"/>
-              </a:rPr>
-              <a:t>: la factura queda registrada, el stock no se descuenta y nadie se entera hasta el inventario.</a:t>
-            </a:r>
-          </a:p>
-        </p:txBody>
-      </p:sp>
-      <p:sp>
-        <p:nvSpPr>
-          <p:cNvPr id="7" name="TextBox 6"/>
           <p:cNvSpPr txBox="1"/>
           <p:nvPr/>
         </p:nvSpPr>
@@ -20875,7 +21498,7 @@
         <p:spPr>
           <a:xfrm>
             <a:off x="0" y="0"/>
-            <a:ext cx="12191695" cy="1170432"/>
+            <a:ext cx="12191695" cy="960120"/>
           </a:xfrm>
           <a:prstGeom prst="rect">
             <a:avLst/>
@@ -20917,7 +21540,7 @@
         </p:nvSpPr>
         <p:spPr>
           <a:xfrm>
-            <a:off x="0" y="1170432"/>
+            <a:off x="0" y="960120"/>
             <a:ext cx="12191695" cy="41148"/>
           </a:xfrm>
           <a:prstGeom prst="rect">
@@ -20961,7 +21584,7 @@
         <p:spPr>
           <a:xfrm>
             <a:off x="457200" y="164592"/>
-            <a:ext cx="11277295" cy="384048"/>
+            <a:ext cx="11277295" cy="502920"/>
           </a:xfrm>
           <a:prstGeom prst="rect">
             <a:avLst/>
@@ -20994,8 +21617,8 @@
         </p:nvSpPr>
         <p:spPr>
           <a:xfrm>
-            <a:off x="457200" y="566928"/>
-            <a:ext cx="11277295" cy="411480"/>
+            <a:off x="457200" y="1170432"/>
+            <a:ext cx="11277295" cy="5230368"/>
           </a:xfrm>
           <a:prstGeom prst="rect">
             <a:avLst/>
@@ -21008,14 +21631,353 @@
           </a:bodyPr>
           <a:lstStyle/>
           <a:p>
-            <a:r>
-              <a:rPr sz="1400" b="0" i="0">
-                <a:solidFill>
-                  <a:srgbClr val="B8D8EE"/>
-                </a:solidFill>
-                <a:latin typeface="Calibri"/>
-              </a:rPr>
-              <a:t>Es la pregunta 3 del taller —15 puntos— y la decision documentada que pide la pregunta 5</a:t>
+            <a:pPr>
+              <a:spcAft>
+                <a:spcPts val="800"/>
+              </a:spcAft>
+            </a:pPr>
+            <a:r>
+              <a:rPr sz="1900" b="0" i="0">
+                <a:solidFill>
+                  <a:srgbClr val="333333"/>
+                </a:solidFill>
+                <a:latin typeface="Calibri"/>
+              </a:rPr>
+              <a:t>–   </a:t>
+            </a:r>
+            <a:r>
+              <a:rPr sz="1900" b="1" i="0">
+                <a:solidFill>
+                  <a:srgbClr val="333333"/>
+                </a:solidFill>
+                <a:latin typeface="Calibri"/>
+              </a:rPr>
+              <a:t>La diferencia.</a:t>
+            </a:r>
+            <a:r>
+              <a:rPr sz="1900" b="0" i="0">
+                <a:solidFill>
+                  <a:srgbClr val="333333"/>
+                </a:solidFill>
+                <a:latin typeface="Calibri"/>
+              </a:rPr>
+              <a:t> El procedimiento </a:t>
+            </a:r>
+            <a:r>
+              <a:rPr sz="1900" b="1" i="0">
+                <a:solidFill>
+                  <a:srgbClr val="333333"/>
+                </a:solidFill>
+                <a:latin typeface="Calibri"/>
+              </a:rPr>
+              <a:t>aborta</a:t>
+            </a:r>
+            <a:r>
+              <a:rPr sz="1900" b="0" i="0">
+                <a:solidFill>
+                  <a:srgbClr val="333333"/>
+                </a:solidFill>
+                <a:latin typeface="Calibri"/>
+              </a:rPr>
+              <a:t> la factura completa; la funcion </a:t>
+            </a:r>
+            <a:r>
+              <a:rPr sz="1900" b="1" i="0">
+                <a:solidFill>
+                  <a:srgbClr val="333333"/>
+                </a:solidFill>
+                <a:latin typeface="Calibri"/>
+              </a:rPr>
+              <a:t>informa</a:t>
+            </a:r>
+            <a:r>
+              <a:rPr sz="1900" b="0" i="0">
+                <a:solidFill>
+                  <a:srgbClr val="333333"/>
+                </a:solidFill>
+                <a:latin typeface="Calibri"/>
+              </a:rPr>
+              <a:t> y deja que el llamador decida. La misma regla de negocio, dos contratos distintos, y hay que saber cual se pide.</a:t>
+            </a:r>
+          </a:p>
+          <a:p>
+            <a:pPr>
+              <a:spcAft>
+                <a:spcPts val="800"/>
+              </a:spcAft>
+            </a:pPr>
+            <a:r>
+              <a:rPr sz="1900" b="0" i="0">
+                <a:solidFill>
+                  <a:srgbClr val="333333"/>
+                </a:solidFill>
+                <a:latin typeface="Calibri"/>
+              </a:rPr>
+              <a:t>–   </a:t>
+            </a:r>
+            <a:r>
+              <a:rPr sz="1900" b="1" i="0">
+                <a:solidFill>
+                  <a:srgbClr val="333333"/>
+                </a:solidFill>
+                <a:latin typeface="Calibri"/>
+              </a:rPr>
+              <a:t>La firma, y su palabra clave.</a:t>
+            </a:r>
+            <a:r>
+              <a:rPr sz="1900" b="0" i="0">
+                <a:solidFill>
+                  <a:srgbClr val="333333"/>
+                </a:solidFill>
+                <a:latin typeface="Calibri"/>
+              </a:rPr>
+              <a:t> «CREATE OR REPLACE FUNCTION fn_descontar_stock(p_id_insumo INT, p_cantidad INT) RETURNS BOOLEAN LANGUAGE plpgsql AS $$ ...» — </a:t>
+            </a:r>
+            <a:r>
+              <a:rPr sz="1900" b="1" i="0">
+                <a:solidFill>
+                  <a:srgbClr val="333333"/>
+                </a:solidFill>
+                <a:latin typeface="Calibri"/>
+              </a:rPr>
+              <a:t>«RETURNS BOOLEAN»</a:t>
+            </a:r>
+            <a:r>
+              <a:rPr sz="1900" b="0" i="0">
+                <a:solidFill>
+                  <a:srgbClr val="333333"/>
+                </a:solidFill>
+                <a:latin typeface="Calibri"/>
+              </a:rPr>
+              <a:t>, no «PROCEDURE». Devuelve «TRUE» si desconto y «FALSE» si no habia suficiente, </a:t>
+            </a:r>
+            <a:r>
+              <a:rPr sz="1900" b="1" i="0">
+                <a:solidFill>
+                  <a:srgbClr val="333333"/>
+                </a:solidFill>
+                <a:latin typeface="Calibri"/>
+              </a:rPr>
+              <a:t>sin lanzar excepcion</a:t>
+            </a:r>
+            <a:r>
+              <a:rPr sz="1900" b="0" i="0">
+                <a:solidFill>
+                  <a:srgbClr val="333333"/>
+                </a:solidFill>
+                <a:latin typeface="Calibri"/>
+              </a:rPr>
+              <a:t> en ese segundo caso.</a:t>
+            </a:r>
+          </a:p>
+          <a:p>
+            <a:pPr>
+              <a:spcAft>
+                <a:spcPts val="800"/>
+              </a:spcAft>
+            </a:pPr>
+            <a:r>
+              <a:rPr sz="1900" b="0" i="0">
+                <a:solidFill>
+                  <a:srgbClr val="333333"/>
+                </a:solidFill>
+                <a:latin typeface="Calibri"/>
+              </a:rPr>
+              <a:t>–   </a:t>
+            </a:r>
+            <a:r>
+              <a:rPr sz="1900" b="1" i="0">
+                <a:solidFill>
+                  <a:srgbClr val="333333"/>
+                </a:solidFill>
+                <a:latin typeface="Calibri"/>
+              </a:rPr>
+              <a:t>Lo que si es un error.</a:t>
+            </a:r>
+            <a:r>
+              <a:rPr sz="1900" b="0" i="0">
+                <a:solidFill>
+                  <a:srgbClr val="333333"/>
+                </a:solidFill>
+                <a:latin typeface="Calibri"/>
+              </a:rPr>
+              <a:t> Una cantidad negativa o cero no es «no hay stock», es una llamada mal hecha: eso </a:t>
+            </a:r>
+            <a:r>
+              <a:rPr sz="1900" b="1" i="0">
+                <a:solidFill>
+                  <a:srgbClr val="333333"/>
+                </a:solidFill>
+                <a:latin typeface="Calibri"/>
+              </a:rPr>
+              <a:t>si</a:t>
+            </a:r>
+            <a:r>
+              <a:rPr sz="1900" b="0" i="0">
+                <a:solidFill>
+                  <a:srgbClr val="333333"/>
+                </a:solidFill>
+                <a:latin typeface="Calibri"/>
+              </a:rPr>
+              <a:t> va con «RAISE EXCEPTION». Distinguir el dato invalido del resultado negativo es la mitad de la pregunta.</a:t>
+            </a:r>
+          </a:p>
+          <a:p>
+            <a:pPr>
+              <a:spcAft>
+                <a:spcPts val="800"/>
+              </a:spcAft>
+            </a:pPr>
+            <a:r>
+              <a:rPr sz="1900" b="0" i="0">
+                <a:solidFill>
+                  <a:srgbClr val="333333"/>
+                </a:solidFill>
+                <a:latin typeface="Calibri"/>
+              </a:rPr>
+              <a:t>–   </a:t>
+            </a:r>
+            <a:r>
+              <a:rPr sz="1900" b="1" i="0">
+                <a:solidFill>
+                  <a:srgbClr val="333333"/>
+                </a:solidFill>
+                <a:latin typeface="Calibri"/>
+              </a:rPr>
+              <a:t>Se prueba en una sola consulta.</a:t>
+            </a:r>
+            <a:r>
+              <a:rPr sz="1900" b="0" i="0">
+                <a:solidFill>
+                  <a:srgbClr val="333333"/>
+                </a:solidFill>
+                <a:latin typeface="Calibri"/>
+              </a:rPr>
+              <a:t> «SELECT fn_descontar_stock(5,3) AS caso_ok, fn_descontar_stock(2,10) AS caso_sin_stock, fn_descontar_stock(2,3) AS caso_limite;» -&gt; </a:t>
+            </a:r>
+            <a:r>
+              <a:rPr sz="1900" b="1" i="0">
+                <a:solidFill>
+                  <a:srgbClr val="333333"/>
+                </a:solidFill>
+                <a:latin typeface="Calibri"/>
+              </a:rPr>
+              <a:t>«true», «false», «true»</a:t>
+            </a:r>
+            <a:r>
+              <a:rPr sz="1900" b="0" i="0">
+                <a:solidFill>
+                  <a:srgbClr val="333333"/>
+                </a:solidFill>
+                <a:latin typeface="Calibri"/>
+              </a:rPr>
+              <a:t>. El tercer caso es el interesante: pide </a:t>
+            </a:r>
+            <a:r>
+              <a:rPr sz="1900" b="1" i="0">
+                <a:solidFill>
+                  <a:srgbClr val="333333"/>
+                </a:solidFill>
+                <a:latin typeface="Calibri"/>
+              </a:rPr>
+              <a:t>exactamente</a:t>
+            </a:r>
+            <a:r>
+              <a:rPr sz="1900" b="0" i="0">
+                <a:solidFill>
+                  <a:srgbClr val="333333"/>
+                </a:solidFill>
+                <a:latin typeface="Calibri"/>
+              </a:rPr>
+              <a:t> el stock que queda, y con «&gt;=» en el guardia tiene que pasar.</a:t>
+            </a:r>
+          </a:p>
+          <a:p>
+            <a:pPr>
+              <a:spcAft>
+                <a:spcPts val="800"/>
+              </a:spcAft>
+            </a:pPr>
+            <a:r>
+              <a:rPr sz="1900" b="0" i="0">
+                <a:solidFill>
+                  <a:srgbClr val="333333"/>
+                </a:solidFill>
+                <a:latin typeface="Calibri"/>
+              </a:rPr>
+              <a:t>–   </a:t>
+            </a:r>
+            <a:r>
+              <a:rPr sz="1900" b="1" i="0">
+                <a:solidFill>
+                  <a:srgbClr val="333333"/>
+                </a:solidFill>
+                <a:latin typeface="Calibri"/>
+              </a:rPr>
+              <a:t>Por que no leer primero.</a:t>
+            </a:r>
+            <a:r>
+              <a:rPr sz="1900" b="0" i="0">
+                <a:solidFill>
+                  <a:srgbClr val="333333"/>
+                </a:solidFill>
+                <a:latin typeface="Calibri"/>
+              </a:rPr>
+              <a:t> «SELECT stock ...; IF stock &gt;= cantidad THEN UPDATE ...» deja una </a:t>
+            </a:r>
+            <a:r>
+              <a:rPr sz="1900" b="1" i="0">
+                <a:solidFill>
+                  <a:srgbClr val="333333"/>
+                </a:solidFill>
+                <a:latin typeface="Calibri"/>
+              </a:rPr>
+              <a:t>ventana</a:t>
+            </a:r>
+            <a:r>
+              <a:rPr sz="1900" b="0" i="0">
+                <a:solidFill>
+                  <a:srgbClr val="333333"/>
+                </a:solidFill>
+                <a:latin typeface="Calibri"/>
+              </a:rPr>
+              <a:t> entre la lectura y la escritura, y con dos recepcionistas facturando el mismo insumo las dos leen 3, las dos deciden que alcanza y el stock termina en </a:t>
+            </a:r>
+            <a:r>
+              <a:rPr sz="1900" b="1" i="0">
+                <a:solidFill>
+                  <a:srgbClr val="333333"/>
+                </a:solidFill>
+                <a:latin typeface="Calibri"/>
+              </a:rPr>
+              <a:t>-2</a:t>
+            </a:r>
+            <a:r>
+              <a:rPr sz="1900" b="0" i="0">
+                <a:solidFill>
+                  <a:srgbClr val="333333"/>
+                </a:solidFill>
+                <a:latin typeface="Calibri"/>
+              </a:rPr>
+              <a:t>. El «UPDATE» con la condicion en el «WHERE» no tiene ventana. Aqui no se puede demostrar —PGlite corre </a:t>
+            </a:r>
+            <a:r>
+              <a:rPr sz="1900" b="1" i="0">
+                <a:solidFill>
+                  <a:srgbClr val="333333"/>
+                </a:solidFill>
+                <a:latin typeface="Calibri"/>
+              </a:rPr>
+              <a:t>una sola sesion</a:t>
+            </a:r>
+            <a:r>
+              <a:rPr sz="1900" b="0" i="0">
+                <a:solidFill>
+                  <a:srgbClr val="333333"/>
+                </a:solidFill>
+                <a:latin typeface="Calibri"/>
+              </a:rPr>
+              <a:t>— y ese es el gap que se declara y que abre la Clase 10.</a:t>
             </a:r>
           </a:p>
         </p:txBody>
@@ -21023,379 +21985,6 @@
       <p:sp>
         <p:nvSpPr>
           <p:cNvPr id="6" name="TextBox 5"/>
-          <p:cNvSpPr txBox="1"/>
-          <p:nvPr/>
-        </p:nvSpPr>
-        <p:spPr>
-          <a:xfrm>
-            <a:off x="457200" y="1380744"/>
-            <a:ext cx="11277295" cy="5020056"/>
-          </a:xfrm>
-          <a:prstGeom prst="rect">
-            <a:avLst/>
-          </a:prstGeom>
-          <a:noFill/>
-        </p:spPr>
-        <p:txBody>
-          <a:bodyPr wrap="square">
-            <a:spAutoFit/>
-          </a:bodyPr>
-          <a:lstStyle/>
-          <a:p>
-            <a:pPr>
-              <a:spcAft>
-                <a:spcPts val="800"/>
-              </a:spcAft>
-            </a:pPr>
-            <a:r>
-              <a:rPr sz="1900" b="0" i="0">
-                <a:solidFill>
-                  <a:srgbClr val="333333"/>
-                </a:solidFill>
-                <a:latin typeface="Calibri"/>
-              </a:rPr>
-              <a:t>–   </a:t>
-            </a:r>
-            <a:r>
-              <a:rPr sz="1900" b="1" i="0">
-                <a:solidFill>
-                  <a:srgbClr val="333333"/>
-                </a:solidFill>
-                <a:latin typeface="Calibri"/>
-              </a:rPr>
-              <a:t>La diferencia.</a:t>
-            </a:r>
-            <a:r>
-              <a:rPr sz="1900" b="0" i="0">
-                <a:solidFill>
-                  <a:srgbClr val="333333"/>
-                </a:solidFill>
-                <a:latin typeface="Calibri"/>
-              </a:rPr>
-              <a:t> El procedimiento </a:t>
-            </a:r>
-            <a:r>
-              <a:rPr sz="1900" b="1" i="0">
-                <a:solidFill>
-                  <a:srgbClr val="333333"/>
-                </a:solidFill>
-                <a:latin typeface="Calibri"/>
-              </a:rPr>
-              <a:t>aborta</a:t>
-            </a:r>
-            <a:r>
-              <a:rPr sz="1900" b="0" i="0">
-                <a:solidFill>
-                  <a:srgbClr val="333333"/>
-                </a:solidFill>
-                <a:latin typeface="Calibri"/>
-              </a:rPr>
-              <a:t> la factura completa; la funcion </a:t>
-            </a:r>
-            <a:r>
-              <a:rPr sz="1900" b="1" i="0">
-                <a:solidFill>
-                  <a:srgbClr val="333333"/>
-                </a:solidFill>
-                <a:latin typeface="Calibri"/>
-              </a:rPr>
-              <a:t>informa</a:t>
-            </a:r>
-            <a:r>
-              <a:rPr sz="1900" b="0" i="0">
-                <a:solidFill>
-                  <a:srgbClr val="333333"/>
-                </a:solidFill>
-                <a:latin typeface="Calibri"/>
-              </a:rPr>
-              <a:t> y deja que el llamador decida. La misma regla de negocio, dos contratos distintos, y hay que saber cual se pide.</a:t>
-            </a:r>
-          </a:p>
-          <a:p>
-            <a:pPr>
-              <a:spcAft>
-                <a:spcPts val="800"/>
-              </a:spcAft>
-            </a:pPr>
-            <a:r>
-              <a:rPr sz="1900" b="0" i="0">
-                <a:solidFill>
-                  <a:srgbClr val="333333"/>
-                </a:solidFill>
-                <a:latin typeface="Calibri"/>
-              </a:rPr>
-              <a:t>–   </a:t>
-            </a:r>
-            <a:r>
-              <a:rPr sz="1900" b="1" i="0">
-                <a:solidFill>
-                  <a:srgbClr val="333333"/>
-                </a:solidFill>
-                <a:latin typeface="Calibri"/>
-              </a:rPr>
-              <a:t>La firma, y su palabra clave.</a:t>
-            </a:r>
-            <a:r>
-              <a:rPr sz="1900" b="0" i="0">
-                <a:solidFill>
-                  <a:srgbClr val="333333"/>
-                </a:solidFill>
-                <a:latin typeface="Calibri"/>
-              </a:rPr>
-              <a:t> «CREATE OR REPLACE FUNCTION fn_descontar_stock(p_id_insumo INT, p_cantidad INT) RETURNS BOOLEAN LANGUAGE plpgsql AS $$ ...» — </a:t>
-            </a:r>
-            <a:r>
-              <a:rPr sz="1900" b="1" i="0">
-                <a:solidFill>
-                  <a:srgbClr val="333333"/>
-                </a:solidFill>
-                <a:latin typeface="Calibri"/>
-              </a:rPr>
-              <a:t>«RETURNS BOOLEAN»</a:t>
-            </a:r>
-            <a:r>
-              <a:rPr sz="1900" b="0" i="0">
-                <a:solidFill>
-                  <a:srgbClr val="333333"/>
-                </a:solidFill>
-                <a:latin typeface="Calibri"/>
-              </a:rPr>
-              <a:t>, no «PROCEDURE». Devuelve «TRUE» si desconto y «FALSE» si no habia suficiente, </a:t>
-            </a:r>
-            <a:r>
-              <a:rPr sz="1900" b="1" i="0">
-                <a:solidFill>
-                  <a:srgbClr val="333333"/>
-                </a:solidFill>
-                <a:latin typeface="Calibri"/>
-              </a:rPr>
-              <a:t>sin lanzar excepcion</a:t>
-            </a:r>
-            <a:r>
-              <a:rPr sz="1900" b="0" i="0">
-                <a:solidFill>
-                  <a:srgbClr val="333333"/>
-                </a:solidFill>
-                <a:latin typeface="Calibri"/>
-              </a:rPr>
-              <a:t> en ese segundo caso.</a:t>
-            </a:r>
-          </a:p>
-          <a:p>
-            <a:pPr>
-              <a:spcAft>
-                <a:spcPts val="800"/>
-              </a:spcAft>
-            </a:pPr>
-            <a:r>
-              <a:rPr sz="1900" b="0" i="0">
-                <a:solidFill>
-                  <a:srgbClr val="333333"/>
-                </a:solidFill>
-                <a:latin typeface="Calibri"/>
-              </a:rPr>
-              <a:t>–   </a:t>
-            </a:r>
-            <a:r>
-              <a:rPr sz="1900" b="1" i="0">
-                <a:solidFill>
-                  <a:srgbClr val="333333"/>
-                </a:solidFill>
-                <a:latin typeface="Calibri"/>
-              </a:rPr>
-              <a:t>Lo que si es un error.</a:t>
-            </a:r>
-            <a:r>
-              <a:rPr sz="1900" b="0" i="0">
-                <a:solidFill>
-                  <a:srgbClr val="333333"/>
-                </a:solidFill>
-                <a:latin typeface="Calibri"/>
-              </a:rPr>
-              <a:t> Una cantidad negativa o cero no es «no hay stock», es una llamada mal hecha: eso </a:t>
-            </a:r>
-            <a:r>
-              <a:rPr sz="1900" b="1" i="0">
-                <a:solidFill>
-                  <a:srgbClr val="333333"/>
-                </a:solidFill>
-                <a:latin typeface="Calibri"/>
-              </a:rPr>
-              <a:t>si</a:t>
-            </a:r>
-            <a:r>
-              <a:rPr sz="1900" b="0" i="0">
-                <a:solidFill>
-                  <a:srgbClr val="333333"/>
-                </a:solidFill>
-                <a:latin typeface="Calibri"/>
-              </a:rPr>
-              <a:t> va con «RAISE EXCEPTION». Distinguir el dato invalido del resultado negativo es la mitad de la pregunta.</a:t>
-            </a:r>
-          </a:p>
-          <a:p>
-            <a:pPr>
-              <a:spcAft>
-                <a:spcPts val="800"/>
-              </a:spcAft>
-            </a:pPr>
-            <a:r>
-              <a:rPr sz="1900" b="0" i="0">
-                <a:solidFill>
-                  <a:srgbClr val="333333"/>
-                </a:solidFill>
-                <a:latin typeface="Calibri"/>
-              </a:rPr>
-              <a:t>–   </a:t>
-            </a:r>
-            <a:r>
-              <a:rPr sz="1900" b="1" i="0">
-                <a:solidFill>
-                  <a:srgbClr val="333333"/>
-                </a:solidFill>
-                <a:latin typeface="Calibri"/>
-              </a:rPr>
-              <a:t>Se prueba en una sola consulta.</a:t>
-            </a:r>
-            <a:r>
-              <a:rPr sz="1900" b="0" i="0">
-                <a:solidFill>
-                  <a:srgbClr val="333333"/>
-                </a:solidFill>
-                <a:latin typeface="Calibri"/>
-              </a:rPr>
-              <a:t> «SELECT fn_descontar_stock(5,3) AS caso_ok, fn_descontar_stock(2,10) AS caso_sin_stock, fn_descontar_stock(2,3) AS caso_limite;» -&gt; </a:t>
-            </a:r>
-            <a:r>
-              <a:rPr sz="1900" b="1" i="0">
-                <a:solidFill>
-                  <a:srgbClr val="333333"/>
-                </a:solidFill>
-                <a:latin typeface="Calibri"/>
-              </a:rPr>
-              <a:t>«true», «false», «true»</a:t>
-            </a:r>
-            <a:r>
-              <a:rPr sz="1900" b="0" i="0">
-                <a:solidFill>
-                  <a:srgbClr val="333333"/>
-                </a:solidFill>
-                <a:latin typeface="Calibri"/>
-              </a:rPr>
-              <a:t>. El tercer caso es el interesante: pide </a:t>
-            </a:r>
-            <a:r>
-              <a:rPr sz="1900" b="1" i="0">
-                <a:solidFill>
-                  <a:srgbClr val="333333"/>
-                </a:solidFill>
-                <a:latin typeface="Calibri"/>
-              </a:rPr>
-              <a:t>exactamente</a:t>
-            </a:r>
-            <a:r>
-              <a:rPr sz="1900" b="0" i="0">
-                <a:solidFill>
-                  <a:srgbClr val="333333"/>
-                </a:solidFill>
-                <a:latin typeface="Calibri"/>
-              </a:rPr>
-              <a:t> el stock que queda, y con «&gt;=» en el guardia tiene que pasar.</a:t>
-            </a:r>
-          </a:p>
-          <a:p>
-            <a:pPr>
-              <a:spcAft>
-                <a:spcPts val="800"/>
-              </a:spcAft>
-            </a:pPr>
-            <a:r>
-              <a:rPr sz="1900" b="0" i="0">
-                <a:solidFill>
-                  <a:srgbClr val="333333"/>
-                </a:solidFill>
-                <a:latin typeface="Calibri"/>
-              </a:rPr>
-              <a:t>–   </a:t>
-            </a:r>
-            <a:r>
-              <a:rPr sz="1900" b="1" i="0">
-                <a:solidFill>
-                  <a:srgbClr val="333333"/>
-                </a:solidFill>
-                <a:latin typeface="Calibri"/>
-              </a:rPr>
-              <a:t>Por que no leer primero.</a:t>
-            </a:r>
-            <a:r>
-              <a:rPr sz="1900" b="0" i="0">
-                <a:solidFill>
-                  <a:srgbClr val="333333"/>
-                </a:solidFill>
-                <a:latin typeface="Calibri"/>
-              </a:rPr>
-              <a:t> «SELECT stock ...; IF stock &gt;= cantidad THEN UPDATE ...» deja una </a:t>
-            </a:r>
-            <a:r>
-              <a:rPr sz="1900" b="1" i="0">
-                <a:solidFill>
-                  <a:srgbClr val="333333"/>
-                </a:solidFill>
-                <a:latin typeface="Calibri"/>
-              </a:rPr>
-              <a:t>ventana</a:t>
-            </a:r>
-            <a:r>
-              <a:rPr sz="1900" b="0" i="0">
-                <a:solidFill>
-                  <a:srgbClr val="333333"/>
-                </a:solidFill>
-                <a:latin typeface="Calibri"/>
-              </a:rPr>
-              <a:t> entre la lectura y la escritura, y con dos recepcionistas facturando el mismo insumo las dos leen 3, las dos deciden que alcanza y el stock termina en </a:t>
-            </a:r>
-            <a:r>
-              <a:rPr sz="1900" b="1" i="0">
-                <a:solidFill>
-                  <a:srgbClr val="333333"/>
-                </a:solidFill>
-                <a:latin typeface="Calibri"/>
-              </a:rPr>
-              <a:t>-2</a:t>
-            </a:r>
-            <a:r>
-              <a:rPr sz="1900" b="0" i="0">
-                <a:solidFill>
-                  <a:srgbClr val="333333"/>
-                </a:solidFill>
-                <a:latin typeface="Calibri"/>
-              </a:rPr>
-              <a:t>. El «UPDATE» con la condicion en el «WHERE» no tiene ventana. Aqui no se puede demostrar —PGlite corre </a:t>
-            </a:r>
-            <a:r>
-              <a:rPr sz="1900" b="1" i="0">
-                <a:solidFill>
-                  <a:srgbClr val="333333"/>
-                </a:solidFill>
-                <a:latin typeface="Calibri"/>
-              </a:rPr>
-              <a:t>una sola sesion</a:t>
-            </a:r>
-            <a:r>
-              <a:rPr sz="1900" b="0" i="0">
-                <a:solidFill>
-                  <a:srgbClr val="333333"/>
-                </a:solidFill>
-                <a:latin typeface="Calibri"/>
-              </a:rPr>
-              <a:t>— y ese es el gap que se declara y que abre la Clase 10.</a:t>
-            </a:r>
-          </a:p>
-        </p:txBody>
-      </p:sp>
-      <p:sp>
-        <p:nvSpPr>
-          <p:cNvPr id="7" name="TextBox 6"/>
           <p:cNvSpPr txBox="1"/>
           <p:nvPr/>
         </p:nvSpPr>
@@ -21626,7 +22215,7 @@
                 </a:solidFill>
                 <a:latin typeface="Calibri"/>
               </a:rPr>
-              <a:t> PostgreSQL en el navegador</a:t>
+              <a:t> PostgreSQL/PGlite</a:t>
             </a:r>
           </a:p>
           <a:p>

--- a/Bases de Datos II/Clases/Clase 8 - Tuning y transacciones/Presentacion.pptx
+++ b/Bases de Datos II/Clases/Clase 8 - Tuning y transacciones/Presentacion.pptx
@@ -59,8 +59,6 @@
     <p:sldId id="307" r:id="rId59"/>
     <p:sldId id="308" r:id="rId60"/>
     <p:sldId id="309" r:id="rId61"/>
-    <p:sldId id="310" r:id="rId62"/>
-    <p:sldId id="311" r:id="rId63"/>
   </p:sldIdLst>
   <p:sldSz cx="12191695" cy="6858000" type="screen4x3"/>
   <p:notesSz cx="6858000" cy="9144000"/>
@@ -560,6 +558,11 @@
               <a:t>La condicion stock &gt;= 2 no es decoracion, es la que impide que el descuento se aplique cuando no hay existencias y hace que el motor informe cero filas afectadas en lugar de dejar un numero negativo.</a:t>
             </a:r>
           </a:p>
+          <a:p>
+            <a:r>
+              <a:t>Fuera de la lamina (habla de la practica): En PL/pgSQL, cuantas filas afecto la sentencia anterior se pregunta con GET DIAGNOSTICS v_filas = ROW_COUNT; no existe SQL%ROWCOUNT, que es de Oracle, y esa sola diferencia decide si el codigo del entregable compila o no.</a:t>
+            </a:r>
+          </a:p>
         </p:txBody>
       </p:sp>
       <p:sp>
@@ -627,12 +630,12 @@
           <a:lstStyle/>
           <a:p>
             <a:r>
-              <a:t>Fuera de la lamina (habla de la practica, no del tema):</a:t>
-            </a:r>
-          </a:p>
-          <a:p>
-            <a:r>
-              <a:t>- Hoy NO se usa, porque la regla del negocio que la actividad implementa es todo o nada, pero conviene nombrarlo para que nadie crea que la unica opcion es abortar la factura completa.</a:t>
+              <a:t>Por eso el mismo procedimiento no se traduce linea por linea entre motores: cambia quien es responsable de confirmar, y con eso cambia donde se escribe el manejo del error.</a:t>
+            </a:r>
+          </a:p>
+          <a:p>
+            <a:r>
+              <a:t>Fuera de la lamina (habla de la practica): La pregunta 4 vale 10 puntos y es de seleccion unica, asi que conviene que el docente sepa exactamente que se pregunta y por que las otras opciones son falsas.</a:t>
             </a:r>
           </a:p>
         </p:txBody>
@@ -702,7 +705,22 @@
           <a:lstStyle/>
           <a:p>
             <a:r>
-              <a:t>Si la excepcion se propaga hasta afuera del procedimiento, el motor deshace TODO lo que ese CALL habia hecho —la cabecera de la factura, las lineas ya insertadas y los descuentos de stock ya aplicados— y nadie escribio ROLLBACK.</a:t>
+              <a:t>El procedimiento ABORTA la factura completa cuando no hay stock; la funcion INFORMA y deja que el llamador decida.</a:t>
+            </a:r>
+          </a:p>
+          <a:p>
+            <a:r>
+              <a:t>Lo que hay que enfatizar es la linea que separa un caso del otro: una cantidad negativa o cero no es «no hay stock», es una llamada mal hecha, y eso SI es una excepcion; el resultado negativo legitimo se devuelve como dato.</a:t>
+            </a:r>
+          </a:p>
+          <a:p>
+            <a:r>
+              <a:t>Eso aqui no se puede demostrar, porque el motor corre una sola sesion.</a:t>
+            </a:r>
+          </a:p>
+          <a:p>
+            <a:r>
+              <a:t>Fuera de la lamina (habla de la practica): Eso aqui no se puede demostrar, porque el motor corre una sola sesion, y ese es el gap que la pregunta 5 pide declarar.</a:t>
             </a:r>
           </a:p>
         </p:txBody>
@@ -772,22 +790,12 @@
           <a:lstStyle/>
           <a:p>
             <a:r>
-              <a:t>EXCEPTION WHEN...</a:t>
-            </a:r>
-          </a:p>
-          <a:p>
-            <a:r>
-              <a:t>END en PL/pgSQL crea un savepoint implicito al entrar.</a:t>
-            </a:r>
-          </a:p>
-          <a:p>
-            <a:r>
-              <a:t>Por eso, cuando el codigo captura el error, se revierte solo lo hecho DENTRO de ese bloque y el resto de la transaccion sigue vivo.</a:t>
-            </a:r>
-          </a:p>
-          <a:p>
-            <a:r>
-              <a:t>El savepoint implicito de ese DO deshace todo lo que el CALL habia hecho, el mensaje se imprime, y la foto final demuestra que la base quedo igual.</a:t>
+              <a:t>Esos cuatro habitos, mas el de no usar SELECT asterisco en los reportes, mas los predicados sargables, mas el respaldo con restore probado.</a:t>
+            </a:r>
+          </a:p>
+          <a:p>
+            <a:r>
+              <a:t>Fuera de la lamina (habla de la practica): Esos cuatro habitos, mas el de no usar SELECT asterisco en los reportes, mas los predicados sargables, mas el respaldo con restore probado, son literalmente los siete items del checklist que la pregunta 5 pide llenar, y cada item exige estado Y evidencia concreta —un nombre de indice, un archivo, una consulta— porque siete casillas marcadas sin evidencia no demuestran nada.</a:t>
             </a:r>
           </a:p>
         </p:txBody>
@@ -857,12 +865,7 @@
           <a:lstStyle/>
           <a:p>
             <a:r>
-              <a:t>Fuera de la lamina (habla de la practica, no del tema):</a:t>
-            </a:r>
-          </a:p>
-          <a:p>
-            <a:r>
-              <a:t>- La pregunta 4 vale 10 puntos y es de seleccion unica, asi que conviene que el docente sepa exactamente que se pregunta y por que las otras opciones son falsas.</a:t>
+              <a:t>Fuera de la lamina (habla de la practica): Si el tiempo aprieta, lo que se recorta es el bloque 4, que el estudiante rehace en la pregunta 3 de la clase; lo que NO se recorta es la pareja de fotos del bloque 3.</a:t>
             </a:r>
           </a:p>
         </p:txBody>
@@ -932,17 +935,42 @@
           <a:lstStyle/>
           <a:p>
             <a:r>
-              <a:t>El procedimiento ABORTA la factura completa cuando no hay stock; la funcion INFORMA y deja que el llamador decida.</a:t>
-            </a:r>
-          </a:p>
-          <a:p>
-            <a:r>
-              <a:t>Lo que hay que enfatizar es la linea que separa un caso del otro: una cantidad negativa o cero no es «no hay stock», es una llamada mal hecha, y eso SI es una excepcion; el resultado negativo legitimo se devuelve como dato.</a:t>
-            </a:r>
-          </a:p>
-          <a:p>
-            <a:r>
-              <a:t>Eso aqui no se puede demostrar, porque el motor corre una sola sesion, y ese es el gap que la pregunta 5 pide declarar.</a:t>
+              <a:t>Nada de eso corre en Oracle Live SQL.</a:t>
+            </a:r>
+          </a:p>
+          <a:p>
+            <a:r>
+              <a:t>Sobre el autocommit, que en versiones anteriores de este material era la advertencia central.</a:t>
+            </a:r>
+          </a:p>
+          <a:p>
+            <a:r>
+              <a:t>Se menciona como diferencia entre motores, no como precaucion de la clase.</a:t>
+            </a:r>
+          </a:p>
+          <a:p>
+            <a:r>
+              <a:t>Lo que si hay que declarar es el limite real: PGlite corre UNA SOLA sesion, asi que la espera por bloqueo, el interbloqueo, la lectura sucia y la actualizacion perdida no se pueden reproducir y se documentan en papel como una linea de tiempo de T1 y T2 con lo que ve cada una en cada paso, formato que usara la Clase 10.</a:t>
+            </a:r>
+          </a:p>
+          <a:p>
+            <a:r>
+              <a:t>Tampoco se demuestra la durabilidad real, porque nadie puede apagar el servidor.</a:t>
+            </a:r>
+          </a:p>
+          <a:p>
+            <a:r>
+              <a:t>Fuera de la lamina (habla de la practica): Las tres preguntas de SQL del dia suman 75 de los 100 puntos y son PL/pgSQL: CALL, GET DIAGNOSTICS ...</a:t>
+            </a:r>
+          </a:p>
+          <a:p>
+            <a:r>
+              <a:t>Fuera de la lamina (habla de la practica): Nada de eso corre en Oracle Live SQL, asi que Live SQL se queda solamente como el contraste de sintaxis de la pregunta 4.</a:t>
+            </a:r>
+          </a:p>
+          <a:p>
+            <a:r>
+              <a:t>Fuera de la lamina (habla de la practica): Sobre el autocommit, que en versiones anteriores de este material era la advertencia central: con la forma del entregable de hoy deja de ser un problema, y conviene explicar por que en lugar de repetir la advertencia.</a:t>
             </a:r>
           </a:p>
         </p:txBody>
@@ -1012,338 +1040,7 @@
           <a:lstStyle/>
           <a:p>
             <a:r>
-              <a:t>Fuera de la lamina (habla de la practica, no del tema):</a:t>
-            </a:r>
-          </a:p>
-          <a:p>
-            <a:r>
-              <a:t>- Esos cuatro habitos, mas el de no usar SELECT asterisco en los reportes, mas los predicados sargables, mas el respaldo con restore probado, son literalmente los siete items del checklist que la pregunta 5 pide llenar</a:t>
-            </a:r>
-          </a:p>
-        </p:txBody>
-      </p:sp>
-      <p:sp>
-        <p:nvSpPr>
-          <p:cNvPr id="4" name="Slide Number Placeholder 3"/>
-          <p:cNvSpPr>
-            <a:spLocks noGrp="1"/>
-          </p:cNvSpPr>
-          <p:nvPr>
-            <p:ph type="sldNum" idx="5" sz="quarter"/>
-          </p:nvPr>
-        </p:nvSpPr>
-        <p:spPr/>
-      </p:sp>
-    </p:spTree>
-  </p:cSld>
-  <p:clrMapOvr>
-    <a:masterClrMapping/>
-  </p:clrMapOvr>
-</p:notes>
-</file>
-
-<file path=ppt/notesSlides/notesSlide16.xml><?xml version="1.0" encoding="utf-8"?>
-<p:notes xmlns:a="http://schemas.openxmlformats.org/drawingml/2006/main" xmlns:p="http://schemas.openxmlformats.org/presentationml/2006/main" xmlns:r="http://schemas.openxmlformats.org/officeDocument/2006/relationships">
-  <p:cSld>
-    <p:spTree>
-      <p:nvGrpSpPr>
-        <p:cNvPr id="1" name=""/>
-        <p:cNvGrpSpPr/>
-        <p:nvPr/>
-      </p:nvGrpSpPr>
-      <p:grpSpPr>
-        <a:xfrm>
-          <a:off x="0" y="0"/>
-          <a:ext cx="0" cy="0"/>
-          <a:chOff x="0" y="0"/>
-          <a:chExt cx="0" cy="0"/>
-        </a:xfrm>
-      </p:grpSpPr>
-      <p:sp>
-        <p:nvSpPr>
-          <p:cNvPr id="2" name="Slide Image Placeholder 1"/>
-          <p:cNvSpPr>
-            <a:spLocks noGrp="1"/>
-          </p:cNvSpPr>
-          <p:nvPr>
-            <p:ph type="sldImg" idx="2"/>
-          </p:nvPr>
-        </p:nvSpPr>
-        <p:spPr/>
-      </p:sp>
-      <p:sp>
-        <p:nvSpPr>
-          <p:cNvPr id="3" name="Notes Placeholder 2"/>
-          <p:cNvSpPr>
-            <a:spLocks noGrp="1"/>
-          </p:cNvSpPr>
-          <p:nvPr>
-            <p:ph type="body" idx="3" sz="quarter"/>
-          </p:nvPr>
-        </p:nvSpPr>
-        <p:spPr/>
-        <p:txBody>
-          <a:bodyPr/>
-          <a:lstStyle/>
-          <a:p>
-            <a:r>
-              <a:t>Fuera de la lamina (habla de la practica, no del tema):</a:t>
-            </a:r>
-          </a:p>
-          <a:p>
-            <a:r>
-              <a:t>- Si el tiempo aprieta, lo que se recorta es el bloque 4, que el estudiante rehace en la pregunta 3 de la clase; lo que NO se recorta es la pareja de fotos del bloque 3.</a:t>
-            </a:r>
-          </a:p>
-        </p:txBody>
-      </p:sp>
-      <p:sp>
-        <p:nvSpPr>
-          <p:cNvPr id="4" name="Slide Number Placeholder 3"/>
-          <p:cNvSpPr>
-            <a:spLocks noGrp="1"/>
-          </p:cNvSpPr>
-          <p:nvPr>
-            <p:ph type="sldNum" idx="5" sz="quarter"/>
-          </p:nvPr>
-        </p:nvSpPr>
-        <p:spPr/>
-      </p:sp>
-    </p:spTree>
-  </p:cSld>
-  <p:clrMapOvr>
-    <a:masterClrMapping/>
-  </p:clrMapOvr>
-</p:notes>
-</file>
-
-<file path=ppt/notesSlides/notesSlide17.xml><?xml version="1.0" encoding="utf-8"?>
-<p:notes xmlns:a="http://schemas.openxmlformats.org/drawingml/2006/main" xmlns:p="http://schemas.openxmlformats.org/presentationml/2006/main" xmlns:r="http://schemas.openxmlformats.org/officeDocument/2006/relationships">
-  <p:cSld>
-    <p:spTree>
-      <p:nvGrpSpPr>
-        <p:cNvPr id="1" name=""/>
-        <p:cNvGrpSpPr/>
-        <p:nvPr/>
-      </p:nvGrpSpPr>
-      <p:grpSpPr>
-        <a:xfrm>
-          <a:off x="0" y="0"/>
-          <a:ext cx="0" cy="0"/>
-          <a:chOff x="0" y="0"/>
-          <a:chExt cx="0" cy="0"/>
-        </a:xfrm>
-      </p:grpSpPr>
-      <p:sp>
-        <p:nvSpPr>
-          <p:cNvPr id="2" name="Slide Image Placeholder 1"/>
-          <p:cNvSpPr>
-            <a:spLocks noGrp="1"/>
-          </p:cNvSpPr>
-          <p:nvPr>
-            <p:ph type="sldImg" idx="2"/>
-          </p:nvPr>
-        </p:nvSpPr>
-        <p:spPr/>
-      </p:sp>
-      <p:sp>
-        <p:nvSpPr>
-          <p:cNvPr id="3" name="Notes Placeholder 2"/>
-          <p:cNvSpPr>
-            <a:spLocks noGrp="1"/>
-          </p:cNvSpPr>
-          <p:nvPr>
-            <p:ph type="body" idx="3" sz="quarter"/>
-          </p:nvPr>
-        </p:nvSpPr>
-        <p:spPr/>
-        <p:txBody>
-          <a:bodyPr/>
-          <a:lstStyle/>
-          <a:p>
-            <a:r>
-              <a:t>Fuera de la lamina (habla de la practica, no del tema):</a:t>
-            </a:r>
-          </a:p>
-          <a:p>
-            <a:r>
-              <a:t>- Las tres preguntas de SQL del dia suman 75 de los 100 puntos y son PL/pgSQL: CALL, GET DIAGNOSTICS...</a:t>
-            </a:r>
-          </a:p>
-          <a:p>
-            <a:r>
-              <a:t>- Nada de eso corre en Oracle Live SQL, asi que Live SQL se queda solamente como el contraste de sintaxis de la pregunta 4.</a:t>
-            </a:r>
-          </a:p>
-          <a:p>
-            <a:r>
-              <a:t>- Sobre el autocommit, que en versiones anteriores de este material era la advertencia central: con la forma del entregable de hoy deja de ser un problema, y conviene explicar por que en lugar de repetir la advertencia.</a:t>
-            </a:r>
-          </a:p>
-          <a:p/>
-          <a:p>
-            <a:r>
-              <a:t>Se menciona como diferencia entre motores, no como precaucion del taller.</a:t>
-            </a:r>
-          </a:p>
-          <a:p>
-            <a:r>
-              <a:t>Lo que si hay que declarar es el limite real: PGlite corre UNA SOLA sesion, asi que la espera por bloqueo, el interbloqueo, la lectura sucia y la actualizacion perdida no se pueden reproducir y se documentan en papel como una linea de tiempo de T1 y T2 con lo que ve cada una en cada paso, formato que usara la Clase 10.</a:t>
-            </a:r>
-          </a:p>
-          <a:p>
-            <a:r>
-              <a:t>Tampoco se demuestra la durabilidad real, porque nadie puede apagar el servidor.</a:t>
-            </a:r>
-          </a:p>
-        </p:txBody>
-      </p:sp>
-      <p:sp>
-        <p:nvSpPr>
-          <p:cNvPr id="4" name="Slide Number Placeholder 3"/>
-          <p:cNvSpPr>
-            <a:spLocks noGrp="1"/>
-          </p:cNvSpPr>
-          <p:nvPr>
-            <p:ph type="sldNum" idx="5" sz="quarter"/>
-          </p:nvPr>
-        </p:nvSpPr>
-        <p:spPr/>
-      </p:sp>
-    </p:spTree>
-  </p:cSld>
-  <p:clrMapOvr>
-    <a:masterClrMapping/>
-  </p:clrMapOvr>
-</p:notes>
-</file>
-
-<file path=ppt/notesSlides/notesSlide18.xml><?xml version="1.0" encoding="utf-8"?>
-<p:notes xmlns:a="http://schemas.openxmlformats.org/drawingml/2006/main" xmlns:p="http://schemas.openxmlformats.org/presentationml/2006/main" xmlns:r="http://schemas.openxmlformats.org/officeDocument/2006/relationships">
-  <p:cSld>
-    <p:spTree>
-      <p:nvGrpSpPr>
-        <p:cNvPr id="1" name=""/>
-        <p:cNvGrpSpPr/>
-        <p:nvPr/>
-      </p:nvGrpSpPr>
-      <p:grpSpPr>
-        <a:xfrm>
-          <a:off x="0" y="0"/>
-          <a:ext cx="0" cy="0"/>
-          <a:chOff x="0" y="0"/>
-          <a:chExt cx="0" cy="0"/>
-        </a:xfrm>
-      </p:grpSpPr>
-      <p:sp>
-        <p:nvSpPr>
-          <p:cNvPr id="2" name="Slide Image Placeholder 1"/>
-          <p:cNvSpPr>
-            <a:spLocks noGrp="1"/>
-          </p:cNvSpPr>
-          <p:nvPr>
-            <p:ph type="sldImg" idx="2"/>
-          </p:nvPr>
-        </p:nvSpPr>
-        <p:spPr/>
-      </p:sp>
-      <p:sp>
-        <p:nvSpPr>
-          <p:cNvPr id="3" name="Notes Placeholder 2"/>
-          <p:cNvSpPr>
-            <a:spLocks noGrp="1"/>
-          </p:cNvSpPr>
-          <p:nvPr>
-            <p:ph type="body" idx="3" sz="quarter"/>
-          </p:nvPr>
-        </p:nvSpPr>
-        <p:spPr/>
-        <p:txBody>
-          <a:bodyPr/>
-          <a:lstStyle/>
-          <a:p>
-            <a:r>
-              <a:t>Fuera de la lamina (habla de la practica, no del tema):</a:t>
-            </a:r>
-          </a:p>
-          <a:p>
-            <a:r>
-              <a:t>- Es la pregunta 4 de la clase, y la respuesta hay que poder darla sin leer.</a:t>
-            </a:r>
-          </a:p>
-        </p:txBody>
-      </p:sp>
-      <p:sp>
-        <p:nvSpPr>
-          <p:cNvPr id="4" name="Slide Number Placeholder 3"/>
-          <p:cNvSpPr>
-            <a:spLocks noGrp="1"/>
-          </p:cNvSpPr>
-          <p:nvPr>
-            <p:ph type="sldNum" idx="5" sz="quarter"/>
-          </p:nvPr>
-        </p:nvSpPr>
-        <p:spPr/>
-      </p:sp>
-    </p:spTree>
-  </p:cSld>
-  <p:clrMapOvr>
-    <a:masterClrMapping/>
-  </p:clrMapOvr>
-</p:notes>
-</file>
-
-<file path=ppt/notesSlides/notesSlide19.xml><?xml version="1.0" encoding="utf-8"?>
-<p:notes xmlns:a="http://schemas.openxmlformats.org/drawingml/2006/main" xmlns:p="http://schemas.openxmlformats.org/presentationml/2006/main" xmlns:r="http://schemas.openxmlformats.org/officeDocument/2006/relationships">
-  <p:cSld>
-    <p:spTree>
-      <p:nvGrpSpPr>
-        <p:cNvPr id="1" name=""/>
-        <p:cNvGrpSpPr/>
-        <p:nvPr/>
-      </p:nvGrpSpPr>
-      <p:grpSpPr>
-        <a:xfrm>
-          <a:off x="0" y="0"/>
-          <a:ext cx="0" cy="0"/>
-          <a:chOff x="0" y="0"/>
-          <a:chExt cx="0" cy="0"/>
-        </a:xfrm>
-      </p:grpSpPr>
-      <p:sp>
-        <p:nvSpPr>
-          <p:cNvPr id="2" name="Slide Image Placeholder 1"/>
-          <p:cNvSpPr>
-            <a:spLocks noGrp="1"/>
-          </p:cNvSpPr>
-          <p:nvPr>
-            <p:ph type="sldImg" idx="2"/>
-          </p:nvPr>
-        </p:nvSpPr>
-        <p:spPr/>
-      </p:sp>
-      <p:sp>
-        <p:nvSpPr>
-          <p:cNvPr id="3" name="Notes Placeholder 2"/>
-          <p:cNvSpPr>
-            <a:spLocks noGrp="1"/>
-          </p:cNvSpPr>
-          <p:nvPr>
-            <p:ph type="body" idx="3" sz="quarter"/>
-          </p:nvPr>
-        </p:nvSpPr>
-        <p:spPr/>
-        <p:txBody>
-          <a:bodyPr/>
-          <a:lstStyle/>
-          <a:p>
-            <a:r>
-              <a:t>Fuera de la lamina (habla de la practica, no del tema):</a:t>
-            </a:r>
-          </a:p>
-          <a:p>
-            <a:r>
-              <a:t>- Es la pregunta 1 de la clase — 35 de los 100 puntos — y el molde que la pregunta 2 hace fallar a proposito</a:t>
+              <a:t>Fuera de la lamina (habla de la practica): Es la pregunta 4 de la clase, y la respuesta hay que poder darla sin leer.</a:t>
             </a:r>
           </a:p>
         </p:txBody>
@@ -1413,162 +1110,17 @@
           <a:lstStyle/>
           <a:p>
             <a:r>
-              <a:t>Fuera de la lamina (habla de la practica, no del tema):</a:t>
-            </a:r>
-          </a:p>
-          <a:p>
-            <a:r>
-              <a:t>- En PL/pgSQL, cuantas filas afecto la sentencia anterior se pregunta con GET DIAGNOSTICS v_filas = ROW_COUNT; no existe SQL%ROWCOUNT, que es de Oracle, y esa sola diferencia decide si el codigo del entregable compila o no.</a:t>
-            </a:r>
-          </a:p>
-        </p:txBody>
-      </p:sp>
-      <p:sp>
-        <p:nvSpPr>
-          <p:cNvPr id="4" name="Slide Number Placeholder 3"/>
-          <p:cNvSpPr>
-            <a:spLocks noGrp="1"/>
-          </p:cNvSpPr>
-          <p:nvPr>
-            <p:ph type="sldNum" idx="5" sz="quarter"/>
-          </p:nvPr>
-        </p:nvSpPr>
-        <p:spPr/>
-      </p:sp>
-    </p:spTree>
-  </p:cSld>
-  <p:clrMapOvr>
-    <a:masterClrMapping/>
-  </p:clrMapOvr>
-</p:notes>
-</file>
-
-<file path=ppt/notesSlides/notesSlide20.xml><?xml version="1.0" encoding="utf-8"?>
-<p:notes xmlns:a="http://schemas.openxmlformats.org/drawingml/2006/main" xmlns:p="http://schemas.openxmlformats.org/presentationml/2006/main" xmlns:r="http://schemas.openxmlformats.org/officeDocument/2006/relationships">
-  <p:cSld>
-    <p:spTree>
-      <p:nvGrpSpPr>
-        <p:cNvPr id="1" name=""/>
-        <p:cNvGrpSpPr/>
-        <p:nvPr/>
-      </p:nvGrpSpPr>
-      <p:grpSpPr>
-        <a:xfrm>
-          <a:off x="0" y="0"/>
-          <a:ext cx="0" cy="0"/>
-          <a:chOff x="0" y="0"/>
-          <a:chExt cx="0" cy="0"/>
-        </a:xfrm>
-      </p:grpSpPr>
-      <p:sp>
-        <p:nvSpPr>
-          <p:cNvPr id="2" name="Slide Image Placeholder 1"/>
-          <p:cNvSpPr>
-            <a:spLocks noGrp="1"/>
-          </p:cNvSpPr>
-          <p:nvPr>
-            <p:ph type="sldImg" idx="2"/>
-          </p:nvPr>
-        </p:nvSpPr>
-        <p:spPr/>
-      </p:sp>
-      <p:sp>
-        <p:nvSpPr>
-          <p:cNvPr id="3" name="Notes Placeholder 2"/>
-          <p:cNvSpPr>
-            <a:spLocks noGrp="1"/>
-          </p:cNvSpPr>
-          <p:nvPr>
-            <p:ph type="body" idx="3" sz="quarter"/>
-          </p:nvPr>
-        </p:nvSpPr>
-        <p:spPr/>
-        <p:txBody>
-          <a:bodyPr/>
-          <a:lstStyle/>
-          <a:p>
-            <a:r>
-              <a:t>Fuera de la lamina (habla de la practica, no del tema):</a:t>
-            </a:r>
-          </a:p>
-          <a:p>
-            <a:r>
-              <a:t>- Es la pregunta 4 de la clase —10 puntos, seleccion unica— y la explicacion de por que la pregunta 2 sale bien sin escribir un ROLLBACK</a:t>
-            </a:r>
-          </a:p>
-        </p:txBody>
-      </p:sp>
-      <p:sp>
-        <p:nvSpPr>
-          <p:cNvPr id="4" name="Slide Number Placeholder 3"/>
-          <p:cNvSpPr>
-            <a:spLocks noGrp="1"/>
-          </p:cNvSpPr>
-          <p:nvPr>
-            <p:ph type="sldNum" idx="5" sz="quarter"/>
-          </p:nvPr>
-        </p:nvSpPr>
-        <p:spPr/>
-      </p:sp>
-    </p:spTree>
-  </p:cSld>
-  <p:clrMapOvr>
-    <a:masterClrMapping/>
-  </p:clrMapOvr>
-</p:notes>
-</file>
-
-<file path=ppt/notesSlides/notesSlide21.xml><?xml version="1.0" encoding="utf-8"?>
-<p:notes xmlns:a="http://schemas.openxmlformats.org/drawingml/2006/main" xmlns:p="http://schemas.openxmlformats.org/presentationml/2006/main" xmlns:r="http://schemas.openxmlformats.org/officeDocument/2006/relationships">
-  <p:cSld>
-    <p:spTree>
-      <p:nvGrpSpPr>
-        <p:cNvPr id="1" name=""/>
-        <p:cNvGrpSpPr/>
-        <p:nvPr/>
-      </p:nvGrpSpPr>
-      <p:grpSpPr>
-        <a:xfrm>
-          <a:off x="0" y="0"/>
-          <a:ext cx="0" cy="0"/>
-          <a:chOff x="0" y="0"/>
-          <a:chExt cx="0" cy="0"/>
-        </a:xfrm>
-      </p:grpSpPr>
-      <p:sp>
-        <p:nvSpPr>
-          <p:cNvPr id="2" name="Slide Image Placeholder 1"/>
-          <p:cNvSpPr>
-            <a:spLocks noGrp="1"/>
-          </p:cNvSpPr>
-          <p:nvPr>
-            <p:ph type="sldImg" idx="2"/>
-          </p:nvPr>
-        </p:nvSpPr>
-        <p:spPr/>
-      </p:sp>
-      <p:sp>
-        <p:nvSpPr>
-          <p:cNvPr id="3" name="Notes Placeholder 2"/>
-          <p:cNvSpPr>
-            <a:spLocks noGrp="1"/>
-          </p:cNvSpPr>
-          <p:nvPr>
-            <p:ph type="body" idx="3" sz="quarter"/>
-          </p:nvPr>
-        </p:nvSpPr>
-        <p:spPr/>
-        <p:txBody>
-          <a:bodyPr/>
-          <a:lstStyle/>
-          <a:p>
-            <a:r>
-              <a:t>Fuera de la lamina (habla de la practica, no del tema):</a:t>
-            </a:r>
-          </a:p>
-          <a:p>
-            <a:r>
-              <a:t>- Es la pregunta 3 de la clase —15 puntos— y la decision documentada que pide la pregunta 5</a:t>
+              <a:t>Sin atomicidad queda una factura cobrando dos productos con una sola linea registrada, y un insumo descontado que nadie entrego.</a:t>
+            </a:r>
+          </a:p>
+          <a:p>
+            <a:r>
+              <a:t>Nadie recibe un error, la clinica cobro, y el dano aparece semanas despues, cuando el inventario fisico no cuadra y ya no hay forma de saber que factura lo desajusto.</a:t>
+            </a:r>
+          </a:p>
+          <a:p>
+            <a:r>
+              <a:t>Fuera de la lamina (habla de la practica): Esa es la razon por la que el entregable no pide tres sentencias sueltas sino un procedimiento que las agrupa, y por la que la pregunta 2 de la clase vale 25 puntos por demostrar con datos —foto inicial y foto final— que el descuento que SI habia alcanzado se deshizo.</a:t>
             </a:r>
           </a:p>
         </p:txBody>
@@ -1638,17 +1190,17 @@
           <a:lstStyle/>
           <a:p>
             <a:r>
-              <a:t>Sin atomicidad queda una factura cobrando dos productos con una sola linea registrada, y un insumo descontado que nadie entrego.</a:t>
-            </a:r>
-          </a:p>
-          <a:p>
-            <a:r>
-              <a:t>Nadie recibe un error, la clinica cobro, y el dano aparece semanas despues, cuando el inventario fisico no cuadra y ya no hay forma de saber que factura lo desajusto.</a:t>
-            </a:r>
-          </a:p>
-          <a:p>
-            <a:r>
-              <a:t>Esa es la razon por la que el entregable no pide tres sentencias sueltas sino un procedimiento que las agrupa, y por la que la pregunta 2 del taller vale 25 puntos por demostrar con datos —foto inicial y foto final— que el descuento que SI habia alcanzado se deshizo.</a:t>
+              <a:t>Si nadie declaro la restriccion, la transaccion puede ser perfectamente atomica y dejar la base en un estado absurdo.</a:t>
+            </a:r>
+          </a:p>
+          <a:p>
+            <a:r>
+              <a:t>Con eso el mismo UPDATE falla con un error del motor y la transaccion se puede deshacer entera.</a:t>
+            </a:r>
+          </a:p>
+          <a:p>
+            <a:r>
+              <a:t>Conviene notar como se combinan las dos defensas del dia: el CHECK es la red de seguridad declarativa, y el AND stock &gt;= p_cantidad del WHERE es el guardia que evita llegar al error y permite dar un mensaje de negocio en lugar de un error de restriccion.</a:t>
             </a:r>
           </a:p>
         </p:txBody>
@@ -1718,17 +1270,27 @@
           <a:lstStyle/>
           <a:p>
             <a:r>
-              <a:t>Si nadie declaro la restriccion, la transaccion puede ser perfectamente atomica y dejar la base en un estado absurdo.</a:t>
-            </a:r>
-          </a:p>
-          <a:p>
-            <a:r>
-              <a:t>Con eso el mismo UPDATE falla con un error del motor y la transaccion se puede deshacer entera.</a:t>
-            </a:r>
-          </a:p>
-          <a:p>
-            <a:r>
-              <a:t>Conviene notar como se combinan las dos defensas del dia: el CHECK es la red de seguridad declarativa, y el AND stock &gt;= p_cantidad del WHERE es el guardia que evita llegar al error y permite dar un mensaje de negocio en lugar de un error de restriccion.</a:t>
+              <a:t>Aislamiento significa que dos transacciones concurrentes producen un resultado equivalente al que darian ejecutadas una despues de la otra.</a:t>
+            </a:r>
+          </a:p>
+          <a:p>
+            <a:r>
+              <a:t>Eso se llama actualizacion perdida o lost update, y la primera defensa es de diseno, no de configuracion: no leer y luego escribir con el valor leido, sino dejar que el motor haga la resta en la misma sentencia, UPDATE insumo SET stock = stock - 3 WHERE id_insumo = 2 AND stock &gt;= 3, porque esa sentencia es atomica y toma un bloqueo sobre la fila mientras se ejecuta.</a:t>
+            </a:r>
+          </a:p>
+          <a:p>
+            <a:r>
+              <a:t>Oracle implementa solo dos, READ COMMITTED por omision y SERIALIZABLE</a:t>
+            </a:r>
+          </a:p>
+          <a:p>
+            <a:r>
+              <a:t>MySQL con InnoDB usa REPEATABLE READ por omision, valor distinto que explica diferencias reales al portar un script.</a:t>
+            </a:r>
+          </a:p>
+          <a:p>
+            <a:r>
+              <a:t>Fuera de la lamina (habla de la practica): Esa es exactamente la decision que la pregunta 5 pide documentar en una frase defendible.</a:t>
             </a:r>
           </a:p>
         </p:txBody>
@@ -1798,27 +1360,12 @@
           <a:lstStyle/>
           <a:p>
             <a:r>
-              <a:t>Aislamiento significa que dos transacciones concurrentes producen un resultado equivalente al que darian ejecutadas una despues de la otra.</a:t>
-            </a:r>
-          </a:p>
-          <a:p>
-            <a:r>
-              <a:t>Eso se llama actualizacion perdida o lost update, y la primera defensa es de diseno, no de configuracion: no leer y luego escribir con el valor leido, sino dejar que el motor haga la resta en la misma sentencia, UPDATE insumo SET stock = stock - 3 WHERE id_insumo = 2 AND stock &gt;= 3, porque esa sentencia es atomica y toma un bloqueo sobre la fila mientras se ejecuta.</a:t>
-            </a:r>
-          </a:p>
-          <a:p>
-            <a:r>
-              <a:t>Esa es exactamente la decision que la pregunta 5 pide documentar en una frase defendible.</a:t>
-            </a:r>
-          </a:p>
-          <a:p>
-            <a:r>
-              <a:t>Oracle implementa solo dos, READ COMMITTED por omision y SERIALIZABLE</a:t>
-            </a:r>
-          </a:p>
-          <a:p>
-            <a:r>
-              <a:t>MySQL con InnoDB usa REPEATABLE READ por omision, valor distinto que explica diferencias reales al portar un script.</a:t>
+              <a:t>Durabilidad significa que despues de confirmar, el dato sobrevive incluso si el servidor se apaga un segundo mas tarde.</a:t>
+            </a:r>
+          </a:p>
+          <a:p>
+            <a:r>
+              <a:t>Fuera de la lamina (habla de la practica): Es tambien el ultimo item del checklist de la pregunta 5, el del restore probado.</a:t>
             </a:r>
           </a:p>
         </p:txBody>
@@ -1888,7 +1435,32 @@
           <a:lstStyle/>
           <a:p>
             <a:r>
-              <a:t>Durabilidad significa que despues de confirmar, el dato sobrevive incluso si el servidor se apaga un segundo mas tarde.</a:t>
+              <a:t>Tres observaciones.</a:t>
+            </a:r>
+          </a:p>
+          <a:p>
+            <a:r>
+              <a:t>Segunda, y es la que sorprende, recibe DOS ARREGLOS PARALELOS y no un insumo suelto, porque una factura real tiene varias lineas; se invoca, que significa una unidad del insumo 1, dos del 6 y tres del 5.</a:t>
+            </a:r>
+          </a:p>
+          <a:p>
+            <a:r>
+              <a:t>Tercera, el cuerpo va entre delimitadores de dolar, y conviene usar una etiqueta como $proc$ en lugar de $$ pelado para que no choque con otro bloque anidado.</a:t>
+            </a:r>
+          </a:p>
+          <a:p>
+            <a:r>
+              <a:t>El cuerpo tiene cuatro partes y vale recorrerlas en orden.</a:t>
+            </a:r>
+          </a:p>
+          <a:p>
+            <a:r>
+              <a:t>INTO evita ir a buscar con otro SELECT el identificador que se acaba de generar.</a:t>
+            </a:r>
+          </a:p>
+          <a:p>
+            <a:r>
+              <a:t>Fuera de la lamina (habla de la practica): Aqui empieza lo que se califica, y la primera cosa que hay que proyectar es la firma exacta, porque no es la que uno escribiria de memoria: CREATE PROCEDURE sp_facturar(p_id_consulta INT, p_insumos INT[], p_cantidades INT[]) LANGUAGE plpgsql AS $proc$ ... $proc$.</a:t>
             </a:r>
           </a:p>
         </p:txBody>
@@ -1958,12 +1530,27 @@
           <a:lstStyle/>
           <a:p>
             <a:r>
-              <a:t>Fuera de la lamina (habla de la practica, no del tema):</a:t>
-            </a:r>
-          </a:p>
-          <a:p>
-            <a:r>
-              <a:t>- Es tambien el ultimo item del checklist de la pregunta 5, el del restore probado.</a:t>
+              <a:t>Hay que separar dos tipos de fallo a mitad de transaccion porque se atienden distinto, y esta distincion es la que ordena todo el procedimiento.</a:t>
+            </a:r>
+          </a:p>
+          <a:p>
+            <a:r>
+              <a:t>De ahi que el procedimiento tenga que convertir el cero filas en una excepcion, con el RAISE EXCEPTION de la seccion anterior, y de ahi tambien que el mensaje deba nombrar el insumo concreto: quien lea el error en la sustentacion tiene que poder decir cual linea fallo.</a:t>
+            </a:r>
+          </a:p>
+          <a:p>
+            <a:r>
+              <a:t>Hoy NO se usa.</a:t>
+            </a:r>
+          </a:p>
+          <a:p>
+            <a:r>
+              <a:t>Fuera de la lamina (habla de la practica): Dos exigencias del entregable salen de aqui.</a:t>
+            </a:r>
+          </a:p>
+          <a:p>
+            <a:r>
+              <a:t>Fuera de la lamina (habla de la practica): Hoy NO se usa, porque la regla del negocio que la actividad implementa es todo o nada, pero conviene nombrarlo para que nadie crea que la unica opcion es abortar la factura completa.</a:t>
             </a:r>
           </a:p>
         </p:txBody>
@@ -2033,32 +1620,7 @@
           <a:lstStyle/>
           <a:p>
             <a:r>
-              <a:t>Aqui empieza lo que se califica, y la primera cosa que hay que proyectar es la firma exacta, porque no es la que uno escribiria de memoria: LANGUAGE plpgsql AS $proc$... $proc$.</a:t>
-            </a:r>
-          </a:p>
-          <a:p>
-            <a:r>
-              <a:t>Tres observaciones.</a:t>
-            </a:r>
-          </a:p>
-          <a:p>
-            <a:r>
-              <a:t>Segunda, y es la que sorprende, recibe DOS ARREGLOS PARALELOS y no un insumo suelto, porque una factura real tiene varias lineas; se invoca, que significa una unidad del insumo 1, dos del 6 y tres del 5.</a:t>
-            </a:r>
-          </a:p>
-          <a:p>
-            <a:r>
-              <a:t>Tercera, el cuerpo va entre delimitadores de dolar, y conviene usar una etiqueta como $proc$ en lugar de $$ pelado para que no choque con otro bloque anidado.</a:t>
-            </a:r>
-          </a:p>
-          <a:p>
-            <a:r>
-              <a:t>El cuerpo tiene cuatro partes y vale recorrerlas en orden.</a:t>
-            </a:r>
-          </a:p>
-          <a:p>
-            <a:r>
-              <a:t>INTO evita ir a buscar con otro SELECT el identificador que se acaba de generar.</a:t>
+              <a:t>Si la excepcion se propaga hasta afuera del procedimiento, el motor deshace TODO lo que ese CALL habia hecho —la cabecera de la factura, las lineas ya insertadas y los descuentos de stock ya aplicados— y nadie escribio ROLLBACK.</a:t>
             </a:r>
           </a:p>
         </p:txBody>
@@ -2128,17 +1690,22 @@
           <a:lstStyle/>
           <a:p>
             <a:r>
-              <a:t>Hay que separar dos tipos de fallo a mitad de transaccion porque se atienden distinto, y esta distincion es la que ordena todo el procedimiento.</a:t>
-            </a:r>
-          </a:p>
-          <a:p>
-            <a:r>
-              <a:t>De ahi que el procedimiento tenga que convertir el cero filas en una excepcion, con el RAISE EXCEPTION de la seccion anterior, y de ahi tambien que el mensaje deba nombrar el insumo concreto: quien lea el error en la sustentacion tiene que poder decir cual linea fallo.</a:t>
-            </a:r>
-          </a:p>
-          <a:p>
-            <a:r>
-              <a:t>Dos exigencias del entregable salen de aqui.</a:t>
+              <a:t>EXCEPTION WHEN...</a:t>
+            </a:r>
+          </a:p>
+          <a:p>
+            <a:r>
+              <a:t>END en PL/pgSQL crea un savepoint implicito al entrar.</a:t>
+            </a:r>
+          </a:p>
+          <a:p>
+            <a:r>
+              <a:t>Por eso, cuando el codigo captura el error, se revierte solo lo hecho DENTRO de ese bloque y el resto de la transaccion sigue vivo.</a:t>
+            </a:r>
+          </a:p>
+          <a:p>
+            <a:r>
+              <a:t>El savepoint implicito de ese DO deshace todo lo que el CALL habia hecho, el mensaje se imprime, y la foto final demuestra que la base quedo igual.</a:t>
             </a:r>
           </a:p>
         </p:txBody>
@@ -6896,22 +6463,6 @@
               <a:t>–   Y por eso mismo hacer un COMMIT por cada fila en una carga de 100.000 filas puede resultar entre cinco y veinte veces mas lento que agrupar, cifra que es orden de magnitud y hay que medir en cada motor.</a:t>
             </a:r>
           </a:p>
-          <a:p>
-            <a:pPr>
-              <a:spcAft>
-                <a:spcPts val="800"/>
-              </a:spcAft>
-            </a:pPr>
-            <a:r>
-              <a:rPr sz="2000" b="0" i="0">
-                <a:solidFill>
-                  <a:srgbClr val="333333"/>
-                </a:solidFill>
-                <a:latin typeface="Calibri"/>
-              </a:rPr>
-              <a:t>–   El ROLLBACK tampoco es magia: el motor conserva la version anterior de cada fila modificada, como versiones antiguas de fila bajo MVCC en PostgreSQL o en el area de undo en Oracle, y deshacer consiste en descartar lo nuevo o restaurar lo viejo.</a:t>
-            </a:r>
-          </a:p>
         </p:txBody>
       </p:sp>
       <p:sp>
@@ -7129,6 +6680,22 @@
                 </a:solidFill>
                 <a:latin typeface="Calibri"/>
               </a:rPr>
+              <a:t>–   El ROLLBACK tampoco es magia: el motor conserva la version anterior de cada fila modificada, como versiones antiguas de fila bajo MVCC en PostgreSQL o en el area de undo en Oracle, y deshacer consiste en descartar lo nuevo o restaurar lo viejo.</a:t>
+            </a:r>
+          </a:p>
+          <a:p>
+            <a:pPr>
+              <a:spcAft>
+                <a:spcPts val="800"/>
+              </a:spcAft>
+            </a:pPr>
+            <a:r>
+              <a:rPr sz="2000" b="0" i="0">
+                <a:solidFill>
+                  <a:srgbClr val="333333"/>
+                </a:solidFill>
+                <a:latin typeface="Calibri"/>
+              </a:rPr>
               <a:t>–   La recuperacion tras una caida usa el mismo mecanismo en dos fases: al arrancar, el motor relee el log, vuelve a aplicar todo lo confirmado y deshace todo lo que quedo sin confirmar.</a:t>
             </a:r>
           </a:p>
@@ -8021,38 +7588,6 @@
                 </a:solidFill>
                 <a:latin typeface="Calibri"/>
               </a:rPr>
-              <a:t>CREATE PROCEDURE sp_facturar(p_id_consulta INT, p_insumos INT[], p_cantidades INT[])</a:t>
-            </a:r>
-          </a:p>
-          <a:p>
-            <a:pPr>
-              <a:spcAft>
-                <a:spcPts val="400"/>
-              </a:spcAft>
-            </a:pPr>
-            <a:r>
-              <a:rPr sz="1400" b="0" i="0">
-                <a:solidFill>
-                  <a:srgbClr val="FFFFFF"/>
-                </a:solidFill>
-                <a:latin typeface="Calibri"/>
-              </a:rPr>
-              <a:t/>
-            </a:r>
-          </a:p>
-          <a:p>
-            <a:pPr>
-              <a:spcAft>
-                <a:spcPts val="400"/>
-              </a:spcAft>
-            </a:pPr>
-            <a:r>
-              <a:rPr sz="1400" b="0" i="0">
-                <a:solidFill>
-                  <a:srgbClr val="FFFFFF"/>
-                </a:solidFill>
-                <a:latin typeface="Calibri"/>
-              </a:rPr>
               <a:t>CALL sp_facturar(4, ARRAY[1, 6, 5], ARRAY[1, 2, 3])</a:t>
             </a:r>
           </a:p>
@@ -8797,6 +8332,40 @@
               <a:t>–   Cada lámina se sostiene sola: sirve para repasar aunque hayas faltado.</a:t>
             </a:r>
           </a:p>
+          <a:p>
+            <a:pPr>
+              <a:spcAft>
+                <a:spcPts val="800"/>
+              </a:spcAft>
+            </a:pPr>
+            <a:r>
+              <a:rPr sz="2000" b="0" i="0">
+                <a:solidFill>
+                  <a:srgbClr val="333333"/>
+                </a:solidFill>
+                <a:latin typeface="Calibri"/>
+              </a:rPr>
+              <a:t>–   </a:t>
+            </a:r>
+            <a:r>
+              <a:rPr sz="2000" b="1" i="0">
+                <a:solidFill>
+                  <a:srgbClr val="333333"/>
+                </a:solidFill>
+                <a:latin typeface="Calibri"/>
+              </a:rPr>
+              <a:t>Conceptos de hoy:</a:t>
+            </a:r>
+            <a:r>
+              <a:rPr sz="2000" b="0" i="0">
+                <a:solidFill>
+                  <a:srgbClr val="333333"/>
+                </a:solidFill>
+                <a:latin typeface="Calibri"/>
+              </a:rPr>
+              <a:t> Que es una transaccion, y las dos amenazas de las que protege · Que es una transaccion, y las dos amenazas de... · Atomicidad · Consistencia.</a:t>
+            </a:r>
+          </a:p>
         </p:txBody>
       </p:sp>
       <p:sp>
@@ -10305,22 +9874,6 @@
               <a:t>–   En VetCare serviria para una factura de cinco lineas donde el insumo de la tercera esta agotado: se deshace esa linea, se avisa y se cobran las otras cuatro.</a:t>
             </a:r>
           </a:p>
-          <a:p>
-            <a:pPr>
-              <a:spcAft>
-                <a:spcPts val="800"/>
-              </a:spcAft>
-            </a:pPr>
-            <a:r>
-              <a:rPr sz="2000" b="0" i="0">
-                <a:solidFill>
-                  <a:srgbClr val="333333"/>
-                </a:solidFill>
-                <a:latin typeface="Calibri"/>
-              </a:rPr>
-              <a:t>–   Hoy NO se usa.</a:t>
-            </a:r>
-          </a:p>
         </p:txBody>
       </p:sp>
       <p:sp>
@@ -11465,6 +11018,22 @@
               <a:t>–   SQLERRM es la variable que trae el texto del error, y conviene nombrarla porque el estudiante la va a necesitar para que su NOTICE diga algo util en vez de «fallo».</a:t>
             </a:r>
           </a:p>
+          <a:p>
+            <a:pPr>
+              <a:spcAft>
+                <a:spcPts val="800"/>
+              </a:spcAft>
+            </a:pPr>
+            <a:r>
+              <a:rPr sz="2000" b="0" i="0">
+                <a:solidFill>
+                  <a:srgbClr val="333333"/>
+                </a:solidFill>
+                <a:latin typeface="Calibri"/>
+              </a:rPr>
+              <a:t>–   Ese savepoint implicito tiene un costo que hay que mencionar: envolver cada iteracion de un bucle largo en su propio bloque con EXCEPTION crea un savepoint por vuelta y eso se paga</a:t>
+            </a:r>
+          </a:p>
         </p:txBody>
       </p:sp>
       <p:sp>
@@ -11682,7 +11251,7 @@
                 </a:solidFill>
                 <a:latin typeface="Calibri"/>
               </a:rPr>
-              <a:t>–   Ese savepoint implicito tiene un costo que hay que mencionar: envolver cada iteracion de un bucle largo en su propio bloque con EXCEPTION crea un savepoint por vuelta y eso se paga</a:t>
+              <a:t>–   Asi que no se pone un manejador de excepciones «por si acaso» dentro de un ciclo de miles de iteraciones.</a:t>
             </a:r>
           </a:p>
           <a:p>
@@ -11698,7 +11267,7 @@
                 </a:solidFill>
                 <a:latin typeface="Calibri"/>
               </a:rPr>
-              <a:t>–   Asi que no se pone un manejador de excepciones «por si acaso» dentro de un ciclo de miles de iteraciones.</a:t>
+              <a:t>–   La regla practica: manejadores donde haya una decision que tomar, y en ningun otro sitio.</a:t>
             </a:r>
           </a:p>
           <a:p>
@@ -11714,7 +11283,7 @@
                 </a:solidFill>
                 <a:latin typeface="Calibri"/>
               </a:rPr>
-              <a:t>–   La regla practica: manejadores donde haya una decision que tomar, y en ningun otro sitio.</a:t>
+              <a:t>–   Consecuencia practica: dentro del bloque que captura el error, lo escrito antes del fallo en ese mismo bloque se deshace, pero lo escrito antes del BEGIN del bloque sigue en pie hasta que la transaccion termine.</a:t>
             </a:r>
           </a:p>
         </p:txBody>
@@ -13161,6 +12730,22 @@
               <a:t>–   Y hay que decir de frente por que aparece: es la forma canonica en Oracle, donde el procedimiento es parte de la transaccion del llamador y si se escribe EXCEPTION WHEN OTHERS THEN ROLLBACK</a:t>
             </a:r>
           </a:p>
+          <a:p>
+            <a:pPr>
+              <a:spcAft>
+                <a:spcPts val="800"/>
+              </a:spcAft>
+            </a:pPr>
+            <a:r>
+              <a:rPr sz="2000" b="0" i="0">
+                <a:solidFill>
+                  <a:srgbClr val="333333"/>
+                </a:solidFill>
+                <a:latin typeface="Calibri"/>
+              </a:rPr>
+              <a:t>–   Es una respuesta razonable para quien aprendio PL/SQL, y es falsa aqui por dos motivos: el procedimiento de la clase no tiene ese bloque, y ese ROLLBACK no es lo que produjo la reversion.</a:t>
+            </a:r>
+          </a:p>
         </p:txBody>
       </p:sp>
       <p:sp>
@@ -13378,7 +12963,7 @@
                 </a:solidFill>
                 <a:latin typeface="Calibri"/>
               </a:rPr>
-              <a:t>–   Es una respuesta razonable para quien aprendio PL/SQL, y es falsa aqui por dos motivos: el procedimiento de la clase no tiene ese bloque, y ese ROLLBACK no es lo que produjo la reversion.</a:t>
+              <a:t>–   Las otras tres opciones son falsas de forma mas simple, y vale enunciarlo para que nadie las considere: PostgreSQL no guarda una copia de seguridad de cada tabla antes de cada CALL, eso seria carisimo y no existe</a:t>
             </a:r>
           </a:p>
           <a:p>
@@ -13394,7 +12979,7 @@
                 </a:solidFill>
                 <a:latin typeface="Calibri"/>
               </a:rPr>
-              <a:t>–   Las otras tres opciones son falsas de forma mas simple, y vale enunciarlo para que nadie las considere: PostgreSQL no guarda una copia de seguridad de cada tabla antes de cada CALL, eso seria carisimo y no existe</a:t>
+              <a:t>–   PL/pgSQL no acumula los UPDATE en memoria para escribirlos al final, cada sentencia se aplica cuando se ejecuta y es visible dentro de la misma transaccion; y no hay ningun trigger de stock en el esquema de la clase, asi que no pudo deshacer nada.</a:t>
             </a:r>
           </a:p>
           <a:p>
@@ -13410,7 +12995,23 @@
                 </a:solidFill>
                 <a:latin typeface="Calibri"/>
               </a:rPr>
-              <a:t>–   PL/pgSQL no acumula los UPDATE en memoria para escribirlos al final, cada sentencia se aplica cuando se ejecuta y es visible dentro de la misma transaccion; y no hay ningun trigger de stock en el esquema de la clase, asi que no pudo deshacer nada.</a:t>
+              <a:t>–   El contraste con Oracle no se borra del curso, se coloca donde corresponde: como contraste.</a:t>
+            </a:r>
+          </a:p>
+          <a:p>
+            <a:pPr>
+              <a:spcAft>
+                <a:spcPts val="800"/>
+              </a:spcAft>
+            </a:pPr>
+            <a:r>
+              <a:rPr sz="2000" b="0" i="0">
+                <a:solidFill>
+                  <a:srgbClr val="333333"/>
+                </a:solidFill>
+                <a:latin typeface="Calibri"/>
+              </a:rPr>
+              <a:t>–   Portar este procedimiento a Oracle exige cambiar los tipos, cambiar GET DIAGNOSTICS por SQL%ROWCOUNT, cambiar RAISE EXCEPTION por RAISE_APPLICATION_ERROR y anadir el control de transaccion</a:t>
             </a:r>
           </a:p>
         </p:txBody>
@@ -13630,7 +13231,7 @@
                 </a:solidFill>
                 <a:latin typeface="Calibri"/>
               </a:rPr>
-              <a:t>–   El contraste con Oracle no se borra del curso, se coloca donde corresponde: como contraste.</a:t>
+              <a:t>–   Que la misma logica de negocio necesite cuatro cambios de sintaxis es en si mismo el aprendizaje.</a:t>
             </a:r>
           </a:p>
           <a:p>
@@ -13646,7 +13247,7 @@
                 </a:solidFill>
                 <a:latin typeface="Calibri"/>
               </a:rPr>
-              <a:t>–   Portar este procedimiento a Oracle exige cambiar los tipos, cambiar GET DIAGNOSTICS por SQL%ROWCOUNT, cambiar RAISE EXCEPTION por RAISE_APPLICATION_ERROR y anadir el control de transaccion</a:t>
+              <a:t>–   Resumen del contraste: en Oracle el COMMIT o ROLLBACK suele escribirse dentro del procedimiento; en PostgreSQL un CALL dentro de una transaccion abierta no puede hacer COMMIT, y es la excepcion propagada la que deshace.</a:t>
             </a:r>
           </a:p>
           <a:p>
@@ -13662,7 +13263,7 @@
                 </a:solidFill>
                 <a:latin typeface="Calibri"/>
               </a:rPr>
-              <a:t>–   Que la misma logica de negocio necesite cuatro cambios de sintaxis es en si mismo el aprendizaje.</a:t>
+              <a:t>–   En PostgreSQL ese responsable es siempre quien abrio la transaccion.</a:t>
             </a:r>
           </a:p>
         </p:txBody>
@@ -14815,7 +14416,7 @@
                 </a:solidFill>
                 <a:latin typeface="Calibri"/>
               </a:rPr>
-              <a:t>Tuning: habitos de escritura, no parametros del servidor (1/3)</a:t>
+              <a:t>Tuning: habitos de escritura, no parametros del servidor (1/2)</a:t>
             </a:r>
           </a:p>
         </p:txBody>
@@ -14903,6 +14504,22 @@
                 <a:latin typeface="Calibri"/>
               </a:rPr>
               <a:t>–   Porque el clasico de abrir, mostrar un cuadro de confirmacion y confirmar convierte una pausa de almuerzo en 45 minutos de filas bloqueadas para el resto de la clinica.</a:t>
+            </a:r>
+          </a:p>
+          <a:p>
+            <a:pPr>
+              <a:spcAft>
+                <a:spcPts val="800"/>
+              </a:spcAft>
+            </a:pPr>
+            <a:r>
+              <a:rPr sz="2000" b="0" i="0">
+                <a:solidFill>
+                  <a:srgbClr val="333333"/>
+                </a:solidFill>
+                <a:latin typeface="Calibri"/>
+              </a:rPr>
+              <a:t>–   Lo correcto es hacer lecturas y validaciones primero y abrir la transaccion solo cuando ya se tienen todos los datos para escribir.</a:t>
             </a:r>
           </a:p>
         </p:txBody>
@@ -15083,7 +14700,7 @@
                 </a:solidFill>
                 <a:latin typeface="Calibri"/>
               </a:rPr>
-              <a:t>Tuning: habitos de escritura, no parametros del servidor (2/3)</a:t>
+              <a:t>Tuning: habitos de escritura, no parametros del servidor (2/2)</a:t>
             </a:r>
           </a:p>
         </p:txBody>
@@ -15122,7 +14739,7 @@
                 </a:solidFill>
                 <a:latin typeface="Calibri"/>
               </a:rPr>
-              <a:t>–   Lo correcto es hacer lecturas y validaciones primero y abrir la transaccion solo cuando ya se tienen todos los datos para escribir.</a:t>
+              <a:t>–   Segundo: en cargas masivas, agrupar los COMMIT en lotes del orden de 1.000 a 5.000 filas, convencion de oficio y no regla dura</a:t>
             </a:r>
           </a:p>
           <a:p>
@@ -15138,7 +14755,7 @@
                 </a:solidFill>
                 <a:latin typeface="Calibri"/>
               </a:rPr>
-              <a:t>–   Segundo: en cargas masivas, agrupar los COMMIT en lotes del orden de 1.000 a 5.000 filas, convencion de oficio y no regla dura</a:t>
+              <a:t>–   En lugar de uno por fila, lentisimo, o uno solo para un millon de filas, que hincha las versiones antiguas y sostiene bloqueos enormes.</a:t>
             </a:r>
           </a:p>
           <a:p>
@@ -15154,7 +14771,7 @@
                 </a:solidFill>
                 <a:latin typeface="Calibri"/>
               </a:rPr>
-              <a:t>–   En lugar de uno por fila, lentisimo, o uno solo para un millon de filas, que hincha las versiones antiguas y sostiene bloqueos enormes.</a:t>
+              <a:t>–   Tercero: apoyarse en los indices de la Clase 7, porque el UPDATE del descuento filtra por id_insumo, que es clave primaria, y por eso bloquea una sola fila; el mismo UPDATE filtrando por una columna sin indice puede recorrer y bloquear muchas mas.</a:t>
             </a:r>
           </a:p>
           <a:p>
@@ -15170,7 +14787,7 @@
                 </a:solidFill>
                 <a:latin typeface="Calibri"/>
               </a:rPr>
-              <a:t>–   Tercero: apoyarse en los indices de la Clase 7, porque el UPDATE del descuento filtra por id_insumo, que es clave primaria, y por eso bloquea una sola fila; el mismo UPDATE filtrando por una columna sin indice puede recorrer y bloquear muchas mas.</a:t>
+              <a:t>–   Cuarto: estadisticas frescas de la Clase 6 y ningun disparador con trabajo pesado dentro de la transaccion, de la Clase 4.</a:t>
             </a:r>
           </a:p>
         </p:txBody>
@@ -15351,7 +14968,7 @@
                 </a:solidFill>
                 <a:latin typeface="Calibri"/>
               </a:rPr>
-              <a:t>Tuning: habitos de escritura, no parametros del servidor (3/3)</a:t>
+              <a:t>La demo, en el orden en que se proyecta (1/2)</a:t>
             </a:r>
           </a:p>
         </p:txBody>
@@ -15390,7 +15007,7 @@
                 </a:solidFill>
                 <a:latin typeface="Calibri"/>
               </a:rPr>
-              <a:t>–   Cuarto: estadisticas frescas de la Clase 6 y ningun disparador con trabajo pesado dentro de la transaccion, de la Clase 4.</a:t>
+              <a:t>–   La demo es el script Codigo/08_transacciones_vetcare.sql y se corre.</a:t>
             </a:r>
           </a:p>
           <a:p>
@@ -15406,7 +15023,7 @@
                 </a:solidFill>
                 <a:latin typeface="Calibri"/>
               </a:rPr>
-              <a:t>–   Esos cuatro habitos, mas el de no usar SELECT asterisco en los reportes, mas los predicados sargables, mas el respaldo con restore probado.</a:t>
+              <a:t>–   Tiene cinco bloques y el valor esta en el tercero, asi que hay que administrar el tiempo para llegar ahi con calma.</a:t>
             </a:r>
           </a:p>
           <a:p>
@@ -15422,7 +15039,55 @@
                 </a:solidFill>
                 <a:latin typeface="Calibri"/>
               </a:rPr>
-              <a:t>–   Y cada item exige estado Y evidencia concreta —un nombre de indice, un archivo, una consulta— porque siete casillas marcadas sin evidencia no demuestran nada.</a:t>
+              <a:t>–   El bloque 0 crea insumo, factura y detalle_factura y siembra los seis insumos con los stocks del enunciado; empieza con los DROP para que el script se pueda correr dos veces sin limpiar a mano.</a:t>
+            </a:r>
+          </a:p>
+          <a:p>
+            <a:pPr>
+              <a:spcAft>
+                <a:spcPts val="800"/>
+              </a:spcAft>
+            </a:pPr>
+            <a:r>
+              <a:rPr sz="2000" b="0" i="0">
+                <a:solidFill>
+                  <a:srgbClr val="333333"/>
+                </a:solidFill>
+                <a:latin typeface="Calibri"/>
+              </a:rPr>
+              <a:t>–   El bloque 1 crea el procedimiento, y conviene proyectarlo leyendo en voz alta el guardia y el GET DIAGNOSTICS, no pasarlo de largo.</a:t>
+            </a:r>
+          </a:p>
+          <a:p>
+            <a:pPr>
+              <a:spcAft>
+                <a:spcPts val="800"/>
+              </a:spcAft>
+            </a:pPr>
+            <a:r>
+              <a:rPr sz="2000" b="0" i="0">
+                <a:solidFill>
+                  <a:srgbClr val="333333"/>
+                </a:solidFill>
+                <a:latin typeface="Calibri"/>
+              </a:rPr>
+              <a:t>–   El bloque 2 es el caso feliz:, factura por 27.400 y los stocks 1, 6 y 5 quedan en 11, 58 y 5.</a:t>
+            </a:r>
+          </a:p>
+          <a:p>
+            <a:pPr>
+              <a:spcAft>
+                <a:spcPts val="800"/>
+              </a:spcAft>
+            </a:pPr>
+            <a:r>
+              <a:rPr sz="2000" b="0" i="0">
+                <a:solidFill>
+                  <a:srgbClr val="333333"/>
+                </a:solidFill>
+                <a:latin typeface="Calibri"/>
+              </a:rPr>
+              <a:t>–   El bloque 3 es la clase entera y tiene tres pasos que no se pueden desordenar: la foto inicial</a:t>
             </a:r>
           </a:p>
         </p:txBody>
@@ -15887,7 +15552,7 @@
                 </a:solidFill>
                 <a:latin typeface="Calibri"/>
               </a:rPr>
-              <a:t>La demo, en el orden en que se proyecta (1/2)</a:t>
+              <a:t>La demo, en el orden en que se proyecta (2/2)</a:t>
             </a:r>
           </a:p>
         </p:txBody>
@@ -15926,7 +15591,7 @@
                 </a:solidFill>
                 <a:latin typeface="Calibri"/>
               </a:rPr>
-              <a:t>–   La demo es el script Codigo/08_transacciones_vetcare.sql y se corre.</a:t>
+              <a:t>–   Que debe dar una factura, tres lineas, el insumo 3 en 40 y el insumo 2 en 3; el intento que falla a mitad, envuelto en el DO con su manejador para que el script siga; y la foto final, que debe dar EXACTAMENTE los mismos cuatro numeros.</a:t>
             </a:r>
           </a:p>
           <a:p>
@@ -15942,7 +15607,7 @@
                 </a:solidFill>
                 <a:latin typeface="Calibri"/>
               </a:rPr>
-              <a:t>–   Tiene cinco bloques y el valor esta en el tercero, asi que hay que administrar el tiempo para llegar ahi con calma.</a:t>
+              <a:t>–   Ese es el momento de preguntarle al grupo donde quedo el descuento del insumo 3 y dejar que alguien diga que se deshizo solo.</a:t>
             </a:r>
           </a:p>
           <a:p>
@@ -15958,7 +15623,7 @@
                 </a:solidFill>
                 <a:latin typeface="Calibri"/>
               </a:rPr>
-              <a:t>–   El bloque 0 crea insumo, factura y detalle_factura y siembra los seis insumos con los stocks del enunciado; empieza con los DROP para que el script se pueda correr dos veces sin limpiar a mano.</a:t>
+              <a:t>–   El bloque 3 cierra con la version viable,, que crea la segunda factura por 112.000 y deja el insumo 3 en 38 y el 2 en 0.</a:t>
             </a:r>
           </a:p>
           <a:p>
@@ -15974,7 +15639,7 @@
                 </a:solidFill>
                 <a:latin typeface="Calibri"/>
               </a:rPr>
-              <a:t>–   El bloque 1 crea el procedimiento, y conviene proyectarlo leyendo en voz alta el guardia y el GET DIAGNOSTICS, no pasarlo de largo.</a:t>
+              <a:t>–   El bloque 4 es la funcion, con su prueba de tres columnas que devuelve verdadero, falso, verdadero; ese bloque reinicia los stocks de los insumos 5 y 2 antes de probar, porque si no los numeros esperados no salen.</a:t>
             </a:r>
           </a:p>
           <a:p>
@@ -15990,23 +15655,7 @@
                 </a:solidFill>
                 <a:latin typeface="Calibri"/>
               </a:rPr>
-              <a:t>–   El bloque 2 es el caso feliz:, factura por 27.400 y los stocks 1, 6 y 5 quedan en 11, 58 y 5.</a:t>
-            </a:r>
-          </a:p>
-          <a:p>
-            <a:pPr>
-              <a:spcAft>
-                <a:spcPts val="800"/>
-              </a:spcAft>
-            </a:pPr>
-            <a:r>
-              <a:rPr sz="2000" b="0" i="0">
-                <a:solidFill>
-                  <a:srgbClr val="333333"/>
-                </a:solidFill>
-                <a:latin typeface="Calibri"/>
-              </a:rPr>
-              <a:t>–   El bloque 3 es la clase entera y tiene tres pasos que no se pueden desordenar: la foto inicial</a:t>
+              <a:t>–   Si el tiempo aprieta, lo que se recorta es el bloque 4.</a:t>
             </a:r>
           </a:p>
         </p:txBody>
@@ -16187,21 +15836,141 @@
                 </a:solidFill>
                 <a:latin typeface="Calibri"/>
               </a:rPr>
-              <a:t>La demo, en el orden en que se proyecta (2/2)</a:t>
-            </a:r>
-          </a:p>
-        </p:txBody>
-      </p:sp>
-      <p:sp>
-        <p:nvSpPr>
-          <p:cNvPr id="5" name="TextBox 4"/>
+              <a:t>La demo, en el orden en que se proyecta — sintaxis</a:t>
+            </a:r>
+          </a:p>
+        </p:txBody>
+      </p:sp>
+      <p:sp>
+        <p:nvSpPr>
+          <p:cNvPr id="5" name="Rounded Rectangle 4"/>
+          <p:cNvSpPr/>
+          <p:nvPr/>
+        </p:nvSpPr>
+        <p:spPr>
+          <a:xfrm>
+            <a:off x="457200" y="1261872"/>
+            <a:ext cx="11277295" cy="5093208"/>
+          </a:xfrm>
+          <a:prstGeom prst="roundRect">
+            <a:avLst>
+              <a:gd name="adj" fmla="val 12000"/>
+            </a:avLst>
+          </a:prstGeom>
+          <a:solidFill>
+            <a:srgbClr val="1E2A38"/>
+          </a:solidFill>
+          <a:ln>
+            <a:noFill/>
+          </a:ln>
+        </p:spPr>
+        <p:style>
+          <a:lnRef idx="1">
+            <a:schemeClr val="accent1"/>
+          </a:lnRef>
+          <a:fillRef idx="3">
+            <a:schemeClr val="accent1"/>
+          </a:fillRef>
+          <a:effectRef idx="2">
+            <a:schemeClr val="accent1"/>
+          </a:effectRef>
+          <a:fontRef idx="minor">
+            <a:schemeClr val="lt1"/>
+          </a:fontRef>
+        </p:style>
+        <p:txBody>
+          <a:bodyPr rtlCol="0" anchor="ctr"/>
+          <a:lstStyle/>
+          <a:p>
+            <a:pPr algn="ctr"/>
+          </a:p>
+        </p:txBody>
+      </p:sp>
+      <p:sp>
+        <p:nvSpPr>
+          <p:cNvPr id="6" name="Rectangle 5"/>
+          <p:cNvSpPr/>
+          <p:nvPr/>
+        </p:nvSpPr>
+        <p:spPr>
+          <a:xfrm>
+            <a:off x="457200" y="1261872"/>
+            <a:ext cx="11277295" cy="320040"/>
+          </a:xfrm>
+          <a:prstGeom prst="rect">
+            <a:avLst/>
+          </a:prstGeom>
+          <a:solidFill>
+            <a:srgbClr val="095292"/>
+          </a:solidFill>
+          <a:ln>
+            <a:noFill/>
+          </a:ln>
+        </p:spPr>
+        <p:style>
+          <a:lnRef idx="1">
+            <a:schemeClr val="accent1"/>
+          </a:lnRef>
+          <a:fillRef idx="3">
+            <a:schemeClr val="accent1"/>
+          </a:fillRef>
+          <a:effectRef idx="2">
+            <a:schemeClr val="accent1"/>
+          </a:effectRef>
+          <a:fontRef idx="minor">
+            <a:schemeClr val="lt1"/>
+          </a:fontRef>
+        </p:style>
+        <p:txBody>
+          <a:bodyPr rtlCol="0" anchor="ctr"/>
+          <a:lstStyle/>
+          <a:p>
+            <a:pPr algn="ctr"/>
+          </a:p>
+        </p:txBody>
+      </p:sp>
+      <p:sp>
+        <p:nvSpPr>
+          <p:cNvPr id="7" name="TextBox 6"/>
           <p:cNvSpPr txBox="1"/>
           <p:nvPr/>
         </p:nvSpPr>
         <p:spPr>
           <a:xfrm>
-            <a:off x="457200" y="1170432"/>
-            <a:ext cx="11277295" cy="5230368"/>
+            <a:off x="685800" y="1307592"/>
+            <a:ext cx="10820095" cy="256032"/>
+          </a:xfrm>
+          <a:prstGeom prst="rect">
+            <a:avLst/>
+          </a:prstGeom>
+          <a:noFill/>
+        </p:spPr>
+        <p:txBody>
+          <a:bodyPr wrap="square" anchor="ctr"/>
+          <a:lstStyle/>
+          <a:p>
+            <a:r>
+              <a:rPr sz="1000" b="1" i="0">
+                <a:solidFill>
+                  <a:srgbClr val="269CCB"/>
+                </a:solidFill>
+                <a:latin typeface="Calibri"/>
+              </a:rPr>
+              <a:t>● ● ●</a:t>
+            </a:r>
+          </a:p>
+        </p:txBody>
+      </p:sp>
+      <p:sp>
+        <p:nvSpPr>
+          <p:cNvPr id="8" name="TextBox 7"/>
+          <p:cNvSpPr txBox="1"/>
+          <p:nvPr/>
+        </p:nvSpPr>
+        <p:spPr>
+          <a:xfrm>
+            <a:off x="777240" y="1719072"/>
+            <a:ext cx="10637215" cy="4453128"/>
           </a:xfrm>
           <a:prstGeom prst="rect">
             <a:avLst/>
@@ -16216,88 +15985,56 @@
           <a:p>
             <a:pPr>
               <a:spcAft>
-                <a:spcPts val="800"/>
-              </a:spcAft>
-            </a:pPr>
-            <a:r>
-              <a:rPr sz="2000" b="0" i="0">
-                <a:solidFill>
-                  <a:srgbClr val="333333"/>
-                </a:solidFill>
-                <a:latin typeface="Calibri"/>
-              </a:rPr>
-              <a:t>–   Que debe dar una factura, tres lineas, el insumo 3 en 40 y el insumo 2 en 3; el intento que falla a mitad, envuelto en el DO con su manejador para que el script siga; y la foto final, que debe dar EXACTAMENTE los mismos cuatro numeros.</a:t>
-            </a:r>
-          </a:p>
-          <a:p>
-            <a:pPr>
-              <a:spcAft>
-                <a:spcPts val="800"/>
-              </a:spcAft>
-            </a:pPr>
-            <a:r>
-              <a:rPr sz="2000" b="0" i="0">
-                <a:solidFill>
-                  <a:srgbClr val="333333"/>
-                </a:solidFill>
-                <a:latin typeface="Calibri"/>
-              </a:rPr>
-              <a:t>–   Ese es el momento de preguntarle al grupo donde quedo el descuento del insumo 3 y dejar que alguien diga que se deshizo solo.</a:t>
-            </a:r>
-          </a:p>
-          <a:p>
-            <a:pPr>
-              <a:spcAft>
-                <a:spcPts val="800"/>
-              </a:spcAft>
-            </a:pPr>
-            <a:r>
-              <a:rPr sz="2000" b="0" i="0">
-                <a:solidFill>
-                  <a:srgbClr val="333333"/>
-                </a:solidFill>
-                <a:latin typeface="Calibri"/>
-              </a:rPr>
-              <a:t>–   El bloque 3 cierra con la version viable,, que crea la segunda factura por 112.000 y deja el insumo 3 en 38 y el 2 en 0.</a:t>
-            </a:r>
-          </a:p>
-          <a:p>
-            <a:pPr>
-              <a:spcAft>
-                <a:spcPts val="800"/>
-              </a:spcAft>
-            </a:pPr>
-            <a:r>
-              <a:rPr sz="2000" b="0" i="0">
-                <a:solidFill>
-                  <a:srgbClr val="333333"/>
-                </a:solidFill>
-                <a:latin typeface="Calibri"/>
-              </a:rPr>
-              <a:t>–   El bloque 4 es la funcion, con su prueba de tres columnas que devuelve verdadero, falso, verdadero; ese bloque reinicia los stocks de los insumos 5 y 2 antes de probar, porque si no los numeros esperados no salen.</a:t>
-            </a:r>
-          </a:p>
-          <a:p>
-            <a:pPr>
-              <a:spcAft>
-                <a:spcPts val="800"/>
-              </a:spcAft>
-            </a:pPr>
-            <a:r>
-              <a:rPr sz="2000" b="0" i="0">
-                <a:solidFill>
-                  <a:srgbClr val="333333"/>
-                </a:solidFill>
-                <a:latin typeface="Calibri"/>
-              </a:rPr>
-              <a:t>–   Si el tiempo aprieta, lo que se recorta es el bloque 4.</a:t>
-            </a:r>
-          </a:p>
-        </p:txBody>
-      </p:sp>
-      <p:sp>
-        <p:nvSpPr>
-          <p:cNvPr id="6" name="TextBox 5"/>
+                <a:spcPts val="400"/>
+              </a:spcAft>
+            </a:pPr>
+            <a:r>
+              <a:rPr sz="1400" b="0" i="0">
+                <a:solidFill>
+                  <a:srgbClr val="FFFFFF"/>
+                </a:solidFill>
+                <a:latin typeface="Calibri"/>
+              </a:rPr>
+              <a:t>CALL sp_facturar(4, ARRAY[1, 6, 5], ARRAY[1, 2, 3])</a:t>
+            </a:r>
+          </a:p>
+          <a:p>
+            <a:pPr>
+              <a:spcAft>
+                <a:spcPts val="400"/>
+              </a:spcAft>
+            </a:pPr>
+            <a:r>
+              <a:rPr sz="1400" b="0" i="0">
+                <a:solidFill>
+                  <a:srgbClr val="FFFFFF"/>
+                </a:solidFill>
+                <a:latin typeface="Calibri"/>
+              </a:rPr>
+              <a:t/>
+            </a:r>
+          </a:p>
+          <a:p>
+            <a:pPr>
+              <a:spcAft>
+                <a:spcPts val="400"/>
+              </a:spcAft>
+            </a:pPr>
+            <a:r>
+              <a:rPr sz="1400" b="0" i="0">
+                <a:solidFill>
+                  <a:srgbClr val="FFFFFF"/>
+                </a:solidFill>
+                <a:latin typeface="Calibri"/>
+              </a:rPr>
+              <a:t>CALL sp_facturar(4, ARRAY[3, 2], ARRAY[2, 3])</a:t>
+            </a:r>
+          </a:p>
+        </p:txBody>
+      </p:sp>
+      <p:sp>
+        <p:nvSpPr>
+          <p:cNvPr id="9" name="TextBox 8"/>
           <p:cNvSpPr txBox="1"/>
           <p:nvPr/>
         </p:nvSpPr>
@@ -16471,141 +16208,21 @@
                 </a:solidFill>
                 <a:latin typeface="Calibri"/>
               </a:rPr>
-              <a:t>La demo, en el orden en que se proyecta — sintaxis</a:t>
-            </a:r>
-          </a:p>
-        </p:txBody>
-      </p:sp>
-      <p:sp>
-        <p:nvSpPr>
-          <p:cNvPr id="5" name="Rounded Rectangle 4"/>
-          <p:cNvSpPr/>
-          <p:nvPr/>
-        </p:nvSpPr>
-        <p:spPr>
-          <a:xfrm>
-            <a:off x="457200" y="1261872"/>
-            <a:ext cx="11277295" cy="5093208"/>
-          </a:xfrm>
-          <a:prstGeom prst="roundRect">
-            <a:avLst>
-              <a:gd name="adj" fmla="val 12000"/>
-            </a:avLst>
-          </a:prstGeom>
-          <a:solidFill>
-            <a:srgbClr val="1E2A38"/>
-          </a:solidFill>
-          <a:ln>
-            <a:noFill/>
-          </a:ln>
-        </p:spPr>
-        <p:style>
-          <a:lnRef idx="1">
-            <a:schemeClr val="accent1"/>
-          </a:lnRef>
-          <a:fillRef idx="3">
-            <a:schemeClr val="accent1"/>
-          </a:fillRef>
-          <a:effectRef idx="2">
-            <a:schemeClr val="accent1"/>
-          </a:effectRef>
-          <a:fontRef idx="minor">
-            <a:schemeClr val="lt1"/>
-          </a:fontRef>
-        </p:style>
-        <p:txBody>
-          <a:bodyPr rtlCol="0" anchor="ctr"/>
-          <a:lstStyle/>
-          <a:p>
-            <a:pPr algn="ctr"/>
-          </a:p>
-        </p:txBody>
-      </p:sp>
-      <p:sp>
-        <p:nvSpPr>
-          <p:cNvPr id="6" name="Rectangle 5"/>
-          <p:cNvSpPr/>
-          <p:nvPr/>
-        </p:nvSpPr>
-        <p:spPr>
-          <a:xfrm>
-            <a:off x="457200" y="1261872"/>
-            <a:ext cx="11277295" cy="320040"/>
-          </a:xfrm>
-          <a:prstGeom prst="rect">
-            <a:avLst/>
-          </a:prstGeom>
-          <a:solidFill>
-            <a:srgbClr val="095292"/>
-          </a:solidFill>
-          <a:ln>
-            <a:noFill/>
-          </a:ln>
-        </p:spPr>
-        <p:style>
-          <a:lnRef idx="1">
-            <a:schemeClr val="accent1"/>
-          </a:lnRef>
-          <a:fillRef idx="3">
-            <a:schemeClr val="accent1"/>
-          </a:fillRef>
-          <a:effectRef idx="2">
-            <a:schemeClr val="accent1"/>
-          </a:effectRef>
-          <a:fontRef idx="minor">
-            <a:schemeClr val="lt1"/>
-          </a:fontRef>
-        </p:style>
-        <p:txBody>
-          <a:bodyPr rtlCol="0" anchor="ctr"/>
-          <a:lstStyle/>
-          <a:p>
-            <a:pPr algn="ctr"/>
-          </a:p>
-        </p:txBody>
-      </p:sp>
-      <p:sp>
-        <p:nvSpPr>
-          <p:cNvPr id="7" name="TextBox 6"/>
+              <a:t>Donde corre esto, y por que el autocommit ya no es el enemigo</a:t>
+            </a:r>
+          </a:p>
+        </p:txBody>
+      </p:sp>
+      <p:sp>
+        <p:nvSpPr>
+          <p:cNvPr id="5" name="TextBox 4"/>
           <p:cNvSpPr txBox="1"/>
           <p:nvPr/>
         </p:nvSpPr>
         <p:spPr>
           <a:xfrm>
-            <a:off x="685800" y="1307592"/>
-            <a:ext cx="10820095" cy="256032"/>
-          </a:xfrm>
-          <a:prstGeom prst="rect">
-            <a:avLst/>
-          </a:prstGeom>
-          <a:noFill/>
-        </p:spPr>
-        <p:txBody>
-          <a:bodyPr wrap="square" anchor="ctr"/>
-          <a:lstStyle/>
-          <a:p>
-            <a:r>
-              <a:rPr sz="1000" b="1" i="0">
-                <a:solidFill>
-                  <a:srgbClr val="269CCB"/>
-                </a:solidFill>
-                <a:latin typeface="Calibri"/>
-              </a:rPr>
-              <a:t>● ● ●</a:t>
-            </a:r>
-          </a:p>
-        </p:txBody>
-      </p:sp>
-      <p:sp>
-        <p:nvSpPr>
-          <p:cNvPr id="8" name="TextBox 7"/>
-          <p:cNvSpPr txBox="1"/>
-          <p:nvPr/>
-        </p:nvSpPr>
-        <p:spPr>
-          <a:xfrm>
-            <a:off x="777240" y="1719072"/>
-            <a:ext cx="10637215" cy="4453128"/>
+            <a:off x="457200" y="1170432"/>
+            <a:ext cx="11277295" cy="5230368"/>
           </a:xfrm>
           <a:prstGeom prst="rect">
             <a:avLst/>
@@ -16620,56 +16237,88 @@
           <a:p>
             <a:pPr>
               <a:spcAft>
-                <a:spcPts val="400"/>
-              </a:spcAft>
-            </a:pPr>
-            <a:r>
-              <a:rPr sz="1400" b="0" i="0">
-                <a:solidFill>
-                  <a:srgbClr val="FFFFFF"/>
-                </a:solidFill>
-                <a:latin typeface="Calibri"/>
-              </a:rPr>
-              <a:t>CALL sp_facturar(4, ARRAY[1, 6, 5], ARRAY[1, 2, 3])</a:t>
-            </a:r>
-          </a:p>
-          <a:p>
-            <a:pPr>
-              <a:spcAft>
-                <a:spcPts val="400"/>
-              </a:spcAft>
-            </a:pPr>
-            <a:r>
-              <a:rPr sz="1400" b="0" i="0">
-                <a:solidFill>
-                  <a:srgbClr val="FFFFFF"/>
-                </a:solidFill>
-                <a:latin typeface="Calibri"/>
-              </a:rPr>
-              <a:t/>
-            </a:r>
-          </a:p>
-          <a:p>
-            <a:pPr>
-              <a:spcAft>
-                <a:spcPts val="400"/>
-              </a:spcAft>
-            </a:pPr>
-            <a:r>
-              <a:rPr sz="1400" b="0" i="0">
-                <a:solidFill>
-                  <a:srgbClr val="FFFFFF"/>
-                </a:solidFill>
-                <a:latin typeface="Calibri"/>
-              </a:rPr>
-              <a:t>CALL sp_facturar(4, ARRAY[3, 2], ARRAY[2, 3])</a:t>
-            </a:r>
-          </a:p>
-        </p:txBody>
-      </p:sp>
-      <p:sp>
-        <p:nvSpPr>
-          <p:cNvPr id="9" name="TextBox 8"/>
+                <a:spcPts val="800"/>
+              </a:spcAft>
+            </a:pPr>
+            <a:r>
+              <a:rPr sz="2000" b="0" i="0">
+                <a:solidFill>
+                  <a:srgbClr val="333333"/>
+                </a:solidFill>
+                <a:latin typeface="Calibri"/>
+              </a:rPr>
+              <a:t>–   La herramienta de hoy es PostgreSQL en el navegador, que ejecuta PostgreSQL sobre PGlite dentro del navegador, y hay que decirlo sin ambiguedad porque este es el tema donde la herramienta equivocada no da un resultado distinto sino que no compila.</a:t>
+            </a:r>
+          </a:p>
+          <a:p>
+            <a:pPr>
+              <a:spcAft>
+                <a:spcPts val="800"/>
+              </a:spcAft>
+            </a:pPr>
+            <a:r>
+              <a:rPr sz="2000" b="0" i="0">
+                <a:solidFill>
+                  <a:srgbClr val="333333"/>
+                </a:solidFill>
+                <a:latin typeface="Calibri"/>
+              </a:rPr>
+              <a:t>–   ROW_COUNT, RAISE EXCEPTION con porcentaje y una funcion que devuelve BOOLEAN.</a:t>
+            </a:r>
+          </a:p>
+          <a:p>
+            <a:pPr>
+              <a:spcAft>
+                <a:spcPts val="800"/>
+              </a:spcAft>
+            </a:pPr>
+            <a:r>
+              <a:rPr sz="2000" b="0" i="0">
+                <a:solidFill>
+                  <a:srgbClr val="333333"/>
+                </a:solidFill>
+                <a:latin typeface="Calibri"/>
+              </a:rPr>
+              <a:t>–   Nadie escribe BEGIN ni COMMIT: el CALL de nivel superior ya es su propia transaccion, y la excepcion que se propaga la deshace entera.</a:t>
+            </a:r>
+          </a:p>
+          <a:p>
+            <a:pPr>
+              <a:spcAft>
+                <a:spcPts val="800"/>
+              </a:spcAft>
+            </a:pPr>
+            <a:r>
+              <a:rPr sz="2000" b="0" i="0">
+                <a:solidFill>
+                  <a:srgbClr val="333333"/>
+                </a:solidFill>
+                <a:latin typeface="Calibri"/>
+              </a:rPr>
+              <a:t>–   La demostracion de atomicidad no depende de dejar una transaccion abierta entre dos ejecuciones, que es justamente lo que un playground no permite; depende de tomar una foto, correr el CALL que falla y volver a tomar la foto, todo en el mismo panel.</a:t>
+            </a:r>
+          </a:p>
+          <a:p>
+            <a:pPr>
+              <a:spcAft>
+                <a:spcPts val="800"/>
+              </a:spcAft>
+            </a:pPr>
+            <a:r>
+              <a:rPr sz="2000" b="0" i="0">
+                <a:solidFill>
+                  <a:srgbClr val="333333"/>
+                </a:solidFill>
+                <a:latin typeface="Calibri"/>
+              </a:rPr>
+              <a:t>–   Por lo mismo, la vieja advertencia de que en Oracle y en MySQL cualquier DDL provoca un COMMIT implicito —y que por eso no hay que mezclar CREATE TABLE con la demostracion— no aplica aqui: en PostgreSQL el DDL es transaccional.</a:t>
+            </a:r>
+          </a:p>
+        </p:txBody>
+      </p:sp>
+      <p:sp>
+        <p:nvSpPr>
+          <p:cNvPr id="6" name="TextBox 5"/>
           <p:cNvSpPr txBox="1"/>
           <p:nvPr/>
         </p:nvSpPr>
@@ -16843,7 +16492,7 @@
                 </a:solidFill>
                 <a:latin typeface="Calibri"/>
               </a:rPr>
-              <a:t>Donde corre esto, y por que el autocommit ya no es el enemigo (1/2)</a:t>
+              <a:t>Preguntas frecuentes del grupo (1/3)</a:t>
             </a:r>
           </a:p>
         </p:txBody>
@@ -16882,7 +16531,7 @@
                 </a:solidFill>
                 <a:latin typeface="Calibri"/>
               </a:rPr>
-              <a:t>–   La herramienta de hoy es PostgreSQL en el navegador, que ejecuta PostgreSQL sobre PGlite dentro del navegador, y hay que decirlo sin ambiguedad porque este es el tema donde la herramienta equivocada no da un resultado distinto sino que no compila.</a:t>
+              <a:t>–   Primera: si el motor confirma solo, para que sirve COMMIT.</a:t>
             </a:r>
           </a:p>
           <a:p>
@@ -16898,7 +16547,7 @@
                 </a:solidFill>
                 <a:latin typeface="Calibri"/>
               </a:rPr>
-              <a:t>–   ROW_COUNT, RAISE EXCEPTION con porcentaje y una funcion que devuelve BOOLEAN.</a:t>
+              <a:t>–   Para agrupar varias sentencias en un unico hecho de negocio, que es justamente lo que el modo de confirmacion automatica impide; y hoy no hace falta escribirlo porque el CALL ya agrupa todo el procedimiento en una transaccion.</a:t>
             </a:r>
           </a:p>
           <a:p>
@@ -16914,7 +16563,7 @@
                 </a:solidFill>
                 <a:latin typeface="Calibri"/>
               </a:rPr>
-              <a:t>–   Nada de eso corre en Oracle Live SQL.</a:t>
+              <a:t>–   Segunda: que pasa si me desconecto sin confirmar.</a:t>
             </a:r>
           </a:p>
           <a:p>
@@ -16930,7 +16579,39 @@
                 </a:solidFill>
                 <a:latin typeface="Calibri"/>
               </a:rPr>
-              <a:t>–   Sobre el autocommit, que en versiones anteriores de este material era la advertencia central.</a:t>
+              <a:t>–   El motor deshace la transaccion cuando la sesion muere de forma anormal, aunque algunos clientes confirman al salir de manera ordenada, asi que jamas se debe depender de eso.</a:t>
+            </a:r>
+          </a:p>
+          <a:p>
+            <a:pPr>
+              <a:spcAft>
+                <a:spcPts val="800"/>
+              </a:spcAft>
+            </a:pPr>
+            <a:r>
+              <a:rPr sz="2000" b="0" i="0">
+                <a:solidFill>
+                  <a:srgbClr val="333333"/>
+                </a:solidFill>
+                <a:latin typeface="Calibri"/>
+              </a:rPr>
+              <a:t>–   Tercera: se puede hacer ROLLBACK despues de un COMMIT.</a:t>
+            </a:r>
+          </a:p>
+          <a:p>
+            <a:pPr>
+              <a:spcAft>
+                <a:spcPts val="800"/>
+              </a:spcAft>
+            </a:pPr>
+            <a:r>
+              <a:rPr sz="2000" b="0" i="0">
+                <a:solidFill>
+                  <a:srgbClr val="333333"/>
+                </a:solidFill>
+                <a:latin typeface="Calibri"/>
+              </a:rPr>
+              <a:t>–   No, confirmar es definitivo, y lo unico que queda es restaurar desde el respaldo de la Clase 4 con recuperacion a un punto en el tiempo, operacion de administrador y no correccion de rutina.</a:t>
             </a:r>
           </a:p>
         </p:txBody>
@@ -17111,7 +16792,7 @@
                 </a:solidFill>
                 <a:latin typeface="Calibri"/>
               </a:rPr>
-              <a:t>Donde corre esto, y por que el autocommit ya no es el enemigo (2/2)</a:t>
+              <a:t>Preguntas frecuentes del grupo (2/3)</a:t>
             </a:r>
           </a:p>
         </p:txBody>
@@ -17150,7 +16831,7 @@
                 </a:solidFill>
                 <a:latin typeface="Calibri"/>
               </a:rPr>
-              <a:t>–   Nadie escribe BEGIN ni COMMIT: el CALL de nivel superior ya es su propia transaccion, y la excepcion que se propaga la deshace entera.</a:t>
+              <a:t>–   Cuarta, y la que sale siempre en esta clase: si no escribo ROLLBACK, como se deshizo.</a:t>
             </a:r>
           </a:p>
           <a:p>
@@ -17166,7 +16847,7 @@
                 </a:solidFill>
                 <a:latin typeface="Calibri"/>
               </a:rPr>
-              <a:t>–   La demostracion de atomicidad no depende de dejar una transaccion abierta entre dos ejecuciones, que es justamente lo que un playground no permite; depende de tomar una foto, correr el CALL que falla y volver a tomar la foto, todo en el mismo panel.</a:t>
+              <a:t>–   Porque el CALL de nivel superior es su propia transaccion y la excepcion que sale del procedimiento la aborta completa; el motor conserva las versiones anteriores de las filas y descarta las nuevas.</a:t>
             </a:r>
           </a:p>
           <a:p>
@@ -17182,7 +16863,39 @@
                 </a:solidFill>
                 <a:latin typeface="Calibri"/>
               </a:rPr>
-              <a:t>–   Por lo mismo, la vieja advertencia de que en Oracle y en MySQL cualquier DDL provoca un COMMIT implicito —y que por eso no hay que mezclar CREATE TABLE con la demostracion— no aplica aqui: en PostgreSQL el DDL es transaccional.</a:t>
+              <a:t>–   Quinta: entonces nunca se escribe COMMIT en un procedimiento de PostgreSQL.</a:t>
+            </a:r>
+          </a:p>
+          <a:p>
+            <a:pPr>
+              <a:spcAft>
+                <a:spcPts val="800"/>
+              </a:spcAft>
+            </a:pPr>
+            <a:r>
+              <a:rPr sz="2000" b="0" i="0">
+                <a:solidFill>
+                  <a:srgbClr val="333333"/>
+                </a:solidFill>
+                <a:latin typeface="Calibri"/>
+              </a:rPr>
+              <a:t>–   Se puede, en procedimientos disenados para ejecutar por lotes y solo si el contexto de la llamada lo permite, pero no en un procedimiento de negocio como este, donde quitarle al llamador la posibilidad de deshacer es un defecto.</a:t>
+            </a:r>
+          </a:p>
+          <a:p>
+            <a:pPr>
+              <a:spcAft>
+                <a:spcPts val="800"/>
+              </a:spcAft>
+            </a:pPr>
+            <a:r>
+              <a:rPr sz="2000" b="0" i="0">
+                <a:solidFill>
+                  <a:srgbClr val="333333"/>
+                </a:solidFill>
+                <a:latin typeface="Calibri"/>
+              </a:rPr>
+              <a:t>–   Sexta: por que la funcion devuelve falso en vez de lanzar una excepcion, si tambien es un fallo.</a:t>
             </a:r>
           </a:p>
         </p:txBody>
@@ -17363,7 +17076,7 @@
                 </a:solidFill>
                 <a:latin typeface="Calibri"/>
               </a:rPr>
-              <a:t>Preguntas frecuentes del grupo (1/3)</a:t>
+              <a:t>Preguntas frecuentes del grupo (3/3)</a:t>
             </a:r>
           </a:p>
         </p:txBody>
@@ -17402,7 +17115,7 @@
                 </a:solidFill>
                 <a:latin typeface="Calibri"/>
               </a:rPr>
-              <a:t>–   Primera: si el motor confirma solo, para que sirve COMMIT.</a:t>
+              <a:t>–   Porque no es un fallo: es un resultado.</a:t>
             </a:r>
           </a:p>
           <a:p>
@@ -17418,7 +17131,7 @@
                 </a:solidFill>
                 <a:latin typeface="Calibri"/>
               </a:rPr>
-              <a:t>–   Para agrupar varias sentencias en un unico hecho de negocio, que es justamente lo que el modo de confirmacion automatica impide; y hoy no hace falta escribirlo porque el CALL ya agrupa todo el procedimiento en una transaccion.</a:t>
+              <a:t>–   La funcion esta pensada para que el llamador decida si sigue con las demas lineas o cancela, y esa decision no se puede tomar si la excepcion ya aborto todo.</a:t>
             </a:r>
           </a:p>
           <a:p>
@@ -17434,7 +17147,7 @@
                 </a:solidFill>
                 <a:latin typeface="Calibri"/>
               </a:rPr>
-              <a:t>–   Segunda: que pasa si me desconecto sin confirmar.</a:t>
+              <a:t>–   Septima: puedo probar dos recepcionistas al mismo tiempo abriendo dos pestanas.</a:t>
             </a:r>
           </a:p>
           <a:p>
@@ -17450,39 +17163,7 @@
                 </a:solidFill>
                 <a:latin typeface="Calibri"/>
               </a:rPr>
-              <a:t>–   El motor deshace la transaccion cuando la sesion muere de forma anormal, aunque algunos clientes confirman al salir de manera ordenada, asi que jamas se debe depender de eso.</a:t>
-            </a:r>
-          </a:p>
-          <a:p>
-            <a:pPr>
-              <a:spcAft>
-                <a:spcPts val="800"/>
-              </a:spcAft>
-            </a:pPr>
-            <a:r>
-              <a:rPr sz="2000" b="0" i="0">
-                <a:solidFill>
-                  <a:srgbClr val="333333"/>
-                </a:solidFill>
-                <a:latin typeface="Calibri"/>
-              </a:rPr>
-              <a:t>–   Tercera: se puede hacer ROLLBACK despues de un COMMIT.</a:t>
-            </a:r>
-          </a:p>
-          <a:p>
-            <a:pPr>
-              <a:spcAft>
-                <a:spcPts val="800"/>
-              </a:spcAft>
-            </a:pPr>
-            <a:r>
-              <a:rPr sz="2000" b="0" i="0">
-                <a:solidFill>
-                  <a:srgbClr val="333333"/>
-                </a:solidFill>
-                <a:latin typeface="Calibri"/>
-              </a:rPr>
-              <a:t>–   No, confirmar es definitivo, y lo unico que queda es restaurar desde el respaldo de la Clase 4 con recuperacion a un punto en el tiempo, operacion de administrador y no correccion de rutina.</a:t>
+              <a:t>–   No, cada pestana levanta su propia base en memoria y no comparten nada; ese escenario se documenta en papel y se estudia en la Clase 10.</a:t>
             </a:r>
           </a:p>
         </p:txBody>
@@ -17663,21 +17344,141 @@
                 </a:solidFill>
                 <a:latin typeface="Calibri"/>
               </a:rPr>
-              <a:t>Preguntas frecuentes del grupo (2/3)</a:t>
-            </a:r>
-          </a:p>
-        </p:txBody>
-      </p:sp>
-      <p:sp>
-        <p:nvSpPr>
-          <p:cNvPr id="5" name="TextBox 4"/>
+              <a:t>Todo o nada: la transaccion explicita</a:t>
+            </a:r>
+          </a:p>
+        </p:txBody>
+      </p:sp>
+      <p:sp>
+        <p:nvSpPr>
+          <p:cNvPr id="5" name="Rounded Rectangle 4"/>
+          <p:cNvSpPr/>
+          <p:nvPr/>
+        </p:nvSpPr>
+        <p:spPr>
+          <a:xfrm>
+            <a:off x="457200" y="1261872"/>
+            <a:ext cx="11277295" cy="4773168"/>
+          </a:xfrm>
+          <a:prstGeom prst="roundRect">
+            <a:avLst>
+              <a:gd name="adj" fmla="val 12000"/>
+            </a:avLst>
+          </a:prstGeom>
+          <a:solidFill>
+            <a:srgbClr val="1E2A38"/>
+          </a:solidFill>
+          <a:ln>
+            <a:noFill/>
+          </a:ln>
+        </p:spPr>
+        <p:style>
+          <a:lnRef idx="1">
+            <a:schemeClr val="accent1"/>
+          </a:lnRef>
+          <a:fillRef idx="3">
+            <a:schemeClr val="accent1"/>
+          </a:fillRef>
+          <a:effectRef idx="2">
+            <a:schemeClr val="accent1"/>
+          </a:effectRef>
+          <a:fontRef idx="minor">
+            <a:schemeClr val="lt1"/>
+          </a:fontRef>
+        </p:style>
+        <p:txBody>
+          <a:bodyPr rtlCol="0" anchor="ctr"/>
+          <a:lstStyle/>
+          <a:p>
+            <a:pPr algn="ctr"/>
+          </a:p>
+        </p:txBody>
+      </p:sp>
+      <p:sp>
+        <p:nvSpPr>
+          <p:cNvPr id="6" name="Rectangle 5"/>
+          <p:cNvSpPr/>
+          <p:nvPr/>
+        </p:nvSpPr>
+        <p:spPr>
+          <a:xfrm>
+            <a:off x="457200" y="1261872"/>
+            <a:ext cx="11277295" cy="320040"/>
+          </a:xfrm>
+          <a:prstGeom prst="rect">
+            <a:avLst/>
+          </a:prstGeom>
+          <a:solidFill>
+            <a:srgbClr val="095292"/>
+          </a:solidFill>
+          <a:ln>
+            <a:noFill/>
+          </a:ln>
+        </p:spPr>
+        <p:style>
+          <a:lnRef idx="1">
+            <a:schemeClr val="accent1"/>
+          </a:lnRef>
+          <a:fillRef idx="3">
+            <a:schemeClr val="accent1"/>
+          </a:fillRef>
+          <a:effectRef idx="2">
+            <a:schemeClr val="accent1"/>
+          </a:effectRef>
+          <a:fontRef idx="minor">
+            <a:schemeClr val="lt1"/>
+          </a:fontRef>
+        </p:style>
+        <p:txBody>
+          <a:bodyPr rtlCol="0" anchor="ctr"/>
+          <a:lstStyle/>
+          <a:p>
+            <a:pPr algn="ctr"/>
+          </a:p>
+        </p:txBody>
+      </p:sp>
+      <p:sp>
+        <p:nvSpPr>
+          <p:cNvPr id="7" name="TextBox 6"/>
           <p:cNvSpPr txBox="1"/>
           <p:nvPr/>
         </p:nvSpPr>
         <p:spPr>
           <a:xfrm>
-            <a:off x="457200" y="1170432"/>
-            <a:ext cx="11277295" cy="5230368"/>
+            <a:off x="685800" y="1307592"/>
+            <a:ext cx="10820095" cy="256032"/>
+          </a:xfrm>
+          <a:prstGeom prst="rect">
+            <a:avLst/>
+          </a:prstGeom>
+          <a:noFill/>
+        </p:spPr>
+        <p:txBody>
+          <a:bodyPr wrap="square" anchor="ctr"/>
+          <a:lstStyle/>
+          <a:p>
+            <a:r>
+              <a:rPr sz="1000" b="1" i="0">
+                <a:solidFill>
+                  <a:srgbClr val="269CCB"/>
+                </a:solidFill>
+                <a:latin typeface="Calibri"/>
+              </a:rPr>
+              <a:t>● ● ●</a:t>
+            </a:r>
+          </a:p>
+        </p:txBody>
+      </p:sp>
+      <p:sp>
+        <p:nvSpPr>
+          <p:cNvPr id="8" name="TextBox 7"/>
+          <p:cNvSpPr txBox="1"/>
+          <p:nvPr/>
+        </p:nvSpPr>
+        <p:spPr>
+          <a:xfrm>
+            <a:off x="777240" y="1719072"/>
+            <a:ext cx="10637215" cy="4133087"/>
           </a:xfrm>
           <a:prstGeom prst="rect">
             <a:avLst/>
@@ -17692,72 +17493,219 @@
           <a:p>
             <a:pPr>
               <a:spcAft>
-                <a:spcPts val="800"/>
-              </a:spcAft>
-            </a:pPr>
-            <a:r>
-              <a:rPr sz="2000" b="0" i="0">
-                <a:solidFill>
-                  <a:srgbClr val="333333"/>
-                </a:solidFill>
-                <a:latin typeface="Calibri"/>
-              </a:rPr>
-              <a:t>–   Cuarta, y la que sale siempre en esta clase: si no escribo ROLLBACK, como se deshizo.</a:t>
-            </a:r>
-          </a:p>
-          <a:p>
-            <a:pPr>
-              <a:spcAft>
-                <a:spcPts val="800"/>
-              </a:spcAft>
-            </a:pPr>
-            <a:r>
-              <a:rPr sz="2000" b="0" i="0">
-                <a:solidFill>
-                  <a:srgbClr val="333333"/>
-                </a:solidFill>
-                <a:latin typeface="Calibri"/>
-              </a:rPr>
-              <a:t>–   Porque el CALL de nivel superior es su propia transaccion y la excepcion que sale del procedimiento la aborta completa; el motor conserva las versiones anteriores de las filas y descarta las nuevas.</a:t>
-            </a:r>
-          </a:p>
-          <a:p>
-            <a:pPr>
-              <a:spcAft>
-                <a:spcPts val="800"/>
-              </a:spcAft>
-            </a:pPr>
-            <a:r>
-              <a:rPr sz="2000" b="0" i="0">
-                <a:solidFill>
-                  <a:srgbClr val="333333"/>
-                </a:solidFill>
-                <a:latin typeface="Calibri"/>
-              </a:rPr>
-              <a:t>–   Quinta: entonces nunca se escribe COMMIT en un procedimiento de PostgreSQL.</a:t>
-            </a:r>
-          </a:p>
-          <a:p>
-            <a:pPr>
-              <a:spcAft>
-                <a:spcPts val="800"/>
-              </a:spcAft>
-            </a:pPr>
-            <a:r>
-              <a:rPr sz="2000" b="0" i="0">
-                <a:solidFill>
-                  <a:srgbClr val="333333"/>
-                </a:solidFill>
-                <a:latin typeface="Calibri"/>
-              </a:rPr>
-              <a:t>–   Se puede, en procedimientos disenados para ejecutar por lotes y solo si el contexto de la llamada lo permite, pero no en un procedimiento de negocio como este, donde quitarle al llamador la posibilidad de deshacer es un defecto.</a:t>
-            </a:r>
-          </a:p>
-        </p:txBody>
-      </p:sp>
-      <p:sp>
-        <p:nvSpPr>
-          <p:cNvPr id="6" name="TextBox 5"/>
+                <a:spcPts val="400"/>
+              </a:spcAft>
+            </a:pPr>
+            <a:r>
+              <a:rPr sz="1400" b="0" i="0">
+                <a:solidFill>
+                  <a:srgbClr val="FFFFFF"/>
+                </a:solidFill>
+                <a:latin typeface="Calibri"/>
+              </a:rPr>
+              <a:t>BEGIN;</a:t>
+            </a:r>
+          </a:p>
+          <a:p>
+            <a:pPr>
+              <a:spcAft>
+                <a:spcPts val="400"/>
+              </a:spcAft>
+            </a:pPr>
+            <a:r>
+              <a:rPr sz="1400" b="0" i="0">
+                <a:solidFill>
+                  <a:srgbClr val="FFFFFF"/>
+                </a:solidFill>
+                <a:latin typeface="Calibri"/>
+              </a:rPr>
+              <a:t/>
+            </a:r>
+          </a:p>
+          <a:p>
+            <a:pPr>
+              <a:spcAft>
+                <a:spcPts val="400"/>
+              </a:spcAft>
+            </a:pPr>
+            <a:r>
+              <a:rPr sz="1400" b="0" i="0">
+                <a:solidFill>
+                  <a:srgbClr val="FFFFFF"/>
+                </a:solidFill>
+                <a:latin typeface="Calibri"/>
+              </a:rPr>
+              <a:t>INSERT INTO factura (id_dueno, fecha, total)</a:t>
+            </a:r>
+          </a:p>
+          <a:p>
+            <a:pPr>
+              <a:spcAft>
+                <a:spcPts val="400"/>
+              </a:spcAft>
+            </a:pPr>
+            <a:r>
+              <a:rPr sz="1400" b="0" i="0">
+                <a:solidFill>
+                  <a:srgbClr val="FFFFFF"/>
+                </a:solidFill>
+                <a:latin typeface="Calibri"/>
+              </a:rPr>
+              <a:t>VALUES (1, NOW(), 0) RETURNING id_factura;   -- devuelve el id generado</a:t>
+            </a:r>
+          </a:p>
+          <a:p>
+            <a:pPr>
+              <a:spcAft>
+                <a:spcPts val="400"/>
+              </a:spcAft>
+            </a:pPr>
+            <a:r>
+              <a:rPr sz="1400" b="0" i="0">
+                <a:solidFill>
+                  <a:srgbClr val="FFFFFF"/>
+                </a:solidFill>
+                <a:latin typeface="Calibri"/>
+              </a:rPr>
+              <a:t/>
+            </a:r>
+          </a:p>
+          <a:p>
+            <a:pPr>
+              <a:spcAft>
+                <a:spcPts val="400"/>
+              </a:spcAft>
+            </a:pPr>
+            <a:r>
+              <a:rPr sz="1400" b="0" i="0">
+                <a:solidFill>
+                  <a:srgbClr val="FFFFFF"/>
+                </a:solidFill>
+                <a:latin typeface="Calibri"/>
+              </a:rPr>
+              <a:t>INSERT INTO detalle_factura (id_factura, id_insumo, cantidad, precio_unitario)</a:t>
+            </a:r>
+          </a:p>
+          <a:p>
+            <a:pPr>
+              <a:spcAft>
+                <a:spcPts val="400"/>
+              </a:spcAft>
+            </a:pPr>
+            <a:r>
+              <a:rPr sz="1400" b="0" i="0">
+                <a:solidFill>
+                  <a:srgbClr val="FFFFFF"/>
+                </a:solidFill>
+                <a:latin typeface="Calibri"/>
+              </a:rPr>
+              <a:t>VALUES (100, 5, 2, 15000.00);</a:t>
+            </a:r>
+          </a:p>
+          <a:p>
+            <a:pPr>
+              <a:spcAft>
+                <a:spcPts val="400"/>
+              </a:spcAft>
+            </a:pPr>
+            <a:r>
+              <a:rPr sz="1400" b="0" i="0">
+                <a:solidFill>
+                  <a:srgbClr val="FFFFFF"/>
+                </a:solidFill>
+                <a:latin typeface="Calibri"/>
+              </a:rPr>
+              <a:t/>
+            </a:r>
+          </a:p>
+          <a:p>
+            <a:pPr>
+              <a:spcAft>
+                <a:spcPts val="400"/>
+              </a:spcAft>
+            </a:pPr>
+            <a:r>
+              <a:rPr sz="1400" b="0" i="0">
+                <a:solidFill>
+                  <a:srgbClr val="FFFFFF"/>
+                </a:solidFill>
+                <a:latin typeface="Calibri"/>
+              </a:rPr>
+              <a:t>UPDATE insumo SET stock = stock - 2 WHERE id_insumo = 5;</a:t>
+            </a:r>
+          </a:p>
+          <a:p>
+            <a:pPr>
+              <a:spcAft>
+                <a:spcPts val="400"/>
+              </a:spcAft>
+            </a:pPr>
+            <a:r>
+              <a:rPr sz="1400" b="0" i="0">
+                <a:solidFill>
+                  <a:srgbClr val="FFFFFF"/>
+                </a:solidFill>
+                <a:latin typeface="Calibri"/>
+              </a:rPr>
+              <a:t/>
+            </a:r>
+          </a:p>
+          <a:p>
+            <a:pPr>
+              <a:spcAft>
+                <a:spcPts val="400"/>
+              </a:spcAft>
+            </a:pPr>
+            <a:r>
+              <a:rPr sz="1400" b="0" i="0">
+                <a:solidFill>
+                  <a:srgbClr val="FFFFFF"/>
+                </a:solidFill>
+                <a:latin typeface="Calibri"/>
+              </a:rPr>
+              <a:t>COMMIT;      -- o ROLLBACK; y no queda rastro de ninguna de las tres</a:t>
+            </a:r>
+          </a:p>
+        </p:txBody>
+      </p:sp>
+      <p:sp>
+        <p:nvSpPr>
+          <p:cNvPr id="9" name="TextBox 8"/>
+          <p:cNvSpPr txBox="1"/>
+          <p:nvPr/>
+        </p:nvSpPr>
+        <p:spPr>
+          <a:xfrm>
+            <a:off x="457200" y="6080760"/>
+            <a:ext cx="11277295" cy="320040"/>
+          </a:xfrm>
+          <a:prstGeom prst="rect">
+            <a:avLst/>
+          </a:prstGeom>
+          <a:noFill/>
+        </p:spPr>
+        <p:txBody>
+          <a:bodyPr wrap="square">
+            <a:spAutoFit/>
+          </a:bodyPr>
+          <a:lstStyle/>
+          <a:p>
+            <a:pPr algn="ctr"/>
+            <a:r>
+              <a:rPr sz="1200" b="0" i="1">
+                <a:solidFill>
+                  <a:srgbClr val="666666"/>
+                </a:solidFill>
+                <a:latin typeface="Calibri"/>
+              </a:rPr>
+              <a:t>BEGIN abre la transaccion; hasta el COMMIT nadie mas ve los cambios, y un ROLLBACK o un error los deshace todos. Asi la factura y sus lineas existen juntas o no existen.</a:t>
+            </a:r>
+          </a:p>
+        </p:txBody>
+      </p:sp>
+      <p:sp>
+        <p:nvSpPr>
+          <p:cNvPr id="10" name="TextBox 9"/>
           <p:cNvSpPr txBox="1"/>
           <p:nvPr/>
         </p:nvSpPr>
@@ -17931,21 +17879,141 @@
                 </a:solidFill>
                 <a:latin typeface="Calibri"/>
               </a:rPr>
-              <a:t>Preguntas frecuentes del grupo (3/3)</a:t>
-            </a:r>
-          </a:p>
-        </p:txBody>
-      </p:sp>
-      <p:sp>
-        <p:nvSpPr>
-          <p:cNvPr id="5" name="TextBox 4"/>
+              <a:t>SAVEPOINT: deshacer una parte sin perder el resto</a:t>
+            </a:r>
+          </a:p>
+        </p:txBody>
+      </p:sp>
+      <p:sp>
+        <p:nvSpPr>
+          <p:cNvPr id="5" name="Rounded Rectangle 4"/>
+          <p:cNvSpPr/>
+          <p:nvPr/>
+        </p:nvSpPr>
+        <p:spPr>
+          <a:xfrm>
+            <a:off x="457200" y="1261872"/>
+            <a:ext cx="11277295" cy="5093208"/>
+          </a:xfrm>
+          <a:prstGeom prst="roundRect">
+            <a:avLst>
+              <a:gd name="adj" fmla="val 12000"/>
+            </a:avLst>
+          </a:prstGeom>
+          <a:solidFill>
+            <a:srgbClr val="1E2A38"/>
+          </a:solidFill>
+          <a:ln>
+            <a:noFill/>
+          </a:ln>
+        </p:spPr>
+        <p:style>
+          <a:lnRef idx="1">
+            <a:schemeClr val="accent1"/>
+          </a:lnRef>
+          <a:fillRef idx="3">
+            <a:schemeClr val="accent1"/>
+          </a:fillRef>
+          <a:effectRef idx="2">
+            <a:schemeClr val="accent1"/>
+          </a:effectRef>
+          <a:fontRef idx="minor">
+            <a:schemeClr val="lt1"/>
+          </a:fontRef>
+        </p:style>
+        <p:txBody>
+          <a:bodyPr rtlCol="0" anchor="ctr"/>
+          <a:lstStyle/>
+          <a:p>
+            <a:pPr algn="ctr"/>
+          </a:p>
+        </p:txBody>
+      </p:sp>
+      <p:sp>
+        <p:nvSpPr>
+          <p:cNvPr id="6" name="Rectangle 5"/>
+          <p:cNvSpPr/>
+          <p:nvPr/>
+        </p:nvSpPr>
+        <p:spPr>
+          <a:xfrm>
+            <a:off x="457200" y="1261872"/>
+            <a:ext cx="11277295" cy="320040"/>
+          </a:xfrm>
+          <a:prstGeom prst="rect">
+            <a:avLst/>
+          </a:prstGeom>
+          <a:solidFill>
+            <a:srgbClr val="095292"/>
+          </a:solidFill>
+          <a:ln>
+            <a:noFill/>
+          </a:ln>
+        </p:spPr>
+        <p:style>
+          <a:lnRef idx="1">
+            <a:schemeClr val="accent1"/>
+          </a:lnRef>
+          <a:fillRef idx="3">
+            <a:schemeClr val="accent1"/>
+          </a:fillRef>
+          <a:effectRef idx="2">
+            <a:schemeClr val="accent1"/>
+          </a:effectRef>
+          <a:fontRef idx="minor">
+            <a:schemeClr val="lt1"/>
+          </a:fontRef>
+        </p:style>
+        <p:txBody>
+          <a:bodyPr rtlCol="0" anchor="ctr"/>
+          <a:lstStyle/>
+          <a:p>
+            <a:pPr algn="ctr"/>
+          </a:p>
+        </p:txBody>
+      </p:sp>
+      <p:sp>
+        <p:nvSpPr>
+          <p:cNvPr id="7" name="TextBox 6"/>
           <p:cNvSpPr txBox="1"/>
           <p:nvPr/>
         </p:nvSpPr>
         <p:spPr>
           <a:xfrm>
-            <a:off x="457200" y="1170432"/>
-            <a:ext cx="11277295" cy="5230368"/>
+            <a:off x="685800" y="1307592"/>
+            <a:ext cx="10820095" cy="256032"/>
+          </a:xfrm>
+          <a:prstGeom prst="rect">
+            <a:avLst/>
+          </a:prstGeom>
+          <a:noFill/>
+        </p:spPr>
+        <p:txBody>
+          <a:bodyPr wrap="square" anchor="ctr"/>
+          <a:lstStyle/>
+          <a:p>
+            <a:r>
+              <a:rPr sz="1000" b="1" i="0">
+                <a:solidFill>
+                  <a:srgbClr val="269CCB"/>
+                </a:solidFill>
+                <a:latin typeface="Calibri"/>
+              </a:rPr>
+              <a:t>● ● ●</a:t>
+            </a:r>
+          </a:p>
+        </p:txBody>
+      </p:sp>
+      <p:sp>
+        <p:nvSpPr>
+          <p:cNvPr id="8" name="TextBox 7"/>
+          <p:cNvSpPr txBox="1"/>
+          <p:nvPr/>
+        </p:nvSpPr>
+        <p:spPr>
+          <a:xfrm>
+            <a:off x="777240" y="1719072"/>
+            <a:ext cx="10637215" cy="4453128"/>
           </a:xfrm>
           <a:prstGeom prst="rect">
             <a:avLst/>
@@ -17960,88 +18028,200 @@
           <a:p>
             <a:pPr>
               <a:spcAft>
-                <a:spcPts val="800"/>
-              </a:spcAft>
-            </a:pPr>
-            <a:r>
-              <a:rPr sz="2000" b="0" i="0">
-                <a:solidFill>
-                  <a:srgbClr val="333333"/>
-                </a:solidFill>
-                <a:latin typeface="Calibri"/>
-              </a:rPr>
-              <a:t>–   Sexta: por que la funcion devuelve falso en vez de lanzar una excepcion, si tambien es un fallo.</a:t>
-            </a:r>
-          </a:p>
-          <a:p>
-            <a:pPr>
-              <a:spcAft>
-                <a:spcPts val="800"/>
-              </a:spcAft>
-            </a:pPr>
-            <a:r>
-              <a:rPr sz="2000" b="0" i="0">
-                <a:solidFill>
-                  <a:srgbClr val="333333"/>
-                </a:solidFill>
-                <a:latin typeface="Calibri"/>
-              </a:rPr>
-              <a:t>–   Porque no es un fallo: es un resultado.</a:t>
-            </a:r>
-          </a:p>
-          <a:p>
-            <a:pPr>
-              <a:spcAft>
-                <a:spcPts val="800"/>
-              </a:spcAft>
-            </a:pPr>
-            <a:r>
-              <a:rPr sz="2000" b="0" i="0">
-                <a:solidFill>
-                  <a:srgbClr val="333333"/>
-                </a:solidFill>
-                <a:latin typeface="Calibri"/>
-              </a:rPr>
-              <a:t>–   La funcion esta pensada para que el llamador decida si sigue con las demas lineas o cancela, y esa decision no se puede tomar si la excepcion ya aborto todo.</a:t>
-            </a:r>
-          </a:p>
-          <a:p>
-            <a:pPr>
-              <a:spcAft>
-                <a:spcPts val="800"/>
-              </a:spcAft>
-            </a:pPr>
-            <a:r>
-              <a:rPr sz="2000" b="0" i="0">
-                <a:solidFill>
-                  <a:srgbClr val="333333"/>
-                </a:solidFill>
-                <a:latin typeface="Calibri"/>
-              </a:rPr>
-              <a:t>–   Septima: puedo probar dos recepcionistas al mismo tiempo abriendo dos pestanas.</a:t>
-            </a:r>
-          </a:p>
-          <a:p>
-            <a:pPr>
-              <a:spcAft>
-                <a:spcPts val="800"/>
-              </a:spcAft>
-            </a:pPr>
-            <a:r>
-              <a:rPr sz="2000" b="0" i="0">
-                <a:solidFill>
-                  <a:srgbClr val="333333"/>
-                </a:solidFill>
-                <a:latin typeface="Calibri"/>
-              </a:rPr>
-              <a:t>–   No, cada pestana levanta su propia base en memoria y no comparten nada; ese escenario se documenta en papel y se estudia en la Clase 10.</a:t>
-            </a:r>
-          </a:p>
-        </p:txBody>
-      </p:sp>
-      <p:sp>
-        <p:nvSpPr>
-          <p:cNvPr id="6" name="TextBox 5"/>
+                <a:spcPts val="400"/>
+              </a:spcAft>
+            </a:pPr>
+            <a:r>
+              <a:rPr sz="1400" b="0" i="0">
+                <a:solidFill>
+                  <a:srgbClr val="FFFFFF"/>
+                </a:solidFill>
+                <a:latin typeface="Calibri"/>
+              </a:rPr>
+              <a:t>BEGIN;</a:t>
+            </a:r>
+          </a:p>
+          <a:p>
+            <a:pPr>
+              <a:spcAft>
+                <a:spcPts val="400"/>
+              </a:spcAft>
+            </a:pPr>
+            <a:r>
+              <a:rPr sz="1400" b="0" i="0">
+                <a:solidFill>
+                  <a:srgbClr val="FFFFFF"/>
+                </a:solidFill>
+                <a:latin typeface="Calibri"/>
+              </a:rPr>
+              <a:t>INSERT INTO factura (id_dueno, fecha, total) VALUES (1, NOW(), 0);</a:t>
+            </a:r>
+          </a:p>
+          <a:p>
+            <a:pPr>
+              <a:spcAft>
+                <a:spcPts val="400"/>
+              </a:spcAft>
+            </a:pPr>
+            <a:r>
+              <a:rPr sz="1400" b="0" i="0">
+                <a:solidFill>
+                  <a:srgbClr val="FFFFFF"/>
+                </a:solidFill>
+                <a:latin typeface="Calibri"/>
+              </a:rPr>
+              <a:t/>
+            </a:r>
+          </a:p>
+          <a:p>
+            <a:pPr>
+              <a:spcAft>
+                <a:spcPts val="400"/>
+              </a:spcAft>
+            </a:pPr>
+            <a:r>
+              <a:rPr sz="1400" b="0" i="0">
+                <a:solidFill>
+                  <a:srgbClr val="FFFFFF"/>
+                </a:solidFill>
+                <a:latin typeface="Calibri"/>
+              </a:rPr>
+              <a:t>SAVEPOINT antes_del_detalle;</a:t>
+            </a:r>
+          </a:p>
+          <a:p>
+            <a:pPr>
+              <a:spcAft>
+                <a:spcPts val="400"/>
+              </a:spcAft>
+            </a:pPr>
+            <a:r>
+              <a:rPr sz="1400" b="0" i="0">
+                <a:solidFill>
+                  <a:srgbClr val="FFFFFF"/>
+                </a:solidFill>
+                <a:latin typeface="Calibri"/>
+              </a:rPr>
+              <a:t>INSERT INTO detalle_factura (id_factura, id_insumo, cantidad, precio_unitario)</a:t>
+            </a:r>
+          </a:p>
+          <a:p>
+            <a:pPr>
+              <a:spcAft>
+                <a:spcPts val="400"/>
+              </a:spcAft>
+            </a:pPr>
+            <a:r>
+              <a:rPr sz="1400" b="0" i="0">
+                <a:solidFill>
+                  <a:srgbClr val="FFFFFF"/>
+                </a:solidFill>
+                <a:latin typeface="Calibri"/>
+              </a:rPr>
+              <a:t>VALUES (100, 9999, 1, 1000.00);      -- insumo inexistente: falla</a:t>
+            </a:r>
+          </a:p>
+          <a:p>
+            <a:pPr>
+              <a:spcAft>
+                <a:spcPts val="400"/>
+              </a:spcAft>
+            </a:pPr>
+            <a:r>
+              <a:rPr sz="1400" b="0" i="0">
+                <a:solidFill>
+                  <a:srgbClr val="FFFFFF"/>
+                </a:solidFill>
+                <a:latin typeface="Calibri"/>
+              </a:rPr>
+              <a:t/>
+            </a:r>
+          </a:p>
+          <a:p>
+            <a:pPr>
+              <a:spcAft>
+                <a:spcPts val="400"/>
+              </a:spcAft>
+            </a:pPr>
+            <a:r>
+              <a:rPr sz="1400" b="0" i="0">
+                <a:solidFill>
+                  <a:srgbClr val="FFFFFF"/>
+                </a:solidFill>
+                <a:latin typeface="Calibri"/>
+              </a:rPr>
+              <a:t>ROLLBACK TO SAVEPOINT antes_del_detalle;   -- la factura sigue viva</a:t>
+            </a:r>
+          </a:p>
+          <a:p>
+            <a:pPr>
+              <a:spcAft>
+                <a:spcPts val="400"/>
+              </a:spcAft>
+            </a:pPr>
+            <a:r>
+              <a:rPr sz="1400" b="0" i="0">
+                <a:solidFill>
+                  <a:srgbClr val="FFFFFF"/>
+                </a:solidFill>
+                <a:latin typeface="Calibri"/>
+              </a:rPr>
+              <a:t/>
+            </a:r>
+          </a:p>
+          <a:p>
+            <a:pPr>
+              <a:spcAft>
+                <a:spcPts val="400"/>
+              </a:spcAft>
+            </a:pPr>
+            <a:r>
+              <a:rPr sz="1400" b="0" i="0">
+                <a:solidFill>
+                  <a:srgbClr val="FFFFFF"/>
+                </a:solidFill>
+                <a:latin typeface="Calibri"/>
+              </a:rPr>
+              <a:t>INSERT INTO detalle_factura (id_factura, id_insumo, cantidad, precio_unitario)</a:t>
+            </a:r>
+          </a:p>
+          <a:p>
+            <a:pPr>
+              <a:spcAft>
+                <a:spcPts val="400"/>
+              </a:spcAft>
+            </a:pPr>
+            <a:r>
+              <a:rPr sz="1400" b="0" i="0">
+                <a:solidFill>
+                  <a:srgbClr val="FFFFFF"/>
+                </a:solidFill>
+                <a:latin typeface="Calibri"/>
+              </a:rPr>
+              <a:t>VALUES (100, 5, 1, 1000.00);</a:t>
+            </a:r>
+          </a:p>
+          <a:p>
+            <a:pPr>
+              <a:spcAft>
+                <a:spcPts val="400"/>
+              </a:spcAft>
+            </a:pPr>
+            <a:r>
+              <a:rPr sz="1400" b="0" i="0">
+                <a:solidFill>
+                  <a:srgbClr val="FFFFFF"/>
+                </a:solidFill>
+                <a:latin typeface="Calibri"/>
+              </a:rPr>
+              <a:t>COMMIT;</a:t>
+            </a:r>
+          </a:p>
+        </p:txBody>
+      </p:sp>
+      <p:sp>
+        <p:nvSpPr>
+          <p:cNvPr id="9" name="TextBox 8"/>
           <p:cNvSpPr txBox="1"/>
           <p:nvPr/>
         </p:nvSpPr>
@@ -18215,7 +18395,7 @@
                 </a:solidFill>
                 <a:latin typeface="Calibri"/>
               </a:rPr>
-              <a:t>Todo o nada: la transaccion explicita</a:t>
+              <a:t>El bloque EXCEPTION</a:t>
             </a:r>
           </a:p>
         </p:txBody>
@@ -18374,7 +18554,7 @@
                 </a:solidFill>
                 <a:latin typeface="Calibri"/>
               </a:rPr>
-              <a:t>BEGIN;</a:t>
+              <a:t>BEGIN</a:t>
             </a:r>
           </a:p>
           <a:p>
@@ -18390,6 +18570,86 @@
                 </a:solidFill>
                 <a:latin typeface="Calibri"/>
               </a:rPr>
+              <a:t>  UPDATE insumo SET stock = stock - p_cantidad WHERE id_insumo = p_id;</a:t>
+            </a:r>
+          </a:p>
+          <a:p>
+            <a:pPr>
+              <a:spcAft>
+                <a:spcPts val="400"/>
+              </a:spcAft>
+            </a:pPr>
+            <a:r>
+              <a:rPr sz="1400" b="0" i="0">
+                <a:solidFill>
+                  <a:srgbClr val="FFFFFF"/>
+                </a:solidFill>
+                <a:latin typeface="Calibri"/>
+              </a:rPr>
+              <a:t>  INSERT INTO detalle_factura (...) VALUES (...);</a:t>
+            </a:r>
+          </a:p>
+          <a:p>
+            <a:pPr>
+              <a:spcAft>
+                <a:spcPts val="400"/>
+              </a:spcAft>
+            </a:pPr>
+            <a:r>
+              <a:rPr sz="1400" b="0" i="0">
+                <a:solidFill>
+                  <a:srgbClr val="FFFFFF"/>
+                </a:solidFill>
+                <a:latin typeface="Calibri"/>
+              </a:rPr>
+              <a:t>EXCEPTION WHEN OTHERS THEN</a:t>
+            </a:r>
+          </a:p>
+          <a:p>
+            <a:pPr>
+              <a:spcAft>
+                <a:spcPts val="400"/>
+              </a:spcAft>
+            </a:pPr>
+            <a:r>
+              <a:rPr sz="1400" b="0" i="0">
+                <a:solidFill>
+                  <a:srgbClr val="FFFFFF"/>
+                </a:solidFill>
+                <a:latin typeface="Calibri"/>
+              </a:rPr>
+              <a:t>  RAISE NOTICE 'algo fallo: %', SQLERRM;   -- &lt;-- LA TRAMPA</a:t>
+            </a:r>
+          </a:p>
+          <a:p>
+            <a:pPr>
+              <a:spcAft>
+                <a:spcPts val="400"/>
+              </a:spcAft>
+            </a:pPr>
+            <a:r>
+              <a:rPr sz="1400" b="0" i="0">
+                <a:solidFill>
+                  <a:srgbClr val="FFFFFF"/>
+                </a:solidFill>
+                <a:latin typeface="Calibri"/>
+              </a:rPr>
+              <a:t>END;</a:t>
+            </a:r>
+          </a:p>
+          <a:p>
+            <a:pPr>
+              <a:spcAft>
+                <a:spcPts val="400"/>
+              </a:spcAft>
+            </a:pPr>
+            <a:r>
+              <a:rPr sz="1400" b="0" i="0">
+                <a:solidFill>
+                  <a:srgbClr val="FFFFFF"/>
+                </a:solidFill>
+                <a:latin typeface="Calibri"/>
+              </a:rPr>
               <a:t/>
             </a:r>
           </a:p>
@@ -18406,7 +18666,7 @@
                 </a:solidFill>
                 <a:latin typeface="Calibri"/>
               </a:rPr>
-              <a:t>INSERT INTO factura (id_dueno, fecha, total)</a:t>
+              <a:t>-- Capturar la excepcion y solo avisar CONFIRMA lo demas: el UPDATE del stock</a:t>
             </a:r>
           </a:p>
           <a:p>
@@ -18422,7 +18682,7 @@
                 </a:solidFill>
                 <a:latin typeface="Calibri"/>
               </a:rPr>
-              <a:t>VALUES (1, NOW(), 0) RETURNING id_factura;   -- devuelve el id generado</a:t>
+              <a:t>-- queda aplicado y el detalle no. La factura miente.</a:t>
             </a:r>
           </a:p>
           <a:p>
@@ -18438,7 +18698,7 @@
                 </a:solidFill>
                 <a:latin typeface="Calibri"/>
               </a:rPr>
-              <a:t/>
+              <a:t>-- Si se captura, hay que RE-LANZAR para que el bloque entero se deshaga:</a:t>
             </a:r>
           </a:p>
           <a:p>
@@ -18454,7 +18714,7 @@
                 </a:solidFill>
                 <a:latin typeface="Calibri"/>
               </a:rPr>
-              <a:t>INSERT INTO detalle_factura (id_factura, id_insumo, cantidad, precio_unitario)</a:t>
+              <a:t>EXCEPTION WHEN OTHERS THEN</a:t>
             </a:r>
           </a:p>
           <a:p>
@@ -18470,71 +18730,7 @@
                 </a:solidFill>
                 <a:latin typeface="Calibri"/>
               </a:rPr>
-              <a:t>VALUES (100, 5, 2, 15000.00);</a:t>
-            </a:r>
-          </a:p>
-          <a:p>
-            <a:pPr>
-              <a:spcAft>
-                <a:spcPts val="400"/>
-              </a:spcAft>
-            </a:pPr>
-            <a:r>
-              <a:rPr sz="1400" b="0" i="0">
-                <a:solidFill>
-                  <a:srgbClr val="FFFFFF"/>
-                </a:solidFill>
-                <a:latin typeface="Calibri"/>
-              </a:rPr>
-              <a:t/>
-            </a:r>
-          </a:p>
-          <a:p>
-            <a:pPr>
-              <a:spcAft>
-                <a:spcPts val="400"/>
-              </a:spcAft>
-            </a:pPr>
-            <a:r>
-              <a:rPr sz="1400" b="0" i="0">
-                <a:solidFill>
-                  <a:srgbClr val="FFFFFF"/>
-                </a:solidFill>
-                <a:latin typeface="Calibri"/>
-              </a:rPr>
-              <a:t>UPDATE insumo SET stock = stock - 2 WHERE id_insumo = 5;</a:t>
-            </a:r>
-          </a:p>
-          <a:p>
-            <a:pPr>
-              <a:spcAft>
-                <a:spcPts val="400"/>
-              </a:spcAft>
-            </a:pPr>
-            <a:r>
-              <a:rPr sz="1400" b="0" i="0">
-                <a:solidFill>
-                  <a:srgbClr val="FFFFFF"/>
-                </a:solidFill>
-                <a:latin typeface="Calibri"/>
-              </a:rPr>
-              <a:t/>
-            </a:r>
-          </a:p>
-          <a:p>
-            <a:pPr>
-              <a:spcAft>
-                <a:spcPts val="400"/>
-              </a:spcAft>
-            </a:pPr>
-            <a:r>
-              <a:rPr sz="1400" b="0" i="0">
-                <a:solidFill>
-                  <a:srgbClr val="FFFFFF"/>
-                </a:solidFill>
-                <a:latin typeface="Calibri"/>
-              </a:rPr>
-              <a:t>COMMIT;      -- o ROLLBACK; y no queda rastro de ninguna de las tres</a:t>
+              <a:t>  RAISE;      -- vuelve a lanzar la misma excepcion</a:t>
             </a:r>
           </a:p>
         </p:txBody>
@@ -18715,7 +18911,7 @@
                 </a:solidFill>
                 <a:latin typeface="Calibri"/>
               </a:rPr>
-              <a:t>SAVEPOINT: deshacer una parte sin perder el resto</a:t>
+              <a:t>Todo o nada: la transaccion de facturacion</a:t>
             </a:r>
           </a:p>
         </p:txBody>
@@ -18729,7 +18925,7 @@
         <p:spPr>
           <a:xfrm>
             <a:off x="457200" y="1261872"/>
-            <a:ext cx="11277295" cy="5093208"/>
+            <a:ext cx="11277295" cy="4773168"/>
           </a:xfrm>
           <a:prstGeom prst="roundRect">
             <a:avLst>
@@ -18849,7 +19045,7 @@
         <p:spPr>
           <a:xfrm>
             <a:off x="777240" y="1719072"/>
-            <a:ext cx="10637215" cy="4453128"/>
+            <a:ext cx="10637215" cy="4133087"/>
           </a:xfrm>
           <a:prstGeom prst="rect">
             <a:avLst/>
@@ -18874,7 +19070,7 @@
                 </a:solidFill>
                 <a:latin typeface="Calibri"/>
               </a:rPr>
-              <a:t>BEGIN;</a:t>
+              <a:t>CREATE PROCEDURE sp_facturar(p_id_consulta INT,</a:t>
             </a:r>
           </a:p>
           <a:p>
@@ -18890,7 +19086,7 @@
                 </a:solidFill>
                 <a:latin typeface="Calibri"/>
               </a:rPr>
-              <a:t>INSERT INTO factura (id_dueno, fecha, total) VALUES (1, NOW(), 0);</a:t>
+              <a:t>        p_insumos INT[], p_cantidades INT[]) ...</a:t>
             </a:r>
           </a:p>
           <a:p>
@@ -18906,7 +19102,7 @@
                 </a:solidFill>
                 <a:latin typeface="Calibri"/>
               </a:rPr>
-              <a:t/>
+              <a:t>  INSERT INTO factura(...) RETURNING id_factura INTO v_id_factura;</a:t>
             </a:r>
           </a:p>
           <a:p>
@@ -18922,7 +19118,7 @@
                 </a:solidFill>
                 <a:latin typeface="Calibri"/>
               </a:rPr>
-              <a:t>SAVEPOINT antes_del_detalle;</a:t>
+              <a:t>  FOR i IN 1 .. array_length(p_insumos, 1) LOOP</a:t>
             </a:r>
           </a:p>
           <a:p>
@@ -18938,7 +19134,7 @@
                 </a:solidFill>
                 <a:latin typeface="Calibri"/>
               </a:rPr>
-              <a:t>INSERT INTO detalle_factura (id_factura, id_insumo, cantidad, precio_unitario)</a:t>
+              <a:t>    UPDATE insumo SET stock = stock - p_cantidades[i]</a:t>
             </a:r>
           </a:p>
           <a:p>
@@ -18954,7 +19150,7 @@
                 </a:solidFill>
                 <a:latin typeface="Calibri"/>
               </a:rPr>
-              <a:t>VALUES (100, 9999, 1, 1000.00);      -- insumo inexistente: falla</a:t>
+              <a:t>     WHERE id_insumo = p_insumos[i]</a:t>
             </a:r>
           </a:p>
           <a:p>
@@ -18970,7 +19166,7 @@
                 </a:solidFill>
                 <a:latin typeface="Calibri"/>
               </a:rPr>
-              <a:t/>
+              <a:t>       AND stock &gt;= p_cantidades[i];   -- 0 filas si no alcanza</a:t>
             </a:r>
           </a:p>
           <a:p>
@@ -18986,7 +19182,7 @@
                 </a:solidFill>
                 <a:latin typeface="Calibri"/>
               </a:rPr>
-              <a:t>ROLLBACK TO SAVEPOINT antes_del_detalle;   -- la factura sigue viva</a:t>
+              <a:t>    GET DIAGNOSTICS v_filas = ROW_COUNT;</a:t>
             </a:r>
           </a:p>
           <a:p>
@@ -19002,7 +19198,7 @@
                 </a:solidFill>
                 <a:latin typeface="Calibri"/>
               </a:rPr>
-              <a:t/>
+              <a:t>    IF v_filas = 0 THEN RAISE EXCEPTION '...'; END IF;</a:t>
             </a:r>
           </a:p>
           <a:p>
@@ -19018,39 +19214,7 @@
                 </a:solidFill>
                 <a:latin typeface="Calibri"/>
               </a:rPr>
-              <a:t>INSERT INTO detalle_factura (id_factura, id_insumo, cantidad, precio_unitario)</a:t>
-            </a:r>
-          </a:p>
-          <a:p>
-            <a:pPr>
-              <a:spcAft>
-                <a:spcPts val="400"/>
-              </a:spcAft>
-            </a:pPr>
-            <a:r>
-              <a:rPr sz="1400" b="0" i="0">
-                <a:solidFill>
-                  <a:srgbClr val="FFFFFF"/>
-                </a:solidFill>
-                <a:latin typeface="Calibri"/>
-              </a:rPr>
-              <a:t>VALUES (100, 5, 1, 1000.00);</a:t>
-            </a:r>
-          </a:p>
-          <a:p>
-            <a:pPr>
-              <a:spcAft>
-                <a:spcPts val="400"/>
-              </a:spcAft>
-            </a:pPr>
-            <a:r>
-              <a:rPr sz="1400" b="0" i="0">
-                <a:solidFill>
-                  <a:srgbClr val="FFFFFF"/>
-                </a:solidFill>
-                <a:latin typeface="Calibri"/>
-              </a:rPr>
-              <a:t>COMMIT;</a:t>
+              <a:t>  END LOOP;   -- sin COMMIT y sin ROLLBACK: los pone el CALL</a:t>
             </a:r>
           </a:p>
         </p:txBody>
@@ -19058,6 +19222,41 @@
       <p:sp>
         <p:nvSpPr>
           <p:cNvPr id="9" name="TextBox 8"/>
+          <p:cNvSpPr txBox="1"/>
+          <p:nvPr/>
+        </p:nvSpPr>
+        <p:spPr>
+          <a:xfrm>
+            <a:off x="457200" y="6080760"/>
+            <a:ext cx="11277295" cy="320040"/>
+          </a:xfrm>
+          <a:prstGeom prst="rect">
+            <a:avLst/>
+          </a:prstGeom>
+          <a:noFill/>
+        </p:spPr>
+        <p:txBody>
+          <a:bodyPr wrap="square">
+            <a:spAutoFit/>
+          </a:bodyPr>
+          <a:lstStyle/>
+          <a:p>
+            <a:pPr algn="ctr"/>
+            <a:r>
+              <a:rPr sz="1200" b="0" i="1">
+                <a:solidFill>
+                  <a:srgbClr val="666666"/>
+                </a:solidFill>
+                <a:latin typeface="Calibri"/>
+              </a:rPr>
+              <a:t>La condicion stock &gt;= cantidad evita el stock negativo; la excepcion que sale del CALL deshace todo sola.</a:t>
+            </a:r>
+          </a:p>
+        </p:txBody>
+      </p:sp>
+      <p:sp>
+        <p:nvSpPr>
+          <p:cNvPr id="10" name="TextBox 9"/>
           <p:cNvSpPr txBox="1"/>
           <p:nvPr/>
         </p:nvSpPr>
@@ -19409,7 +19608,7 @@
         <p:spPr>
           <a:xfrm>
             <a:off x="0" y="0"/>
-            <a:ext cx="12191695" cy="960120"/>
+            <a:ext cx="12191695" cy="1170432"/>
           </a:xfrm>
           <a:prstGeom prst="rect">
             <a:avLst/>
@@ -19451,7 +19650,7 @@
         </p:nvSpPr>
         <p:spPr>
           <a:xfrm>
-            <a:off x="0" y="960120"/>
+            <a:off x="0" y="1170432"/>
             <a:ext cx="12191695" cy="41148"/>
           </a:xfrm>
           <a:prstGeom prst="rect">
@@ -19495,7 +19694,7 @@
         <p:spPr>
           <a:xfrm>
             <a:off x="457200" y="164592"/>
-            <a:ext cx="11277295" cy="502920"/>
+            <a:ext cx="11277295" cy="384048"/>
           </a:xfrm>
           <a:prstGeom prst="rect">
             <a:avLst/>
@@ -19515,141 +19714,21 @@
                 </a:solidFill>
                 <a:latin typeface="Calibri"/>
               </a:rPr>
-              <a:t>El bloque EXCEPTION</a:t>
-            </a:r>
-          </a:p>
-        </p:txBody>
-      </p:sp>
-      <p:sp>
-        <p:nvSpPr>
-          <p:cNvPr id="5" name="Rounded Rectangle 4"/>
-          <p:cNvSpPr/>
-          <p:nvPr/>
-        </p:nvSpPr>
-        <p:spPr>
-          <a:xfrm>
-            <a:off x="457200" y="1261872"/>
-            <a:ext cx="11277295" cy="5093208"/>
-          </a:xfrm>
-          <a:prstGeom prst="roundRect">
-            <a:avLst>
-              <a:gd name="adj" fmla="val 12000"/>
-            </a:avLst>
-          </a:prstGeom>
-          <a:solidFill>
-            <a:srgbClr val="1E2A38"/>
-          </a:solidFill>
-          <a:ln>
-            <a:noFill/>
-          </a:ln>
-        </p:spPr>
-        <p:style>
-          <a:lnRef idx="1">
-            <a:schemeClr val="accent1"/>
-          </a:lnRef>
-          <a:fillRef idx="3">
-            <a:schemeClr val="accent1"/>
-          </a:fillRef>
-          <a:effectRef idx="2">
-            <a:schemeClr val="accent1"/>
-          </a:effectRef>
-          <a:fontRef idx="minor">
-            <a:schemeClr val="lt1"/>
-          </a:fontRef>
-        </p:style>
-        <p:txBody>
-          <a:bodyPr rtlCol="0" anchor="ctr"/>
-          <a:lstStyle/>
-          <a:p>
-            <a:pPr algn="ctr"/>
-          </a:p>
-        </p:txBody>
-      </p:sp>
-      <p:sp>
-        <p:nvSpPr>
-          <p:cNvPr id="6" name="Rectangle 5"/>
-          <p:cNvSpPr/>
-          <p:nvPr/>
-        </p:nvSpPr>
-        <p:spPr>
-          <a:xfrm>
-            <a:off x="457200" y="1261872"/>
-            <a:ext cx="11277295" cy="320040"/>
-          </a:xfrm>
-          <a:prstGeom prst="rect">
-            <a:avLst/>
-          </a:prstGeom>
-          <a:solidFill>
-            <a:srgbClr val="095292"/>
-          </a:solidFill>
-          <a:ln>
-            <a:noFill/>
-          </a:ln>
-        </p:spPr>
-        <p:style>
-          <a:lnRef idx="1">
-            <a:schemeClr val="accent1"/>
-          </a:lnRef>
-          <a:fillRef idx="3">
-            <a:schemeClr val="accent1"/>
-          </a:fillRef>
-          <a:effectRef idx="2">
-            <a:schemeClr val="accent1"/>
-          </a:effectRef>
-          <a:fontRef idx="minor">
-            <a:schemeClr val="lt1"/>
-          </a:fontRef>
-        </p:style>
-        <p:txBody>
-          <a:bodyPr rtlCol="0" anchor="ctr"/>
-          <a:lstStyle/>
-          <a:p>
-            <a:pPr algn="ctr"/>
-          </a:p>
-        </p:txBody>
-      </p:sp>
-      <p:sp>
-        <p:nvSpPr>
-          <p:cNvPr id="7" name="TextBox 6"/>
+              <a:t>sp_facturar en PL/pgSQL</a:t>
+            </a:r>
+          </a:p>
+        </p:txBody>
+      </p:sp>
+      <p:sp>
+        <p:nvSpPr>
+          <p:cNvPr id="5" name="TextBox 4"/>
           <p:cNvSpPr txBox="1"/>
           <p:nvPr/>
         </p:nvSpPr>
         <p:spPr>
           <a:xfrm>
-            <a:off x="685800" y="1307592"/>
-            <a:ext cx="10820095" cy="256032"/>
-          </a:xfrm>
-          <a:prstGeom prst="rect">
-            <a:avLst/>
-          </a:prstGeom>
-          <a:noFill/>
-        </p:spPr>
-        <p:txBody>
-          <a:bodyPr wrap="square" anchor="ctr"/>
-          <a:lstStyle/>
-          <a:p>
-            <a:r>
-              <a:rPr sz="1000" b="1" i="0">
-                <a:solidFill>
-                  <a:srgbClr val="269CCB"/>
-                </a:solidFill>
-                <a:latin typeface="Calibri"/>
-              </a:rPr>
-              <a:t>● ● ●</a:t>
-            </a:r>
-          </a:p>
-        </p:txBody>
-      </p:sp>
-      <p:sp>
-        <p:nvSpPr>
-          <p:cNvPr id="8" name="TextBox 7"/>
-          <p:cNvSpPr txBox="1"/>
-          <p:nvPr/>
-        </p:nvSpPr>
-        <p:spPr>
-          <a:xfrm>
-            <a:off x="777240" y="1719072"/>
-            <a:ext cx="10637215" cy="4453128"/>
+            <a:off x="457200" y="566928"/>
+            <a:ext cx="11277295" cy="411480"/>
           </a:xfrm>
           <a:prstGeom prst="rect">
             <a:avLst/>
@@ -19662,202 +19741,376 @@
           </a:bodyPr>
           <a:lstStyle/>
           <a:p>
-            <a:pPr>
-              <a:spcAft>
-                <a:spcPts val="400"/>
-              </a:spcAft>
-            </a:pPr>
             <a:r>
               <a:rPr sz="1400" b="0" i="0">
                 <a:solidFill>
-                  <a:srgbClr val="FFFFFF"/>
-                </a:solidFill>
-                <a:latin typeface="Calibri"/>
-              </a:rPr>
-              <a:t>BEGIN</a:t>
-            </a:r>
-          </a:p>
-          <a:p>
-            <a:pPr>
-              <a:spcAft>
-                <a:spcPts val="400"/>
-              </a:spcAft>
-            </a:pPr>
-            <a:r>
-              <a:rPr sz="1400" b="0" i="0">
-                <a:solidFill>
-                  <a:srgbClr val="FFFFFF"/>
-                </a:solidFill>
-                <a:latin typeface="Calibri"/>
-              </a:rPr>
-              <a:t>  UPDATE insumo SET stock = stock - p_cantidad WHERE id_insumo = p_id;</a:t>
-            </a:r>
-          </a:p>
-          <a:p>
-            <a:pPr>
-              <a:spcAft>
-                <a:spcPts val="400"/>
-              </a:spcAft>
-            </a:pPr>
-            <a:r>
-              <a:rPr sz="1400" b="0" i="0">
-                <a:solidFill>
-                  <a:srgbClr val="FFFFFF"/>
-                </a:solidFill>
-                <a:latin typeface="Calibri"/>
-              </a:rPr>
-              <a:t>  INSERT INTO detalle_factura (...) VALUES (...);</a:t>
-            </a:r>
-          </a:p>
-          <a:p>
-            <a:pPr>
-              <a:spcAft>
-                <a:spcPts val="400"/>
-              </a:spcAft>
-            </a:pPr>
-            <a:r>
-              <a:rPr sz="1400" b="0" i="0">
-                <a:solidFill>
-                  <a:srgbClr val="FFFFFF"/>
-                </a:solidFill>
-                <a:latin typeface="Calibri"/>
-              </a:rPr>
-              <a:t>EXCEPTION WHEN OTHERS THEN</a:t>
-            </a:r>
-          </a:p>
-          <a:p>
-            <a:pPr>
-              <a:spcAft>
-                <a:spcPts val="400"/>
-              </a:spcAft>
-            </a:pPr>
-            <a:r>
-              <a:rPr sz="1400" b="0" i="0">
-                <a:solidFill>
-                  <a:srgbClr val="FFFFFF"/>
-                </a:solidFill>
-                <a:latin typeface="Calibri"/>
-              </a:rPr>
-              <a:t>  RAISE NOTICE 'algo fallo: %', SQLERRM;   -- &lt;-- LA TRAMPA</a:t>
-            </a:r>
-          </a:p>
-          <a:p>
-            <a:pPr>
-              <a:spcAft>
-                <a:spcPts val="400"/>
-              </a:spcAft>
-            </a:pPr>
-            <a:r>
-              <a:rPr sz="1400" b="0" i="0">
-                <a:solidFill>
-                  <a:srgbClr val="FFFFFF"/>
-                </a:solidFill>
-                <a:latin typeface="Calibri"/>
-              </a:rPr>
-              <a:t>END;</a:t>
-            </a:r>
-          </a:p>
-          <a:p>
-            <a:pPr>
-              <a:spcAft>
-                <a:spcPts val="400"/>
-              </a:spcAft>
-            </a:pPr>
-            <a:r>
-              <a:rPr sz="1400" b="0" i="0">
-                <a:solidFill>
-                  <a:srgbClr val="FFFFFF"/>
-                </a:solidFill>
-                <a:latin typeface="Calibri"/>
-              </a:rPr>
-              <a:t/>
-            </a:r>
-          </a:p>
-          <a:p>
-            <a:pPr>
-              <a:spcAft>
-                <a:spcPts val="400"/>
-              </a:spcAft>
-            </a:pPr>
-            <a:r>
-              <a:rPr sz="1400" b="0" i="0">
-                <a:solidFill>
-                  <a:srgbClr val="FFFFFF"/>
-                </a:solidFill>
-                <a:latin typeface="Calibri"/>
-              </a:rPr>
-              <a:t>-- Capturar la excepcion y solo avisar CONFIRMA lo demas: el UPDATE del stock</a:t>
-            </a:r>
-          </a:p>
-          <a:p>
-            <a:pPr>
-              <a:spcAft>
-                <a:spcPts val="400"/>
-              </a:spcAft>
-            </a:pPr>
-            <a:r>
-              <a:rPr sz="1400" b="0" i="0">
-                <a:solidFill>
-                  <a:srgbClr val="FFFFFF"/>
-                </a:solidFill>
-                <a:latin typeface="Calibri"/>
-              </a:rPr>
-              <a:t>-- queda aplicado y el detalle no. La factura miente.</a:t>
-            </a:r>
-          </a:p>
-          <a:p>
-            <a:pPr>
-              <a:spcAft>
-                <a:spcPts val="400"/>
-              </a:spcAft>
-            </a:pPr>
-            <a:r>
-              <a:rPr sz="1400" b="0" i="0">
-                <a:solidFill>
-                  <a:srgbClr val="FFFFFF"/>
-                </a:solidFill>
-                <a:latin typeface="Calibri"/>
-              </a:rPr>
-              <a:t>-- Si se captura, hay que RE-LANZAR para que el bloque entero se deshaga:</a:t>
-            </a:r>
-          </a:p>
-          <a:p>
-            <a:pPr>
-              <a:spcAft>
-                <a:spcPts val="400"/>
-              </a:spcAft>
-            </a:pPr>
-            <a:r>
-              <a:rPr sz="1400" b="0" i="0">
-                <a:solidFill>
-                  <a:srgbClr val="FFFFFF"/>
-                </a:solidFill>
-                <a:latin typeface="Calibri"/>
-              </a:rPr>
-              <a:t>EXCEPTION WHEN OTHERS THEN</a:t>
-            </a:r>
-          </a:p>
-          <a:p>
-            <a:pPr>
-              <a:spcAft>
-                <a:spcPts val="400"/>
-              </a:spcAft>
-            </a:pPr>
-            <a:r>
-              <a:rPr sz="1400" b="0" i="0">
-                <a:solidFill>
-                  <a:srgbClr val="FFFFFF"/>
-                </a:solidFill>
-                <a:latin typeface="Calibri"/>
-              </a:rPr>
-              <a:t>  RAISE;      -- vuelve a lanzar la misma excepcion</a:t>
-            </a:r>
-          </a:p>
-        </p:txBody>
-      </p:sp>
-      <p:sp>
-        <p:nvSpPr>
-          <p:cNvPr id="9" name="TextBox 8"/>
+                  <a:srgbClr val="B8D8EE"/>
+                </a:solidFill>
+                <a:latin typeface="Calibri"/>
+              </a:rPr>
+              <a:t>Cabecera, bucle de lineas y descuento condicional: si una linea falla, no queda nada de la factura</a:t>
+            </a:r>
+          </a:p>
+        </p:txBody>
+      </p:sp>
+      <p:sp>
+        <p:nvSpPr>
+          <p:cNvPr id="6" name="TextBox 5"/>
+          <p:cNvSpPr txBox="1"/>
+          <p:nvPr/>
+        </p:nvSpPr>
+        <p:spPr>
+          <a:xfrm>
+            <a:off x="457200" y="1380744"/>
+            <a:ext cx="11277295" cy="5020056"/>
+          </a:xfrm>
+          <a:prstGeom prst="rect">
+            <a:avLst/>
+          </a:prstGeom>
+          <a:noFill/>
+        </p:spPr>
+        <p:txBody>
+          <a:bodyPr wrap="square">
+            <a:spAutoFit/>
+          </a:bodyPr>
+          <a:lstStyle/>
+          <a:p>
+            <a:pPr>
+              <a:spcAft>
+                <a:spcPts val="800"/>
+              </a:spcAft>
+            </a:pPr>
+            <a:r>
+              <a:rPr sz="1600" b="0" i="0">
+                <a:solidFill>
+                  <a:srgbClr val="333333"/>
+                </a:solidFill>
+                <a:latin typeface="Calibri"/>
+              </a:rPr>
+              <a:t>–   </a:t>
+            </a:r>
+            <a:r>
+              <a:rPr sz="1600" b="1" i="0">
+                <a:solidFill>
+                  <a:srgbClr val="333333"/>
+                </a:solidFill>
+                <a:latin typeface="Calibri"/>
+              </a:rPr>
+              <a:t>La firma exacta, que se factura por lineas.</a:t>
+            </a:r>
+            <a:r>
+              <a:rPr sz="1600" b="0" i="0">
+                <a:solidFill>
+                  <a:srgbClr val="333333"/>
+                </a:solidFill>
+                <a:latin typeface="Calibri"/>
+              </a:rPr>
+              <a:t> «CREATE PROCEDURE sp_facturar(p_id_consulta INT, p_insumos INT[], p_cantidades INT[]) LANGUAGE plpgsql AS $proc$ ... $proc$;» — </a:t>
+            </a:r>
+            <a:r>
+              <a:rPr sz="1600" b="1" i="0">
+                <a:solidFill>
+                  <a:srgbClr val="333333"/>
+                </a:solidFill>
+                <a:latin typeface="Calibri"/>
+              </a:rPr>
+              <a:t>dos arreglos paralelos</a:t>
+            </a:r>
+            <a:r>
+              <a:rPr sz="1600" b="0" i="0">
+                <a:solidFill>
+                  <a:srgbClr val="333333"/>
+                </a:solidFill>
+                <a:latin typeface="Calibri"/>
+              </a:rPr>
+              <a:t>, no un insumo suelto: una factura tiene varias lineas. Se llama «CALL sp_facturar(4, ARRAY[1,6,5], ARRAY[1,2,3]);». Los tipos son «INT» y «NUMERIC», no «NUMBER». Primera linea del cuerpo: «IF array_length(p_insumos, 1) IS DISTINCT FROM array_length(p_cantidades, 1) THEN RAISE EXCEPTION ...» — dos arreglos de longitud distinta se rechazan </a:t>
+            </a:r>
+            <a:r>
+              <a:rPr sz="1600" b="1" i="0">
+                <a:solidFill>
+                  <a:srgbClr val="333333"/>
+                </a:solidFill>
+                <a:latin typeface="Calibri"/>
+              </a:rPr>
+              <a:t>antes de tocar la base</a:t>
+            </a:r>
+            <a:r>
+              <a:rPr sz="1600" b="0" i="0">
+                <a:solidFill>
+                  <a:srgbClr val="333333"/>
+                </a:solidFill>
+                <a:latin typeface="Calibri"/>
+              </a:rPr>
+              <a:t>.</a:t>
+            </a:r>
+          </a:p>
+          <a:p>
+            <a:pPr>
+              <a:spcAft>
+                <a:spcPts val="800"/>
+              </a:spcAft>
+            </a:pPr>
+            <a:r>
+              <a:rPr sz="1600" b="0" i="0">
+                <a:solidFill>
+                  <a:srgbClr val="333333"/>
+                </a:solidFill>
+                <a:latin typeface="Calibri"/>
+              </a:rPr>
+              <a:t>–   </a:t>
+            </a:r>
+            <a:r>
+              <a:rPr sz="1600" b="1" i="0">
+                <a:solidFill>
+                  <a:srgbClr val="333333"/>
+                </a:solidFill>
+                <a:latin typeface="Calibri"/>
+              </a:rPr>
+              <a:t>La cabecera y el id que se acaba de generar.</a:t>
+            </a:r>
+            <a:r>
+              <a:rPr sz="1600" b="0" i="0">
+                <a:solidFill>
+                  <a:srgbClr val="333333"/>
+                </a:solidFill>
+                <a:latin typeface="Calibri"/>
+              </a:rPr>
+              <a:t> «INSERT INTO factura (id_consulta, total) VALUES (p_id_consulta, 0) RETURNING id_factura INTO v_id_factura;» — el total entra en </a:t>
+            </a:r>
+            <a:r>
+              <a:rPr sz="1600" b="1" i="0">
+                <a:solidFill>
+                  <a:srgbClr val="333333"/>
+                </a:solidFill>
+                <a:latin typeface="Calibri"/>
+              </a:rPr>
+              <a:t>0</a:t>
+            </a:r>
+            <a:r>
+              <a:rPr sz="1600" b="0" i="0">
+                <a:solidFill>
+                  <a:srgbClr val="333333"/>
+                </a:solidFill>
+                <a:latin typeface="Calibri"/>
+              </a:rPr>
+              <a:t> y se corrige al final, porque todavia no se sabe. «RETURNING ... INTO» evita ir a buscarlo con otro «SELECT».</a:t>
+            </a:r>
+          </a:p>
+          <a:p>
+            <a:pPr>
+              <a:spcAft>
+                <a:spcPts val="800"/>
+              </a:spcAft>
+            </a:pPr>
+            <a:r>
+              <a:rPr sz="1600" b="0" i="0">
+                <a:solidFill>
+                  <a:srgbClr val="333333"/>
+                </a:solidFill>
+                <a:latin typeface="Calibri"/>
+              </a:rPr>
+              <a:t>–   </a:t>
+            </a:r>
+            <a:r>
+              <a:rPr sz="1600" b="1" i="0">
+                <a:solidFill>
+                  <a:srgbClr val="333333"/>
+                </a:solidFill>
+                <a:latin typeface="Calibri"/>
+              </a:rPr>
+              <a:t>El bucle, y el guardia que es el corazon del dia.</a:t>
+            </a:r>
+            <a:r>
+              <a:rPr sz="1600" b="0" i="0">
+                <a:solidFill>
+                  <a:srgbClr val="333333"/>
+                </a:solidFill>
+                <a:latin typeface="Calibri"/>
+              </a:rPr>
+              <a:t> «FOR i IN 1 .. array_length(p_insumos, 1) LOOP» y dentro: «UPDATE insumo SET stock = stock - p_cantidades[i] WHERE id_insumo = p_insumos[i] AND </a:t>
+            </a:r>
+            <a:r>
+              <a:rPr sz="1600" b="1" i="0">
+                <a:solidFill>
+                  <a:srgbClr val="333333"/>
+                </a:solidFill>
+                <a:latin typeface="Calibri"/>
+              </a:rPr>
+              <a:t>stock &gt;= p_cantidades[i]</a:t>
+            </a:r>
+            <a:r>
+              <a:rPr sz="1600" b="0" i="0">
+                <a:solidFill>
+                  <a:srgbClr val="333333"/>
+                </a:solidFill>
+                <a:latin typeface="Calibri"/>
+              </a:rPr>
+              <a:t>;» — la comprobacion viaja </a:t>
+            </a:r>
+            <a:r>
+              <a:rPr sz="1600" b="1" i="0">
+                <a:solidFill>
+                  <a:srgbClr val="333333"/>
+                </a:solidFill>
+                <a:latin typeface="Calibri"/>
+              </a:rPr>
+              <a:t>dentro del «WHERE»</a:t>
+            </a:r>
+            <a:r>
+              <a:rPr sz="1600" b="0" i="0">
+                <a:solidFill>
+                  <a:srgbClr val="333333"/>
+                </a:solidFill>
+                <a:latin typeface="Calibri"/>
+              </a:rPr>
+              <a:t>: comprobar y escribir son </a:t>
+            </a:r>
+            <a:r>
+              <a:rPr sz="1600" b="1" i="0">
+                <a:solidFill>
+                  <a:srgbClr val="333333"/>
+                </a:solidFill>
+                <a:latin typeface="Calibri"/>
+              </a:rPr>
+              <a:t>una sola sentencia</a:t>
+            </a:r>
+            <a:r>
+              <a:rPr sz="1600" b="0" i="0">
+                <a:solidFill>
+                  <a:srgbClr val="333333"/>
+                </a:solidFill>
+                <a:latin typeface="Calibri"/>
+              </a:rPr>
+              <a:t> y nadie puede colarse entre las dos.</a:t>
+            </a:r>
+          </a:p>
+          <a:p>
+            <a:pPr>
+              <a:spcAft>
+                <a:spcPts val="800"/>
+              </a:spcAft>
+            </a:pPr>
+            <a:r>
+              <a:rPr sz="1600" b="0" i="0">
+                <a:solidFill>
+                  <a:srgbClr val="333333"/>
+                </a:solidFill>
+                <a:latin typeface="Calibri"/>
+              </a:rPr>
+              <a:t>–   </a:t>
+            </a:r>
+            <a:r>
+              <a:rPr sz="1600" b="1" i="0">
+                <a:solidFill>
+                  <a:srgbClr val="333333"/>
+                </a:solidFill>
+                <a:latin typeface="Calibri"/>
+              </a:rPr>
+              <a:t>Como se sabe si alcanzo, y como se aborta.</a:t>
+            </a:r>
+            <a:r>
+              <a:rPr sz="1600" b="0" i="0">
+                <a:solidFill>
+                  <a:srgbClr val="333333"/>
+                </a:solidFill>
+                <a:latin typeface="Calibri"/>
+              </a:rPr>
+              <a:t> «GET DIAGNOSTICS v_filas = ROW_COUNT;» guarda cuantas filas toco el «UPDATE»: «1» alcanzo, «0» no habia stock. Entonces «IF v_filas = 0 THEN RAISE EXCEPTION 'ERROR: stock insuficiente del insumo %', p_insumos[i]; END IF;». </a:t>
+            </a:r>
+            <a:r>
+              <a:rPr sz="1600" b="1" i="0">
+                <a:solidFill>
+                  <a:srgbClr val="333333"/>
+                </a:solidFill>
+                <a:latin typeface="Calibri"/>
+              </a:rPr>
+              <a:t>No es «SQL%ROWCOUNT» ni «RAISE_APPLICATION_ERROR»</a:t>
+            </a:r>
+            <a:r>
+              <a:rPr sz="1600" b="0" i="0">
+                <a:solidFill>
+                  <a:srgbClr val="333333"/>
+                </a:solidFill>
+                <a:latin typeface="Calibri"/>
+              </a:rPr>
+              <a:t>: eso es Oracle y aqui no existe.</a:t>
+            </a:r>
+          </a:p>
+          <a:p>
+            <a:pPr>
+              <a:spcAft>
+                <a:spcPts val="800"/>
+              </a:spcAft>
+            </a:pPr>
+            <a:r>
+              <a:rPr sz="1600" b="0" i="0">
+                <a:solidFill>
+                  <a:srgbClr val="333333"/>
+                </a:solidFill>
+                <a:latin typeface="Calibri"/>
+              </a:rPr>
+              <a:t>–   </a:t>
+            </a:r>
+            <a:r>
+              <a:rPr sz="1600" b="1" i="0">
+                <a:solidFill>
+                  <a:srgbClr val="333333"/>
+                </a:solidFill>
+                <a:latin typeface="Calibri"/>
+              </a:rPr>
+              <a:t>Y el cierre.</a:t>
+            </a:r>
+            <a:r>
+              <a:rPr sz="1600" b="0" i="0">
+                <a:solidFill>
+                  <a:srgbClr val="333333"/>
+                </a:solidFill>
+                <a:latin typeface="Calibri"/>
+              </a:rPr>
+              <a:t> Cada iteracion inserta su linea en «detalle_factura» con el «precio_unit» </a:t>
+            </a:r>
+            <a:r>
+              <a:rPr sz="1600" b="1" i="0">
+                <a:solidFill>
+                  <a:srgbClr val="333333"/>
+                </a:solidFill>
+                <a:latin typeface="Calibri"/>
+              </a:rPr>
+              <a:t>vigente</a:t>
+            </a:r>
+            <a:r>
+              <a:rPr sz="1600" b="0" i="0">
+                <a:solidFill>
+                  <a:srgbClr val="333333"/>
+                </a:solidFill>
+                <a:latin typeface="Calibri"/>
+              </a:rPr>
+              <a:t> y acumula «v_total := v_total + v_precio * p_cantidades[i];». Al salir del bucle, «UPDATE factura SET total = v_total WHERE id_factura = v_id_factura;». El caso de prueba da </a:t>
+            </a:r>
+            <a:r>
+              <a:rPr sz="1600" b="1" i="0">
+                <a:solidFill>
+                  <a:srgbClr val="333333"/>
+                </a:solidFill>
+                <a:latin typeface="Calibri"/>
+              </a:rPr>
+              <a:t>27.400</a:t>
+            </a:r>
+            <a:r>
+              <a:rPr sz="1600" b="0" i="0">
+                <a:solidFill>
+                  <a:srgbClr val="333333"/>
+                </a:solidFill>
+                <a:latin typeface="Calibri"/>
+              </a:rPr>
+              <a:t> y deja los stocks en 11, 58 y 5.</a:t>
+            </a:r>
+          </a:p>
+        </p:txBody>
+      </p:sp>
+      <p:sp>
+        <p:nvSpPr>
+          <p:cNvPr id="7" name="TextBox 6"/>
           <p:cNvSpPr txBox="1"/>
           <p:nvPr/>
         </p:nvSpPr>
@@ -19925,7 +20178,7 @@
         <p:spPr>
           <a:xfrm>
             <a:off x="0" y="0"/>
-            <a:ext cx="12191695" cy="960120"/>
+            <a:ext cx="12191695" cy="1170432"/>
           </a:xfrm>
           <a:prstGeom prst="rect">
             <a:avLst/>
@@ -19967,7 +20220,7 @@
         </p:nvSpPr>
         <p:spPr>
           <a:xfrm>
-            <a:off x="0" y="960120"/>
+            <a:off x="0" y="1170432"/>
             <a:ext cx="12191695" cy="41148"/>
           </a:xfrm>
           <a:prstGeom prst="rect">
@@ -20011,7 +20264,7 @@
         <p:spPr>
           <a:xfrm>
             <a:off x="457200" y="164592"/>
-            <a:ext cx="11277295" cy="502920"/>
+            <a:ext cx="11277295" cy="384048"/>
           </a:xfrm>
           <a:prstGeom prst="rect">
             <a:avLst/>
@@ -20031,141 +20284,21 @@
                 </a:solidFill>
                 <a:latin typeface="Calibri"/>
               </a:rPr>
-              <a:t>Todo o nada: la transaccion de facturacion</a:t>
-            </a:r>
-          </a:p>
-        </p:txBody>
-      </p:sp>
-      <p:sp>
-        <p:nvSpPr>
-          <p:cNvPr id="5" name="Rounded Rectangle 4"/>
-          <p:cNvSpPr/>
-          <p:nvPr/>
-        </p:nvSpPr>
-        <p:spPr>
-          <a:xfrm>
-            <a:off x="457200" y="1261872"/>
-            <a:ext cx="11277295" cy="4773168"/>
-          </a:xfrm>
-          <a:prstGeom prst="roundRect">
-            <a:avLst>
-              <a:gd name="adj" fmla="val 12000"/>
-            </a:avLst>
-          </a:prstGeom>
-          <a:solidFill>
-            <a:srgbClr val="1E2A38"/>
-          </a:solidFill>
-          <a:ln>
-            <a:noFill/>
-          </a:ln>
-        </p:spPr>
-        <p:style>
-          <a:lnRef idx="1">
-            <a:schemeClr val="accent1"/>
-          </a:lnRef>
-          <a:fillRef idx="3">
-            <a:schemeClr val="accent1"/>
-          </a:fillRef>
-          <a:effectRef idx="2">
-            <a:schemeClr val="accent1"/>
-          </a:effectRef>
-          <a:fontRef idx="minor">
-            <a:schemeClr val="lt1"/>
-          </a:fontRef>
-        </p:style>
-        <p:txBody>
-          <a:bodyPr rtlCol="0" anchor="ctr"/>
-          <a:lstStyle/>
-          <a:p>
-            <a:pPr algn="ctr"/>
-          </a:p>
-        </p:txBody>
-      </p:sp>
-      <p:sp>
-        <p:nvSpPr>
-          <p:cNvPr id="6" name="Rectangle 5"/>
-          <p:cNvSpPr/>
-          <p:nvPr/>
-        </p:nvSpPr>
-        <p:spPr>
-          <a:xfrm>
-            <a:off x="457200" y="1261872"/>
-            <a:ext cx="11277295" cy="320040"/>
-          </a:xfrm>
-          <a:prstGeom prst="rect">
-            <a:avLst/>
-          </a:prstGeom>
-          <a:solidFill>
-            <a:srgbClr val="095292"/>
-          </a:solidFill>
-          <a:ln>
-            <a:noFill/>
-          </a:ln>
-        </p:spPr>
-        <p:style>
-          <a:lnRef idx="1">
-            <a:schemeClr val="accent1"/>
-          </a:lnRef>
-          <a:fillRef idx="3">
-            <a:schemeClr val="accent1"/>
-          </a:fillRef>
-          <a:effectRef idx="2">
-            <a:schemeClr val="accent1"/>
-          </a:effectRef>
-          <a:fontRef idx="minor">
-            <a:schemeClr val="lt1"/>
-          </a:fontRef>
-        </p:style>
-        <p:txBody>
-          <a:bodyPr rtlCol="0" anchor="ctr"/>
-          <a:lstStyle/>
-          <a:p>
-            <a:pPr algn="ctr"/>
-          </a:p>
-        </p:txBody>
-      </p:sp>
-      <p:sp>
-        <p:nvSpPr>
-          <p:cNvPr id="7" name="TextBox 6"/>
+              <a:t>Por que el procedimiento no lleva COMMIT ni ROLLBACK</a:t>
+            </a:r>
+          </a:p>
+        </p:txBody>
+      </p:sp>
+      <p:sp>
+        <p:nvSpPr>
+          <p:cNvPr id="5" name="TextBox 4"/>
           <p:cNvSpPr txBox="1"/>
           <p:nvPr/>
         </p:nvSpPr>
         <p:spPr>
           <a:xfrm>
-            <a:off x="685800" y="1307592"/>
-            <a:ext cx="10820095" cy="256032"/>
-          </a:xfrm>
-          <a:prstGeom prst="rect">
-            <a:avLst/>
-          </a:prstGeom>
-          <a:noFill/>
-        </p:spPr>
-        <p:txBody>
-          <a:bodyPr wrap="square" anchor="ctr"/>
-          <a:lstStyle/>
-          <a:p>
-            <a:r>
-              <a:rPr sz="1000" b="1" i="0">
-                <a:solidFill>
-                  <a:srgbClr val="269CCB"/>
-                </a:solidFill>
-                <a:latin typeface="Calibri"/>
-              </a:rPr>
-              <a:t>● ● ●</a:t>
-            </a:r>
-          </a:p>
-        </p:txBody>
-      </p:sp>
-      <p:sp>
-        <p:nvSpPr>
-          <p:cNvPr id="8" name="TextBox 7"/>
-          <p:cNvSpPr txBox="1"/>
-          <p:nvPr/>
-        </p:nvSpPr>
-        <p:spPr>
-          <a:xfrm>
-            <a:off x="777240" y="1719072"/>
-            <a:ext cx="10637215" cy="4133087"/>
+            <a:off x="457200" y="566928"/>
+            <a:ext cx="11277295" cy="411480"/>
           </a:xfrm>
           <a:prstGeom prst="rect">
             <a:avLst/>
@@ -20178,177 +20311,28 @@
           </a:bodyPr>
           <a:lstStyle/>
           <a:p>
-            <a:pPr>
-              <a:spcAft>
-                <a:spcPts val="400"/>
-              </a:spcAft>
-            </a:pPr>
             <a:r>
               <a:rPr sz="1400" b="0" i="0">
                 <a:solidFill>
-                  <a:srgbClr val="FFFFFF"/>
-                </a:solidFill>
-                <a:latin typeface="Calibri"/>
-              </a:rPr>
-              <a:t>CREATE PROCEDURE sp_facturar(p_id_consulta INT,</a:t>
-            </a:r>
-          </a:p>
-          <a:p>
-            <a:pPr>
-              <a:spcAft>
-                <a:spcPts val="400"/>
-              </a:spcAft>
-            </a:pPr>
-            <a:r>
-              <a:rPr sz="1400" b="0" i="0">
-                <a:solidFill>
-                  <a:srgbClr val="FFFFFF"/>
-                </a:solidFill>
-                <a:latin typeface="Calibri"/>
-              </a:rPr>
-              <a:t>        p_insumos INT[], p_cantidades INT[]) ...</a:t>
-            </a:r>
-          </a:p>
-          <a:p>
-            <a:pPr>
-              <a:spcAft>
-                <a:spcPts val="400"/>
-              </a:spcAft>
-            </a:pPr>
-            <a:r>
-              <a:rPr sz="1400" b="0" i="0">
-                <a:solidFill>
-                  <a:srgbClr val="FFFFFF"/>
-                </a:solidFill>
-                <a:latin typeface="Calibri"/>
-              </a:rPr>
-              <a:t>  INSERT INTO factura(...) RETURNING id_factura INTO v_id_factura;</a:t>
-            </a:r>
-          </a:p>
-          <a:p>
-            <a:pPr>
-              <a:spcAft>
-                <a:spcPts val="400"/>
-              </a:spcAft>
-            </a:pPr>
-            <a:r>
-              <a:rPr sz="1400" b="0" i="0">
-                <a:solidFill>
-                  <a:srgbClr val="FFFFFF"/>
-                </a:solidFill>
-                <a:latin typeface="Calibri"/>
-              </a:rPr>
-              <a:t>  FOR i IN 1 .. array_length(p_insumos, 1) LOOP</a:t>
-            </a:r>
-          </a:p>
-          <a:p>
-            <a:pPr>
-              <a:spcAft>
-                <a:spcPts val="400"/>
-              </a:spcAft>
-            </a:pPr>
-            <a:r>
-              <a:rPr sz="1400" b="0" i="0">
-                <a:solidFill>
-                  <a:srgbClr val="FFFFFF"/>
-                </a:solidFill>
-                <a:latin typeface="Calibri"/>
-              </a:rPr>
-              <a:t>    UPDATE insumo SET stock = stock - p_cantidades[i]</a:t>
-            </a:r>
-          </a:p>
-          <a:p>
-            <a:pPr>
-              <a:spcAft>
-                <a:spcPts val="400"/>
-              </a:spcAft>
-            </a:pPr>
-            <a:r>
-              <a:rPr sz="1400" b="0" i="0">
-                <a:solidFill>
-                  <a:srgbClr val="FFFFFF"/>
-                </a:solidFill>
-                <a:latin typeface="Calibri"/>
-              </a:rPr>
-              <a:t>     WHERE id_insumo = p_insumos[i]</a:t>
-            </a:r>
-          </a:p>
-          <a:p>
-            <a:pPr>
-              <a:spcAft>
-                <a:spcPts val="400"/>
-              </a:spcAft>
-            </a:pPr>
-            <a:r>
-              <a:rPr sz="1400" b="0" i="0">
-                <a:solidFill>
-                  <a:srgbClr val="FFFFFF"/>
-                </a:solidFill>
-                <a:latin typeface="Calibri"/>
-              </a:rPr>
-              <a:t>       AND stock &gt;= p_cantidades[i];   -- 0 filas si no alcanza</a:t>
-            </a:r>
-          </a:p>
-          <a:p>
-            <a:pPr>
-              <a:spcAft>
-                <a:spcPts val="400"/>
-              </a:spcAft>
-            </a:pPr>
-            <a:r>
-              <a:rPr sz="1400" b="0" i="0">
-                <a:solidFill>
-                  <a:srgbClr val="FFFFFF"/>
-                </a:solidFill>
-                <a:latin typeface="Calibri"/>
-              </a:rPr>
-              <a:t>    GET DIAGNOSTICS v_filas = ROW_COUNT;</a:t>
-            </a:r>
-          </a:p>
-          <a:p>
-            <a:pPr>
-              <a:spcAft>
-                <a:spcPts val="400"/>
-              </a:spcAft>
-            </a:pPr>
-            <a:r>
-              <a:rPr sz="1400" b="0" i="0">
-                <a:solidFill>
-                  <a:srgbClr val="FFFFFF"/>
-                </a:solidFill>
-                <a:latin typeface="Calibri"/>
-              </a:rPr>
-              <a:t>    IF v_filas = 0 THEN RAISE EXCEPTION '...'; END IF;</a:t>
-            </a:r>
-          </a:p>
-          <a:p>
-            <a:pPr>
-              <a:spcAft>
-                <a:spcPts val="400"/>
-              </a:spcAft>
-            </a:pPr>
-            <a:r>
-              <a:rPr sz="1400" b="0" i="0">
-                <a:solidFill>
-                  <a:srgbClr val="FFFFFF"/>
-                </a:solidFill>
-                <a:latin typeface="Calibri"/>
-              </a:rPr>
-              <a:t>  END LOOP;   -- sin COMMIT y sin ROLLBACK: los pone el CALL</a:t>
-            </a:r>
-          </a:p>
-        </p:txBody>
-      </p:sp>
-      <p:sp>
-        <p:nvSpPr>
-          <p:cNvPr id="9" name="TextBox 8"/>
+                  <a:srgbClr val="B8D8EE"/>
+                </a:solidFill>
+                <a:latin typeface="Calibri"/>
+              </a:rPr>
+              <a:t>El CALL es su propia transaccion: la excepcion que sale de el deshace todo sin escribir ROLLBACK</a:t>
+            </a:r>
+          </a:p>
+        </p:txBody>
+      </p:sp>
+      <p:sp>
+        <p:nvSpPr>
+          <p:cNvPr id="6" name="TextBox 5"/>
           <p:cNvSpPr txBox="1"/>
           <p:nvPr/>
         </p:nvSpPr>
         <p:spPr>
           <a:xfrm>
-            <a:off x="457200" y="6080760"/>
-            <a:ext cx="11277295" cy="320040"/>
+            <a:off x="457200" y="1380744"/>
+            <a:ext cx="11277295" cy="5020056"/>
           </a:xfrm>
           <a:prstGeom prst="rect">
             <a:avLst/>
@@ -20361,22 +20345,324 @@
           </a:bodyPr>
           <a:lstStyle/>
           <a:p>
-            <a:pPr algn="ctr"/>
-            <a:r>
-              <a:rPr sz="1200" b="0" i="1">
-                <a:solidFill>
-                  <a:srgbClr val="666666"/>
-                </a:solidFill>
-                <a:latin typeface="Calibri"/>
-              </a:rPr>
-              <a:t>La condicion stock &gt;= cantidad evita el stock negativo; la excepcion que sale del CALL deshace todo sola.</a:t>
-            </a:r>
-          </a:p>
-        </p:txBody>
-      </p:sp>
-      <p:sp>
-        <p:nvSpPr>
-          <p:cNvPr id="10" name="TextBox 9"/>
+            <a:pPr>
+              <a:spcAft>
+                <a:spcPts val="800"/>
+              </a:spcAft>
+            </a:pPr>
+            <a:r>
+              <a:rPr sz="1800" b="0" i="0">
+                <a:solidFill>
+                  <a:srgbClr val="333333"/>
+                </a:solidFill>
+                <a:latin typeface="Calibri"/>
+              </a:rPr>
+              <a:t>–   </a:t>
+            </a:r>
+            <a:r>
+              <a:rPr sz="1800" b="1" i="0">
+                <a:solidFill>
+                  <a:srgbClr val="333333"/>
+                </a:solidFill>
+                <a:latin typeface="Calibri"/>
+              </a:rPr>
+              <a:t>La regla de PostgreSQL.</a:t>
+            </a:r>
+            <a:r>
+              <a:rPr sz="1800" b="0" i="0">
+                <a:solidFill>
+                  <a:srgbClr val="333333"/>
+                </a:solidFill>
+                <a:latin typeface="Calibri"/>
+              </a:rPr>
+              <a:t> Un «CALL» escrito por fuera de cualquier «BEGIN» es </a:t>
+            </a:r>
+            <a:r>
+              <a:rPr sz="1800" b="1" i="0">
+                <a:solidFill>
+                  <a:srgbClr val="333333"/>
+                </a:solidFill>
+                <a:latin typeface="Calibri"/>
+              </a:rPr>
+              <a:t>su propia transaccion</a:t>
+            </a:r>
+            <a:r>
+              <a:rPr sz="1800" b="0" i="0">
+                <a:solidFill>
+                  <a:srgbClr val="333333"/>
+                </a:solidFill>
+                <a:latin typeface="Calibri"/>
+              </a:rPr>
+              <a:t>. Si la excepcion se propaga hasta afuera del procedimiento, el motor deshace </a:t>
+            </a:r>
+            <a:r>
+              <a:rPr sz="1800" b="1" i="0">
+                <a:solidFill>
+                  <a:srgbClr val="333333"/>
+                </a:solidFill>
+                <a:latin typeface="Calibri"/>
+              </a:rPr>
+              <a:t>todo</a:t>
+            </a:r>
+            <a:r>
+              <a:rPr sz="1800" b="0" i="0">
+                <a:solidFill>
+                  <a:srgbClr val="333333"/>
+                </a:solidFill>
+                <a:latin typeface="Calibri"/>
+              </a:rPr>
+              <a:t> lo que ese «CALL» habia hecho: la cabecera de la factura, el detalle y el descuento del primer insumo. </a:t>
+            </a:r>
+            <a:r>
+              <a:rPr sz="1800" b="1" i="0">
+                <a:solidFill>
+                  <a:srgbClr val="333333"/>
+                </a:solidFill>
+                <a:latin typeface="Calibri"/>
+              </a:rPr>
+              <a:t>Nadie escribio ROLLBACK</a:t>
+            </a:r>
+            <a:r>
+              <a:rPr sz="1800" b="0" i="0">
+                <a:solidFill>
+                  <a:srgbClr val="333333"/>
+                </a:solidFill>
+                <a:latin typeface="Calibri"/>
+              </a:rPr>
+              <a:t> y la base queda intacta.</a:t>
+            </a:r>
+          </a:p>
+          <a:p>
+            <a:pPr>
+              <a:spcAft>
+                <a:spcPts val="800"/>
+              </a:spcAft>
+            </a:pPr>
+            <a:r>
+              <a:rPr sz="1800" b="0" i="0">
+                <a:solidFill>
+                  <a:srgbClr val="333333"/>
+                </a:solidFill>
+                <a:latin typeface="Calibri"/>
+              </a:rPr>
+              <a:t>–   </a:t>
+            </a:r>
+            <a:r>
+              <a:rPr sz="1800" b="1" i="0">
+                <a:solidFill>
+                  <a:srgbClr val="333333"/>
+                </a:solidFill>
+                <a:latin typeface="Calibri"/>
+              </a:rPr>
+              <a:t>Y el savepoint que nadie declara.</a:t>
+            </a:r>
+            <a:r>
+              <a:rPr sz="1800" b="0" i="0">
+                <a:solidFill>
+                  <a:srgbClr val="333333"/>
+                </a:solidFill>
+                <a:latin typeface="Calibri"/>
+              </a:rPr>
+              <a:t> Un bloque «BEGIN ... EXCEPTION WHEN ... END» en PL/pgSQL crea un </a:t>
+            </a:r>
+            <a:r>
+              <a:rPr sz="1800" b="1" i="0">
+                <a:solidFill>
+                  <a:srgbClr val="333333"/>
+                </a:solidFill>
+                <a:latin typeface="Calibri"/>
+              </a:rPr>
+              <a:t>savepoint implicito</a:t>
+            </a:r>
+            <a:r>
+              <a:rPr sz="1800" b="0" i="0">
+                <a:solidFill>
+                  <a:srgbClr val="333333"/>
+                </a:solidFill>
+                <a:latin typeface="Calibri"/>
+              </a:rPr>
+              <a:t> al entrar. Por eso, si tu capturas el error, se revierte solo lo hecho </a:t>
+            </a:r>
+            <a:r>
+              <a:rPr sz="1800" b="1" i="0">
+                <a:solidFill>
+                  <a:srgbClr val="333333"/>
+                </a:solidFill>
+                <a:latin typeface="Calibri"/>
+              </a:rPr>
+              <a:t>dentro de ese bloque</a:t>
+            </a:r>
+            <a:r>
+              <a:rPr sz="1800" b="0" i="0">
+                <a:solidFill>
+                  <a:srgbClr val="333333"/>
+                </a:solidFill>
+                <a:latin typeface="Calibri"/>
+              </a:rPr>
+              <a:t> y el resto sigue vivo. Capturar no es lo mismo que dejar propagar.</a:t>
+            </a:r>
+          </a:p>
+          <a:p>
+            <a:pPr>
+              <a:spcAft>
+                <a:spcPts val="800"/>
+              </a:spcAft>
+            </a:pPr>
+            <a:r>
+              <a:rPr sz="1800" b="0" i="0">
+                <a:solidFill>
+                  <a:srgbClr val="333333"/>
+                </a:solidFill>
+                <a:latin typeface="Calibri"/>
+              </a:rPr>
+              <a:t>–   </a:t>
+            </a:r>
+            <a:r>
+              <a:rPr sz="1800" b="1" i="0">
+                <a:solidFill>
+                  <a:srgbClr val="333333"/>
+                </a:solidFill>
+                <a:latin typeface="Calibri"/>
+              </a:rPr>
+              <a:t>El contraste con Oracle, que es lo que se pregunta.</a:t>
+            </a:r>
+            <a:r>
+              <a:rPr sz="1800" b="0" i="0">
+                <a:solidFill>
+                  <a:srgbClr val="333333"/>
+                </a:solidFill>
+                <a:latin typeface="Calibri"/>
+              </a:rPr>
+              <a:t> En Oracle el procedimiento es parte de la transaccion del llamador y ahi si se escribe «EXCEPTION WHEN OTHERS THEN ROLLBACK; RAISE;». En PostgreSQL ese «ROLLBACK» dentro de un procedimiento invocado por un «CALL» de nivel superior </a:t>
+            </a:r>
+            <a:r>
+              <a:rPr sz="1800" b="1" i="0">
+                <a:solidFill>
+                  <a:srgbClr val="333333"/>
+                </a:solidFill>
+                <a:latin typeface="Calibri"/>
+              </a:rPr>
+              <a:t>ni siquiera esta permitido</a:t>
+            </a:r>
+            <a:r>
+              <a:rPr sz="1800" b="0" i="0">
+                <a:solidFill>
+                  <a:srgbClr val="333333"/>
+                </a:solidFill>
+                <a:latin typeface="Calibri"/>
+              </a:rPr>
+              <a:t>.</a:t>
+            </a:r>
+          </a:p>
+          <a:p>
+            <a:pPr>
+              <a:spcAft>
+                <a:spcPts val="800"/>
+              </a:spcAft>
+            </a:pPr>
+            <a:r>
+              <a:rPr sz="1800" b="0" i="0">
+                <a:solidFill>
+                  <a:srgbClr val="333333"/>
+                </a:solidFill>
+                <a:latin typeface="Calibri"/>
+              </a:rPr>
+              <a:t>–   </a:t>
+            </a:r>
+            <a:r>
+              <a:rPr sz="1800" b="1" i="0">
+                <a:solidFill>
+                  <a:srgbClr val="333333"/>
+                </a:solidFill>
+                <a:latin typeface="Calibri"/>
+              </a:rPr>
+              <a:t>La consecuencia practica.</a:t>
+            </a:r>
+            <a:r>
+              <a:rPr sz="1800" b="0" i="0">
+                <a:solidFill>
+                  <a:srgbClr val="333333"/>
+                </a:solidFill>
+                <a:latin typeface="Calibri"/>
+              </a:rPr>
+              <a:t> Quien decide el «COMMIT» es </a:t>
+            </a:r>
+            <a:r>
+              <a:rPr sz="1800" b="1" i="0">
+                <a:solidFill>
+                  <a:srgbClr val="333333"/>
+                </a:solidFill>
+                <a:latin typeface="Calibri"/>
+              </a:rPr>
+              <a:t>uno solo</a:t>
+            </a:r>
+            <a:r>
+              <a:rPr sz="1800" b="0" i="0">
+                <a:solidFill>
+                  <a:srgbClr val="333333"/>
+                </a:solidFill>
+                <a:latin typeface="Calibri"/>
+              </a:rPr>
+              <a:t>: el llamador. Un procedimiento que confirma por su cuenta le quita al llamador la posibilidad de deshacer, y es la fuente numero uno de facturas a medias cuando la Clase 12 conecte la aplicacion.</a:t>
+            </a:r>
+          </a:p>
+          <a:p>
+            <a:pPr>
+              <a:spcAft>
+                <a:spcPts val="800"/>
+              </a:spcAft>
+            </a:pPr>
+            <a:r>
+              <a:rPr sz="1800" b="0" i="0">
+                <a:solidFill>
+                  <a:srgbClr val="333333"/>
+                </a:solidFill>
+                <a:latin typeface="Calibri"/>
+              </a:rPr>
+              <a:t>–   </a:t>
+            </a:r>
+            <a:r>
+              <a:rPr sz="1800" b="1" i="0">
+                <a:solidFill>
+                  <a:srgbClr val="333333"/>
+                </a:solidFill>
+                <a:latin typeface="Calibri"/>
+              </a:rPr>
+              <a:t>El error que no se perdona.</a:t>
+            </a:r>
+            <a:r>
+              <a:rPr sz="1800" b="0" i="0">
+                <a:solidFill>
+                  <a:srgbClr val="333333"/>
+                </a:solidFill>
+                <a:latin typeface="Calibri"/>
+              </a:rPr>
+              <a:t> Capturar la excepcion y no volver a lanzarla. «EXCEPTION WHEN OTHERS THEN NULL;» </a:t>
+            </a:r>
+            <a:r>
+              <a:rPr sz="1800" b="1" i="0">
+                <a:solidFill>
+                  <a:srgbClr val="333333"/>
+                </a:solidFill>
+                <a:latin typeface="Calibri"/>
+              </a:rPr>
+              <a:t>convierte el fallo en silencio</a:t>
+            </a:r>
+            <a:r>
+              <a:rPr sz="1800" b="0" i="0">
+                <a:solidFill>
+                  <a:srgbClr val="333333"/>
+                </a:solidFill>
+                <a:latin typeface="Calibri"/>
+              </a:rPr>
+              <a:t>: la factura queda registrada, el stock no se descuenta y nadie se entera hasta el inventario.</a:t>
+            </a:r>
+          </a:p>
+        </p:txBody>
+      </p:sp>
+      <p:sp>
+        <p:nvSpPr>
+          <p:cNvPr id="7" name="TextBox 6"/>
           <p:cNvSpPr txBox="1"/>
           <p:nvPr/>
         </p:nvSpPr>
@@ -20444,7 +20730,7 @@
         <p:spPr>
           <a:xfrm>
             <a:off x="0" y="0"/>
-            <a:ext cx="12191695" cy="960120"/>
+            <a:ext cx="12191695" cy="1170432"/>
           </a:xfrm>
           <a:prstGeom prst="rect">
             <a:avLst/>
@@ -20486,7 +20772,7 @@
         </p:nvSpPr>
         <p:spPr>
           <a:xfrm>
-            <a:off x="0" y="960120"/>
+            <a:off x="0" y="1170432"/>
             <a:ext cx="12191695" cy="41148"/>
           </a:xfrm>
           <a:prstGeom prst="rect">
@@ -20530,7 +20816,7 @@
         <p:spPr>
           <a:xfrm>
             <a:off x="457200" y="164592"/>
-            <a:ext cx="11277295" cy="502920"/>
+            <a:ext cx="11277295" cy="384048"/>
           </a:xfrm>
           <a:prstGeom prst="rect">
             <a:avLst/>
@@ -20550,7 +20836,7 @@
                 </a:solidFill>
                 <a:latin typeface="Calibri"/>
               </a:rPr>
-              <a:t>sp_facturar en PL/pgSQL</a:t>
+              <a:t>fn_descontar_stock: cuando «no hay stock» es una respuesta, no un error</a:t>
             </a:r>
           </a:p>
         </p:txBody>
@@ -20563,8 +20849,8 @@
         </p:nvSpPr>
         <p:spPr>
           <a:xfrm>
-            <a:off x="457200" y="1170432"/>
-            <a:ext cx="11277295" cy="5230368"/>
+            <a:off x="457200" y="566928"/>
+            <a:ext cx="11277295" cy="411480"/>
           </a:xfrm>
           <a:prstGeom prst="rect">
             <a:avLst/>
@@ -20577,13 +20863,47 @@
           </a:bodyPr>
           <a:lstStyle/>
           <a:p>
+            <a:r>
+              <a:rPr sz="1400" b="0" i="0">
+                <a:solidFill>
+                  <a:srgbClr val="B8D8EE"/>
+                </a:solidFill>
+                <a:latin typeface="Calibri"/>
+              </a:rPr>
+              <a:t>Mismo descuento condicional, contrato distinto: aqui «no alcanza» se devuelve como FALSE, no se lanza</a:t>
+            </a:r>
+          </a:p>
+        </p:txBody>
+      </p:sp>
+      <p:sp>
+        <p:nvSpPr>
+          <p:cNvPr id="6" name="TextBox 5"/>
+          <p:cNvSpPr txBox="1"/>
+          <p:nvPr/>
+        </p:nvSpPr>
+        <p:spPr>
+          <a:xfrm>
+            <a:off x="457200" y="1380744"/>
+            <a:ext cx="11277295" cy="5020056"/>
+          </a:xfrm>
+          <a:prstGeom prst="rect">
+            <a:avLst/>
+          </a:prstGeom>
+          <a:noFill/>
+        </p:spPr>
+        <p:txBody>
+          <a:bodyPr wrap="square">
+            <a:spAutoFit/>
+          </a:bodyPr>
+          <a:lstStyle/>
+          <a:p>
             <a:pPr>
               <a:spcAft>
                 <a:spcPts val="800"/>
               </a:spcAft>
             </a:pPr>
             <a:r>
-              <a:rPr sz="1600" b="0" i="0">
+              <a:rPr sz="1900" b="0" i="0">
                 <a:solidFill>
                   <a:srgbClr val="333333"/>
                 </a:solidFill>
@@ -20592,58 +20912,58 @@
               <a:t>–   </a:t>
             </a:r>
             <a:r>
-              <a:rPr sz="1600" b="1" i="0">
-                <a:solidFill>
-                  <a:srgbClr val="333333"/>
-                </a:solidFill>
-                <a:latin typeface="Calibri"/>
-              </a:rPr>
-              <a:t>La firma exacta, que se factura por lineas.</a:t>
-            </a:r>
-            <a:r>
-              <a:rPr sz="1600" b="0" i="0">
-                <a:solidFill>
-                  <a:srgbClr val="333333"/>
-                </a:solidFill>
-                <a:latin typeface="Calibri"/>
-              </a:rPr>
-              <a:t> «CREATE PROCEDURE sp_facturar(p_id_consulta INT, p_insumos INT[], p_cantidades INT[]) LANGUAGE plpgsql AS $proc$ ... $proc$;» — </a:t>
-            </a:r>
-            <a:r>
-              <a:rPr sz="1600" b="1" i="0">
-                <a:solidFill>
-                  <a:srgbClr val="333333"/>
-                </a:solidFill>
-                <a:latin typeface="Calibri"/>
-              </a:rPr>
-              <a:t>dos arreglos paralelos</a:t>
-            </a:r>
-            <a:r>
-              <a:rPr sz="1600" b="0" i="0">
-                <a:solidFill>
-                  <a:srgbClr val="333333"/>
-                </a:solidFill>
-                <a:latin typeface="Calibri"/>
-              </a:rPr>
-              <a:t>, no un insumo suelto: una factura tiene varias lineas. Se llama «CALL sp_facturar(4, ARRAY[1,6,5], ARRAY[1,2,3]);». Los tipos son «INT» y «NUMERIC», no «NUMBER». Primera linea del cuerpo: «IF array_length(p_insumos, 1) IS DISTINCT FROM array_length(p_cantidades, 1) THEN RAISE EXCEPTION ...» — dos arreglos de longitud distinta se rechazan </a:t>
-            </a:r>
-            <a:r>
-              <a:rPr sz="1600" b="1" i="0">
-                <a:solidFill>
-                  <a:srgbClr val="333333"/>
-                </a:solidFill>
-                <a:latin typeface="Calibri"/>
-              </a:rPr>
-              <a:t>antes de tocar la base</a:t>
-            </a:r>
-            <a:r>
-              <a:rPr sz="1600" b="0" i="0">
-                <a:solidFill>
-                  <a:srgbClr val="333333"/>
-                </a:solidFill>
-                <a:latin typeface="Calibri"/>
-              </a:rPr>
-              <a:t>.</a:t>
+              <a:rPr sz="1900" b="1" i="0">
+                <a:solidFill>
+                  <a:srgbClr val="333333"/>
+                </a:solidFill>
+                <a:latin typeface="Calibri"/>
+              </a:rPr>
+              <a:t>La diferencia.</a:t>
+            </a:r>
+            <a:r>
+              <a:rPr sz="1900" b="0" i="0">
+                <a:solidFill>
+                  <a:srgbClr val="333333"/>
+                </a:solidFill>
+                <a:latin typeface="Calibri"/>
+              </a:rPr>
+              <a:t> El procedimiento </a:t>
+            </a:r>
+            <a:r>
+              <a:rPr sz="1900" b="1" i="0">
+                <a:solidFill>
+                  <a:srgbClr val="333333"/>
+                </a:solidFill>
+                <a:latin typeface="Calibri"/>
+              </a:rPr>
+              <a:t>aborta</a:t>
+            </a:r>
+            <a:r>
+              <a:rPr sz="1900" b="0" i="0">
+                <a:solidFill>
+                  <a:srgbClr val="333333"/>
+                </a:solidFill>
+                <a:latin typeface="Calibri"/>
+              </a:rPr>
+              <a:t> la factura completa; la funcion </a:t>
+            </a:r>
+            <a:r>
+              <a:rPr sz="1900" b="1" i="0">
+                <a:solidFill>
+                  <a:srgbClr val="333333"/>
+                </a:solidFill>
+                <a:latin typeface="Calibri"/>
+              </a:rPr>
+              <a:t>informa</a:t>
+            </a:r>
+            <a:r>
+              <a:rPr sz="1900" b="0" i="0">
+                <a:solidFill>
+                  <a:srgbClr val="333333"/>
+                </a:solidFill>
+                <a:latin typeface="Calibri"/>
+              </a:rPr>
+              <a:t> y deja que el llamador decida. La misma regla de negocio, dos contratos distintos, y hay que saber cual se pide.</a:t>
             </a:r>
           </a:p>
           <a:p>
@@ -20653,7 +20973,7 @@
               </a:spcAft>
             </a:pPr>
             <a:r>
-              <a:rPr sz="1600" b="0" i="0">
+              <a:rPr sz="1900" b="0" i="0">
                 <a:solidFill>
                   <a:srgbClr val="333333"/>
                 </a:solidFill>
@@ -20662,40 +20982,58 @@
               <a:t>–   </a:t>
             </a:r>
             <a:r>
-              <a:rPr sz="1600" b="1" i="0">
-                <a:solidFill>
-                  <a:srgbClr val="333333"/>
-                </a:solidFill>
-                <a:latin typeface="Calibri"/>
-              </a:rPr>
-              <a:t>La cabecera y el id que se acaba de generar.</a:t>
-            </a:r>
-            <a:r>
-              <a:rPr sz="1600" b="0" i="0">
-                <a:solidFill>
-                  <a:srgbClr val="333333"/>
-                </a:solidFill>
-                <a:latin typeface="Calibri"/>
-              </a:rPr>
-              <a:t> «INSERT INTO factura (id_consulta, total) VALUES (p_id_consulta, 0) RETURNING id_factura INTO v_id_factura;» — el total entra en </a:t>
-            </a:r>
-            <a:r>
-              <a:rPr sz="1600" b="1" i="0">
-                <a:solidFill>
-                  <a:srgbClr val="333333"/>
-                </a:solidFill>
-                <a:latin typeface="Calibri"/>
-              </a:rPr>
-              <a:t>0</a:t>
-            </a:r>
-            <a:r>
-              <a:rPr sz="1600" b="0" i="0">
-                <a:solidFill>
-                  <a:srgbClr val="333333"/>
-                </a:solidFill>
-                <a:latin typeface="Calibri"/>
-              </a:rPr>
-              <a:t> y se corrige al final, porque todavia no se sabe. «RETURNING ... INTO» evita ir a buscarlo con otro «SELECT».</a:t>
+              <a:rPr sz="1900" b="1" i="0">
+                <a:solidFill>
+                  <a:srgbClr val="333333"/>
+                </a:solidFill>
+                <a:latin typeface="Calibri"/>
+              </a:rPr>
+              <a:t>La firma, y su palabra clave.</a:t>
+            </a:r>
+            <a:r>
+              <a:rPr sz="1900" b="0" i="0">
+                <a:solidFill>
+                  <a:srgbClr val="333333"/>
+                </a:solidFill>
+                <a:latin typeface="Calibri"/>
+              </a:rPr>
+              <a:t> «CREATE OR REPLACE FUNCTION fn_descontar_stock(p_id_insumo INT, p_cantidad INT) RETURNS BOOLEAN LANGUAGE plpgsql AS $$ ...» — </a:t>
+            </a:r>
+            <a:r>
+              <a:rPr sz="1900" b="1" i="0">
+                <a:solidFill>
+                  <a:srgbClr val="333333"/>
+                </a:solidFill>
+                <a:latin typeface="Calibri"/>
+              </a:rPr>
+              <a:t>«RETURNS BOOLEAN»</a:t>
+            </a:r>
+            <a:r>
+              <a:rPr sz="1900" b="0" i="0">
+                <a:solidFill>
+                  <a:srgbClr val="333333"/>
+                </a:solidFill>
+                <a:latin typeface="Calibri"/>
+              </a:rPr>
+              <a:t>, no «PROCEDURE». Devuelve «TRUE» si desconto y «FALSE» si no habia suficiente, </a:t>
+            </a:r>
+            <a:r>
+              <a:rPr sz="1900" b="1" i="0">
+                <a:solidFill>
+                  <a:srgbClr val="333333"/>
+                </a:solidFill>
+                <a:latin typeface="Calibri"/>
+              </a:rPr>
+              <a:t>sin lanzar excepcion</a:t>
+            </a:r>
+            <a:r>
+              <a:rPr sz="1900" b="0" i="0">
+                <a:solidFill>
+                  <a:srgbClr val="333333"/>
+                </a:solidFill>
+                <a:latin typeface="Calibri"/>
+              </a:rPr>
+              <a:t> en ese segundo caso.</a:t>
             </a:r>
           </a:p>
           <a:p>
@@ -20705,7 +21043,7 @@
               </a:spcAft>
             </a:pPr>
             <a:r>
-              <a:rPr sz="1600" b="0" i="0">
+              <a:rPr sz="1900" b="0" i="0">
                 <a:solidFill>
                   <a:srgbClr val="333333"/>
                 </a:solidFill>
@@ -20714,76 +21052,40 @@
               <a:t>–   </a:t>
             </a:r>
             <a:r>
-              <a:rPr sz="1600" b="1" i="0">
-                <a:solidFill>
-                  <a:srgbClr val="333333"/>
-                </a:solidFill>
-                <a:latin typeface="Calibri"/>
-              </a:rPr>
-              <a:t>El bucle, y el guardia que es el corazon del dia.</a:t>
-            </a:r>
-            <a:r>
-              <a:rPr sz="1600" b="0" i="0">
-                <a:solidFill>
-                  <a:srgbClr val="333333"/>
-                </a:solidFill>
-                <a:latin typeface="Calibri"/>
-              </a:rPr>
-              <a:t> «FOR i IN 1 .. array_length(p_insumos, 1) LOOP» y dentro: «UPDATE insumo SET stock = stock - p_cantidades[i] WHERE id_insumo = p_insumos[i] AND </a:t>
-            </a:r>
-            <a:r>
-              <a:rPr sz="1600" b="1" i="0">
-                <a:solidFill>
-                  <a:srgbClr val="333333"/>
-                </a:solidFill>
-                <a:latin typeface="Calibri"/>
-              </a:rPr>
-              <a:t>stock &gt;= p_cantidades[i]</a:t>
-            </a:r>
-            <a:r>
-              <a:rPr sz="1600" b="0" i="0">
-                <a:solidFill>
-                  <a:srgbClr val="333333"/>
-                </a:solidFill>
-                <a:latin typeface="Calibri"/>
-              </a:rPr>
-              <a:t>;» — la comprobacion viaja </a:t>
-            </a:r>
-            <a:r>
-              <a:rPr sz="1600" b="1" i="0">
-                <a:solidFill>
-                  <a:srgbClr val="333333"/>
-                </a:solidFill>
-                <a:latin typeface="Calibri"/>
-              </a:rPr>
-              <a:t>dentro del «WHERE»</a:t>
-            </a:r>
-            <a:r>
-              <a:rPr sz="1600" b="0" i="0">
-                <a:solidFill>
-                  <a:srgbClr val="333333"/>
-                </a:solidFill>
-                <a:latin typeface="Calibri"/>
-              </a:rPr>
-              <a:t>: comprobar y escribir son </a:t>
-            </a:r>
-            <a:r>
-              <a:rPr sz="1600" b="1" i="0">
-                <a:solidFill>
-                  <a:srgbClr val="333333"/>
-                </a:solidFill>
-                <a:latin typeface="Calibri"/>
-              </a:rPr>
-              <a:t>una sola sentencia</a:t>
-            </a:r>
-            <a:r>
-              <a:rPr sz="1600" b="0" i="0">
-                <a:solidFill>
-                  <a:srgbClr val="333333"/>
-                </a:solidFill>
-                <a:latin typeface="Calibri"/>
-              </a:rPr>
-              <a:t> y nadie puede colarse entre las dos.</a:t>
+              <a:rPr sz="1900" b="1" i="0">
+                <a:solidFill>
+                  <a:srgbClr val="333333"/>
+                </a:solidFill>
+                <a:latin typeface="Calibri"/>
+              </a:rPr>
+              <a:t>Lo que si es un error.</a:t>
+            </a:r>
+            <a:r>
+              <a:rPr sz="1900" b="0" i="0">
+                <a:solidFill>
+                  <a:srgbClr val="333333"/>
+                </a:solidFill>
+                <a:latin typeface="Calibri"/>
+              </a:rPr>
+              <a:t> Una cantidad negativa o cero no es «no hay stock», es una llamada mal hecha: eso </a:t>
+            </a:r>
+            <a:r>
+              <a:rPr sz="1900" b="1" i="0">
+                <a:solidFill>
+                  <a:srgbClr val="333333"/>
+                </a:solidFill>
+                <a:latin typeface="Calibri"/>
+              </a:rPr>
+              <a:t>si</a:t>
+            </a:r>
+            <a:r>
+              <a:rPr sz="1900" b="0" i="0">
+                <a:solidFill>
+                  <a:srgbClr val="333333"/>
+                </a:solidFill>
+                <a:latin typeface="Calibri"/>
+              </a:rPr>
+              <a:t> va con «RAISE EXCEPTION». Distinguir el dato invalido del resultado negativo es la mitad de la pregunta.</a:t>
             </a:r>
           </a:p>
           <a:p>
@@ -20793,7 +21095,7 @@
               </a:spcAft>
             </a:pPr>
             <a:r>
-              <a:rPr sz="1600" b="0" i="0">
+              <a:rPr sz="1900" b="0" i="0">
                 <a:solidFill>
                   <a:srgbClr val="333333"/>
                 </a:solidFill>
@@ -20802,40 +21104,58 @@
               <a:t>–   </a:t>
             </a:r>
             <a:r>
-              <a:rPr sz="1600" b="1" i="0">
-                <a:solidFill>
-                  <a:srgbClr val="333333"/>
-                </a:solidFill>
-                <a:latin typeface="Calibri"/>
-              </a:rPr>
-              <a:t>Como se sabe si alcanzo, y como se aborta.</a:t>
-            </a:r>
-            <a:r>
-              <a:rPr sz="1600" b="0" i="0">
-                <a:solidFill>
-                  <a:srgbClr val="333333"/>
-                </a:solidFill>
-                <a:latin typeface="Calibri"/>
-              </a:rPr>
-              <a:t> «GET DIAGNOSTICS v_filas = ROW_COUNT;» guarda cuantas filas toco el «UPDATE»: «1» alcanzo, «0» no habia stock. Entonces «IF v_filas = 0 THEN RAISE EXCEPTION 'ERROR: stock insuficiente del insumo %', p_insumos[i]; END IF;». </a:t>
-            </a:r>
-            <a:r>
-              <a:rPr sz="1600" b="1" i="0">
-                <a:solidFill>
-                  <a:srgbClr val="333333"/>
-                </a:solidFill>
-                <a:latin typeface="Calibri"/>
-              </a:rPr>
-              <a:t>No es «SQL%ROWCOUNT» ni «RAISE_APPLICATION_ERROR»</a:t>
-            </a:r>
-            <a:r>
-              <a:rPr sz="1600" b="0" i="0">
-                <a:solidFill>
-                  <a:srgbClr val="333333"/>
-                </a:solidFill>
-                <a:latin typeface="Calibri"/>
-              </a:rPr>
-              <a:t>: eso es Oracle y aqui no existe.</a:t>
+              <a:rPr sz="1900" b="1" i="0">
+                <a:solidFill>
+                  <a:srgbClr val="333333"/>
+                </a:solidFill>
+                <a:latin typeface="Calibri"/>
+              </a:rPr>
+              <a:t>Se prueba en una sola consulta.</a:t>
+            </a:r>
+            <a:r>
+              <a:rPr sz="1900" b="0" i="0">
+                <a:solidFill>
+                  <a:srgbClr val="333333"/>
+                </a:solidFill>
+                <a:latin typeface="Calibri"/>
+              </a:rPr>
+              <a:t> «SELECT fn_descontar_stock(5,3) AS caso_ok, fn_descontar_stock(2,10) AS caso_sin_stock, fn_descontar_stock(2,3) AS caso_limite;» -&gt; </a:t>
+            </a:r>
+            <a:r>
+              <a:rPr sz="1900" b="1" i="0">
+                <a:solidFill>
+                  <a:srgbClr val="333333"/>
+                </a:solidFill>
+                <a:latin typeface="Calibri"/>
+              </a:rPr>
+              <a:t>«true», «false», «true»</a:t>
+            </a:r>
+            <a:r>
+              <a:rPr sz="1900" b="0" i="0">
+                <a:solidFill>
+                  <a:srgbClr val="333333"/>
+                </a:solidFill>
+                <a:latin typeface="Calibri"/>
+              </a:rPr>
+              <a:t>. El tercer caso es el interesante: pide </a:t>
+            </a:r>
+            <a:r>
+              <a:rPr sz="1900" b="1" i="0">
+                <a:solidFill>
+                  <a:srgbClr val="333333"/>
+                </a:solidFill>
+                <a:latin typeface="Calibri"/>
+              </a:rPr>
+              <a:t>exactamente</a:t>
+            </a:r>
+            <a:r>
+              <a:rPr sz="1900" b="0" i="0">
+                <a:solidFill>
+                  <a:srgbClr val="333333"/>
+                </a:solidFill>
+                <a:latin typeface="Calibri"/>
+              </a:rPr>
+              <a:t> el stock que queda, y con «&gt;=» en el guardia tiene que pasar.</a:t>
             </a:r>
           </a:p>
           <a:p>
@@ -20845,7 +21165,7 @@
               </a:spcAft>
             </a:pPr>
             <a:r>
-              <a:rPr sz="1600" b="0" i="0">
+              <a:rPr sz="1900" b="0" i="0">
                 <a:solidFill>
                   <a:srgbClr val="333333"/>
                 </a:solidFill>
@@ -20854,65 +21174,83 @@
               <a:t>–   </a:t>
             </a:r>
             <a:r>
-              <a:rPr sz="1600" b="1" i="0">
-                <a:solidFill>
-                  <a:srgbClr val="333333"/>
-                </a:solidFill>
-                <a:latin typeface="Calibri"/>
-              </a:rPr>
-              <a:t>Y el cierre.</a:t>
-            </a:r>
-            <a:r>
-              <a:rPr sz="1600" b="0" i="0">
-                <a:solidFill>
-                  <a:srgbClr val="333333"/>
-                </a:solidFill>
-                <a:latin typeface="Calibri"/>
-              </a:rPr>
-              <a:t> Cada iteracion inserta su linea en «detalle_factura» con el «precio_unit» </a:t>
-            </a:r>
-            <a:r>
-              <a:rPr sz="1600" b="1" i="0">
-                <a:solidFill>
-                  <a:srgbClr val="333333"/>
-                </a:solidFill>
-                <a:latin typeface="Calibri"/>
-              </a:rPr>
-              <a:t>vigente</a:t>
-            </a:r>
-            <a:r>
-              <a:rPr sz="1600" b="0" i="0">
-                <a:solidFill>
-                  <a:srgbClr val="333333"/>
-                </a:solidFill>
-                <a:latin typeface="Calibri"/>
-              </a:rPr>
-              <a:t> y acumula «v_total := v_total + v_precio * p_cantidades[i];». Al salir del bucle, «UPDATE factura SET total = v_total WHERE id_factura = v_id_factura;». El caso de prueba da </a:t>
-            </a:r>
-            <a:r>
-              <a:rPr sz="1600" b="1" i="0">
-                <a:solidFill>
-                  <a:srgbClr val="333333"/>
-                </a:solidFill>
-                <a:latin typeface="Calibri"/>
-              </a:rPr>
-              <a:t>27.400</a:t>
-            </a:r>
-            <a:r>
-              <a:rPr sz="1600" b="0" i="0">
-                <a:solidFill>
-                  <a:srgbClr val="333333"/>
-                </a:solidFill>
-                <a:latin typeface="Calibri"/>
-              </a:rPr>
-              <a:t> y deja los stocks en 11, 58 y 5.</a:t>
-            </a:r>
-          </a:p>
-        </p:txBody>
-      </p:sp>
-      <p:sp>
-        <p:nvSpPr>
-          <p:cNvPr id="6" name="TextBox 5"/>
+              <a:rPr sz="1900" b="1" i="0">
+                <a:solidFill>
+                  <a:srgbClr val="333333"/>
+                </a:solidFill>
+                <a:latin typeface="Calibri"/>
+              </a:rPr>
+              <a:t>Por que no leer primero.</a:t>
+            </a:r>
+            <a:r>
+              <a:rPr sz="1900" b="0" i="0">
+                <a:solidFill>
+                  <a:srgbClr val="333333"/>
+                </a:solidFill>
+                <a:latin typeface="Calibri"/>
+              </a:rPr>
+              <a:t> «SELECT stock ...; IF stock &gt;= cantidad THEN UPDATE ...» deja una </a:t>
+            </a:r>
+            <a:r>
+              <a:rPr sz="1900" b="1" i="0">
+                <a:solidFill>
+                  <a:srgbClr val="333333"/>
+                </a:solidFill>
+                <a:latin typeface="Calibri"/>
+              </a:rPr>
+              <a:t>ventana</a:t>
+            </a:r>
+            <a:r>
+              <a:rPr sz="1900" b="0" i="0">
+                <a:solidFill>
+                  <a:srgbClr val="333333"/>
+                </a:solidFill>
+                <a:latin typeface="Calibri"/>
+              </a:rPr>
+              <a:t> entre la lectura y la escritura, y con dos recepcionistas facturando el mismo insumo las dos leen 3, las dos deciden que alcanza y el stock termina en </a:t>
+            </a:r>
+            <a:r>
+              <a:rPr sz="1900" b="1" i="0">
+                <a:solidFill>
+                  <a:srgbClr val="333333"/>
+                </a:solidFill>
+                <a:latin typeface="Calibri"/>
+              </a:rPr>
+              <a:t>-2</a:t>
+            </a:r>
+            <a:r>
+              <a:rPr sz="1900" b="0" i="0">
+                <a:solidFill>
+                  <a:srgbClr val="333333"/>
+                </a:solidFill>
+                <a:latin typeface="Calibri"/>
+              </a:rPr>
+              <a:t>. El «UPDATE» con la condicion en el «WHERE» no tiene ventana. Aqui no se puede demostrar —PGlite corre </a:t>
+            </a:r>
+            <a:r>
+              <a:rPr sz="1900" b="1" i="0">
+                <a:solidFill>
+                  <a:srgbClr val="333333"/>
+                </a:solidFill>
+                <a:latin typeface="Calibri"/>
+              </a:rPr>
+              <a:t>una sola sesion</a:t>
+            </a:r>
+            <a:r>
+              <a:rPr sz="1900" b="0" i="0">
+                <a:solidFill>
+                  <a:srgbClr val="333333"/>
+                </a:solidFill>
+                <a:latin typeface="Calibri"/>
+              </a:rPr>
+              <a:t>— y ese es el gap que se declara y que abre la Clase 10.</a:t>
+            </a:r>
+          </a:p>
+        </p:txBody>
+      </p:sp>
+      <p:sp>
+        <p:nvSpPr>
+          <p:cNvPr id="7" name="TextBox 6"/>
           <p:cNvSpPr txBox="1"/>
           <p:nvPr/>
         </p:nvSpPr>
@@ -21086,7 +21424,7 @@
                 </a:solidFill>
                 <a:latin typeface="Calibri"/>
               </a:rPr>
-              <a:t>Por que el procedimiento no lleva COMMIT ni ROLLBACK</a:t>
+              <a:t>Demo del dia</a:t>
             </a:r>
           </a:p>
         </p:txBody>
@@ -21119,7 +21457,7 @@
               </a:spcAft>
             </a:pPr>
             <a:r>
-              <a:rPr sz="1900" b="0" i="0">
+              <a:rPr sz="2000" b="0" i="0">
                 <a:solidFill>
                   <a:srgbClr val="333333"/>
                 </a:solidFill>
@@ -21128,76 +21466,22 @@
               <a:t>–   </a:t>
             </a:r>
             <a:r>
-              <a:rPr sz="1900" b="1" i="0">
-                <a:solidFill>
-                  <a:srgbClr val="333333"/>
-                </a:solidFill>
-                <a:latin typeface="Calibri"/>
-              </a:rPr>
-              <a:t>La regla de PostgreSQL.</a:t>
-            </a:r>
-            <a:r>
-              <a:rPr sz="1900" b="0" i="0">
-                <a:solidFill>
-                  <a:srgbClr val="333333"/>
-                </a:solidFill>
-                <a:latin typeface="Calibri"/>
-              </a:rPr>
-              <a:t> Un «CALL» escrito por fuera de cualquier «BEGIN» es </a:t>
-            </a:r>
-            <a:r>
-              <a:rPr sz="1900" b="1" i="0">
-                <a:solidFill>
-                  <a:srgbClr val="333333"/>
-                </a:solidFill>
-                <a:latin typeface="Calibri"/>
-              </a:rPr>
-              <a:t>su propia transaccion</a:t>
-            </a:r>
-            <a:r>
-              <a:rPr sz="1900" b="0" i="0">
-                <a:solidFill>
-                  <a:srgbClr val="333333"/>
-                </a:solidFill>
-                <a:latin typeface="Calibri"/>
-              </a:rPr>
-              <a:t>. Si la excepcion se propaga hasta afuera del procedimiento, el motor deshace </a:t>
-            </a:r>
-            <a:r>
-              <a:rPr sz="1900" b="1" i="0">
-                <a:solidFill>
-                  <a:srgbClr val="333333"/>
-                </a:solidFill>
-                <a:latin typeface="Calibri"/>
-              </a:rPr>
-              <a:t>todo</a:t>
-            </a:r>
-            <a:r>
-              <a:rPr sz="1900" b="0" i="0">
-                <a:solidFill>
-                  <a:srgbClr val="333333"/>
-                </a:solidFill>
-                <a:latin typeface="Calibri"/>
-              </a:rPr>
-              <a:t> lo que ese «CALL» habia hecho: la cabecera de la factura, el detalle y el descuento del primer insumo. </a:t>
-            </a:r>
-            <a:r>
-              <a:rPr sz="1900" b="1" i="0">
-                <a:solidFill>
-                  <a:srgbClr val="333333"/>
-                </a:solidFill>
-                <a:latin typeface="Calibri"/>
-              </a:rPr>
-              <a:t>Nadie escribio ROLLBACK</a:t>
-            </a:r>
-            <a:r>
-              <a:rPr sz="1900" b="0" i="0">
-                <a:solidFill>
-                  <a:srgbClr val="333333"/>
-                </a:solidFill>
-                <a:latin typeface="Calibri"/>
-              </a:rPr>
-              <a:t> y la base queda intacta.</a:t>
+              <a:rPr sz="2000" b="1" i="0">
+                <a:solidFill>
+                  <a:srgbClr val="333333"/>
+                </a:solidFill>
+                <a:latin typeface="Calibri"/>
+              </a:rPr>
+              <a:t>Herramienta:</a:t>
+            </a:r>
+            <a:r>
+              <a:rPr sz="2000" b="0" i="0">
+                <a:solidFill>
+                  <a:srgbClr val="333333"/>
+                </a:solidFill>
+                <a:latin typeface="Calibri"/>
+              </a:rPr>
+              <a:t> PostgreSQL/PGlite</a:t>
             </a:r>
           </a:p>
           <a:p>
@@ -21207,7 +21491,7 @@
               </a:spcAft>
             </a:pPr>
             <a:r>
-              <a:rPr sz="1900" b="0" i="0">
+              <a:rPr sz="2000" b="0" i="0">
                 <a:solidFill>
                   <a:srgbClr val="333333"/>
                 </a:solidFill>
@@ -21216,58 +21500,22 @@
               <a:t>–   </a:t>
             </a:r>
             <a:r>
-              <a:rPr sz="1900" b="1" i="0">
-                <a:solidFill>
-                  <a:srgbClr val="333333"/>
-                </a:solidFill>
-                <a:latin typeface="Calibri"/>
-              </a:rPr>
-              <a:t>Y el savepoint que nadie declara.</a:t>
-            </a:r>
-            <a:r>
-              <a:rPr sz="1900" b="0" i="0">
-                <a:solidFill>
-                  <a:srgbClr val="333333"/>
-                </a:solidFill>
-                <a:latin typeface="Calibri"/>
-              </a:rPr>
-              <a:t> Un bloque «BEGIN ... EXCEPTION WHEN ... END» en PL/pgSQL crea un </a:t>
-            </a:r>
-            <a:r>
-              <a:rPr sz="1900" b="1" i="0">
-                <a:solidFill>
-                  <a:srgbClr val="333333"/>
-                </a:solidFill>
-                <a:latin typeface="Calibri"/>
-              </a:rPr>
-              <a:t>savepoint implicito</a:t>
-            </a:r>
-            <a:r>
-              <a:rPr sz="1900" b="0" i="0">
-                <a:solidFill>
-                  <a:srgbClr val="333333"/>
-                </a:solidFill>
-                <a:latin typeface="Calibri"/>
-              </a:rPr>
-              <a:t> al entrar. Por eso, si tu capturas el error, se revierte solo lo hecho </a:t>
-            </a:r>
-            <a:r>
-              <a:rPr sz="1900" b="1" i="0">
-                <a:solidFill>
-                  <a:srgbClr val="333333"/>
-                </a:solidFill>
-                <a:latin typeface="Calibri"/>
-              </a:rPr>
-              <a:t>dentro de ese bloque</a:t>
-            </a:r>
-            <a:r>
-              <a:rPr sz="1900" b="0" i="0">
-                <a:solidFill>
-                  <a:srgbClr val="333333"/>
-                </a:solidFill>
-                <a:latin typeface="Calibri"/>
-              </a:rPr>
-              <a:t> y el resto sigue vivo. Capturar no es lo mismo que dejar propagar.</a:t>
+              <a:rPr sz="2000" b="1" i="0">
+                <a:solidFill>
+                  <a:srgbClr val="333333"/>
+                </a:solidFill>
+                <a:latin typeface="Calibri"/>
+              </a:rPr>
+              <a:t>Demo:</a:t>
+            </a:r>
+            <a:r>
+              <a:rPr sz="2000" b="0" i="0">
+                <a:solidFill>
+                  <a:srgbClr val="333333"/>
+                </a:solidFill>
+                <a:latin typeface="Calibri"/>
+              </a:rPr>
+              <a:t> CALL sp_facturar(4, ARRAY[1,6,5], ARRAY[1,2,3]) que factura 27.400, y CALL sp_facturar(4, ARRAY[3,2], ARRAY[2,10]) que falla en la segunda linea: el stock del insumo 3 vuelve a 40 sin ROLLBACK escrito.</a:t>
             </a:r>
           </a:p>
           <a:p>
@@ -21277,7 +21525,23 @@
               </a:spcAft>
             </a:pPr>
             <a:r>
-              <a:rPr sz="1900" b="0" i="0">
+              <a:rPr sz="2000" b="0" i="0">
+                <a:solidFill>
+                  <a:srgbClr val="333333"/>
+                </a:solidFill>
+                <a:latin typeface="Calibri"/>
+              </a:rPr>
+              <a:t>–   Sigan el mismo dominio VetCare (no inventen otro caso).</a:t>
+            </a:r>
+          </a:p>
+          <a:p>
+            <a:pPr>
+              <a:spcAft>
+                <a:spcPts val="800"/>
+              </a:spcAft>
+            </a:pPr>
+            <a:r>
+              <a:rPr sz="2000" b="0" i="0">
                 <a:solidFill>
                   <a:srgbClr val="333333"/>
                 </a:solidFill>
@@ -21286,144 +21550,22 @@
               <a:t>–   </a:t>
             </a:r>
             <a:r>
-              <a:rPr sz="1900" b="1" i="0">
-                <a:solidFill>
-                  <a:srgbClr val="333333"/>
-                </a:solidFill>
-                <a:latin typeface="Calibri"/>
-              </a:rPr>
-              <a:t>El contraste con Oracle, que es lo que se pregunta.</a:t>
-            </a:r>
-            <a:r>
-              <a:rPr sz="1900" b="0" i="0">
-                <a:solidFill>
-                  <a:srgbClr val="333333"/>
-                </a:solidFill>
-                <a:latin typeface="Calibri"/>
-              </a:rPr>
-              <a:t> En Oracle el procedimiento es parte de la transaccion del llamador y ahi si se escribe «EXCEPTION WHEN OTHERS THEN ROLLBACK; RAISE;». En PostgreSQL ese «ROLLBACK» dentro de un procedimiento invocado por un «CALL» de nivel superior </a:t>
-            </a:r>
-            <a:r>
-              <a:rPr sz="1900" b="1" i="0">
-                <a:solidFill>
-                  <a:srgbClr val="333333"/>
-                </a:solidFill>
-                <a:latin typeface="Calibri"/>
-              </a:rPr>
-              <a:t>ni siquiera esta permitido</a:t>
-            </a:r>
-            <a:r>
-              <a:rPr sz="1900" b="0" i="0">
-                <a:solidFill>
-                  <a:srgbClr val="333333"/>
-                </a:solidFill>
-                <a:latin typeface="Calibri"/>
-              </a:rPr>
-              <a:t>.</a:t>
-            </a:r>
-          </a:p>
-          <a:p>
-            <a:pPr>
-              <a:spcAft>
-                <a:spcPts val="800"/>
-              </a:spcAft>
-            </a:pPr>
-            <a:r>
-              <a:rPr sz="1900" b="0" i="0">
-                <a:solidFill>
-                  <a:srgbClr val="333333"/>
-                </a:solidFill>
-                <a:latin typeface="Calibri"/>
-              </a:rPr>
-              <a:t>–   </a:t>
-            </a:r>
-            <a:r>
-              <a:rPr sz="1900" b="1" i="0">
-                <a:solidFill>
-                  <a:srgbClr val="333333"/>
-                </a:solidFill>
-                <a:latin typeface="Calibri"/>
-              </a:rPr>
-              <a:t>La consecuencia practica.</a:t>
-            </a:r>
-            <a:r>
-              <a:rPr sz="1900" b="0" i="0">
-                <a:solidFill>
-                  <a:srgbClr val="333333"/>
-                </a:solidFill>
-                <a:latin typeface="Calibri"/>
-              </a:rPr>
-              <a:t> Quien decide el «COMMIT» es </a:t>
-            </a:r>
-            <a:r>
-              <a:rPr sz="1900" b="1" i="0">
-                <a:solidFill>
-                  <a:srgbClr val="333333"/>
-                </a:solidFill>
-                <a:latin typeface="Calibri"/>
-              </a:rPr>
-              <a:t>uno solo</a:t>
-            </a:r>
-            <a:r>
-              <a:rPr sz="1900" b="0" i="0">
-                <a:solidFill>
-                  <a:srgbClr val="333333"/>
-                </a:solidFill>
-                <a:latin typeface="Calibri"/>
-              </a:rPr>
-              <a:t>: el llamador. Un procedimiento que confirma por su cuenta le quita al llamador la posibilidad de deshacer, y es la fuente numero uno de facturas a medias cuando la Clase 12 conecte la aplicacion.</a:t>
-            </a:r>
-          </a:p>
-          <a:p>
-            <a:pPr>
-              <a:spcAft>
-                <a:spcPts val="800"/>
-              </a:spcAft>
-            </a:pPr>
-            <a:r>
-              <a:rPr sz="1900" b="0" i="0">
-                <a:solidFill>
-                  <a:srgbClr val="333333"/>
-                </a:solidFill>
-                <a:latin typeface="Calibri"/>
-              </a:rPr>
-              <a:t>–   </a:t>
-            </a:r>
-            <a:r>
-              <a:rPr sz="1900" b="1" i="0">
-                <a:solidFill>
-                  <a:srgbClr val="333333"/>
-                </a:solidFill>
-                <a:latin typeface="Calibri"/>
-              </a:rPr>
-              <a:t>El error que no se perdona.</a:t>
-            </a:r>
-            <a:r>
-              <a:rPr sz="1900" b="0" i="0">
-                <a:solidFill>
-                  <a:srgbClr val="333333"/>
-                </a:solidFill>
-                <a:latin typeface="Calibri"/>
-              </a:rPr>
-              <a:t> Capturar la excepcion y no volver a lanzarla. «EXCEPTION WHEN OTHERS THEN NULL;» </a:t>
-            </a:r>
-            <a:r>
-              <a:rPr sz="1900" b="1" i="0">
-                <a:solidFill>
-                  <a:srgbClr val="333333"/>
-                </a:solidFill>
-                <a:latin typeface="Calibri"/>
-              </a:rPr>
-              <a:t>convierte el fallo en silencio</a:t>
-            </a:r>
-            <a:r>
-              <a:rPr sz="1900" b="0" i="0">
-                <a:solidFill>
-                  <a:srgbClr val="333333"/>
-                </a:solidFill>
-                <a:latin typeface="Calibri"/>
-              </a:rPr>
-              <a:t>: la factura queda registrada, el stock no se descuenta y nadie se entera hasta el inventario.</a:t>
+              <a:rPr sz="2000" b="1" i="0">
+                <a:solidFill>
+                  <a:srgbClr val="333333"/>
+                </a:solidFill>
+                <a:latin typeface="Calibri"/>
+              </a:rPr>
+              <a:t>Qué observar:</a:t>
+            </a:r>
+            <a:r>
+              <a:rPr sz="2000" b="0" i="0">
+                <a:solidFill>
+                  <a:srgbClr val="333333"/>
+                </a:solidFill>
+                <a:latin typeface="Calibri"/>
+              </a:rPr>
+              <a:t> la factura que falla a mitad no deja cabecera ni lineas, y el stock del insumo vuelve exactamente a su valor inicial.</a:t>
             </a:r>
           </a:p>
         </p:txBody>
@@ -21472,864 +21614,6 @@
 </file>
 
 <file path=ppt/slides/slide54.xml><?xml version="1.0" encoding="utf-8"?>
-<p:sld xmlns:a="http://schemas.openxmlformats.org/drawingml/2006/main" xmlns:p="http://schemas.openxmlformats.org/presentationml/2006/main" xmlns:r="http://schemas.openxmlformats.org/officeDocument/2006/relationships">
-  <p:cSld>
-    <p:bg>
-      <p:bgPr>
-        <a:solidFill>
-          <a:srgbClr val="FFFFFF"/>
-        </a:solidFill>
-        <a:effectLst/>
-      </p:bgPr>
-    </p:bg>
-    <p:spTree>
-      <p:nvGrpSpPr>
-        <p:cNvPr id="1" name=""/>
-        <p:cNvGrpSpPr/>
-        <p:nvPr/>
-      </p:nvGrpSpPr>
-      <p:grpSpPr/>
-      <p:sp>
-        <p:nvSpPr>
-          <p:cNvPr id="2" name="Rectangle 1"/>
-          <p:cNvSpPr/>
-          <p:nvPr/>
-        </p:nvSpPr>
-        <p:spPr>
-          <a:xfrm>
-            <a:off x="0" y="0"/>
-            <a:ext cx="12191695" cy="960120"/>
-          </a:xfrm>
-          <a:prstGeom prst="rect">
-            <a:avLst/>
-          </a:prstGeom>
-          <a:solidFill>
-            <a:srgbClr val="095292"/>
-          </a:solidFill>
-          <a:ln>
-            <a:noFill/>
-          </a:ln>
-        </p:spPr>
-        <p:style>
-          <a:lnRef idx="1">
-            <a:schemeClr val="accent1"/>
-          </a:lnRef>
-          <a:fillRef idx="3">
-            <a:schemeClr val="accent1"/>
-          </a:fillRef>
-          <a:effectRef idx="2">
-            <a:schemeClr val="accent1"/>
-          </a:effectRef>
-          <a:fontRef idx="minor">
-            <a:schemeClr val="lt1"/>
-          </a:fontRef>
-        </p:style>
-        <p:txBody>
-          <a:bodyPr rtlCol="0" anchor="ctr"/>
-          <a:lstStyle/>
-          <a:p>
-            <a:pPr algn="ctr"/>
-          </a:p>
-        </p:txBody>
-      </p:sp>
-      <p:sp>
-        <p:nvSpPr>
-          <p:cNvPr id="3" name="Rectangle 2"/>
-          <p:cNvSpPr/>
-          <p:nvPr/>
-        </p:nvSpPr>
-        <p:spPr>
-          <a:xfrm>
-            <a:off x="0" y="960120"/>
-            <a:ext cx="12191695" cy="41148"/>
-          </a:xfrm>
-          <a:prstGeom prst="rect">
-            <a:avLst/>
-          </a:prstGeom>
-          <a:solidFill>
-            <a:srgbClr val="FFD000"/>
-          </a:solidFill>
-          <a:ln>
-            <a:noFill/>
-          </a:ln>
-        </p:spPr>
-        <p:style>
-          <a:lnRef idx="1">
-            <a:schemeClr val="accent1"/>
-          </a:lnRef>
-          <a:fillRef idx="3">
-            <a:schemeClr val="accent1"/>
-          </a:fillRef>
-          <a:effectRef idx="2">
-            <a:schemeClr val="accent1"/>
-          </a:effectRef>
-          <a:fontRef idx="minor">
-            <a:schemeClr val="lt1"/>
-          </a:fontRef>
-        </p:style>
-        <p:txBody>
-          <a:bodyPr rtlCol="0" anchor="ctr"/>
-          <a:lstStyle/>
-          <a:p>
-            <a:pPr algn="ctr"/>
-          </a:p>
-        </p:txBody>
-      </p:sp>
-      <p:sp>
-        <p:nvSpPr>
-          <p:cNvPr id="4" name="TextBox 3"/>
-          <p:cNvSpPr txBox="1"/>
-          <p:nvPr/>
-        </p:nvSpPr>
-        <p:spPr>
-          <a:xfrm>
-            <a:off x="457200" y="164592"/>
-            <a:ext cx="11277295" cy="502920"/>
-          </a:xfrm>
-          <a:prstGeom prst="rect">
-            <a:avLst/>
-          </a:prstGeom>
-          <a:noFill/>
-        </p:spPr>
-        <p:txBody>
-          <a:bodyPr wrap="square">
-            <a:spAutoFit/>
-          </a:bodyPr>
-          <a:lstStyle/>
-          <a:p>
-            <a:r>
-              <a:rPr sz="2600" b="1" i="0">
-                <a:solidFill>
-                  <a:srgbClr val="FFFFFF"/>
-                </a:solidFill>
-                <a:latin typeface="Calibri"/>
-              </a:rPr>
-              <a:t>fn_descontar_stock: cuando «no hay stock» es una respuesta, no un error</a:t>
-            </a:r>
-          </a:p>
-        </p:txBody>
-      </p:sp>
-      <p:sp>
-        <p:nvSpPr>
-          <p:cNvPr id="5" name="TextBox 4"/>
-          <p:cNvSpPr txBox="1"/>
-          <p:nvPr/>
-        </p:nvSpPr>
-        <p:spPr>
-          <a:xfrm>
-            <a:off x="457200" y="1170432"/>
-            <a:ext cx="11277295" cy="5230368"/>
-          </a:xfrm>
-          <a:prstGeom prst="rect">
-            <a:avLst/>
-          </a:prstGeom>
-          <a:noFill/>
-        </p:spPr>
-        <p:txBody>
-          <a:bodyPr wrap="square">
-            <a:spAutoFit/>
-          </a:bodyPr>
-          <a:lstStyle/>
-          <a:p>
-            <a:pPr>
-              <a:spcAft>
-                <a:spcPts val="800"/>
-              </a:spcAft>
-            </a:pPr>
-            <a:r>
-              <a:rPr sz="1900" b="0" i="0">
-                <a:solidFill>
-                  <a:srgbClr val="333333"/>
-                </a:solidFill>
-                <a:latin typeface="Calibri"/>
-              </a:rPr>
-              <a:t>–   </a:t>
-            </a:r>
-            <a:r>
-              <a:rPr sz="1900" b="1" i="0">
-                <a:solidFill>
-                  <a:srgbClr val="333333"/>
-                </a:solidFill>
-                <a:latin typeface="Calibri"/>
-              </a:rPr>
-              <a:t>La diferencia.</a:t>
-            </a:r>
-            <a:r>
-              <a:rPr sz="1900" b="0" i="0">
-                <a:solidFill>
-                  <a:srgbClr val="333333"/>
-                </a:solidFill>
-                <a:latin typeface="Calibri"/>
-              </a:rPr>
-              <a:t> El procedimiento </a:t>
-            </a:r>
-            <a:r>
-              <a:rPr sz="1900" b="1" i="0">
-                <a:solidFill>
-                  <a:srgbClr val="333333"/>
-                </a:solidFill>
-                <a:latin typeface="Calibri"/>
-              </a:rPr>
-              <a:t>aborta</a:t>
-            </a:r>
-            <a:r>
-              <a:rPr sz="1900" b="0" i="0">
-                <a:solidFill>
-                  <a:srgbClr val="333333"/>
-                </a:solidFill>
-                <a:latin typeface="Calibri"/>
-              </a:rPr>
-              <a:t> la factura completa; la funcion </a:t>
-            </a:r>
-            <a:r>
-              <a:rPr sz="1900" b="1" i="0">
-                <a:solidFill>
-                  <a:srgbClr val="333333"/>
-                </a:solidFill>
-                <a:latin typeface="Calibri"/>
-              </a:rPr>
-              <a:t>informa</a:t>
-            </a:r>
-            <a:r>
-              <a:rPr sz="1900" b="0" i="0">
-                <a:solidFill>
-                  <a:srgbClr val="333333"/>
-                </a:solidFill>
-                <a:latin typeface="Calibri"/>
-              </a:rPr>
-              <a:t> y deja que el llamador decida. La misma regla de negocio, dos contratos distintos, y hay que saber cual se pide.</a:t>
-            </a:r>
-          </a:p>
-          <a:p>
-            <a:pPr>
-              <a:spcAft>
-                <a:spcPts val="800"/>
-              </a:spcAft>
-            </a:pPr>
-            <a:r>
-              <a:rPr sz="1900" b="0" i="0">
-                <a:solidFill>
-                  <a:srgbClr val="333333"/>
-                </a:solidFill>
-                <a:latin typeface="Calibri"/>
-              </a:rPr>
-              <a:t>–   </a:t>
-            </a:r>
-            <a:r>
-              <a:rPr sz="1900" b="1" i="0">
-                <a:solidFill>
-                  <a:srgbClr val="333333"/>
-                </a:solidFill>
-                <a:latin typeface="Calibri"/>
-              </a:rPr>
-              <a:t>La firma, y su palabra clave.</a:t>
-            </a:r>
-            <a:r>
-              <a:rPr sz="1900" b="0" i="0">
-                <a:solidFill>
-                  <a:srgbClr val="333333"/>
-                </a:solidFill>
-                <a:latin typeface="Calibri"/>
-              </a:rPr>
-              <a:t> «CREATE OR REPLACE FUNCTION fn_descontar_stock(p_id_insumo INT, p_cantidad INT) RETURNS BOOLEAN LANGUAGE plpgsql AS $$ ...» — </a:t>
-            </a:r>
-            <a:r>
-              <a:rPr sz="1900" b="1" i="0">
-                <a:solidFill>
-                  <a:srgbClr val="333333"/>
-                </a:solidFill>
-                <a:latin typeface="Calibri"/>
-              </a:rPr>
-              <a:t>«RETURNS BOOLEAN»</a:t>
-            </a:r>
-            <a:r>
-              <a:rPr sz="1900" b="0" i="0">
-                <a:solidFill>
-                  <a:srgbClr val="333333"/>
-                </a:solidFill>
-                <a:latin typeface="Calibri"/>
-              </a:rPr>
-              <a:t>, no «PROCEDURE». Devuelve «TRUE» si desconto y «FALSE» si no habia suficiente, </a:t>
-            </a:r>
-            <a:r>
-              <a:rPr sz="1900" b="1" i="0">
-                <a:solidFill>
-                  <a:srgbClr val="333333"/>
-                </a:solidFill>
-                <a:latin typeface="Calibri"/>
-              </a:rPr>
-              <a:t>sin lanzar excepcion</a:t>
-            </a:r>
-            <a:r>
-              <a:rPr sz="1900" b="0" i="0">
-                <a:solidFill>
-                  <a:srgbClr val="333333"/>
-                </a:solidFill>
-                <a:latin typeface="Calibri"/>
-              </a:rPr>
-              <a:t> en ese segundo caso.</a:t>
-            </a:r>
-          </a:p>
-          <a:p>
-            <a:pPr>
-              <a:spcAft>
-                <a:spcPts val="800"/>
-              </a:spcAft>
-            </a:pPr>
-            <a:r>
-              <a:rPr sz="1900" b="0" i="0">
-                <a:solidFill>
-                  <a:srgbClr val="333333"/>
-                </a:solidFill>
-                <a:latin typeface="Calibri"/>
-              </a:rPr>
-              <a:t>–   </a:t>
-            </a:r>
-            <a:r>
-              <a:rPr sz="1900" b="1" i="0">
-                <a:solidFill>
-                  <a:srgbClr val="333333"/>
-                </a:solidFill>
-                <a:latin typeface="Calibri"/>
-              </a:rPr>
-              <a:t>Lo que si es un error.</a:t>
-            </a:r>
-            <a:r>
-              <a:rPr sz="1900" b="0" i="0">
-                <a:solidFill>
-                  <a:srgbClr val="333333"/>
-                </a:solidFill>
-                <a:latin typeface="Calibri"/>
-              </a:rPr>
-              <a:t> Una cantidad negativa o cero no es «no hay stock», es una llamada mal hecha: eso </a:t>
-            </a:r>
-            <a:r>
-              <a:rPr sz="1900" b="1" i="0">
-                <a:solidFill>
-                  <a:srgbClr val="333333"/>
-                </a:solidFill>
-                <a:latin typeface="Calibri"/>
-              </a:rPr>
-              <a:t>si</a:t>
-            </a:r>
-            <a:r>
-              <a:rPr sz="1900" b="0" i="0">
-                <a:solidFill>
-                  <a:srgbClr val="333333"/>
-                </a:solidFill>
-                <a:latin typeface="Calibri"/>
-              </a:rPr>
-              <a:t> va con «RAISE EXCEPTION». Distinguir el dato invalido del resultado negativo es la mitad de la pregunta.</a:t>
-            </a:r>
-          </a:p>
-          <a:p>
-            <a:pPr>
-              <a:spcAft>
-                <a:spcPts val="800"/>
-              </a:spcAft>
-            </a:pPr>
-            <a:r>
-              <a:rPr sz="1900" b="0" i="0">
-                <a:solidFill>
-                  <a:srgbClr val="333333"/>
-                </a:solidFill>
-                <a:latin typeface="Calibri"/>
-              </a:rPr>
-              <a:t>–   </a:t>
-            </a:r>
-            <a:r>
-              <a:rPr sz="1900" b="1" i="0">
-                <a:solidFill>
-                  <a:srgbClr val="333333"/>
-                </a:solidFill>
-                <a:latin typeface="Calibri"/>
-              </a:rPr>
-              <a:t>Se prueba en una sola consulta.</a:t>
-            </a:r>
-            <a:r>
-              <a:rPr sz="1900" b="0" i="0">
-                <a:solidFill>
-                  <a:srgbClr val="333333"/>
-                </a:solidFill>
-                <a:latin typeface="Calibri"/>
-              </a:rPr>
-              <a:t> «SELECT fn_descontar_stock(5,3) AS caso_ok, fn_descontar_stock(2,10) AS caso_sin_stock, fn_descontar_stock(2,3) AS caso_limite;» -&gt; </a:t>
-            </a:r>
-            <a:r>
-              <a:rPr sz="1900" b="1" i="0">
-                <a:solidFill>
-                  <a:srgbClr val="333333"/>
-                </a:solidFill>
-                <a:latin typeface="Calibri"/>
-              </a:rPr>
-              <a:t>«true», «false», «true»</a:t>
-            </a:r>
-            <a:r>
-              <a:rPr sz="1900" b="0" i="0">
-                <a:solidFill>
-                  <a:srgbClr val="333333"/>
-                </a:solidFill>
-                <a:latin typeface="Calibri"/>
-              </a:rPr>
-              <a:t>. El tercer caso es el interesante: pide </a:t>
-            </a:r>
-            <a:r>
-              <a:rPr sz="1900" b="1" i="0">
-                <a:solidFill>
-                  <a:srgbClr val="333333"/>
-                </a:solidFill>
-                <a:latin typeface="Calibri"/>
-              </a:rPr>
-              <a:t>exactamente</a:t>
-            </a:r>
-            <a:r>
-              <a:rPr sz="1900" b="0" i="0">
-                <a:solidFill>
-                  <a:srgbClr val="333333"/>
-                </a:solidFill>
-                <a:latin typeface="Calibri"/>
-              </a:rPr>
-              <a:t> el stock que queda, y con «&gt;=» en el guardia tiene que pasar.</a:t>
-            </a:r>
-          </a:p>
-          <a:p>
-            <a:pPr>
-              <a:spcAft>
-                <a:spcPts val="800"/>
-              </a:spcAft>
-            </a:pPr>
-            <a:r>
-              <a:rPr sz="1900" b="0" i="0">
-                <a:solidFill>
-                  <a:srgbClr val="333333"/>
-                </a:solidFill>
-                <a:latin typeface="Calibri"/>
-              </a:rPr>
-              <a:t>–   </a:t>
-            </a:r>
-            <a:r>
-              <a:rPr sz="1900" b="1" i="0">
-                <a:solidFill>
-                  <a:srgbClr val="333333"/>
-                </a:solidFill>
-                <a:latin typeface="Calibri"/>
-              </a:rPr>
-              <a:t>Por que no leer primero.</a:t>
-            </a:r>
-            <a:r>
-              <a:rPr sz="1900" b="0" i="0">
-                <a:solidFill>
-                  <a:srgbClr val="333333"/>
-                </a:solidFill>
-                <a:latin typeface="Calibri"/>
-              </a:rPr>
-              <a:t> «SELECT stock ...; IF stock &gt;= cantidad THEN UPDATE ...» deja una </a:t>
-            </a:r>
-            <a:r>
-              <a:rPr sz="1900" b="1" i="0">
-                <a:solidFill>
-                  <a:srgbClr val="333333"/>
-                </a:solidFill>
-                <a:latin typeface="Calibri"/>
-              </a:rPr>
-              <a:t>ventana</a:t>
-            </a:r>
-            <a:r>
-              <a:rPr sz="1900" b="0" i="0">
-                <a:solidFill>
-                  <a:srgbClr val="333333"/>
-                </a:solidFill>
-                <a:latin typeface="Calibri"/>
-              </a:rPr>
-              <a:t> entre la lectura y la escritura, y con dos recepcionistas facturando el mismo insumo las dos leen 3, las dos deciden que alcanza y el stock termina en </a:t>
-            </a:r>
-            <a:r>
-              <a:rPr sz="1900" b="1" i="0">
-                <a:solidFill>
-                  <a:srgbClr val="333333"/>
-                </a:solidFill>
-                <a:latin typeface="Calibri"/>
-              </a:rPr>
-              <a:t>-2</a:t>
-            </a:r>
-            <a:r>
-              <a:rPr sz="1900" b="0" i="0">
-                <a:solidFill>
-                  <a:srgbClr val="333333"/>
-                </a:solidFill>
-                <a:latin typeface="Calibri"/>
-              </a:rPr>
-              <a:t>. El «UPDATE» con la condicion en el «WHERE» no tiene ventana. Aqui no se puede demostrar —PGlite corre </a:t>
-            </a:r>
-            <a:r>
-              <a:rPr sz="1900" b="1" i="0">
-                <a:solidFill>
-                  <a:srgbClr val="333333"/>
-                </a:solidFill>
-                <a:latin typeface="Calibri"/>
-              </a:rPr>
-              <a:t>una sola sesion</a:t>
-            </a:r>
-            <a:r>
-              <a:rPr sz="1900" b="0" i="0">
-                <a:solidFill>
-                  <a:srgbClr val="333333"/>
-                </a:solidFill>
-                <a:latin typeface="Calibri"/>
-              </a:rPr>
-              <a:t>— y ese es el gap que se declara y que abre la Clase 10.</a:t>
-            </a:r>
-          </a:p>
-        </p:txBody>
-      </p:sp>
-      <p:sp>
-        <p:nvSpPr>
-          <p:cNvPr id="6" name="TextBox 5"/>
-          <p:cNvSpPr txBox="1"/>
-          <p:nvPr/>
-        </p:nvSpPr>
-        <p:spPr>
-          <a:xfrm>
-            <a:off x="11185855" y="6473952"/>
-            <a:ext cx="640080" cy="274320"/>
-          </a:xfrm>
-          <a:prstGeom prst="rect">
-            <a:avLst/>
-          </a:prstGeom>
-          <a:noFill/>
-        </p:spPr>
-        <p:txBody>
-          <a:bodyPr wrap="square">
-            <a:spAutoFit/>
-          </a:bodyPr>
-          <a:lstStyle/>
-          <a:p>
-            <a:pPr algn="r"/>
-            <a:r>
-              <a:rPr sz="1100" b="0" i="0">
-                <a:solidFill>
-                  <a:srgbClr val="666666"/>
-                </a:solidFill>
-                <a:latin typeface="Calibri"/>
-              </a:rPr>
-              <a:t>54</a:t>
-            </a:r>
-          </a:p>
-        </p:txBody>
-      </p:sp>
-    </p:spTree>
-  </p:cSld>
-  <p:clrMapOvr>
-    <a:masterClrMapping/>
-  </p:clrMapOvr>
-</p:sld>
-</file>
-
-<file path=ppt/slides/slide55.xml><?xml version="1.0" encoding="utf-8"?>
-<p:sld xmlns:a="http://schemas.openxmlformats.org/drawingml/2006/main" xmlns:p="http://schemas.openxmlformats.org/presentationml/2006/main" xmlns:r="http://schemas.openxmlformats.org/officeDocument/2006/relationships">
-  <p:cSld>
-    <p:bg>
-      <p:bgPr>
-        <a:solidFill>
-          <a:srgbClr val="FFFFFF"/>
-        </a:solidFill>
-        <a:effectLst/>
-      </p:bgPr>
-    </p:bg>
-    <p:spTree>
-      <p:nvGrpSpPr>
-        <p:cNvPr id="1" name=""/>
-        <p:cNvGrpSpPr/>
-        <p:nvPr/>
-      </p:nvGrpSpPr>
-      <p:grpSpPr/>
-      <p:sp>
-        <p:nvSpPr>
-          <p:cNvPr id="2" name="Rectangle 1"/>
-          <p:cNvSpPr/>
-          <p:nvPr/>
-        </p:nvSpPr>
-        <p:spPr>
-          <a:xfrm>
-            <a:off x="0" y="0"/>
-            <a:ext cx="12191695" cy="960120"/>
-          </a:xfrm>
-          <a:prstGeom prst="rect">
-            <a:avLst/>
-          </a:prstGeom>
-          <a:solidFill>
-            <a:srgbClr val="095292"/>
-          </a:solidFill>
-          <a:ln>
-            <a:noFill/>
-          </a:ln>
-        </p:spPr>
-        <p:style>
-          <a:lnRef idx="1">
-            <a:schemeClr val="accent1"/>
-          </a:lnRef>
-          <a:fillRef idx="3">
-            <a:schemeClr val="accent1"/>
-          </a:fillRef>
-          <a:effectRef idx="2">
-            <a:schemeClr val="accent1"/>
-          </a:effectRef>
-          <a:fontRef idx="minor">
-            <a:schemeClr val="lt1"/>
-          </a:fontRef>
-        </p:style>
-        <p:txBody>
-          <a:bodyPr rtlCol="0" anchor="ctr"/>
-          <a:lstStyle/>
-          <a:p>
-            <a:pPr algn="ctr"/>
-          </a:p>
-        </p:txBody>
-      </p:sp>
-      <p:sp>
-        <p:nvSpPr>
-          <p:cNvPr id="3" name="Rectangle 2"/>
-          <p:cNvSpPr/>
-          <p:nvPr/>
-        </p:nvSpPr>
-        <p:spPr>
-          <a:xfrm>
-            <a:off x="0" y="960120"/>
-            <a:ext cx="12191695" cy="41148"/>
-          </a:xfrm>
-          <a:prstGeom prst="rect">
-            <a:avLst/>
-          </a:prstGeom>
-          <a:solidFill>
-            <a:srgbClr val="FFD000"/>
-          </a:solidFill>
-          <a:ln>
-            <a:noFill/>
-          </a:ln>
-        </p:spPr>
-        <p:style>
-          <a:lnRef idx="1">
-            <a:schemeClr val="accent1"/>
-          </a:lnRef>
-          <a:fillRef idx="3">
-            <a:schemeClr val="accent1"/>
-          </a:fillRef>
-          <a:effectRef idx="2">
-            <a:schemeClr val="accent1"/>
-          </a:effectRef>
-          <a:fontRef idx="minor">
-            <a:schemeClr val="lt1"/>
-          </a:fontRef>
-        </p:style>
-        <p:txBody>
-          <a:bodyPr rtlCol="0" anchor="ctr"/>
-          <a:lstStyle/>
-          <a:p>
-            <a:pPr algn="ctr"/>
-          </a:p>
-        </p:txBody>
-      </p:sp>
-      <p:sp>
-        <p:nvSpPr>
-          <p:cNvPr id="4" name="TextBox 3"/>
-          <p:cNvSpPr txBox="1"/>
-          <p:nvPr/>
-        </p:nvSpPr>
-        <p:spPr>
-          <a:xfrm>
-            <a:off x="457200" y="164592"/>
-            <a:ext cx="11277295" cy="502920"/>
-          </a:xfrm>
-          <a:prstGeom prst="rect">
-            <a:avLst/>
-          </a:prstGeom>
-          <a:noFill/>
-        </p:spPr>
-        <p:txBody>
-          <a:bodyPr wrap="square">
-            <a:spAutoFit/>
-          </a:bodyPr>
-          <a:lstStyle/>
-          <a:p>
-            <a:r>
-              <a:rPr sz="2600" b="1" i="0">
-                <a:solidFill>
-                  <a:srgbClr val="FFFFFF"/>
-                </a:solidFill>
-                <a:latin typeface="Calibri"/>
-              </a:rPr>
-              <a:t>Demo del dia</a:t>
-            </a:r>
-          </a:p>
-        </p:txBody>
-      </p:sp>
-      <p:sp>
-        <p:nvSpPr>
-          <p:cNvPr id="5" name="TextBox 4"/>
-          <p:cNvSpPr txBox="1"/>
-          <p:nvPr/>
-        </p:nvSpPr>
-        <p:spPr>
-          <a:xfrm>
-            <a:off x="457200" y="1170432"/>
-            <a:ext cx="11277295" cy="5230368"/>
-          </a:xfrm>
-          <a:prstGeom prst="rect">
-            <a:avLst/>
-          </a:prstGeom>
-          <a:noFill/>
-        </p:spPr>
-        <p:txBody>
-          <a:bodyPr wrap="square">
-            <a:spAutoFit/>
-          </a:bodyPr>
-          <a:lstStyle/>
-          <a:p>
-            <a:pPr>
-              <a:spcAft>
-                <a:spcPts val="800"/>
-              </a:spcAft>
-            </a:pPr>
-            <a:r>
-              <a:rPr sz="2000" b="0" i="0">
-                <a:solidFill>
-                  <a:srgbClr val="333333"/>
-                </a:solidFill>
-                <a:latin typeface="Calibri"/>
-              </a:rPr>
-              <a:t>–   </a:t>
-            </a:r>
-            <a:r>
-              <a:rPr sz="2000" b="1" i="0">
-                <a:solidFill>
-                  <a:srgbClr val="333333"/>
-                </a:solidFill>
-                <a:latin typeface="Calibri"/>
-              </a:rPr>
-              <a:t>Herramienta:</a:t>
-            </a:r>
-            <a:r>
-              <a:rPr sz="2000" b="0" i="0">
-                <a:solidFill>
-                  <a:srgbClr val="333333"/>
-                </a:solidFill>
-                <a:latin typeface="Calibri"/>
-              </a:rPr>
-              <a:t> PostgreSQL/PGlite</a:t>
-            </a:r>
-          </a:p>
-          <a:p>
-            <a:pPr>
-              <a:spcAft>
-                <a:spcPts val="800"/>
-              </a:spcAft>
-            </a:pPr>
-            <a:r>
-              <a:rPr sz="2000" b="0" i="0">
-                <a:solidFill>
-                  <a:srgbClr val="333333"/>
-                </a:solidFill>
-                <a:latin typeface="Calibri"/>
-              </a:rPr>
-              <a:t>–   </a:t>
-            </a:r>
-            <a:r>
-              <a:rPr sz="2000" b="1" i="0">
-                <a:solidFill>
-                  <a:srgbClr val="333333"/>
-                </a:solidFill>
-                <a:latin typeface="Calibri"/>
-              </a:rPr>
-              <a:t>Demo:</a:t>
-            </a:r>
-            <a:r>
-              <a:rPr sz="2000" b="0" i="0">
-                <a:solidFill>
-                  <a:srgbClr val="333333"/>
-                </a:solidFill>
-                <a:latin typeface="Calibri"/>
-              </a:rPr>
-              <a:t> CALL sp_facturar(4, ARRAY[1,6,5], ARRAY[1,2,3]) que factura 27.400, y CALL sp_facturar(4, ARRAY[3,2], ARRAY[2,10]) que falla en la segunda linea: el stock del insumo 3 vuelve a 40 sin ROLLBACK escrito.</a:t>
-            </a:r>
-          </a:p>
-          <a:p>
-            <a:pPr>
-              <a:spcAft>
-                <a:spcPts val="800"/>
-              </a:spcAft>
-            </a:pPr>
-            <a:r>
-              <a:rPr sz="2000" b="0" i="0">
-                <a:solidFill>
-                  <a:srgbClr val="333333"/>
-                </a:solidFill>
-                <a:latin typeface="Calibri"/>
-              </a:rPr>
-              <a:t>–   Sigan el mismo dominio VetCare (no inventen otro caso).</a:t>
-            </a:r>
-          </a:p>
-          <a:p>
-            <a:pPr>
-              <a:spcAft>
-                <a:spcPts val="800"/>
-              </a:spcAft>
-            </a:pPr>
-            <a:r>
-              <a:rPr sz="2000" b="0" i="0">
-                <a:solidFill>
-                  <a:srgbClr val="333333"/>
-                </a:solidFill>
-                <a:latin typeface="Calibri"/>
-              </a:rPr>
-              <a:t>–   Al final de la demo: dejar enlace/script compartible al grupo.</a:t>
-            </a:r>
-          </a:p>
-        </p:txBody>
-      </p:sp>
-      <p:sp>
-        <p:nvSpPr>
-          <p:cNvPr id="6" name="TextBox 5"/>
-          <p:cNvSpPr txBox="1"/>
-          <p:nvPr/>
-        </p:nvSpPr>
-        <p:spPr>
-          <a:xfrm>
-            <a:off x="11185855" y="6473952"/>
-            <a:ext cx="640080" cy="274320"/>
-          </a:xfrm>
-          <a:prstGeom prst="rect">
-            <a:avLst/>
-          </a:prstGeom>
-          <a:noFill/>
-        </p:spPr>
-        <p:txBody>
-          <a:bodyPr wrap="square">
-            <a:spAutoFit/>
-          </a:bodyPr>
-          <a:lstStyle/>
-          <a:p>
-            <a:pPr algn="r"/>
-            <a:r>
-              <a:rPr sz="1100" b="0" i="0">
-                <a:solidFill>
-                  <a:srgbClr val="666666"/>
-                </a:solidFill>
-                <a:latin typeface="Calibri"/>
-              </a:rPr>
-              <a:t>55</a:t>
-            </a:r>
-          </a:p>
-        </p:txBody>
-      </p:sp>
-    </p:spTree>
-  </p:cSld>
-  <p:clrMapOvr>
-    <a:masterClrMapping/>
-  </p:clrMapOvr>
-</p:sld>
-</file>
-
-<file path=ppt/slides/slide56.xml><?xml version="1.0" encoding="utf-8"?>
 <p:sld xmlns:a="http://schemas.openxmlformats.org/drawingml/2006/main" xmlns:p="http://schemas.openxmlformats.org/presentationml/2006/main" xmlns:r="http://schemas.openxmlformats.org/officeDocument/2006/relationships">
   <p:cSld>
     <p:bg>

--- a/Bases de Datos II/Clases/Clase 8 - Tuning y transacciones/Presentacion.pptx
+++ b/Bases de Datos II/Clases/Clase 8 - Tuning y transacciones/Presentacion.pptx
@@ -4970,7 +4970,7 @@
                 </a:solidFill>
                 <a:latin typeface="Calibri"/>
               </a:rPr>
-              <a:t>Tuning · Transacciones · VetCare</a:t>
+              <a:t>Tuning · Transacciones · la clínica</a:t>
             </a:r>
           </a:p>
         </p:txBody>
@@ -8238,7 +8238,7 @@
                 </a:solidFill>
                 <a:latin typeface="Calibri"/>
               </a:rPr>
-              <a:t> Tuning · Transacciones · VetCare</a:t>
+              <a:t> Tuning · Transacciones · la clínica</a:t>
             </a:r>
           </a:p>
           <a:p>
@@ -8313,7 +8313,7 @@
                 </a:solidFill>
                 <a:latin typeface="Calibri"/>
               </a:rPr>
-              <a:t>–   Recorrido: teoría del tema, una lámina por concepto, y demo del docente sobre VetCare DB.</a:t>
+              <a:t>–   Recorrido: teoría del tema, una lámina por concepto, y demo del docente sobre la base de la clínica.</a:t>
             </a:r>
           </a:p>
           <a:p>
@@ -9871,7 +9871,7 @@
                 </a:solidFill>
                 <a:latin typeface="Calibri"/>
               </a:rPr>
-              <a:t>–   En VetCare serviria para una factura de cinco lineas donde el insumo de la tercera esta agotado: se deshace esa linea, se avisa y se cobran las otras cuatro.</a:t>
+              <a:t>–   En la clínica serviria para una factura de cinco lineas donde el insumo de la tercera esta agotado: se deshace esa linea, se avisa y se cobran las otras cuatro.</a:t>
             </a:r>
           </a:p>
         </p:txBody>
@@ -11622,7 +11622,7 @@
                 </a:solidFill>
                 <a:latin typeface="Calibri"/>
               </a:rPr>
-              <a:t>Encuadre · clase regular · VetCare</a:t>
+              <a:t>Encuadre · clase regular · la clínica</a:t>
             </a:r>
           </a:p>
         </p:txBody>
@@ -11737,7 +11737,7 @@
                 </a:solidFill>
                 <a:latin typeface="Calibri"/>
               </a:rPr>
-              <a:t>Teoría Core breve (al servicio del PI)</a:t>
+              <a:t>Teoría Core breve (al servicio del proyecto)</a:t>
             </a:r>
           </a:p>
         </p:txBody>
@@ -15007,7 +15007,7 @@
                 </a:solidFill>
                 <a:latin typeface="Calibri"/>
               </a:rPr>
-              <a:t>–   La demo es el script Codigo/08_transacciones_vetcare.sql y se corre.</a:t>
+              <a:t>–   La demo es el script Codigo/08_transacciones_clinica.sql y se corre.</a:t>
             </a:r>
           </a:p>
           <a:p>
@@ -15371,7 +15371,7 @@
                 </a:solidFill>
                 <a:latin typeface="Calibri"/>
               </a:rPr>
-              <a:t>–   El ejemplo del PI es la facturacion de una consulta: se inserta la cabecera en factura, se insertan las lineas en detalle_factura y se descuenta el stock de cada insumo.</a:t>
+              <a:t>–   El ejemplo del proyecto es la facturacion de una consulta: se inserta la cabecera en factura, se insertan las lineas en detalle_factura y se descuenta el stock de cada insumo.</a:t>
             </a:r>
           </a:p>
         </p:txBody>
@@ -21531,7 +21531,7 @@
                 </a:solidFill>
                 <a:latin typeface="Calibri"/>
               </a:rPr>
-              <a:t>–   Sigan el mismo dominio VetCare (no inventen otro caso).</a:t>
+              <a:t>–   Sigan el mismo dominio de la clínica (no inventen otro caso).</a:t>
             </a:r>
           </a:p>
           <a:p>
@@ -21726,7 +21726,7 @@
                 </a:solidFill>
                 <a:latin typeface="Calibri"/>
               </a:rPr>
-              <a:t>Clase 8 · Tuning · Transacciones · VetCare</a:t>
+              <a:t>Clase 8 · Tuning · Transacciones · la clínica</a:t>
             </a:r>
           </a:p>
         </p:txBody>
@@ -22350,7 +22350,7 @@
                 </a:solidFill>
                 <a:latin typeface="Calibri"/>
               </a:rPr>
-              <a:t>Atomicidad: el fallo concreto en VetCare</a:t>
+              <a:t>Atomicidad: el fallo concreto en la clínica</a:t>
             </a:r>
           </a:p>
         </p:txBody>
@@ -22405,7 +22405,7 @@
                 </a:solidFill>
                 <a:latin typeface="Calibri"/>
               </a:rPr>
-              <a:t>–   El fallo concreto en VetCare cuando falta: se ejecuta el INSERT en factura, se ejecuta el INSERT de la primera linea en detalle_factura, se descuenta el stock de ese primer insumo y justo antes de la segunda linea se cae la red del consultorio.</a:t>
+              <a:t>–   El fallo concreto en la clínica cuando falta: se ejecuta el INSERT en factura, se ejecuta el INSERT de la primera linea en detalle_factura, se descuenta el stock de ese primer insumo y justo antes de la segunda linea se cae la red del consultorio.</a:t>
             </a:r>
           </a:p>
           <a:p>
@@ -22618,7 +22618,7 @@
                 </a:solidFill>
                 <a:latin typeface="Calibri"/>
               </a:rPr>
-              <a:t>Atomicidad: el fallo concreto en VetCare — sintaxis</a:t>
+              <a:t>Atomicidad: el fallo concreto en la clínica — sintaxis</a:t>
             </a:r>
           </a:p>
         </p:txBody>
@@ -23045,7 +23045,23 @@
                 </a:solidFill>
                 <a:latin typeface="Calibri"/>
               </a:rPr>
-              <a:t>–   El fallo concreto: la regla de VetCare dice que el stock de un insumo nunca queda negativo, pero si la tabla insumo no tiene la restriccion y la aplicacion factura 10 unidades de las 3 disponibles del insumo 2</a:t>
+              <a:t>–   El fallo concreto: la regla de la clínica dice que el stock de un insumo nunca queda negativo</a:t>
+            </a:r>
+          </a:p>
+          <a:p>
+            <a:pPr>
+              <a:spcAft>
+                <a:spcPts val="800"/>
+              </a:spcAft>
+            </a:pPr>
+            <a:r>
+              <a:rPr sz="2000" b="0" i="0">
+                <a:solidFill>
+                  <a:srgbClr val="333333"/>
+                </a:solidFill>
+                <a:latin typeface="Calibri"/>
+              </a:rPr>
+              <a:t>–   Pero si la tabla insumo no tiene la restriccion y la aplicacion factura 10 unidades de las 3 disponibles del insumo 2</a:t>
             </a:r>
           </a:p>
           <a:p>

--- a/Bases de Datos II/Clases/Clase 8 - Tuning y transacciones/Presentacion.pptx
+++ b/Bases de Datos II/Clases/Clase 8 - Tuning y transacciones/Presentacion.pptx
@@ -7,8 +7,8 @@
   <p:sldIdLst>
     <p:sldId id="256" r:id="rId7"/>
     <p:sldId id="257" r:id="rId8"/>
-    <p:sldId id="258" r:id="rId10"/>
-    <p:sldId id="259" r:id="rId11"/>
+    <p:sldId id="258" r:id="rId9"/>
+    <p:sldId id="259" r:id="rId10"/>
     <p:sldId id="260" r:id="rId12"/>
     <p:sldId id="261" r:id="rId13"/>
     <p:sldId id="262" r:id="rId14"/>
@@ -528,43 +528,82 @@
           <a:lstStyle/>
           <a:p>
             <a:r>
-              <a:t>TEXTO COMPLETO DE LA LÁMINA (se proyecta resumido):</a:t>
-            </a:r>
-          </a:p>
-          <a:p/>
-          <a:p>
-            <a:r>
-              <a:t>Tema de hoy: Tuning · Transacciones · la clínica</a:t>
-            </a:r>
-          </a:p>
-          <a:p/>
-          <a:p>
-            <a:r>
-              <a:t>Herramienta: PostgreSQL/PGlite · Bloque 120 min</a:t>
-            </a:r>
-          </a:p>
-          <a:p/>
-          <a:p>
-            <a:r>
-              <a:t>Gratis + navegador · free tier · sin software de pago obligatorio.</a:t>
-            </a:r>
-          </a:p>
-          <a:p/>
-          <a:p>
-            <a:r>
-              <a:t>Recorrido: teoría del tema, una lámina por concepto, y demo del docente sobre la base de la clínica.</a:t>
-            </a:r>
-          </a:p>
-          <a:p/>
-          <a:p>
-            <a:r>
-              <a:t>Cada lámina se sostiene sola: sirve para repasar aunque hayas faltado.</a:t>
-            </a:r>
-          </a:p>
-          <a:p/>
-          <a:p>
-            <a:r>
-              <a:t>Conceptos de hoy: Que es una transaccion, y las dos amenazas de las que protege · Atomicidad · Consistencia · Aislamiento.</a:t>
+              <a:t>DESARROLLO (para explicarlo, no se proyecta):</a:t>
+            </a:r>
+          </a:p>
+          <a:p>
+            <a:r>
+              <a:t>Una transaccion es una unidad logica de trabajo formada por una o mas sentencias que el motor trata como indivisible frente a dos amenazas distintas: las fallas</a:t>
+            </a:r>
+          </a:p>
+          <a:p>
+            <a:r>
+              <a:t>Porque no puede quedar aplicada a medias, y las demas sesiones, porque nadie debe ver el estado intermedio.</a:t>
+            </a:r>
+          </a:p>
+          <a:p>
+            <a:r>
+              <a:t>Lo primero que hay que aclarar, porque el estudiante lo asume mal, es donde empieza y donde termina.</a:t>
+            </a:r>
+          </a:p>
+          <a:p>
+            <a:r>
+              <a:t>En PostgreSQL, si no se abre explicitamente con BEGIN, cada sentencia de nivel superior es su propia transaccion y se confirma sola; en Oracle empieza sola con la primera sentencia DML, sin que nadie escriba BEGIN, y termina con COMMIT o con ROLLBACK.</a:t>
+            </a:r>
+          </a:p>
+          <a:p>
+            <a:r>
+              <a:t>El ejemplo del proyecto es la facturacion de una consulta: se inserta la cabecera en factura, se insertan las lineas en detalle_factura y se descuenta el stock de cada insumo.</a:t>
+            </a:r>
+          </a:p>
+          <a:p>
+            <a:r>
+              <a:t>Son varias sentencias que describen UN hecho de negocio, cobrar una consulta con sus insumos, no varios hechos independientes que casualmente ocurren juntos.</a:t>
+            </a:r>
+          </a:p>
+          <a:p>
+            <a:r>
+              <a:t>Vale detenerse en la sentencia del descuento, porque es el centro de la clase</a:t>
+            </a:r>
+          </a:p>
+          <a:p>
+            <a:r>
+              <a:t>En PL/pgSQL, cuantas filas afecto la sentencia anterior se pregunta con GET DIAGNOSTICS v_filas = ROW_COUNT; no existe SQL%ROWCOUNT, que es de Oracle.</a:t>
+            </a:r>
+          </a:p>
+          <a:p>
+            <a:r>
+              <a:t>Los datos con los que se trabaja hoy son seis insumos: 1 Vacuna antirrabica con stock 12, 2 Vacuna triple felina con stock 3, 3 Antiparasitario oral con stock 40, 4 Suero fisiologico con stock 25, 5 Gasa esteril con stock 8 y 6 Jeringa 5ml con stock 60.</a:t>
+            </a:r>
+          </a:p>
+          <a:p>
+            <a:r>
+              <a:t>El insumo 2, con sus 3 unidades, es el que se va a quedar corto en la demo.</a:t>
+            </a:r>
+          </a:p>
+          <a:p>
+            <a:r>
+              <a:t>NOTAS:</a:t>
+            </a:r>
+          </a:p>
+          <a:p>
+            <a:r>
+              <a:t>La condicion stock &gt;= 2 no es decoracion, es la que impide que el descuento se aplique cuando no hay existencias y hace que el motor informe cero filas afectadas en lugar de dejar un numero negativo.</a:t>
+            </a:r>
+          </a:p>
+          <a:p>
+            <a:r>
+              <a:t>CÓDIGO CITADO (referencia):</a:t>
+            </a:r>
+          </a:p>
+          <a:p>
+            <a:r>
+              <a:t>UPDATE insumo SET stock = stock - 2 WHERE id_insumo = 2 AND stock &gt;= 2</a:t>
+            </a:r>
+          </a:p>
+          <a:p>
+            <a:r>
+              <a:t>Fuera de la lamina (habla de la practica): En PL/pgSQL, cuantas filas afecto la sentencia anterior se pregunta con GET DIAGNOSTICS v_filas = ROW_COUNT; no existe SQL%ROWCOUNT, que es de Oracle, y esa sola diferencia decide si el codigo del entregable compila o no.</a:t>
             </a:r>
           </a:p>
         </p:txBody>
@@ -639,42 +678,42 @@
           </a:p>
           <a:p>
             <a:r>
-              <a:t>Un error del motor es la violacion de una regla que la base conoce: una restriccion CHECK, una clave foranea, un tipo incompatible, un interbloqueo; el motor lo detecta, lanza la excepcion y aborta.</a:t>
-            </a:r>
-          </a:p>
-          <a:p>
-            <a:r>
-              <a:t>Un error de negocio es la violacion de una regla que la base NO conoce en esa forma: que no haya stock suficiente, que la mascota este inactiva, que el total no cuadre con el detalle.</a:t>
-            </a:r>
-          </a:p>
-          <a:p>
-            <a:r>
-              <a:t>El motor no va a deshacer nada por su cuenta, porque desde su punto de vista todo salio bien: el UPDATE que no afecta ninguna fila es una sentencia exitosa.</a:t>
-            </a:r>
-          </a:p>
-          <a:p>
-            <a:r>
-              <a:t>La primera: nada de capturar y silenciar.</a:t>
-            </a:r>
-          </a:p>
-          <a:p>
-            <a:r>
-              <a:t>Un EXCEPTION WHEN OTHERS THEN NULL convierte el fallo en silencio, la factura queda registrada, el stock no se descuenta y nadie se entera hasta el inventario; si se captura, se vuelve a lanzar con RAISE a secas, que relanza la excepcion actual.</a:t>
-            </a:r>
-          </a:p>
-          <a:p>
-            <a:r>
-              <a:t>La segunda: quien decide confirmar es uno solo, y en PostgreSQL ese uno solo NO es el procedimiento, que es lo que explica la diapositiva siguiente.</a:t>
-            </a:r>
-          </a:p>
-          <a:p>
-            <a:r>
-              <a:t>Existe ademas el SAVEPOINT para el caso en que la transaccion es larga y solo una parte puede fallar: una marca intermedia con nombre a la que se vuelve sin abortar todo, SAVEPOINT sp_linea3 y mas adelante ROLLBACK TO SAVEPOINT sp_linea3.</a:t>
-            </a:r>
-          </a:p>
-          <a:p>
-            <a:r>
-              <a:t>En la clínica serviria para una factura de cinco lineas donde el insumo de la tercera esta agotado: se deshace esa linea, se avisa y se cobran las otras cuatro.</a:t>
+              <a:t>El segundo mecanismo es menos conocido: un bloque BEGIN...</a:t>
+            </a:r>
+          </a:p>
+          <a:p>
+            <a:r>
+              <a:t>Capturar no es lo mismo que dejar propagar, y la diferencia se ve en la practica: el</a:t>
+            </a:r>
+          </a:p>
+          <a:p>
+            <a:r>
+              <a:t>EXCEPTION WHEN OTHERS THEN RAISE NOTICE 'Fallo esperado: %', SQLERRM</a:t>
+            </a:r>
+          </a:p>
+          <a:p>
+            <a:r>
+              <a:t>END $$ del enunciado esta ahi para que el script no se detenga y se pueda seguir midiendo, no para arreglar nada.</a:t>
+            </a:r>
+          </a:p>
+          <a:p>
+            <a:r>
+              <a:t>Ese savepoint implicito tiene un costo que hay que mencionar: envolver cada iteracion de un bucle largo en su propio bloque con EXCEPTION crea un savepoint por vuelta y eso se paga</a:t>
+            </a:r>
+          </a:p>
+          <a:p>
+            <a:r>
+              <a:t>Asi que no se pone un manejador de excepciones «por si acaso» dentro de un ciclo de miles de iteraciones.</a:t>
+            </a:r>
+          </a:p>
+          <a:p>
+            <a:r>
+              <a:t>La regla practica: manejadores donde haya una decision que tomar, y en ningun otro sitio.</a:t>
+            </a:r>
+          </a:p>
+          <a:p>
+            <a:r>
+              <a:t>Consecuencia practica: dentro del bloque que captura el error, lo escrito antes del fallo en ese mismo bloque se deshace, pero lo escrito antes del BEGIN del bloque sigue en pie hasta que la transaccion termine.</a:t>
             </a:r>
           </a:p>
           <a:p>
@@ -684,27 +723,37 @@
           </a:p>
           <a:p>
             <a:r>
-              <a:t>Hay que separar dos tipos de fallo a mitad de transaccion porque se atienden distinto, y esta distincion es la que ordena todo el procedimiento.</a:t>
-            </a:r>
-          </a:p>
-          <a:p>
-            <a:r>
-              <a:t>De ahi que el procedimiento tenga que convertir el cero filas en una excepcion, con el RAISE EXCEPTION de la seccion anterior, y de ahi tambien que el mensaje deba nombrar el insumo concreto: quien lea el error en la sustentacion tiene que poder decir cual linea fallo.</a:t>
-            </a:r>
-          </a:p>
-          <a:p>
-            <a:r>
-              <a:t>Hoy NO se usa.</a:t>
-            </a:r>
-          </a:p>
-          <a:p>
-            <a:r>
-              <a:t>Fuera de la lamina (habla de la practica): Dos exigencias del entregable salen de aqui.</a:t>
-            </a:r>
-          </a:p>
-          <a:p>
-            <a:r>
-              <a:t>Fuera de la lamina (habla de la practica): Hoy NO se usa, porque la regla del negocio que la actividad implementa es todo o nada, pero conviene nombrarlo para que nadie crea que la unica opcion es abortar la factura completa.</a:t>
+              <a:t>EXCEPTION WHEN...</a:t>
+            </a:r>
+          </a:p>
+          <a:p>
+            <a:r>
+              <a:t>END en PL/pgSQL crea un savepoint implicito al entrar.</a:t>
+            </a:r>
+          </a:p>
+          <a:p>
+            <a:r>
+              <a:t>Por eso, cuando el codigo captura el error, se revierte solo lo hecho DENTRO de ese bloque y el resto de la transaccion sigue vivo.</a:t>
+            </a:r>
+          </a:p>
+          <a:p>
+            <a:r>
+              <a:t>El savepoint implicito de ese DO deshace todo lo que el CALL habia hecho, el mensaje se imprime, y la foto final demuestra que la base quedo igual.</a:t>
+            </a:r>
+          </a:p>
+          <a:p>
+            <a:r>
+              <a:t>SQLERRM es la variable que trae el texto del error, y conviene nombrarla porque el estudiante la va a necesitar para que su NOTICE diga algo util en vez de «fallo».</a:t>
+            </a:r>
+          </a:p>
+          <a:p>
+            <a:r>
+              <a:t>CÓDIGO CITADO (referencia):</a:t>
+            </a:r>
+          </a:p>
+          <a:p>
+            <a:r>
+              <a:t>DO $$ BEGIN CALL sp_facturar(...)</a:t>
             </a:r>
           </a:p>
         </p:txBody>
@@ -779,37 +828,47 @@
           </a:p>
           <a:p>
             <a:r>
-              <a:t>La afirmacion central es corta: un CALL escrito por fuera de cualquier BEGIN es su propia transaccion.</a:t>
-            </a:r>
-          </a:p>
-          <a:p>
-            <a:r>
-              <a:t>Se demuestra con datos: el descuenta 2 unidades del insumo 3, que tiene 40 y por lo tanto alcanza, y se estrella en el insumo 2, que tiene 3 y no puede dar 10; al final el stock del insumo 3 vuelve a 40 sin intervencion de nadie.</a:t>
-            </a:r>
-          </a:p>
-          <a:p>
-            <a:r>
-              <a:t>La consecuencia practica hay que enunciarla como regla de diseno: quien decide el COMMIT es uno solo, el llamador.</a:t>
-            </a:r>
-          </a:p>
-          <a:p>
-            <a:r>
-              <a:t>Un procedimiento que confirma por su cuenta le quita al llamador la posibilidad de deshacer, y es la fuente numero uno de facturas a medias cuando la Clase 12 conecte la aplicacion con la base.</a:t>
-            </a:r>
-          </a:p>
-          <a:p>
-            <a:r>
-              <a:t>Y hay un detalle de sintaxis que conviene mencionar antes de que alguien lo intente: en PostgreSQL un procedimiento SI puede contener COMMIT y ROLLBACK</a:t>
-            </a:r>
-          </a:p>
-          <a:p>
-            <a:r>
-              <a:t>Pero solo cuando se invoca desde un contexto que lo permita; si el CALL esta dentro de un bloque con manejador de excepciones, el control de transaccion dentro del procedimiento no esta permitido y el motor lo rechaza.</a:t>
-            </a:r>
-          </a:p>
-          <a:p>
-            <a:r>
-              <a:t>O sea que la version con ROLLBACK adentro no es solo innecesaria: en el escenario de la clase ni siquiera corre.</a:t>
+              <a:t>Por que la base quedo intacta: la respuesta correcta reune las dos ideas de las dos secciones anteriores: el CALL de nivel superior es su propia transaccion y al propagarse la excepcion se deshace todo, y ademas un bloque con EXCEPTION crea un savepoint implicito.</a:t>
+            </a:r>
+          </a:p>
+          <a:p>
+            <a:r>
+              <a:t>Es una respuesta razonable para quien aprendio PL/SQL, y es falsa aqui por dos motivos: el procedimiento de la clase no tiene ese bloque, y ese ROLLBACK no es lo que produjo la reversion.</a:t>
+            </a:r>
+          </a:p>
+          <a:p>
+            <a:r>
+              <a:t>Las otras tres opciones son falsas de forma mas simple, y vale enunciarlo para que nadie las considere: PostgreSQL no guarda una copia de seguridad de cada tabla antes de cada CALL, eso seria carisimo y no existe</a:t>
+            </a:r>
+          </a:p>
+          <a:p>
+            <a:r>
+              <a:t>PL/pgSQL no acumula los UPDATE en memoria para escribirlos al final, cada sentencia se aplica cuando se ejecuta y es visible dentro de la misma transaccion; y no hay ningun trigger de stock en el esquema de la clase, asi que no pudo deshacer nada.</a:t>
+            </a:r>
+          </a:p>
+          <a:p>
+            <a:r>
+              <a:t>El contraste con Oracle no se borra del curso, se coloca donde corresponde: como contraste.</a:t>
+            </a:r>
+          </a:p>
+          <a:p>
+            <a:r>
+              <a:t>Portar este procedimiento a Oracle exige cambiar los tipos, cambiar GET DIAGNOSTICS por SQL%ROWCOUNT, cambiar RAISE EXCEPTION por RAISE_APPLICATION_ERROR y anadir el control de transaccion</a:t>
+            </a:r>
+          </a:p>
+          <a:p>
+            <a:r>
+              <a:t>Que la misma logica de negocio necesite cuatro cambios de sintaxis es en si mismo el aprendizaje.</a:t>
+            </a:r>
+          </a:p>
+          <a:p>
+            <a:r>
+              <a:t>Resumen del contraste: en Oracle el COMMIT o ROLLBACK suele escribirse dentro del procedimiento; en PostgreSQL un CALL dentro de una transaccion abierta no puede hacer COMMIT, y es la excepcion propagada la que deshace.</a:t>
+            </a:r>
+          </a:p>
+          <a:p>
+            <a:r>
+              <a:t>En PostgreSQL ese responsable es siempre quien abrio la transaccion.</a:t>
             </a:r>
           </a:p>
           <a:p>
@@ -819,17 +878,17 @@
           </a:p>
           <a:p>
             <a:r>
-              <a:t>Si la excepcion se propaga hasta afuera del procedimiento, el motor deshace TODO lo que ese CALL habia hecho —la cabecera de la factura, las lineas ya insertadas y los descuentos de stock ya aplicados— y nadie escribio ROLLBACK.</a:t>
-            </a:r>
-          </a:p>
-          <a:p>
-            <a:r>
-              <a:t>CÓDIGO CITADO (referencia):</a:t>
-            </a:r>
-          </a:p>
-          <a:p>
-            <a:r>
-              <a:t>CALL sp_facturar(4, ARRAY[3, 2], ARRAY[2, 10])</a:t>
+              <a:t>La opcion incorrecta que mas gente marca es «porque el procedimiento incluia un ROLLBACK explicito en su bloque EXCEPTION, igual que en Oracle», y hay que decir de frente por que aparece: es la forma canonica en Oracle, donde el procedimiento es parte de la transaccion del llamador y si se escribe EXCEPTION WHEN OTHERS THEN ROLLBACK</a:t>
+            </a:r>
+          </a:p>
+          <a:p>
+            <a:r>
+              <a:t>Por eso el mismo procedimiento no se traduce linea por linea entre motores: cambia quien es responsable de confirmar, y con eso cambia donde se escribe el manejo del error.</a:t>
+            </a:r>
+          </a:p>
+          <a:p>
+            <a:r>
+              <a:t>Fuera de la lamina (habla de la practica): La pregunta 4 vale 10 puntos y es de seleccion unica, asi que conviene que el docente sepa exactamente que se pregunta y por que las otras opciones son falsas.</a:t>
             </a:r>
           </a:p>
         </p:txBody>
@@ -899,37 +958,107 @@
           <a:lstStyle/>
           <a:p>
             <a:r>
-              <a:t>TEXTO COMPLETO DE LA LÁMINA (se proyecta resumido):</a:t>
-            </a:r>
-          </a:p>
-          <a:p/>
-          <a:p>
-            <a:r>
-              <a:t>La regla de PostgreSQL. Un `CALL` escrito por fuera de cualquier `BEGIN` es su propia transaccion. Si la excepcion se propaga hasta afuera del procedimiento, el motor deshace todo lo que ese `CALL` habia hecho: la cabecera de la factura, el detalle y el descuento del primer insumo. Nadie escribio ROLLBACK y la base queda intacta.</a:t>
-            </a:r>
-          </a:p>
-          <a:p/>
-          <a:p>
-            <a:r>
-              <a:t>Y el savepoint que nadie declara. Un bloque `BEGIN ... EXCEPTION WHEN ... END` en PL/pgSQL crea un savepoint implicito al entrar. Por eso, si tu capturas el error, se revierte solo lo hecho dentro de ese bloque y el resto sigue vivo. Capturar no es lo mismo que dejar propagar.</a:t>
-            </a:r>
-          </a:p>
-          <a:p/>
-          <a:p>
-            <a:r>
-              <a:t>El contraste con Oracle, que es lo que se pregunta. En Oracle el procedimiento es parte de la transaccion del llamador y ahi si se escribe `EXCEPTION WHEN OTHERS THEN ROLLBACK; RAISE;`. En PostgreSQL ese `ROLLBACK` dentro de un procedimiento invocado por un `CALL` de nivel superior ni siquiera esta permitido.</a:t>
-            </a:r>
-          </a:p>
-          <a:p/>
-          <a:p>
-            <a:r>
-              <a:t>La consecuencia practica. Quien decide el `COMMIT` es uno solo: el llamador. Un procedimiento que confirma por su cuenta le quita al llamador la posibilidad de deshacer, y es la fuente numero uno de facturas a medias cuando la Clase 12 conecte la aplicacion.</a:t>
-            </a:r>
-          </a:p>
-          <a:p/>
-          <a:p>
-            <a:r>
-              <a:t>El error que no se perdona. Capturar la excepcion y no volver a lanzarla. `EXCEPTION WHEN OTHERS THEN NULL;` convierte el fallo en silencio: la factura queda registrada, el stock no se descuenta y nadie se entera hasta el inventario.</a:t>
+              <a:t>DESARROLLO (para explicarlo, no se proyecta):</a:t>
+            </a:r>
+          </a:p>
+          <a:p>
+            <a:r>
+              <a:t>fn_descontar_stock aplica el mismo patron de descuento con un contrato distinto, que es una de las distinciones mas utiles del curso.</a:t>
+            </a:r>
+          </a:p>
+          <a:p>
+            <a:r>
+              <a:t>Misma regla de negocio, dos contratos, y hay que saber cual se esta pidiendo.</a:t>
+            </a:r>
+          </a:p>
+          <a:p>
+            <a:r>
+              <a:t>La firma: RETURNS BOOLEAN LANGUAGE plpgsql AS $fn$... $fn$.</a:t>
+            </a:r>
+          </a:p>
+          <a:p>
+            <a:r>
+              <a:t>RETURNS BOOLEAN y no PROCEDURE: devuelve verdadero si desconto y falso si no habia suficiente, SIN lanzar excepcion en ese segundo caso.</a:t>
+            </a:r>
+          </a:p>
+          <a:p>
+            <a:r>
+              <a:t>Adentro hay tres partes: validar que p_cantidad sea positiva, y si no, RAISE EXCEPTION; el mismo UPDATE con la condicion en el WHERE; y GET DIAGNOSTICS seguido de RETURN v_filas = 1</a:t>
+            </a:r>
+          </a:p>
+          <a:p>
+            <a:r>
+              <a:t>Que devuelve directamente el resultado de la comparacion sin necesidad de un IF.</a:t>
+            </a:r>
+          </a:p>
+          <a:p>
+            <a:r>
+              <a:t>Distinguir el dato invalido del resultado negativo es la mitad de la pregunta.</a:t>
+            </a:r>
+          </a:p>
+          <a:p>
+            <a:r>
+              <a:t>Se prueba en una sola consulta, AS caso_ok, fn_descontar_stock(2, 10) AS caso_sin_stock, fn_descontar_stock(2, 3) AS caso_limite, que devuelve verdadero, falso y verdadero.</a:t>
+            </a:r>
+          </a:p>
+          <a:p>
+            <a:r>
+              <a:t>El tercer caso es el interesante y conviene detenerse: pide EXACTAMENTE el stock que queda, y con el operador mayor o igual en el guardia tiene que pasar; si alguien escribio solo mayor, ese caso devuelve falso y ahi se ve el error.</a:t>
+            </a:r>
+          </a:p>
+          <a:p>
+            <a:r>
+              <a:t>El estado final deja el insumo 5 en 5 y el insumo 2 en 0, sin ningun negativo.</a:t>
+            </a:r>
+          </a:p>
+          <a:p>
+            <a:r>
+              <a:t>Y el comentario que cierra la pregunta es la decision documentada: leer primero y decidir despues deja una ventana entre la lectura y la escritura</a:t>
+            </a:r>
+          </a:p>
+          <a:p>
+            <a:r>
+              <a:t>Con dos recepcionistas las dos leen 3, las dos deciden que alcanza y el stock termina en menos 2 o el CHECK revienta; el UPDATE con la condicion en el WHERE no tiene ventana.</a:t>
+            </a:r>
+          </a:p>
+          <a:p>
+            <a:r>
+              <a:t>NOTAS:</a:t>
+            </a:r>
+          </a:p>
+          <a:p>
+            <a:r>
+              <a:t>El procedimiento ABORTA la factura completa cuando no hay stock; la funcion INFORMA y deja que el llamador decida.</a:t>
+            </a:r>
+          </a:p>
+          <a:p>
+            <a:r>
+              <a:t>Lo que hay que enfatizar es la linea que separa un caso del otro: una cantidad negativa o cero no es «no hay stock», es una llamada mal hecha, y eso SI es una excepcion; el resultado negativo legitimo se devuelve como dato.</a:t>
+            </a:r>
+          </a:p>
+          <a:p>
+            <a:r>
+              <a:t>Eso aqui no se puede demostrar, porque el motor corre una sola sesion.</a:t>
+            </a:r>
+          </a:p>
+          <a:p>
+            <a:r>
+              <a:t>CÓDIGO CITADO (referencia):</a:t>
+            </a:r>
+          </a:p>
+          <a:p>
+            <a:r>
+              <a:t>CREATE FUNCTION fn_descontar_stock(p_id_insumo INT, p_cantidad INT)</a:t>
+            </a:r>
+          </a:p>
+          <a:p>
+            <a:r>
+              <a:t>SELECT fn_descontar_stock(5, 3)</a:t>
+            </a:r>
+          </a:p>
+          <a:p>
+            <a:r>
+              <a:t>Fuera de la lamina (habla de la practica): Eso aqui no se puede demostrar, porque el motor corre una sola sesion, y ese es el gap que la pregunta 5 pide declarar.</a:t>
             </a:r>
           </a:p>
         </p:txBody>
@@ -1004,42 +1133,47 @@
           </a:p>
           <a:p>
             <a:r>
-              <a:t>El segundo mecanismo es menos conocido: un bloque BEGIN...</a:t>
-            </a:r>
-          </a:p>
-          <a:p>
-            <a:r>
-              <a:t>Capturar no es lo mismo que dejar propagar, y la diferencia se ve en la practica: el</a:t>
-            </a:r>
-          </a:p>
-          <a:p>
-            <a:r>
-              <a:t>EXCEPTION WHEN OTHERS THEN RAISE NOTICE 'Fallo esperado: %', SQLERRM</a:t>
-            </a:r>
-          </a:p>
-          <a:p>
-            <a:r>
-              <a:t>END $$ del enunciado esta ahi para que el script no se detenga y se pueda seguir midiendo, no para arreglar nada.</a:t>
-            </a:r>
-          </a:p>
-          <a:p>
-            <a:r>
-              <a:t>Ese savepoint implicito tiene un costo que hay que mencionar: envolver cada iteracion de un bucle largo en su propio bloque con EXCEPTION crea un savepoint por vuelta y eso se paga</a:t>
-            </a:r>
-          </a:p>
-          <a:p>
-            <a:r>
-              <a:t>Asi que no se pone un manejador de excepciones «por si acaso» dentro de un ciclo de miles de iteraciones.</a:t>
-            </a:r>
-          </a:p>
-          <a:p>
-            <a:r>
-              <a:t>La regla practica: manejadores donde haya una decision que tomar, y en ningun otro sitio.</a:t>
-            </a:r>
-          </a:p>
-          <a:p>
-            <a:r>
-              <a:t>Consecuencia practica: dentro del bloque que captura el error, lo escrito antes del fallo en ese mismo bloque se deshace, pero lo escrito antes del BEGIN del bloque sigue en pie hasta que la transaccion termine.</a:t>
+              <a:t>El ultimo bloque conceptual es el de tuning, que aqui no significa tocar parametros del servidor —imposible en el navegador y peligroso sin medicion— sino habitos con numeros.</a:t>
+            </a:r>
+          </a:p>
+          <a:p>
+            <a:r>
+              <a:t>Primero: la transaccion debe ser corta.</a:t>
+            </a:r>
+          </a:p>
+          <a:p>
+            <a:r>
+              <a:t>Una transaccion de negocio bien hecha vive en el orden de milisegundos a pocos cientos de milisegundos, y cualquier cosa que sostenga bloqueos durante segundos es sospechosa; la regla absoluta es no esperar nunca una accion humana con la transaccion abierta</a:t>
+            </a:r>
+          </a:p>
+          <a:p>
+            <a:r>
+              <a:t>Porque el clasico de abrir, mostrar un cuadro de confirmacion y confirmar convierte una pausa de almuerzo en 45 minutos de filas bloqueadas para el resto de la clinica.</a:t>
+            </a:r>
+          </a:p>
+          <a:p>
+            <a:r>
+              <a:t>Lo correcto es hacer lecturas y validaciones primero y abrir la transaccion solo cuando ya se tienen todos los datos para escribir.</a:t>
+            </a:r>
+          </a:p>
+          <a:p>
+            <a:r>
+              <a:t>Segundo: en cargas masivas, agrupar los COMMIT en lotes del orden de 1.000 a 5.000 filas, convencion de oficio y no regla dura</a:t>
+            </a:r>
+          </a:p>
+          <a:p>
+            <a:r>
+              <a:t>En lugar de uno por fila, lentisimo, o uno solo para un millon de filas, que hincha las versiones antiguas y sostiene bloqueos enormes.</a:t>
+            </a:r>
+          </a:p>
+          <a:p>
+            <a:r>
+              <a:t>Tercero: apoyarse en los indices de la Clase 7, porque el UPDATE del descuento filtra por id_insumo, que es clave primaria, y por eso bloquea una sola fila; el mismo UPDATE filtrando por una columna sin indice puede recorrer y bloquear muchas mas.</a:t>
+            </a:r>
+          </a:p>
+          <a:p>
+            <a:r>
+              <a:t>Cuarto: estadisticas frescas de la Clase 6 y ningun disparador con trabajo pesado dentro de la transaccion, de la Clase 4.</a:t>
             </a:r>
           </a:p>
           <a:p>
@@ -1049,37 +1183,12 @@
           </a:p>
           <a:p>
             <a:r>
-              <a:t>EXCEPTION WHEN...</a:t>
-            </a:r>
-          </a:p>
-          <a:p>
-            <a:r>
-              <a:t>END en PL/pgSQL crea un savepoint implicito al entrar.</a:t>
-            </a:r>
-          </a:p>
-          <a:p>
-            <a:r>
-              <a:t>Por eso, cuando el codigo captura el error, se revierte solo lo hecho DENTRO de ese bloque y el resto de la transaccion sigue vivo.</a:t>
-            </a:r>
-          </a:p>
-          <a:p>
-            <a:r>
-              <a:t>El savepoint implicito de ese DO deshace todo lo que el CALL habia hecho, el mensaje se imprime, y la foto final demuestra que la base quedo igual.</a:t>
-            </a:r>
-          </a:p>
-          <a:p>
-            <a:r>
-              <a:t>SQLERRM es la variable que trae el texto del error, y conviene nombrarla porque el estudiante la va a necesitar para que su NOTICE diga algo util en vez de «fallo».</a:t>
-            </a:r>
-          </a:p>
-          <a:p>
-            <a:r>
-              <a:t>CÓDIGO CITADO (referencia):</a:t>
-            </a:r>
-          </a:p>
-          <a:p>
-            <a:r>
-              <a:t>DO $$ BEGIN CALL sp_facturar(...)</a:t>
+              <a:t>Esos cuatro habitos, mas el de no usar SELECT asterisco en los reportes, mas los predicados sargables, mas el respaldo con restore probado.</a:t>
+            </a:r>
+          </a:p>
+          <a:p>
+            <a:r>
+              <a:t>Fuera de la lamina (habla de la practica): Esos cuatro habitos, mas el de no usar SELECT asterisco en los reportes, mas los predicados sargables, mas el respaldo con restore probado, son literalmente los siete items del checklist que la pregunta 5 pide llenar, y cada item exige estado Y evidencia concreta —un nombre de indice, un archivo, una consulta— porque siete casillas marcadas sin evidencia no demuestran nada.</a:t>
             </a:r>
           </a:p>
         </p:txBody>
@@ -1154,47 +1263,52 @@
           </a:p>
           <a:p>
             <a:r>
-              <a:t>Por que la base quedo intacta: la respuesta correcta reune las dos ideas de las dos secciones anteriores: el CALL de nivel superior es su propia transaccion y al propagarse la excepcion se deshace todo, y ademas un bloque con EXCEPTION crea un savepoint implicito.</a:t>
-            </a:r>
-          </a:p>
-          <a:p>
-            <a:r>
-              <a:t>Es una respuesta razonable para quien aprendio PL/SQL, y es falsa aqui por dos motivos: el procedimiento de la clase no tiene ese bloque, y ese ROLLBACK no es lo que produjo la reversion.</a:t>
-            </a:r>
-          </a:p>
-          <a:p>
-            <a:r>
-              <a:t>Las otras tres opciones son falsas de forma mas simple, y vale enunciarlo para que nadie las considere: PostgreSQL no guarda una copia de seguridad de cada tabla antes de cada CALL, eso seria carisimo y no existe</a:t>
-            </a:r>
-          </a:p>
-          <a:p>
-            <a:r>
-              <a:t>PL/pgSQL no acumula los UPDATE en memoria para escribirlos al final, cada sentencia se aplica cuando se ejecuta y es visible dentro de la misma transaccion; y no hay ningun trigger de stock en el esquema de la clase, asi que no pudo deshacer nada.</a:t>
-            </a:r>
-          </a:p>
-          <a:p>
-            <a:r>
-              <a:t>El contraste con Oracle no se borra del curso, se coloca donde corresponde: como contraste.</a:t>
-            </a:r>
-          </a:p>
-          <a:p>
-            <a:r>
-              <a:t>Portar este procedimiento a Oracle exige cambiar los tipos, cambiar GET DIAGNOSTICS por SQL%ROWCOUNT, cambiar RAISE EXCEPTION por RAISE_APPLICATION_ERROR y anadir el control de transaccion</a:t>
-            </a:r>
-          </a:p>
-          <a:p>
-            <a:r>
-              <a:t>Que la misma logica de negocio necesite cuatro cambios de sintaxis es en si mismo el aprendizaje.</a:t>
-            </a:r>
-          </a:p>
-          <a:p>
-            <a:r>
-              <a:t>Resumen del contraste: en Oracle el COMMIT o ROLLBACK suele escribirse dentro del procedimiento; en PostgreSQL un CALL dentro de una transaccion abierta no puede hacer COMMIT, y es la excepcion propagada la que deshace.</a:t>
-            </a:r>
-          </a:p>
-          <a:p>
-            <a:r>
-              <a:t>En PostgreSQL ese responsable es siempre quien abrio la transaccion.</a:t>
+              <a:t>La demo es el script Codigo/08_transacciones_clinica.sql y se corre.</a:t>
+            </a:r>
+          </a:p>
+          <a:p>
+            <a:r>
+              <a:t>Tiene cinco bloques y el valor esta en el tercero, asi que hay que administrar el tiempo para llegar ahi con calma.</a:t>
+            </a:r>
+          </a:p>
+          <a:p>
+            <a:r>
+              <a:t>El bloque 0 crea insumo, factura y detalle_factura y siembra los seis insumos con los stocks del enunciado; empieza con los DROP para que el script se pueda correr dos veces sin limpiar a mano.</a:t>
+            </a:r>
+          </a:p>
+          <a:p>
+            <a:r>
+              <a:t>El bloque 2 es el caso feliz:, factura por 27.400 y los stocks 1, 6 y 5 quedan en 11, 58 y 5.</a:t>
+            </a:r>
+          </a:p>
+          <a:p>
+            <a:r>
+              <a:t>El bloque 3 es la clase entera y tiene tres pasos que no se pueden desordenar: la foto inicial</a:t>
+            </a:r>
+          </a:p>
+          <a:p>
+            <a:r>
+              <a:t>Que debe dar una factura, tres lineas, el insumo 3 en 40 y el insumo 2 en 3; el intento que falla a mitad, envuelto en el DO con su manejador para que el script siga; y la foto final, que debe dar EXACTAMENTE los mismos cuatro numeros.</a:t>
+            </a:r>
+          </a:p>
+          <a:p>
+            <a:r>
+              <a:t>Ese es el momento de preguntarle al grupo donde quedo el descuento del insumo 3 y dejar que alguien diga que se deshizo solo.</a:t>
+            </a:r>
+          </a:p>
+          <a:p>
+            <a:r>
+              <a:t>El bloque 3 cierra con la version viable,, que crea la segunda factura por 112.000 y deja el insumo 3 en 38 y el 2 en 0.</a:t>
+            </a:r>
+          </a:p>
+          <a:p>
+            <a:r>
+              <a:t>El bloque 4 es la funcion, con su prueba de tres columnas que devuelve verdadero, falso, verdadero; ese bloque reinicia los stocks de los insumos 5 y 2 antes de probar, porque si no los numeros esperados no salen.</a:t>
+            </a:r>
+          </a:p>
+          <a:p>
+            <a:r>
+              <a:t>Si el tiempo aprieta, lo que se recorta es el bloque 4.</a:t>
             </a:r>
           </a:p>
           <a:p>
@@ -1204,17 +1318,27 @@
           </a:p>
           <a:p>
             <a:r>
-              <a:t>La opcion incorrecta que mas gente marca es «porque el procedimiento incluia un ROLLBACK explicito en su bloque EXCEPTION, igual que en Oracle», y hay que decir de frente por que aparece: es la forma canonica en Oracle, donde el procedimiento es parte de la transaccion del llamador y si se escribe EXCEPTION WHEN OTHERS THEN ROLLBACK</a:t>
-            </a:r>
-          </a:p>
-          <a:p>
-            <a:r>
-              <a:t>Por eso el mismo procedimiento no se traduce linea por linea entre motores: cambia quien es responsable de confirmar, y con eso cambia donde se escribe el manejo del error.</a:t>
-            </a:r>
-          </a:p>
-          <a:p>
-            <a:r>
-              <a:t>Fuera de la lamina (habla de la practica): La pregunta 4 vale 10 puntos y es de seleccion unica, asi que conviene que el docente sepa exactamente que se pregunta y por que las otras opciones son falsas.</a:t>
+              <a:t>El bloque 1 crea el procedimiento, y conviene proyectarlo leyendo en voz alta el guardia y el GET DIAGNOSTICS, no pasarlo de largo.</a:t>
+            </a:r>
+          </a:p>
+          <a:p>
+            <a:r>
+              <a:t>CÓDIGO CITADO (referencia):</a:t>
+            </a:r>
+          </a:p>
+          <a:p>
+            <a:r>
+              <a:t>CALL sp_facturar(4, ARRAY[1, 6, 5], ARRAY[1, 2, 3])</a:t>
+            </a:r>
+          </a:p>
+          <a:p>
+            <a:r>
+              <a:t>CALL sp_facturar(4, ARRAY[3, 2], ARRAY[2, 3])</a:t>
+            </a:r>
+          </a:p>
+          <a:p>
+            <a:r>
+              <a:t>Fuera de la lamina (habla de la practica): Si el tiempo aprieta, lo que se recorta es el bloque 4, que el estudiante rehace en la pregunta 3 de la clase; lo que NO se recorta es la pareja de fotos del bloque 3.</a:t>
             </a:r>
           </a:p>
         </p:txBody>
@@ -1289,556 +1413,6 @@
           </a:p>
           <a:p>
             <a:r>
-              <a:t>fn_descontar_stock aplica el mismo patron de descuento con un contrato distinto, que es una de las distinciones mas utiles del curso.</a:t>
-            </a:r>
-          </a:p>
-          <a:p>
-            <a:r>
-              <a:t>Misma regla de negocio, dos contratos, y hay que saber cual se esta pidiendo.</a:t>
-            </a:r>
-          </a:p>
-          <a:p>
-            <a:r>
-              <a:t>La firma: RETURNS BOOLEAN LANGUAGE plpgsql AS $fn$... $fn$.</a:t>
-            </a:r>
-          </a:p>
-          <a:p>
-            <a:r>
-              <a:t>RETURNS BOOLEAN y no PROCEDURE: devuelve verdadero si desconto y falso si no habia suficiente, SIN lanzar excepcion en ese segundo caso.</a:t>
-            </a:r>
-          </a:p>
-          <a:p>
-            <a:r>
-              <a:t>Adentro hay tres partes: validar que p_cantidad sea positiva, y si no, RAISE EXCEPTION; el mismo UPDATE con la condicion en el WHERE; y GET DIAGNOSTICS seguido de RETURN v_filas = 1</a:t>
-            </a:r>
-          </a:p>
-          <a:p>
-            <a:r>
-              <a:t>Que devuelve directamente el resultado de la comparacion sin necesidad de un IF.</a:t>
-            </a:r>
-          </a:p>
-          <a:p>
-            <a:r>
-              <a:t>Distinguir el dato invalido del resultado negativo es la mitad de la pregunta.</a:t>
-            </a:r>
-          </a:p>
-          <a:p>
-            <a:r>
-              <a:t>Se prueba en una sola consulta, AS caso_ok, fn_descontar_stock(2, 10) AS caso_sin_stock, fn_descontar_stock(2, 3) AS caso_limite, que devuelve verdadero, falso y verdadero.</a:t>
-            </a:r>
-          </a:p>
-          <a:p>
-            <a:r>
-              <a:t>El tercer caso es el interesante y conviene detenerse: pide EXACTAMENTE el stock que queda, y con el operador mayor o igual en el guardia tiene que pasar; si alguien escribio solo mayor, ese caso devuelve falso y ahi se ve el error.</a:t>
-            </a:r>
-          </a:p>
-          <a:p>
-            <a:r>
-              <a:t>El estado final deja el insumo 5 en 5 y el insumo 2 en 0, sin ningun negativo.</a:t>
-            </a:r>
-          </a:p>
-          <a:p>
-            <a:r>
-              <a:t>Y el comentario que cierra la pregunta es la decision documentada: leer primero y decidir despues deja una ventana entre la lectura y la escritura</a:t>
-            </a:r>
-          </a:p>
-          <a:p>
-            <a:r>
-              <a:t>Con dos recepcionistas las dos leen 3, las dos deciden que alcanza y el stock termina en menos 2 o el CHECK revienta; el UPDATE con la condicion en el WHERE no tiene ventana.</a:t>
-            </a:r>
-          </a:p>
-          <a:p>
-            <a:r>
-              <a:t>NOTAS:</a:t>
-            </a:r>
-          </a:p>
-          <a:p>
-            <a:r>
-              <a:t>El procedimiento ABORTA la factura completa cuando no hay stock; la funcion INFORMA y deja que el llamador decida.</a:t>
-            </a:r>
-          </a:p>
-          <a:p>
-            <a:r>
-              <a:t>Lo que hay que enfatizar es la linea que separa un caso del otro: una cantidad negativa o cero no es «no hay stock», es una llamada mal hecha, y eso SI es una excepcion; el resultado negativo legitimo se devuelve como dato.</a:t>
-            </a:r>
-          </a:p>
-          <a:p>
-            <a:r>
-              <a:t>Eso aqui no se puede demostrar, porque el motor corre una sola sesion.</a:t>
-            </a:r>
-          </a:p>
-          <a:p>
-            <a:r>
-              <a:t>CÓDIGO CITADO (referencia):</a:t>
-            </a:r>
-          </a:p>
-          <a:p>
-            <a:r>
-              <a:t>CREATE FUNCTION fn_descontar_stock(p_id_insumo INT, p_cantidad INT)</a:t>
-            </a:r>
-          </a:p>
-          <a:p>
-            <a:r>
-              <a:t>SELECT fn_descontar_stock(5, 3)</a:t>
-            </a:r>
-          </a:p>
-          <a:p>
-            <a:r>
-              <a:t>Fuera de la lamina (habla de la practica): Eso aqui no se puede demostrar, porque el motor corre una sola sesion, y ese es el gap que la pregunta 5 pide declarar.</a:t>
-            </a:r>
-          </a:p>
-        </p:txBody>
-      </p:sp>
-      <p:sp>
-        <p:nvSpPr>
-          <p:cNvPr id="4" name="Slide Number Placeholder 3"/>
-          <p:cNvSpPr>
-            <a:spLocks noGrp="1"/>
-          </p:cNvSpPr>
-          <p:nvPr>
-            <p:ph type="sldNum" idx="5" sz="quarter"/>
-          </p:nvPr>
-        </p:nvSpPr>
-        <p:spPr/>
-      </p:sp>
-    </p:spTree>
-  </p:cSld>
-  <p:clrMapOvr>
-    <a:masterClrMapping/>
-  </p:clrMapOvr>
-</p:notes>
-</file>
-
-<file path=ppt/notesSlides/notesSlide16.xml><?xml version="1.0" encoding="utf-8"?>
-<p:notes xmlns:a="http://schemas.openxmlformats.org/drawingml/2006/main" xmlns:p="http://schemas.openxmlformats.org/presentationml/2006/main" xmlns:r="http://schemas.openxmlformats.org/officeDocument/2006/relationships">
-  <p:cSld>
-    <p:spTree>
-      <p:nvGrpSpPr>
-        <p:cNvPr id="1" name=""/>
-        <p:cNvGrpSpPr/>
-        <p:nvPr/>
-      </p:nvGrpSpPr>
-      <p:grpSpPr>
-        <a:xfrm>
-          <a:off x="0" y="0"/>
-          <a:ext cx="0" cy="0"/>
-          <a:chOff x="0" y="0"/>
-          <a:chExt cx="0" cy="0"/>
-        </a:xfrm>
-      </p:grpSpPr>
-      <p:sp>
-        <p:nvSpPr>
-          <p:cNvPr id="2" name="Slide Image Placeholder 1"/>
-          <p:cNvSpPr>
-            <a:spLocks noGrp="1"/>
-          </p:cNvSpPr>
-          <p:nvPr>
-            <p:ph type="sldImg" idx="2"/>
-          </p:nvPr>
-        </p:nvSpPr>
-        <p:spPr/>
-      </p:sp>
-      <p:sp>
-        <p:nvSpPr>
-          <p:cNvPr id="3" name="Notes Placeholder 2"/>
-          <p:cNvSpPr>
-            <a:spLocks noGrp="1"/>
-          </p:cNvSpPr>
-          <p:nvPr>
-            <p:ph type="body" idx="3" sz="quarter"/>
-          </p:nvPr>
-        </p:nvSpPr>
-        <p:spPr/>
-        <p:txBody>
-          <a:bodyPr/>
-          <a:lstStyle/>
-          <a:p>
-            <a:r>
-              <a:t>TEXTO COMPLETO DE LA LÁMINA (se proyecta resumido):</a:t>
-            </a:r>
-          </a:p>
-          <a:p/>
-          <a:p>
-            <a:r>
-              <a:t>La diferencia. El procedimiento aborta la factura completa; la funcion informa y deja que el llamador decida. La misma regla de negocio, dos contratos distintos, y hay que saber cual se pide.</a:t>
-            </a:r>
-          </a:p>
-          <a:p/>
-          <a:p>
-            <a:r>
-              <a:t>La firma, y su palabra clave. `CREATE OR REPLACE FUNCTION fn_descontar_stock(p_id_insumo INT, p_cantidad INT) RETURNS BOOLEAN LANGUAGE plpgsql AS $$ ...` — `RETURNS BOOLEAN`, no `PROCEDURE`. Devuelve `TRUE` si desconto y `FALSE` si no habia suficiente, sin lanzar excepcion en ese segundo caso.</a:t>
-            </a:r>
-          </a:p>
-          <a:p/>
-          <a:p>
-            <a:r>
-              <a:t>Lo que si es un error. Una cantidad negativa o cero no es «no hay stock», es una llamada mal hecha: eso si va con `RAISE EXCEPTION`. Distinguir el dato invalido del resultado negativo es la mitad de la pregunta.</a:t>
-            </a:r>
-          </a:p>
-          <a:p/>
-          <a:p>
-            <a:r>
-              <a:t>Se prueba en una sola consulta. `SELECT fn_descontar_stock(5,3) AS caso_ok, fn_descontar_stock(2,10) AS caso_sin_stock, fn_descontar_stock(2,3) AS caso_limite;` -&gt; `true`, `false`, `true`. El tercer caso es el interesante: pide exactamente el stock que queda, y con `&gt;=` en el guardia tiene que pasar.</a:t>
-            </a:r>
-          </a:p>
-          <a:p/>
-          <a:p>
-            <a:r>
-              <a:t>Por que no leer primero. `SELECT stock ...; IF stock &gt;= cantidad THEN UPDATE ...` deja una ventana entre la lectura y la escritura, y con dos recepcionistas facturando el mismo insumo las dos leen 3, las dos deciden que alcanza y el stock termina en -2. El `UPDATE` con la condicion en el `WHERE` no tiene ventana. Aqui no se puede demostrar —PGlite corre una sola sesion— y ese es el gap que se declara y que abre la Clase 10.</a:t>
-            </a:r>
-          </a:p>
-        </p:txBody>
-      </p:sp>
-      <p:sp>
-        <p:nvSpPr>
-          <p:cNvPr id="4" name="Slide Number Placeholder 3"/>
-          <p:cNvSpPr>
-            <a:spLocks noGrp="1"/>
-          </p:cNvSpPr>
-          <p:nvPr>
-            <p:ph type="sldNum" idx="5" sz="quarter"/>
-          </p:nvPr>
-        </p:nvSpPr>
-        <p:spPr/>
-      </p:sp>
-    </p:spTree>
-  </p:cSld>
-  <p:clrMapOvr>
-    <a:masterClrMapping/>
-  </p:clrMapOvr>
-</p:notes>
-</file>
-
-<file path=ppt/notesSlides/notesSlide17.xml><?xml version="1.0" encoding="utf-8"?>
-<p:notes xmlns:a="http://schemas.openxmlformats.org/drawingml/2006/main" xmlns:p="http://schemas.openxmlformats.org/presentationml/2006/main" xmlns:r="http://schemas.openxmlformats.org/officeDocument/2006/relationships">
-  <p:cSld>
-    <p:spTree>
-      <p:nvGrpSpPr>
-        <p:cNvPr id="1" name=""/>
-        <p:cNvGrpSpPr/>
-        <p:nvPr/>
-      </p:nvGrpSpPr>
-      <p:grpSpPr>
-        <a:xfrm>
-          <a:off x="0" y="0"/>
-          <a:ext cx="0" cy="0"/>
-          <a:chOff x="0" y="0"/>
-          <a:chExt cx="0" cy="0"/>
-        </a:xfrm>
-      </p:grpSpPr>
-      <p:sp>
-        <p:nvSpPr>
-          <p:cNvPr id="2" name="Slide Image Placeholder 1"/>
-          <p:cNvSpPr>
-            <a:spLocks noGrp="1"/>
-          </p:cNvSpPr>
-          <p:nvPr>
-            <p:ph type="sldImg" idx="2"/>
-          </p:nvPr>
-        </p:nvSpPr>
-        <p:spPr/>
-      </p:sp>
-      <p:sp>
-        <p:nvSpPr>
-          <p:cNvPr id="3" name="Notes Placeholder 2"/>
-          <p:cNvSpPr>
-            <a:spLocks noGrp="1"/>
-          </p:cNvSpPr>
-          <p:nvPr>
-            <p:ph type="body" idx="3" sz="quarter"/>
-          </p:nvPr>
-        </p:nvSpPr>
-        <p:spPr/>
-        <p:txBody>
-          <a:bodyPr/>
-          <a:lstStyle/>
-          <a:p>
-            <a:r>
-              <a:t>DESARROLLO (para explicarlo, no se proyecta):</a:t>
-            </a:r>
-          </a:p>
-          <a:p>
-            <a:r>
-              <a:t>El ultimo bloque conceptual es el de tuning, que aqui no significa tocar parametros del servidor —imposible en el navegador y peligroso sin medicion— sino habitos con numeros.</a:t>
-            </a:r>
-          </a:p>
-          <a:p>
-            <a:r>
-              <a:t>Primero: la transaccion debe ser corta.</a:t>
-            </a:r>
-          </a:p>
-          <a:p>
-            <a:r>
-              <a:t>Una transaccion de negocio bien hecha vive en el orden de milisegundos a pocos cientos de milisegundos, y cualquier cosa que sostenga bloqueos durante segundos es sospechosa; la regla absoluta es no esperar nunca una accion humana con la transaccion abierta</a:t>
-            </a:r>
-          </a:p>
-          <a:p>
-            <a:r>
-              <a:t>Porque el clasico de abrir, mostrar un cuadro de confirmacion y confirmar convierte una pausa de almuerzo en 45 minutos de filas bloqueadas para el resto de la clinica.</a:t>
-            </a:r>
-          </a:p>
-          <a:p>
-            <a:r>
-              <a:t>Lo correcto es hacer lecturas y validaciones primero y abrir la transaccion solo cuando ya se tienen todos los datos para escribir.</a:t>
-            </a:r>
-          </a:p>
-          <a:p>
-            <a:r>
-              <a:t>Segundo: en cargas masivas, agrupar los COMMIT en lotes del orden de 1.000 a 5.000 filas, convencion de oficio y no regla dura</a:t>
-            </a:r>
-          </a:p>
-          <a:p>
-            <a:r>
-              <a:t>En lugar de uno por fila, lentisimo, o uno solo para un millon de filas, que hincha las versiones antiguas y sostiene bloqueos enormes.</a:t>
-            </a:r>
-          </a:p>
-          <a:p>
-            <a:r>
-              <a:t>Tercero: apoyarse en los indices de la Clase 7, porque el UPDATE del descuento filtra por id_insumo, que es clave primaria, y por eso bloquea una sola fila; el mismo UPDATE filtrando por una columna sin indice puede recorrer y bloquear muchas mas.</a:t>
-            </a:r>
-          </a:p>
-          <a:p>
-            <a:r>
-              <a:t>Cuarto: estadisticas frescas de la Clase 6 y ningun disparador con trabajo pesado dentro de la transaccion, de la Clase 4.</a:t>
-            </a:r>
-          </a:p>
-          <a:p>
-            <a:r>
-              <a:t>NOTAS:</a:t>
-            </a:r>
-          </a:p>
-          <a:p>
-            <a:r>
-              <a:t>Esos cuatro habitos, mas el de no usar SELECT asterisco en los reportes, mas los predicados sargables, mas el respaldo con restore probado.</a:t>
-            </a:r>
-          </a:p>
-          <a:p>
-            <a:r>
-              <a:t>Fuera de la lamina (habla de la practica): Esos cuatro habitos, mas el de no usar SELECT asterisco en los reportes, mas los predicados sargables, mas el respaldo con restore probado, son literalmente los siete items del checklist que la pregunta 5 pide llenar, y cada item exige estado Y evidencia concreta —un nombre de indice, un archivo, una consulta— porque siete casillas marcadas sin evidencia no demuestran nada.</a:t>
-            </a:r>
-          </a:p>
-        </p:txBody>
-      </p:sp>
-      <p:sp>
-        <p:nvSpPr>
-          <p:cNvPr id="4" name="Slide Number Placeholder 3"/>
-          <p:cNvSpPr>
-            <a:spLocks noGrp="1"/>
-          </p:cNvSpPr>
-          <p:nvPr>
-            <p:ph type="sldNum" idx="5" sz="quarter"/>
-          </p:nvPr>
-        </p:nvSpPr>
-        <p:spPr/>
-      </p:sp>
-    </p:spTree>
-  </p:cSld>
-  <p:clrMapOvr>
-    <a:masterClrMapping/>
-  </p:clrMapOvr>
-</p:notes>
-</file>
-
-<file path=ppt/notesSlides/notesSlide18.xml><?xml version="1.0" encoding="utf-8"?>
-<p:notes xmlns:a="http://schemas.openxmlformats.org/drawingml/2006/main" xmlns:p="http://schemas.openxmlformats.org/presentationml/2006/main" xmlns:r="http://schemas.openxmlformats.org/officeDocument/2006/relationships">
-  <p:cSld>
-    <p:spTree>
-      <p:nvGrpSpPr>
-        <p:cNvPr id="1" name=""/>
-        <p:cNvGrpSpPr/>
-        <p:nvPr/>
-      </p:nvGrpSpPr>
-      <p:grpSpPr>
-        <a:xfrm>
-          <a:off x="0" y="0"/>
-          <a:ext cx="0" cy="0"/>
-          <a:chOff x="0" y="0"/>
-          <a:chExt cx="0" cy="0"/>
-        </a:xfrm>
-      </p:grpSpPr>
-      <p:sp>
-        <p:nvSpPr>
-          <p:cNvPr id="2" name="Slide Image Placeholder 1"/>
-          <p:cNvSpPr>
-            <a:spLocks noGrp="1"/>
-          </p:cNvSpPr>
-          <p:nvPr>
-            <p:ph type="sldImg" idx="2"/>
-          </p:nvPr>
-        </p:nvSpPr>
-        <p:spPr/>
-      </p:sp>
-      <p:sp>
-        <p:nvSpPr>
-          <p:cNvPr id="3" name="Notes Placeholder 2"/>
-          <p:cNvSpPr>
-            <a:spLocks noGrp="1"/>
-          </p:cNvSpPr>
-          <p:nvPr>
-            <p:ph type="body" idx="3" sz="quarter"/>
-          </p:nvPr>
-        </p:nvSpPr>
-        <p:spPr/>
-        <p:txBody>
-          <a:bodyPr/>
-          <a:lstStyle/>
-          <a:p>
-            <a:r>
-              <a:t>DESARROLLO (para explicarlo, no se proyecta):</a:t>
-            </a:r>
-          </a:p>
-          <a:p>
-            <a:r>
-              <a:t>La demo es el script Codigo/08_transacciones_clinica.sql y se corre.</a:t>
-            </a:r>
-          </a:p>
-          <a:p>
-            <a:r>
-              <a:t>Tiene cinco bloques y el valor esta en el tercero, asi que hay que administrar el tiempo para llegar ahi con calma.</a:t>
-            </a:r>
-          </a:p>
-          <a:p>
-            <a:r>
-              <a:t>El bloque 0 crea insumo, factura y detalle_factura y siembra los seis insumos con los stocks del enunciado; empieza con los DROP para que el script se pueda correr dos veces sin limpiar a mano.</a:t>
-            </a:r>
-          </a:p>
-          <a:p>
-            <a:r>
-              <a:t>El bloque 2 es el caso feliz:, factura por 27.400 y los stocks 1, 6 y 5 quedan en 11, 58 y 5.</a:t>
-            </a:r>
-          </a:p>
-          <a:p>
-            <a:r>
-              <a:t>El bloque 3 es la clase entera y tiene tres pasos que no se pueden desordenar: la foto inicial</a:t>
-            </a:r>
-          </a:p>
-          <a:p>
-            <a:r>
-              <a:t>Que debe dar una factura, tres lineas, el insumo 3 en 40 y el insumo 2 en 3; el intento que falla a mitad, envuelto en el DO con su manejador para que el script siga; y la foto final, que debe dar EXACTAMENTE los mismos cuatro numeros.</a:t>
-            </a:r>
-          </a:p>
-          <a:p>
-            <a:r>
-              <a:t>Ese es el momento de preguntarle al grupo donde quedo el descuento del insumo 3 y dejar que alguien diga que se deshizo solo.</a:t>
-            </a:r>
-          </a:p>
-          <a:p>
-            <a:r>
-              <a:t>El bloque 3 cierra con la version viable,, que crea la segunda factura por 112.000 y deja el insumo 3 en 38 y el 2 en 0.</a:t>
-            </a:r>
-          </a:p>
-          <a:p>
-            <a:r>
-              <a:t>El bloque 4 es la funcion, con su prueba de tres columnas que devuelve verdadero, falso, verdadero; ese bloque reinicia los stocks de los insumos 5 y 2 antes de probar, porque si no los numeros esperados no salen.</a:t>
-            </a:r>
-          </a:p>
-          <a:p>
-            <a:r>
-              <a:t>Si el tiempo aprieta, lo que se recorta es el bloque 4.</a:t>
-            </a:r>
-          </a:p>
-          <a:p>
-            <a:r>
-              <a:t>NOTAS:</a:t>
-            </a:r>
-          </a:p>
-          <a:p>
-            <a:r>
-              <a:t>El bloque 1 crea el procedimiento, y conviene proyectarlo leyendo en voz alta el guardia y el GET DIAGNOSTICS, no pasarlo de largo.</a:t>
-            </a:r>
-          </a:p>
-          <a:p>
-            <a:r>
-              <a:t>CÓDIGO CITADO (referencia):</a:t>
-            </a:r>
-          </a:p>
-          <a:p>
-            <a:r>
-              <a:t>CALL sp_facturar(4, ARRAY[1, 6, 5], ARRAY[1, 2, 3])</a:t>
-            </a:r>
-          </a:p>
-          <a:p>
-            <a:r>
-              <a:t>CALL sp_facturar(4, ARRAY[3, 2], ARRAY[2, 3])</a:t>
-            </a:r>
-          </a:p>
-          <a:p>
-            <a:r>
-              <a:t>Fuera de la lamina (habla de la practica): Si el tiempo aprieta, lo que se recorta es el bloque 4, que el estudiante rehace en la pregunta 3 de la clase; lo que NO se recorta es la pareja de fotos del bloque 3.</a:t>
-            </a:r>
-          </a:p>
-        </p:txBody>
-      </p:sp>
-      <p:sp>
-        <p:nvSpPr>
-          <p:cNvPr id="4" name="Slide Number Placeholder 3"/>
-          <p:cNvSpPr>
-            <a:spLocks noGrp="1"/>
-          </p:cNvSpPr>
-          <p:nvPr>
-            <p:ph type="sldNum" idx="5" sz="quarter"/>
-          </p:nvPr>
-        </p:nvSpPr>
-        <p:spPr/>
-      </p:sp>
-    </p:spTree>
-  </p:cSld>
-  <p:clrMapOvr>
-    <a:masterClrMapping/>
-  </p:clrMapOvr>
-</p:notes>
-</file>
-
-<file path=ppt/notesSlides/notesSlide19.xml><?xml version="1.0" encoding="utf-8"?>
-<p:notes xmlns:a="http://schemas.openxmlformats.org/drawingml/2006/main" xmlns:p="http://schemas.openxmlformats.org/presentationml/2006/main" xmlns:r="http://schemas.openxmlformats.org/officeDocument/2006/relationships">
-  <p:cSld>
-    <p:spTree>
-      <p:nvGrpSpPr>
-        <p:cNvPr id="1" name=""/>
-        <p:cNvGrpSpPr/>
-        <p:nvPr/>
-      </p:nvGrpSpPr>
-      <p:grpSpPr>
-        <a:xfrm>
-          <a:off x="0" y="0"/>
-          <a:ext cx="0" cy="0"/>
-          <a:chOff x="0" y="0"/>
-          <a:chExt cx="0" cy="0"/>
-        </a:xfrm>
-      </p:grpSpPr>
-      <p:sp>
-        <p:nvSpPr>
-          <p:cNvPr id="2" name="Slide Image Placeholder 1"/>
-          <p:cNvSpPr>
-            <a:spLocks noGrp="1"/>
-          </p:cNvSpPr>
-          <p:nvPr>
-            <p:ph type="sldImg" idx="2"/>
-          </p:nvPr>
-        </p:nvSpPr>
-        <p:spPr/>
-      </p:sp>
-      <p:sp>
-        <p:nvSpPr>
-          <p:cNvPr id="3" name="Notes Placeholder 2"/>
-          <p:cNvSpPr>
-            <a:spLocks noGrp="1"/>
-          </p:cNvSpPr>
-          <p:nvPr>
-            <p:ph type="body" idx="3" sz="quarter"/>
-          </p:nvPr>
-        </p:nvSpPr>
-        <p:spPr/>
-        <p:txBody>
-          <a:bodyPr/>
-          <a:lstStyle/>
-          <a:p>
-            <a:r>
-              <a:t>DESARROLLO (para explicarlo, no se proyecta):</a:t>
-            </a:r>
-          </a:p>
-          <a:p>
-            <a:r>
               <a:t>ROW_COUNT, RAISE EXCEPTION con porcentaje y una funcion que devuelve BOOLEAN.</a:t>
             </a:r>
           </a:p>
@@ -2059,52 +1633,22 @@
           </a:p>
           <a:p>
             <a:r>
-              <a:t>Una transaccion es una unidad logica de trabajo formada por una o mas sentencias que el motor trata como indivisible frente a dos amenazas distintas: las fallas</a:t>
-            </a:r>
-          </a:p>
-          <a:p>
-            <a:r>
-              <a:t>Porque no puede quedar aplicada a medias, y las demas sesiones, porque nadie debe ver el estado intermedio.</a:t>
-            </a:r>
-          </a:p>
-          <a:p>
-            <a:r>
-              <a:t>Lo primero que hay que aclarar, porque el estudiante lo asume mal, es donde empieza y donde termina.</a:t>
-            </a:r>
-          </a:p>
-          <a:p>
-            <a:r>
-              <a:t>En PostgreSQL, si no se abre explicitamente con BEGIN, cada sentencia de nivel superior es su propia transaccion y se confirma sola; en Oracle empieza sola con la primera sentencia DML, sin que nadie escriba BEGIN, y termina con COMMIT o con ROLLBACK.</a:t>
-            </a:r>
-          </a:p>
-          <a:p>
-            <a:r>
-              <a:t>El ejemplo del proyecto es la facturacion de una consulta: se inserta la cabecera en factura, se insertan las lineas en detalle_factura y se descuenta el stock de cada insumo.</a:t>
-            </a:r>
-          </a:p>
-          <a:p>
-            <a:r>
-              <a:t>Son varias sentencias que describen UN hecho de negocio, cobrar una consulta con sus insumos, no varios hechos independientes que casualmente ocurren juntos.</a:t>
-            </a:r>
-          </a:p>
-          <a:p>
-            <a:r>
-              <a:t>Vale detenerse en la sentencia del descuento, porque es el centro de la clase</a:t>
-            </a:r>
-          </a:p>
-          <a:p>
-            <a:r>
-              <a:t>En PL/pgSQL, cuantas filas afecto la sentencia anterior se pregunta con GET DIAGNOSTICS v_filas = ROW_COUNT; no existe SQL%ROWCOUNT, que es de Oracle.</a:t>
-            </a:r>
-          </a:p>
-          <a:p>
-            <a:r>
-              <a:t>Los datos con los que se trabaja hoy son seis insumos: 1 Vacuna antirrabica con stock 12, 2 Vacuna triple felina con stock 3, 3 Antiparasitario oral con stock 40, 4 Suero fisiologico con stock 25, 5 Gasa esteril con stock 8 y 6 Jeringa 5ml con stock 60.</a:t>
-            </a:r>
-          </a:p>
-          <a:p>
-            <a:r>
-              <a:t>El insumo 2, con sus 3 unidades, es el que se va a quedar corto en la demo.</a:t>
+              <a:t>Atomicidad significa que la transaccion se aplica completa o no se aplica en absoluto, sin estados intermedios visibles ni persistentes.</a:t>
+            </a:r>
+          </a:p>
+          <a:p>
+            <a:r>
+              <a:t>El fallo concreto en la clínica cuando falta: se ejecuta el INSERT en factura, se ejecuta el INSERT de la primera linea en detalle_factura, se descuenta el stock de ese primer insumo y justo antes de la segunda linea se cae la red del consultorio.</a:t>
+            </a:r>
+          </a:p>
+          <a:p>
+            <a:r>
+              <a:t>La consulta que detecta el descuadre conviene tenerla escrita porque es tambien buen ejercicio: AS vendido FROM detalle_factura d GROUP BY d.id_insumo, contrastada contra los movimientos registrados en insumo.</a:t>
+            </a:r>
+          </a:p>
+          <a:p>
+            <a:r>
+              <a:t>Con atomicidad, el corte de red deja la transaccion sin confirmar y el motor la deshace por su cuenta al detectar que la sesion murio: no queda factura, no queda detalle, no se descuenta nada, y la recepcionista repite la operacion.</a:t>
             </a:r>
           </a:p>
           <a:p>
@@ -2114,7 +1658,12 @@
           </a:p>
           <a:p>
             <a:r>
-              <a:t>La condicion stock &gt;= 2 no es decoracion, es la que impide que el descuento se aplique cuando no hay existencias y hace que el motor informe cero filas afectadas en lugar de dejar un numero negativo.</a:t>
+              <a:t>Sin atomicidad queda una factura cobrando dos productos con una sola linea registrada, y un insumo descontado que nadie entrego.</a:t>
+            </a:r>
+          </a:p>
+          <a:p>
+            <a:r>
+              <a:t>Nadie recibe un error, la clinica cobro, y el dano aparece semanas despues, cuando el inventario fisico no cuadra y ya no hay forma de saber que factura lo desajusto.</a:t>
             </a:r>
           </a:p>
           <a:p>
@@ -2124,106 +1673,12 @@
           </a:p>
           <a:p>
             <a:r>
-              <a:t>UPDATE insumo SET stock = stock - 2 WHERE id_insumo = 2 AND stock &gt;= 2</a:t>
-            </a:r>
-          </a:p>
-          <a:p>
-            <a:r>
-              <a:t>Fuera de la lamina (habla de la practica): En PL/pgSQL, cuantas filas afecto la sentencia anterior se pregunta con GET DIAGNOSTICS v_filas = ROW_COUNT; no existe SQL%ROWCOUNT, que es de Oracle, y esa sola diferencia decide si el codigo del entregable compila o no.</a:t>
-            </a:r>
-          </a:p>
-        </p:txBody>
-      </p:sp>
-      <p:sp>
-        <p:nvSpPr>
-          <p:cNvPr id="4" name="Slide Number Placeholder 3"/>
-          <p:cNvSpPr>
-            <a:spLocks noGrp="1"/>
-          </p:cNvSpPr>
-          <p:nvPr>
-            <p:ph type="sldNum" idx="5" sz="quarter"/>
-          </p:nvPr>
-        </p:nvSpPr>
-        <p:spPr/>
-      </p:sp>
-    </p:spTree>
-  </p:cSld>
-  <p:clrMapOvr>
-    <a:masterClrMapping/>
-  </p:clrMapOvr>
-</p:notes>
-</file>
-
-<file path=ppt/notesSlides/notesSlide20.xml><?xml version="1.0" encoding="utf-8"?>
-<p:notes xmlns:a="http://schemas.openxmlformats.org/drawingml/2006/main" xmlns:p="http://schemas.openxmlformats.org/presentationml/2006/main" xmlns:r="http://schemas.openxmlformats.org/officeDocument/2006/relationships">
-  <p:cSld>
-    <p:spTree>
-      <p:nvGrpSpPr>
-        <p:cNvPr id="1" name=""/>
-        <p:cNvGrpSpPr/>
-        <p:nvPr/>
-      </p:nvGrpSpPr>
-      <p:grpSpPr>
-        <a:xfrm>
-          <a:off x="0" y="0"/>
-          <a:ext cx="0" cy="0"/>
-          <a:chOff x="0" y="0"/>
-          <a:chExt cx="0" cy="0"/>
-        </a:xfrm>
-      </p:grpSpPr>
-      <p:sp>
-        <p:nvSpPr>
-          <p:cNvPr id="2" name="Slide Image Placeholder 1"/>
-          <p:cNvSpPr>
-            <a:spLocks noGrp="1"/>
-          </p:cNvSpPr>
-          <p:nvPr>
-            <p:ph type="sldImg" idx="2"/>
-          </p:nvPr>
-        </p:nvSpPr>
-        <p:spPr/>
-      </p:sp>
-      <p:sp>
-        <p:nvSpPr>
-          <p:cNvPr id="3" name="Notes Placeholder 2"/>
-          <p:cNvSpPr>
-            <a:spLocks noGrp="1"/>
-          </p:cNvSpPr>
-          <p:nvPr>
-            <p:ph type="body" idx="3" sz="quarter"/>
-          </p:nvPr>
-        </p:nvSpPr>
-        <p:spPr/>
-        <p:txBody>
-          <a:bodyPr/>
-          <a:lstStyle/>
-          <a:p>
-            <a:r>
-              <a:t>TEXTO COMPLETO DE LA LÁMINA (se proyecta resumido):</a:t>
-            </a:r>
-          </a:p>
-          <a:p/>
-          <a:p>
-            <a:r>
-              <a:t>Herramienta: PostgreSQL/PGlite</a:t>
-            </a:r>
-          </a:p>
-          <a:p/>
-          <a:p>
-            <a:r>
-              <a:t>Demo: CALL sp_facturar(4, ARRAY[1,6,5], ARRAY[1,2,3]) que factura 27.400, y CALL sp_facturar(4, ARRAY[3,2], ARRAY[2,10]) que falla en la segunda linea: el stock del insumo 3 vuelve a 40 sin ROLLBACK escrito.</a:t>
-            </a:r>
-          </a:p>
-          <a:p/>
-          <a:p>
-            <a:r>
-              <a:t>Sigan el mismo dominio de la clínica (no inventen otro caso).</a:t>
-            </a:r>
-          </a:p>
-          <a:p/>
-          <a:p>
-            <a:r>
-              <a:t>Qué observar: la factura que falla a mitad no deja cabecera ni lineas, y el stock del insumo vuelve exactamente a su valor inicial.</a:t>
+              <a:t>SELECT d.id_insumo, SUM(d.cantidad)</a:t>
+            </a:r>
+          </a:p>
+          <a:p>
+            <a:r>
+              <a:t>Fuera de la lamina (habla de la practica): Esa es la razon por la que el entregable no pide tres sentencias sueltas sino un procedimiento que las agrupa, y por la que la pregunta 2 de la clase vale 25 puntos por demostrar con datos —foto inicial y foto final— que el descuento que SI habia alcanzado se deshizo.</a:t>
             </a:r>
           </a:p>
         </p:txBody>
@@ -2298,22 +1753,52 @@
           </a:p>
           <a:p>
             <a:r>
-              <a:t>Atomicidad significa que la transaccion se aplica completa o no se aplica en absoluto, sin estados intermedios visibles ni persistentes.</a:t>
-            </a:r>
-          </a:p>
-          <a:p>
-            <a:r>
-              <a:t>El fallo concreto en la clínica cuando falta: se ejecuta el INSERT en factura, se ejecuta el INSERT de la primera linea en detalle_factura, se descuenta el stock de ese primer insumo y justo antes de la segunda linea se cae la red del consultorio.</a:t>
-            </a:r>
-          </a:p>
-          <a:p>
-            <a:r>
-              <a:t>La consulta que detecta el descuadre conviene tenerla escrita porque es tambien buen ejercicio: AS vendido FROM detalle_factura d GROUP BY d.id_insumo, contrastada contra los movimientos registrados en insumo.</a:t>
-            </a:r>
-          </a:p>
-          <a:p>
-            <a:r>
-              <a:t>Con atomicidad, el corte de red deja la transaccion sin confirmar y el motor la deshace por su cuenta al detectar que la sesion murio: no queda factura, no queda detalle, no se descuenta nada, y la recepcionista repite la operacion.</a:t>
+              <a:t>Consistencia significa que la transaccion lleva la base de un estado valido a otro estado valido</a:t>
+            </a:r>
+          </a:p>
+          <a:p>
+            <a:r>
+              <a:t>Y valido no es palabra filosofica: valido es lo que cumplen las restricciones declaradas, claves primarias, claves foraneas, UNIQUE, NOT NULL, CHECK y los disparadores de la Clase 4.</a:t>
+            </a:r>
+          </a:p>
+          <a:p>
+            <a:r>
+              <a:t>Aqui esta el malentendido mas costoso del tema y hay que enunciarlo de frente: la atomicidad NO produce consistencia.</a:t>
+            </a:r>
+          </a:p>
+          <a:p>
+            <a:r>
+              <a:t>El fallo concreto: la regla de la clínica dice que el stock de un insumo nunca queda negativo</a:t>
+            </a:r>
+          </a:p>
+          <a:p>
+            <a:r>
+              <a:t>Pero si la tabla insumo no tiene la restriccion y la aplicacion factura 10 unidades de las 3 disponibles del insumo 2</a:t>
+            </a:r>
+          </a:p>
+          <a:p>
+            <a:r>
+              <a:t>El UPDATE insumo SET stock = stock - 10 WHERE id_insumo = 2 deja stock en menos 7, confirma sin quejarse y el sistema queda vendiendo lo que no existe.</a:t>
+            </a:r>
+          </a:p>
+          <a:p>
+            <a:r>
+              <a:t>La regla se declara una vez y vale para siempre, sin importar quien escriba el SQL despues:.</a:t>
+            </a:r>
+          </a:p>
+          <a:p>
+            <a:r>
+              <a:t>Y hay una diferencia entre motores que conviene conocer antes de la demo porque desconcierta en vivo: cuando una restriccion falla</a:t>
+            </a:r>
+          </a:p>
+          <a:p>
+            <a:r>
+              <a:t>PostgreSQL aborta la transaccion completa y toda sentencia posterior responde que la transaccion actual esta abortada hasta que se deshaga</a:t>
+            </a:r>
+          </a:p>
+          <a:p>
+            <a:r>
+              <a:t>Mientras Oracle aborta solo la sentencia que fallo y deja la transaccion abierta, de modo que el programa decide si continua o si deshace.</a:t>
             </a:r>
           </a:p>
           <a:p>
@@ -2323,12 +1808,17 @@
           </a:p>
           <a:p>
             <a:r>
-              <a:t>Sin atomicidad queda una factura cobrando dos productos con una sola linea registrada, y un insumo descontado que nadie entrego.</a:t>
-            </a:r>
-          </a:p>
-          <a:p>
-            <a:r>
-              <a:t>Nadie recibe un error, la clinica cobro, y el dano aparece semanas despues, cuando el inventario fisico no cuadra y ya no hay forma de saber que factura lo desajusto.</a:t>
+              <a:t>Si nadie declaro la restriccion, la transaccion puede ser perfectamente atomica y dejar la base en un estado absurdo.</a:t>
+            </a:r>
+          </a:p>
+          <a:p>
+            <a:r>
+              <a:t>Con eso el mismo UPDATE falla con un error del motor y la transaccion se puede deshacer entera.</a:t>
+            </a:r>
+          </a:p>
+          <a:p>
+            <a:r>
+              <a:t>Conviene notar como se combinan las dos defensas del dia: el CHECK es la red de seguridad declarativa, y el AND stock &gt;= p_cantidad del WHERE es el guardia que evita llegar al error y permite dar un mensaje de negocio en lugar de un error de restriccion.</a:t>
             </a:r>
           </a:p>
           <a:p>
@@ -2338,12 +1828,7 @@
           </a:p>
           <a:p>
             <a:r>
-              <a:t>SELECT d.id_insumo, SUM(d.cantidad)</a:t>
-            </a:r>
-          </a:p>
-          <a:p>
-            <a:r>
-              <a:t>Fuera de la lamina (habla de la practica): Esa es la razon por la que el entregable no pide tres sentencias sueltas sino un procedimiento que las agrupa, y por la que la pregunta 2 de la clase vale 25 puntos por demostrar con datos —foto inicial y foto final— que el descuento que SI habia alcanzado se deshizo.</a:t>
+              <a:t>ALTER TABLE insumo ADD CONSTRAINT ck_insumo_stock_no_negativo CHECK (stock &gt;= 0)</a:t>
             </a:r>
           </a:p>
         </p:txBody>
@@ -2418,52 +1903,27 @@
           </a:p>
           <a:p>
             <a:r>
-              <a:t>Consistencia significa que la transaccion lleva la base de un estado valido a otro estado valido</a:t>
-            </a:r>
-          </a:p>
-          <a:p>
-            <a:r>
-              <a:t>Y valido no es palabra filosofica: valido es lo que cumplen las restricciones declaradas, claves primarias, claves foraneas, UNIQUE, NOT NULL, CHECK y los disparadores de la Clase 4.</a:t>
-            </a:r>
-          </a:p>
-          <a:p>
-            <a:r>
-              <a:t>Aqui esta el malentendido mas costoso del tema y hay que enunciarlo de frente: la atomicidad NO produce consistencia.</a:t>
-            </a:r>
-          </a:p>
-          <a:p>
-            <a:r>
-              <a:t>El fallo concreto: la regla de la clínica dice que el stock de un insumo nunca queda negativo</a:t>
-            </a:r>
-          </a:p>
-          <a:p>
-            <a:r>
-              <a:t>Pero si la tabla insumo no tiene la restriccion y la aplicacion factura 10 unidades de las 3 disponibles del insumo 2</a:t>
-            </a:r>
-          </a:p>
-          <a:p>
-            <a:r>
-              <a:t>El UPDATE insumo SET stock = stock - 10 WHERE id_insumo = 2 deja stock en menos 7, confirma sin quejarse y el sistema queda vendiendo lo que no existe.</a:t>
-            </a:r>
-          </a:p>
-          <a:p>
-            <a:r>
-              <a:t>La regla se declara una vez y vale para siempre, sin importar quien escriba el SQL despues:.</a:t>
-            </a:r>
-          </a:p>
-          <a:p>
-            <a:r>
-              <a:t>Y hay una diferencia entre motores que conviene conocer antes de la demo porque desconcierta en vivo: cuando una restriccion falla</a:t>
-            </a:r>
-          </a:p>
-          <a:p>
-            <a:r>
-              <a:t>PostgreSQL aborta la transaccion completa y toda sentencia posterior responde que la transaccion actual esta abortada hasta que se deshaga</a:t>
-            </a:r>
-          </a:p>
-          <a:p>
-            <a:r>
-              <a:t>Mientras Oracle aborta solo la sentencia que fallo y deja la transaccion abierta, de modo que el programa decide si continua o si deshace.</a:t>
+              <a:t>El fallo concreto, el mas facil de contar: quedan 3 vacunas triples y dos recepcionistas facturan cada una 3 al mismo tiempo.</a:t>
+            </a:r>
+          </a:p>
+          <a:p>
+            <a:r>
+              <a:t>Ambas leen stock igual a 3, ambas calculan 3 menos 3 y ambas escriben 0; el resultado es stock 0 con seis vacunas vendidas y tres entregadas de aire.</a:t>
+            </a:r>
+          </a:p>
+          <a:p>
+            <a:r>
+              <a:t>La segunda defensa es el nivel de aislamiento, la perilla que decide cuanto ve una transaccion de lo que otra hace.</a:t>
+            </a:r>
+          </a:p>
+          <a:p>
+            <a:r>
+              <a:t>Numeros para citar: el estandar SQL define cuatro niveles, READ UNCOMMITTED, READ COMMITTED, REPEATABLE READ y SERIALIZABLE</a:t>
+            </a:r>
+          </a:p>
+          <a:p>
+            <a:r>
+              <a:t>PostgreSQL acepta los cuatro nombres pero READ UNCOMMITTED se comporta como READ COMMITTED, y su valor por omision es READ COMMITTED</a:t>
             </a:r>
           </a:p>
           <a:p>
@@ -2473,27 +1933,37 @@
           </a:p>
           <a:p>
             <a:r>
-              <a:t>Si nadie declaro la restriccion, la transaccion puede ser perfectamente atomica y dejar la base en un estado absurdo.</a:t>
-            </a:r>
-          </a:p>
-          <a:p>
-            <a:r>
-              <a:t>Con eso el mismo UPDATE falla con un error del motor y la transaccion se puede deshacer entera.</a:t>
-            </a:r>
-          </a:p>
-          <a:p>
-            <a:r>
-              <a:t>Conviene notar como se combinan las dos defensas del dia: el CHECK es la red de seguridad declarativa, y el AND stock &gt;= p_cantidad del WHERE es el guardia que evita llegar al error y permite dar un mensaje de negocio en lugar de un error de restriccion.</a:t>
-            </a:r>
-          </a:p>
-          <a:p>
-            <a:r>
-              <a:t>CÓDIGO CITADO (referencia):</a:t>
-            </a:r>
-          </a:p>
-          <a:p>
-            <a:r>
-              <a:t>ALTER TABLE insumo ADD CONSTRAINT ck_insumo_stock_no_negativo CHECK (stock &gt;= 0)</a:t>
+              <a:t>Aislamiento significa que dos transacciones concurrentes producen un resultado equivalente al que darian ejecutadas una despues de la otra.</a:t>
+            </a:r>
+          </a:p>
+          <a:p>
+            <a:r>
+              <a:t>Eso se llama actualizacion perdida o lost update, y la primera defensa es de diseno, no de configuracion: no leer y luego escribir con el valor leido, sino dejar que el motor haga la resta en la misma sentencia, UPDATE insumo SET stock = stock - 3 WHERE id_insumo = 2 AND stock &gt;= 3, porque esa sentencia es atomica y toma un bloqueo sobre la fila mientras se ejecuta.</a:t>
+            </a:r>
+          </a:p>
+          <a:p>
+            <a:r>
+              <a:t>Oracle implementa solo dos, READ COMMITTED por omision y SERIALIZABLE</a:t>
+            </a:r>
+          </a:p>
+          <a:p>
+            <a:r>
+              <a:t>MySQL con InnoDB usa REPEATABLE READ por omision, valor distinto que explica diferencias reales al portar un script.</a:t>
+            </a:r>
+          </a:p>
+          <a:p>
+            <a:r>
+              <a:t>Aqui queda el gancho explicito, y hay que decirlo tal cual: hoy se garantiza que UNA transaccion sea correcta consigo misma, y la Clase 10 estudia que pasa cuando dos se cruzan, con la lectura sucia, la lectura no repetible, la lectura fantasma, los bloqueos y el interbloqueo o deadlock.</a:t>
+            </a:r>
+          </a:p>
+          <a:p>
+            <a:r>
+              <a:t>Tambien hay que decir que hoy no se puede demostrar, porque el motor de la clase corre una sola sesion.</a:t>
+            </a:r>
+          </a:p>
+          <a:p>
+            <a:r>
+              <a:t>Fuera de la lamina (habla de la practica): Esa es exactamente la decision que la pregunta 5 pide documentar en una frase defendible.</a:t>
             </a:r>
           </a:p>
         </p:txBody>
@@ -2568,27 +2038,37 @@
           </a:p>
           <a:p>
             <a:r>
-              <a:t>El fallo concreto, el mas facil de contar: quedan 3 vacunas triples y dos recepcionistas facturan cada una 3 al mismo tiempo.</a:t>
-            </a:r>
-          </a:p>
-          <a:p>
-            <a:r>
-              <a:t>Ambas leen stock igual a 3, ambas calculan 3 menos 3 y ambas escriben 0; el resultado es stock 0 con seis vacunas vendidas y tres entregadas de aire.</a:t>
-            </a:r>
-          </a:p>
-          <a:p>
-            <a:r>
-              <a:t>La segunda defensa es el nivel de aislamiento, la perilla que decide cuanto ve una transaccion de lo que otra hace.</a:t>
-            </a:r>
-          </a:p>
-          <a:p>
-            <a:r>
-              <a:t>Numeros para citar: el estandar SQL define cuatro niveles, READ UNCOMMITTED, READ COMMITTED, REPEATABLE READ y SERIALIZABLE</a:t>
-            </a:r>
-          </a:p>
-          <a:p>
-            <a:r>
-              <a:t>PostgreSQL acepta los cuatro nombres pero READ UNCOMMITTED se comporta como READ COMMITTED, y su valor por omision es READ COMMITTED</a:t>
+              <a:t>Lo hace posible el registro de transacciones, llamado WAL o write-ahead log en PostgreSQL y redo log en Oracle: un archivo secuencial donde el motor escribe lo que va a cambiar ANTES de tocar las paginas de datos.</a:t>
+            </a:r>
+          </a:p>
+          <a:p>
+            <a:r>
+              <a:t>La consecuencia practica es contraintuitiva y muy citable: el COMMIT no necesita escribir en disco las paginas de datos modificadas, solo necesita que su registro del log quede fisicamente grabado</a:t>
+            </a:r>
+          </a:p>
+          <a:p>
+            <a:r>
+              <a:t>Por eso un COMMIT cuesta una escritura secuencial de unos cientos de bytes en lugar de varias escrituras dispersas</a:t>
+            </a:r>
+          </a:p>
+          <a:p>
+            <a:r>
+              <a:t>Y por eso mismo hacer un COMMIT por cada fila en una carga de 100.000 filas puede resultar entre cinco y veinte veces mas lento que agrupar, cifra que es orden de magnitud y hay que medir en cada motor.</a:t>
+            </a:r>
+          </a:p>
+          <a:p>
+            <a:r>
+              <a:t>El ROLLBACK tampoco es magia: el motor conserva la version anterior de cada fila modificada, como versiones antiguas de fila bajo MVCC en PostgreSQL o en el area de undo en Oracle, y deshacer consiste en descartar lo nuevo o restaurar lo viejo.</a:t>
+            </a:r>
+          </a:p>
+          <a:p>
+            <a:r>
+              <a:t>La recuperacion tras una caida usa el mismo mecanismo en dos fases: al arrancar, el motor relee el log, vuelve a aplicar todo lo confirmado y deshace todo lo que quedo sin confirmar.</a:t>
+            </a:r>
+          </a:p>
+          <a:p>
+            <a:r>
+              <a:t>Vale decirlo el mismo dia que se explica la reversion, porque conecta con el respaldo de la Clase 4: el respaldo restaura el estado hasta un punto y el log es lo que permite avanzar desde ese punto hasta el instante anterior a la falla.</a:t>
             </a:r>
           </a:p>
           <a:p>
@@ -2598,37 +2078,12 @@
           </a:p>
           <a:p>
             <a:r>
-              <a:t>Aislamiento significa que dos transacciones concurrentes producen un resultado equivalente al que darian ejecutadas una despues de la otra.</a:t>
-            </a:r>
-          </a:p>
-          <a:p>
-            <a:r>
-              <a:t>Eso se llama actualizacion perdida o lost update, y la primera defensa es de diseno, no de configuracion: no leer y luego escribir con el valor leido, sino dejar que el motor haga la resta en la misma sentencia, UPDATE insumo SET stock = stock - 3 WHERE id_insumo = 2 AND stock &gt;= 3, porque esa sentencia es atomica y toma un bloqueo sobre la fila mientras se ejecuta.</a:t>
-            </a:r>
-          </a:p>
-          <a:p>
-            <a:r>
-              <a:t>Oracle implementa solo dos, READ COMMITTED por omision y SERIALIZABLE</a:t>
-            </a:r>
-          </a:p>
-          <a:p>
-            <a:r>
-              <a:t>MySQL con InnoDB usa REPEATABLE READ por omision, valor distinto que explica diferencias reales al portar un script.</a:t>
-            </a:r>
-          </a:p>
-          <a:p>
-            <a:r>
-              <a:t>Aqui queda el gancho explicito, y hay que decirlo tal cual: hoy se garantiza que UNA transaccion sea correcta consigo misma, y la Clase 10 estudia que pasa cuando dos se cruzan, con la lectura sucia, la lectura no repetible, la lectura fantasma, los bloqueos y el interbloqueo o deadlock.</a:t>
-            </a:r>
-          </a:p>
-          <a:p>
-            <a:r>
-              <a:t>Tambien hay que decir que hoy no se puede demostrar, porque el motor de la clase corre una sola sesion.</a:t>
-            </a:r>
-          </a:p>
-          <a:p>
-            <a:r>
-              <a:t>Fuera de la lamina (habla de la practica): Esa es exactamente la decision que la pregunta 5 pide documentar en una frase defendible.</a:t>
+              <a:t>Durabilidad significa que despues de confirmar, el dato sobrevive incluso si el servidor se apaga un segundo mas tarde.</a:t>
+            </a:r>
+          </a:p>
+          <a:p>
+            <a:r>
+              <a:t>Fuera de la lamina (habla de la practica): Es tambien el ultimo item del checklist de la pregunta 5, el del restore probado.</a:t>
             </a:r>
           </a:p>
         </p:txBody>
@@ -2703,37 +2158,42 @@
           </a:p>
           <a:p>
             <a:r>
-              <a:t>Lo hace posible el registro de transacciones, llamado WAL o write-ahead log en PostgreSQL y redo log en Oracle: un archivo secuencial donde el motor escribe lo que va a cambiar ANTES de tocar las paginas de datos.</a:t>
-            </a:r>
-          </a:p>
-          <a:p>
-            <a:r>
-              <a:t>La consecuencia practica es contraintuitiva y muy citable: el COMMIT no necesita escribir en disco las paginas de datos modificadas, solo necesita que su registro del log quede fisicamente grabado</a:t>
-            </a:r>
-          </a:p>
-          <a:p>
-            <a:r>
-              <a:t>Por eso un COMMIT cuesta una escritura secuencial de unos cientos de bytes en lugar de varias escrituras dispersas</a:t>
-            </a:r>
-          </a:p>
-          <a:p>
-            <a:r>
-              <a:t>Y por eso mismo hacer un COMMIT por cada fila en una carga de 100.000 filas puede resultar entre cinco y veinte veces mas lento que agrupar, cifra que es orden de magnitud y hay que medir en cada motor.</a:t>
-            </a:r>
-          </a:p>
-          <a:p>
-            <a:r>
-              <a:t>El ROLLBACK tampoco es magia: el motor conserva la version anterior de cada fila modificada, como versiones antiguas de fila bajo MVCC en PostgreSQL o en el area de undo en Oracle, y deshacer consiste en descartar lo nuevo o restaurar lo viejo.</a:t>
-            </a:r>
-          </a:p>
-          <a:p>
-            <a:r>
-              <a:t>La recuperacion tras una caida usa el mismo mecanismo en dos fases: al arrancar, el motor relee el log, vuelve a aplicar todo lo confirmado y deshace todo lo que quedo sin confirmar.</a:t>
-            </a:r>
-          </a:p>
-          <a:p>
-            <a:r>
-              <a:t>Vale decirlo el mismo dia que se explica la reversion, porque conecta con el respaldo de la Clase 4: el respaldo restaura el estado hasta un punto y el log es lo que permite avanzar desde ese punto hasta el instante anterior a la falla.</a:t>
+              <a:t>Primera, los tipos son INT y NUMERIC, no NUMBER: NUMBER es de Oracle y en PostgreSQL no existe.</a:t>
+            </a:r>
+          </a:p>
+          <a:p>
+            <a:r>
+              <a:t>Uno: validar que los dos arreglos midan lo mismo, con IF array_length(p_insumos, 1) IS DISTINCT THEN RAISE EXCEPTION...; dos arreglos de longitud distinta significan que el llamador se equivoco, y eso se rechaza antes de tocar la base.</a:t>
+            </a:r>
+          </a:p>
+          <a:p>
+            <a:r>
+              <a:t>Se usa IS DISTINCT FROM y no el signo de distinto porque array_length puede devolver nulo si el arreglo viene vacio, y con nulo una comparacion normal no es verdadera ni falsa.</a:t>
+            </a:r>
+          </a:p>
+          <a:p>
+            <a:r>
+              <a:t>Dos: la cabecera, RETURNING id_factura INTO v_id_factura.</a:t>
+            </a:r>
+          </a:p>
+          <a:p>
+            <a:r>
+              <a:t>El total entra en cero porque todavia no se sabe, y RETURNING...</a:t>
+            </a:r>
+          </a:p>
+          <a:p>
+            <a:r>
+              <a:t>Tres: el bucle, FOR i IN 1.. array_length(p_insumos, 1) LOOP, que es la seccion siguiente.</a:t>
+            </a:r>
+          </a:p>
+          <a:p>
+            <a:r>
+              <a:t>Cuatro: al salir del bucle</a:t>
+            </a:r>
+          </a:p>
+          <a:p>
+            <a:r>
+              <a:t>El caso de prueba del enunciado da 22000 por 1 mas 900 por 2 mas 1200 por 3, o sea 27.400, y deja los stocks de los insumos 1, 6 y 5 en 11, 58 y 5.</a:t>
             </a:r>
           </a:p>
           <a:p>
@@ -2743,12 +2203,57 @@
           </a:p>
           <a:p>
             <a:r>
-              <a:t>Durabilidad significa que despues de confirmar, el dato sobrevive incluso si el servidor se apaga un segundo mas tarde.</a:t>
-            </a:r>
-          </a:p>
-          <a:p>
-            <a:r>
-              <a:t>Fuera de la lamina (habla de la practica): Es tambien el ultimo item del checklist de la pregunta 5, el del restore probado.</a:t>
+              <a:t>Tres observaciones.</a:t>
+            </a:r>
+          </a:p>
+          <a:p>
+            <a:r>
+              <a:t>Segunda, y es la que sorprende, recibe DOS ARREGLOS PARALELOS y no un insumo suelto, porque una factura real tiene varias lineas; se invoca, que significa una unidad del insumo 1, dos del 6 y tres del 5.</a:t>
+            </a:r>
+          </a:p>
+          <a:p>
+            <a:r>
+              <a:t>Tercera, el cuerpo va entre delimitadores de dolar, y conviene usar una etiqueta como $proc$ en lugar de $$ pelado para que no choque con otro bloque anidado.</a:t>
+            </a:r>
+          </a:p>
+          <a:p>
+            <a:r>
+              <a:t>El cuerpo tiene cuatro partes y vale recorrerlas en orden.</a:t>
+            </a:r>
+          </a:p>
+          <a:p>
+            <a:r>
+              <a:t>INTO evita ir a buscar con otro SELECT el identificador que se acaba de generar.</a:t>
+            </a:r>
+          </a:p>
+          <a:p>
+            <a:r>
+              <a:t>CÓDIGO CITADO (referencia):</a:t>
+            </a:r>
+          </a:p>
+          <a:p>
+            <a:r>
+              <a:t>CALL sp_facturar(4, ARRAY[1, 6, 5], ARRAY[1, 2, 3])</a:t>
+            </a:r>
+          </a:p>
+          <a:p>
+            <a:r>
+              <a:t>FROM array_length(p_cantidades, 1)</a:t>
+            </a:r>
+          </a:p>
+          <a:p>
+            <a:r>
+              <a:t>INSERT INTO factura (id_consulta, total) VALUES (p_id_consulta, 0)</a:t>
+            </a:r>
+          </a:p>
+          <a:p>
+            <a:r>
+              <a:t>UPDATE factura SET total = v_total WHERE id_factura = v_id_factura</a:t>
+            </a:r>
+          </a:p>
+          <a:p>
+            <a:r>
+              <a:t>Fuera de la lamina (habla de la practica): Aqui empieza lo que se califica, y la primera cosa que hay que proyectar es la firma exacta, porque no es la que uno escribiria de memoria: CREATE PROCEDURE sp_facturar(p_id_consulta INT, p_insumos INT[], p_cantidades INT[]) LANGUAGE plpgsql AS $proc$ ... $proc$.</a:t>
             </a:r>
           </a:p>
         </p:txBody>
@@ -2823,72 +2328,62 @@
           </a:p>
           <a:p>
             <a:r>
-              <a:t>Primera, los tipos son INT y NUMERIC, no NUMBER: NUMBER es de Oracle y en PostgreSQL no existe.</a:t>
-            </a:r>
-          </a:p>
-          <a:p>
-            <a:r>
-              <a:t>Uno: validar que los dos arreglos midan lo mismo, con IF array_length(p_insumos, 1) IS DISTINCT THEN RAISE EXCEPTION...; dos arreglos de longitud distinta significan que el llamador se equivoco, y eso se rechaza antes de tocar la base.</a:t>
-            </a:r>
-          </a:p>
-          <a:p>
-            <a:r>
-              <a:t>Se usa IS DISTINCT FROM y no el signo de distinto porque array_length puede devolver nulo si el arreglo viene vacio, y con nulo una comparacion normal no es verdadera ni falsa.</a:t>
-            </a:r>
-          </a:p>
-          <a:p>
-            <a:r>
-              <a:t>Dos: la cabecera, RETURNING id_factura INTO v_id_factura.</a:t>
-            </a:r>
-          </a:p>
-          <a:p>
-            <a:r>
-              <a:t>El total entra en cero porque todavia no se sabe, y RETURNING...</a:t>
-            </a:r>
-          </a:p>
-          <a:p>
-            <a:r>
-              <a:t>Tres: el bucle, FOR i IN 1.. array_length(p_insumos, 1) LOOP, que es la seccion siguiente.</a:t>
-            </a:r>
-          </a:p>
-          <a:p>
-            <a:r>
-              <a:t>Cuatro: al salir del bucle</a:t>
-            </a:r>
-          </a:p>
-          <a:p>
-            <a:r>
-              <a:t>El caso de prueba del enunciado da 22000 por 1 mas 900 por 2 mas 1200 por 3, o sea 27.400, y deja los stocks de los insumos 1, 6 y 5 en 11, 58 y 5.</a:t>
-            </a:r>
-          </a:p>
-          <a:p>
-            <a:r>
-              <a:t>NOTAS:</a:t>
-            </a:r>
-          </a:p>
-          <a:p>
-            <a:r>
-              <a:t>Tres observaciones.</a:t>
-            </a:r>
-          </a:p>
-          <a:p>
-            <a:r>
-              <a:t>Segunda, y es la que sorprende, recibe DOS ARREGLOS PARALELOS y no un insumo suelto, porque una factura real tiene varias lineas; se invoca, que significa una unidad del insumo 1, dos del 6 y tres del 5.</a:t>
-            </a:r>
-          </a:p>
-          <a:p>
-            <a:r>
-              <a:t>Tercera, el cuerpo va entre delimitadores de dolar, y conviene usar una etiqueta como $proc$ en lugar de $$ pelado para que no choque con otro bloque anidado.</a:t>
-            </a:r>
-          </a:p>
-          <a:p>
-            <a:r>
-              <a:t>El cuerpo tiene cuatro partes y vale recorrerlas en orden.</a:t>
-            </a:r>
-          </a:p>
-          <a:p>
-            <a:r>
-              <a:t>INTO evita ir a buscar con otro SELECT el identificador que se acaba de generar.</a:t>
+              <a:t>Dentro del bucle estan las cuatro sentencias que hay que saber defender.</a:t>
+            </a:r>
+          </a:p>
+          <a:p>
+            <a:r>
+              <a:t>Primera, el precio vigente: seguida de IF NOT FOUND THEN RAISE EXCEPTION 'ERROR: el insumo % no existe', p_insumos[i]</a:t>
+            </a:r>
+          </a:p>
+          <a:p>
+            <a:r>
+              <a:t>NOT FOUND es una variable especial de PL/pgSQL que dice si el SELECT INTO anterior trajo fila; sin esa comprobacion, un insumo inexistente deja v_precio nulo y la factura termina con total nulo, que es peor que un error.</a:t>
+            </a:r>
+          </a:p>
+          <a:p>
+            <a:r>
+              <a:t>Se lee el precio de la tabla y no se recibe por parametro a proposito: el precio que se cobra es el vigente, no el que la aplicacion crea recordar.</a:t>
+            </a:r>
+          </a:p>
+          <a:p>
+            <a:r>
+              <a:t>Segunda, el guardia, que es el corazon del dia</a:t>
+            </a:r>
+          </a:p>
+          <a:p>
+            <a:r>
+              <a:t>La comprobacion viaja DENTRO del WHERE, de modo que comprobar y escribir son una sola sentencia y nadie puede colarse entre las dos.</a:t>
+            </a:r>
+          </a:p>
+          <a:p>
+            <a:r>
+              <a:t>Tercera, como se sabe si alcanzo: GET DIAGNOSTICS v_filas = ROW_COUNT, que guarda cuantas filas toco el UPDATE anterior.</a:t>
+            </a:r>
+          </a:p>
+          <a:p>
+            <a:r>
+              <a:t>Uno significa que alcanzo; cero significa que no habia stock, y ese cero es un dato de negocio, no un error del motor: la sentencia se ejecuto perfectamente, simplemente no encontro ninguna fila que cumpliera la condicion.</a:t>
+            </a:r>
+          </a:p>
+          <a:p>
+            <a:r>
+              <a:t>Cuarta, el aborto: IF v_filas = 0 THEN RAISE EXCEPTION 'ERROR: stock insuficiente del insumo % (se pidieron %)', p_insumos[i], p_cantidades[i]</a:t>
+            </a:r>
+          </a:p>
+          <a:p>
+            <a:r>
+              <a:t>El signo de porcentaje es la marca de sustitucion de RAISE, y los argumentos van despues de la cadena en el orden en que aparecen.</a:t>
+            </a:r>
+          </a:p>
+          <a:p>
+            <a:r>
+              <a:t>No lleva RAISE_APPLICATION_ERROR ni un numero de error negativo: eso es Oracle.</a:t>
+            </a:r>
+          </a:p>
+          <a:p>
+            <a:r>
+              <a:t>Cierran el ciclo el INSERT de la linea en detalle_factura con el precio vigente y la acumulacion v_total:= v_total + (v_precio * p_cantidades[i]); notese el operador de asignacion de PL/pgSQL, dos puntos y un igual.</a:t>
             </a:r>
           </a:p>
           <a:p>
@@ -2898,27 +2393,12 @@
           </a:p>
           <a:p>
             <a:r>
-              <a:t>CALL sp_facturar(4, ARRAY[1, 6, 5], ARRAY[1, 2, 3])</a:t>
-            </a:r>
-          </a:p>
-          <a:p>
-            <a:r>
-              <a:t>FROM array_length(p_cantidades, 1)</a:t>
-            </a:r>
-          </a:p>
-          <a:p>
-            <a:r>
-              <a:t>INSERT INTO factura (id_consulta, total) VALUES (p_id_consulta, 0)</a:t>
-            </a:r>
-          </a:p>
-          <a:p>
-            <a:r>
-              <a:t>UPDATE factura SET total = v_total WHERE id_factura = v_id_factura</a:t>
-            </a:r>
-          </a:p>
-          <a:p>
-            <a:r>
-              <a:t>Fuera de la lamina (habla de la practica): Aqui empieza lo que se califica, y la primera cosa que hay que proyectar es la firma exacta, porque no es la que uno escribiria de memoria: CREATE PROCEDURE sp_facturar(p_id_consulta INT, p_insumos INT[], p_cantidades INT[]) LANGUAGE plpgsql AS $proc$ ... $proc$.</a:t>
+              <a:t>SELECT precio_unit INTO v_precio FROM insumo WHERE id_insumo = p_insumos[i]</a:t>
+            </a:r>
+          </a:p>
+          <a:p>
+            <a:r>
+              <a:t>UPDATE insumo SET stock = stock - p_cantidades[i] WHERE id_insumo = p_insumos[i] AND stock &gt;= p_cantidades[i]</a:t>
             </a:r>
           </a:p>
         </p:txBody>
@@ -2988,37 +2468,77 @@
           <a:lstStyle/>
           <a:p>
             <a:r>
-              <a:t>TEXTO COMPLETO DE LA LÁMINA (se proyecta resumido):</a:t>
-            </a:r>
-          </a:p>
-          <a:p/>
-          <a:p>
-            <a:r>
-              <a:t>La firma exacta, que se factura por lineas. `CREATE PROCEDURE sp_facturar(p_id_consulta INT, p_insumos INT[], p_cantidades INT[]) LANGUAGE plpgsql AS $proc$ ... $proc$;` — dos arreglos paralelos, no un insumo suelto: una factura tiene varias lineas. Se llama `CALL sp_facturar(4, ARRAY[1,6,5], ARRAY[1,2,3]);`. Los tipos son `INT` y `NUMERIC`, no `NUMBER`. Primera linea del cuerpo: `IF array_length(p_insumos, 1) IS DISTINCT FROM array_length(p_cantidades, 1) THEN RAISE EXCEPTION ...` — dos arreglos de longitud distinta se rechazan antes de tocar la base.</a:t>
-            </a:r>
-          </a:p>
-          <a:p/>
-          <a:p>
-            <a:r>
-              <a:t>La cabecera y el id que se acaba de generar. `INSERT INTO factura (id_consulta, total) VALUES (p_id_consulta, 0) RETURNING id_factura INTO v_id_factura;` — el total entra en 0 y se corrige al final, porque todavia no se sabe. `RETURNING ... INTO` evita ir a buscarlo con otro `SELECT`.</a:t>
-            </a:r>
-          </a:p>
-          <a:p/>
-          <a:p>
-            <a:r>
-              <a:t>El bucle, y el guardia que es el corazon del dia. `FOR i IN 1 .. array_length(p_insumos, 1) LOOP` y dentro: `UPDATE insumo SET stock = stock - p_cantidades[i] WHERE id_insumo = p_insumos[i] AND stock &gt;= p_cantidades[i];` — la comprobacion viaja dentro del `WHERE`: comprobar y escribir son una sola sentencia y nadie puede colarse entre las dos.</a:t>
-            </a:r>
-          </a:p>
-          <a:p/>
-          <a:p>
-            <a:r>
-              <a:t>Como se sabe si alcanzo, y como se aborta. `GET DIAGNOSTICS v_filas = ROW_COUNT;` guarda cuantas filas toco el `UPDATE`: `1` alcanzo, `0` no habia stock. Entonces `IF v_filas = 0 THEN RAISE EXCEPTION 'ERROR: stock insuficiente del insumo %', p_insumos[i]; END IF;`. No es `SQL%ROWCOUNT` ni `RAISE_APPLICATION_ERROR`: eso es Oracle y aqui no existe.</a:t>
-            </a:r>
-          </a:p>
-          <a:p/>
-          <a:p>
-            <a:r>
-              <a:t>Y el cierre. Cada iteracion inserta su linea en `detalle_factura` con el `precio_unit` vigente y acumula `v_total := v_total + v_precio * p_cantidades[i];`. Al salir del bucle, `UPDATE factura SET total = v_total WHERE id_factura = v_id_factura;`. El caso de prueba da 27.400 y deja los stocks en 11, 58 y 5.</a:t>
+              <a:t>DESARROLLO (para explicarlo, no se proyecta):</a:t>
+            </a:r>
+          </a:p>
+          <a:p>
+            <a:r>
+              <a:t>Un error del motor es la violacion de una regla que la base conoce: una restriccion CHECK, una clave foranea, un tipo incompatible, un interbloqueo; el motor lo detecta, lanza la excepcion y aborta.</a:t>
+            </a:r>
+          </a:p>
+          <a:p>
+            <a:r>
+              <a:t>Un error de negocio es la violacion de una regla que la base NO conoce en esa forma: que no haya stock suficiente, que la mascota este inactiva, que el total no cuadre con el detalle.</a:t>
+            </a:r>
+          </a:p>
+          <a:p>
+            <a:r>
+              <a:t>El motor no va a deshacer nada por su cuenta, porque desde su punto de vista todo salio bien: el UPDATE que no afecta ninguna fila es una sentencia exitosa.</a:t>
+            </a:r>
+          </a:p>
+          <a:p>
+            <a:r>
+              <a:t>La primera: nada de capturar y silenciar.</a:t>
+            </a:r>
+          </a:p>
+          <a:p>
+            <a:r>
+              <a:t>Un EXCEPTION WHEN OTHERS THEN NULL convierte el fallo en silencio, la factura queda registrada, el stock no se descuenta y nadie se entera hasta el inventario; si se captura, se vuelve a lanzar con RAISE a secas, que relanza la excepcion actual.</a:t>
+            </a:r>
+          </a:p>
+          <a:p>
+            <a:r>
+              <a:t>La segunda: quien decide confirmar es uno solo, y en PostgreSQL ese uno solo NO es el procedimiento, que es lo que explica la diapositiva siguiente.</a:t>
+            </a:r>
+          </a:p>
+          <a:p>
+            <a:r>
+              <a:t>Existe ademas el SAVEPOINT para el caso en que la transaccion es larga y solo una parte puede fallar: una marca intermedia con nombre a la que se vuelve sin abortar todo, SAVEPOINT sp_linea3 y mas adelante ROLLBACK TO SAVEPOINT sp_linea3.</a:t>
+            </a:r>
+          </a:p>
+          <a:p>
+            <a:r>
+              <a:t>En la clínica serviria para una factura de cinco lineas donde el insumo de la tercera esta agotado: se deshace esa linea, se avisa y se cobran las otras cuatro.</a:t>
+            </a:r>
+          </a:p>
+          <a:p>
+            <a:r>
+              <a:t>NOTAS:</a:t>
+            </a:r>
+          </a:p>
+          <a:p>
+            <a:r>
+              <a:t>Hay que separar dos tipos de fallo a mitad de transaccion porque se atienden distinto, y esta distincion es la que ordena todo el procedimiento.</a:t>
+            </a:r>
+          </a:p>
+          <a:p>
+            <a:r>
+              <a:t>De ahi que el procedimiento tenga que convertir el cero filas en una excepcion, con el RAISE EXCEPTION de la seccion anterior, y de ahi tambien que el mensaje deba nombrar el insumo concreto: quien lea el error en la sustentacion tiene que poder decir cual linea fallo.</a:t>
+            </a:r>
+          </a:p>
+          <a:p>
+            <a:r>
+              <a:t>Hoy NO se usa.</a:t>
+            </a:r>
+          </a:p>
+          <a:p>
+            <a:r>
+              <a:t>Fuera de la lamina (habla de la practica): Dos exigencias del entregable salen de aqui.</a:t>
+            </a:r>
+          </a:p>
+          <a:p>
+            <a:r>
+              <a:t>Fuera de la lamina (habla de la practica): Hoy NO se usa, porque la regla del negocio que la actividad implementa es todo o nada, pero conviene nombrarlo para que nadie crea que la unica opcion es abortar la factura completa.</a:t>
             </a:r>
           </a:p>
         </p:txBody>
@@ -3093,62 +2613,47 @@
           </a:p>
           <a:p>
             <a:r>
-              <a:t>Dentro del bucle estan las cuatro sentencias que hay que saber defender.</a:t>
-            </a:r>
-          </a:p>
-          <a:p>
-            <a:r>
-              <a:t>Primera, el precio vigente: seguida de IF NOT FOUND THEN RAISE EXCEPTION 'ERROR: el insumo % no existe', p_insumos[i]</a:t>
-            </a:r>
-          </a:p>
-          <a:p>
-            <a:r>
-              <a:t>NOT FOUND es una variable especial de PL/pgSQL que dice si el SELECT INTO anterior trajo fila; sin esa comprobacion, un insumo inexistente deja v_precio nulo y la factura termina con total nulo, que es peor que un error.</a:t>
-            </a:r>
-          </a:p>
-          <a:p>
-            <a:r>
-              <a:t>Se lee el precio de la tabla y no se recibe por parametro a proposito: el precio que se cobra es el vigente, no el que la aplicacion crea recordar.</a:t>
-            </a:r>
-          </a:p>
-          <a:p>
-            <a:r>
-              <a:t>Segunda, el guardia, que es el corazon del dia</a:t>
-            </a:r>
-          </a:p>
-          <a:p>
-            <a:r>
-              <a:t>La comprobacion viaja DENTRO del WHERE, de modo que comprobar y escribir son una sola sentencia y nadie puede colarse entre las dos.</a:t>
-            </a:r>
-          </a:p>
-          <a:p>
-            <a:r>
-              <a:t>Tercera, como se sabe si alcanzo: GET DIAGNOSTICS v_filas = ROW_COUNT, que guarda cuantas filas toco el UPDATE anterior.</a:t>
-            </a:r>
-          </a:p>
-          <a:p>
-            <a:r>
-              <a:t>Uno significa que alcanzo; cero significa que no habia stock, y ese cero es un dato de negocio, no un error del motor: la sentencia se ejecuto perfectamente, simplemente no encontro ninguna fila que cumpliera la condicion.</a:t>
-            </a:r>
-          </a:p>
-          <a:p>
-            <a:r>
-              <a:t>Cuarta, el aborto: IF v_filas = 0 THEN RAISE EXCEPTION 'ERROR: stock insuficiente del insumo % (se pidieron %)', p_insumos[i], p_cantidades[i]</a:t>
-            </a:r>
-          </a:p>
-          <a:p>
-            <a:r>
-              <a:t>El signo de porcentaje es la marca de sustitucion de RAISE, y los argumentos van despues de la cadena en el orden en que aparecen.</a:t>
-            </a:r>
-          </a:p>
-          <a:p>
-            <a:r>
-              <a:t>No lleva RAISE_APPLICATION_ERROR ni un numero de error negativo: eso es Oracle.</a:t>
-            </a:r>
-          </a:p>
-          <a:p>
-            <a:r>
-              <a:t>Cierran el ciclo el INSERT de la linea en detalle_factura con el precio vigente y la acumulacion v_total:= v_total + (v_precio * p_cantidades[i]); notese el operador de asignacion de PL/pgSQL, dos puntos y un igual.</a:t>
+              <a:t>La afirmacion central es corta: un CALL escrito por fuera de cualquier BEGIN es su propia transaccion.</a:t>
+            </a:r>
+          </a:p>
+          <a:p>
+            <a:r>
+              <a:t>Se demuestra con datos: el descuenta 2 unidades del insumo 3, que tiene 40 y por lo tanto alcanza, y se estrella en el insumo 2, que tiene 3 y no puede dar 10; al final el stock del insumo 3 vuelve a 40 sin intervencion de nadie.</a:t>
+            </a:r>
+          </a:p>
+          <a:p>
+            <a:r>
+              <a:t>La consecuencia practica hay que enunciarla como regla de diseno: quien decide el COMMIT es uno solo, el llamador.</a:t>
+            </a:r>
+          </a:p>
+          <a:p>
+            <a:r>
+              <a:t>Un procedimiento que confirma por su cuenta le quita al llamador la posibilidad de deshacer, y es la fuente numero uno de facturas a medias cuando la Clase 12 conecte la aplicacion con la base.</a:t>
+            </a:r>
+          </a:p>
+          <a:p>
+            <a:r>
+              <a:t>Y hay un detalle de sintaxis que conviene mencionar antes de que alguien lo intente: en PostgreSQL un procedimiento SI puede contener COMMIT y ROLLBACK</a:t>
+            </a:r>
+          </a:p>
+          <a:p>
+            <a:r>
+              <a:t>Pero solo cuando se invoca desde un contexto que lo permita; si el CALL esta dentro de un bloque con manejador de excepciones, el control de transaccion dentro del procedimiento no esta permitido y el motor lo rechaza.</a:t>
+            </a:r>
+          </a:p>
+          <a:p>
+            <a:r>
+              <a:t>O sea que la version con ROLLBACK adentro no es solo innecesaria: en el escenario de la clase ni siquiera corre.</a:t>
+            </a:r>
+          </a:p>
+          <a:p>
+            <a:r>
+              <a:t>NOTAS:</a:t>
+            </a:r>
+          </a:p>
+          <a:p>
+            <a:r>
+              <a:t>Si la excepcion se propaga hasta afuera del procedimiento, el motor deshace TODO lo que ese CALL habia hecho —la cabecera de la factura, las lineas ya insertadas y los descuentos de stock ya aplicados— y nadie escribio ROLLBACK.</a:t>
             </a:r>
           </a:p>
           <a:p>
@@ -3158,12 +2663,7 @@
           </a:p>
           <a:p>
             <a:r>
-              <a:t>SELECT precio_unit INTO v_precio FROM insumo WHERE id_insumo = p_insumos[i]</a:t>
-            </a:r>
-          </a:p>
-          <a:p>
-            <a:r>
-              <a:t>UPDATE insumo SET stock = stock - p_cantidades[i] WHERE id_insumo = p_insumos[i] AND stock &gt;= p_cantidades[i]</a:t>
+              <a:t>CALL sp_facturar(4, ARRAY[3, 2], ARRAY[2, 10])</a:t>
             </a:r>
           </a:p>
         </p:txBody>
@@ -9341,118 +8841,14 @@
       </p:sp>
       <p:sp>
         <p:nvSpPr>
-          <p:cNvPr id="6" name="Rounded Rectangle 5"/>
-          <p:cNvSpPr/>
-          <p:nvPr/>
-        </p:nvSpPr>
-        <p:spPr>
-          <a:xfrm>
-            <a:off x="5797149" y="1436512"/>
-            <a:ext cx="6010497" cy="4542758"/>
-          </a:xfrm>
-          <a:prstGeom prst="roundRect">
-            <a:avLst>
-              <a:gd name="adj" fmla="val 4000"/>
-            </a:avLst>
-          </a:prstGeom>
-          <a:solidFill>
-            <a:srgbClr val="E8EEF4"/>
-          </a:solidFill>
-          <a:ln>
-            <a:noFill/>
-          </a:ln>
-        </p:spPr>
-        <p:style>
-          <a:lnRef idx="1">
-            <a:schemeClr val="accent1"/>
-          </a:lnRef>
-          <a:fillRef idx="3">
-            <a:schemeClr val="accent1"/>
-          </a:fillRef>
-          <a:effectRef idx="2">
-            <a:schemeClr val="accent1"/>
-          </a:effectRef>
-          <a:fontRef idx="minor">
-            <a:schemeClr val="lt1"/>
-          </a:fontRef>
-        </p:style>
-        <p:txBody>
-          <a:bodyPr rtlCol="0" anchor="ctr"/>
-          <a:lstStyle/>
-          <a:p>
-            <a:pPr algn="ctr"/>
-          </a:p>
-        </p:txBody>
-      </p:sp>
-      <p:pic>
-        <p:nvPicPr>
-          <p:cNvPr id="7" name="Picture 6" descr="invoice-receipt-printing.jpg"/>
-          <p:cNvPicPr>
-            <a:picLocks noChangeAspect="1"/>
-          </p:cNvPicPr>
-          <p:nvPr/>
-        </p:nvPicPr>
-        <p:blipFill>
-          <a:blip r:embed="rId2"/>
-          <a:stretch>
-            <a:fillRect/>
-          </a:stretch>
-        </p:blipFill>
-        <p:spPr>
-          <a:xfrm>
-            <a:off x="5870301" y="1509664"/>
-            <a:ext cx="5864193" cy="4396454"/>
-          </a:xfrm>
-          <a:prstGeom prst="rect">
-            <a:avLst/>
-          </a:prstGeom>
-        </p:spPr>
-      </p:pic>
-      <p:sp>
-        <p:nvSpPr>
-          <p:cNvPr id="8" name="TextBox 7"/>
+          <p:cNvPr id="6" name="TextBox 5"/>
           <p:cNvSpPr txBox="1"/>
           <p:nvPr/>
         </p:nvSpPr>
         <p:spPr>
           <a:xfrm>
-            <a:off x="5870301" y="5961888"/>
-            <a:ext cx="5864193" cy="320040"/>
-          </a:xfrm>
-          <a:prstGeom prst="rect">
-            <a:avLst/>
-          </a:prstGeom>
-          <a:noFill/>
-        </p:spPr>
-        <p:txBody>
-          <a:bodyPr wrap="square">
-            <a:spAutoFit/>
-          </a:bodyPr>
-          <a:lstStyle/>
-          <a:p>
-            <a:pPr algn="ctr"/>
-            <a:r>
-              <a:rPr sz="1100" b="0" i="1">
-                <a:solidFill>
-                  <a:srgbClr val="666666"/>
-                </a:solidFill>
-                <a:latin typeface="Calibri"/>
-              </a:rPr>
-              <a:t>Foto: Kindel Media · Pexels</a:t>
-            </a:r>
-          </a:p>
-        </p:txBody>
-      </p:sp>
-      <p:sp>
-        <p:nvSpPr>
-          <p:cNvPr id="9" name="TextBox 8"/>
-          <p:cNvSpPr txBox="1"/>
-          <p:nvPr/>
-        </p:nvSpPr>
-        <p:spPr>
-          <a:xfrm>
-            <a:off x="457200" y="1563624"/>
-            <a:ext cx="5093061" cy="4837176"/>
+            <a:off x="457200" y="1380744"/>
+            <a:ext cx="11277295" cy="5020056"/>
           </a:xfrm>
           <a:prstGeom prst="rect">
             <a:avLst/>
@@ -9471,7 +8867,7 @@
               </a:spcAft>
             </a:pPr>
             <a:r>
-              <a:rPr sz="2000" b="0" i="0">
+              <a:rPr sz="1600" b="0" i="0">
                 <a:solidFill>
                   <a:srgbClr val="333333"/>
                 </a:solidFill>
@@ -9480,13 +8876,58 @@
               <a:t>–   </a:t>
             </a:r>
             <a:r>
-              <a:rPr sz="2000" b="1" i="0">
+              <a:rPr sz="1600" b="1" i="0">
                 <a:solidFill>
                   <a:srgbClr val="333333"/>
                 </a:solidFill>
                 <a:latin typeface="Calibri"/>
               </a:rPr>
               <a:t>La firma exacta, que se factura por lineas.</a:t>
+            </a:r>
+            <a:r>
+              <a:rPr sz="1600" b="0" i="0">
+                <a:solidFill>
+                  <a:srgbClr val="333333"/>
+                </a:solidFill>
+                <a:latin typeface="Calibri"/>
+              </a:rPr>
+              <a:t> «CREATE PROCEDURE sp_facturar(p_id_consulta INT, p_insumos INT[], p_cantidades INT[]) LANGUAGE plpgsql AS $proc$ ... $proc$;» — </a:t>
+            </a:r>
+            <a:r>
+              <a:rPr sz="1600" b="1" i="0">
+                <a:solidFill>
+                  <a:srgbClr val="333333"/>
+                </a:solidFill>
+                <a:latin typeface="Calibri"/>
+              </a:rPr>
+              <a:t>dos arreglos paralelos</a:t>
+            </a:r>
+            <a:r>
+              <a:rPr sz="1600" b="0" i="0">
+                <a:solidFill>
+                  <a:srgbClr val="333333"/>
+                </a:solidFill>
+                <a:latin typeface="Calibri"/>
+              </a:rPr>
+              <a:t>, no un insumo suelto: una factura tiene varias lineas. Se llama «CALL sp_facturar(4, ARRAY[1,6,5], ARRAY[1,2,3]);». Los tipos son «INT» y «NUMERIC», no «NUMBER». Primera linea del cuerpo: «IF array_length(p_insumos, 1) IS DISTINCT FROM array_length(p_cantidades, 1) THEN RAISE EXCEPTION ...» — dos arreglos de longitud distinta se rechazan </a:t>
+            </a:r>
+            <a:r>
+              <a:rPr sz="1600" b="1" i="0">
+                <a:solidFill>
+                  <a:srgbClr val="333333"/>
+                </a:solidFill>
+                <a:latin typeface="Calibri"/>
+              </a:rPr>
+              <a:t>antes de tocar la base</a:t>
+            </a:r>
+            <a:r>
+              <a:rPr sz="1600" b="0" i="0">
+                <a:solidFill>
+                  <a:srgbClr val="333333"/>
+                </a:solidFill>
+                <a:latin typeface="Calibri"/>
+              </a:rPr>
+              <a:t>.</a:t>
             </a:r>
           </a:p>
           <a:p>
@@ -9496,7 +8937,7 @@
               </a:spcAft>
             </a:pPr>
             <a:r>
-              <a:rPr sz="2000" b="0" i="0">
+              <a:rPr sz="1600" b="0" i="0">
                 <a:solidFill>
                   <a:srgbClr val="333333"/>
                 </a:solidFill>
@@ -9505,13 +8946,40 @@
               <a:t>–   </a:t>
             </a:r>
             <a:r>
-              <a:rPr sz="2000" b="1" i="0">
+              <a:rPr sz="1600" b="1" i="0">
                 <a:solidFill>
                   <a:srgbClr val="333333"/>
                 </a:solidFill>
                 <a:latin typeface="Calibri"/>
               </a:rPr>
               <a:t>La cabecera y el id que se acaba de generar.</a:t>
+            </a:r>
+            <a:r>
+              <a:rPr sz="1600" b="0" i="0">
+                <a:solidFill>
+                  <a:srgbClr val="333333"/>
+                </a:solidFill>
+                <a:latin typeface="Calibri"/>
+              </a:rPr>
+              <a:t> «INSERT INTO factura (id_consulta, total) VALUES (p_id_consulta, 0) RETURNING id_factura INTO v_id_factura;» — el total entra en </a:t>
+            </a:r>
+            <a:r>
+              <a:rPr sz="1600" b="1" i="0">
+                <a:solidFill>
+                  <a:srgbClr val="333333"/>
+                </a:solidFill>
+                <a:latin typeface="Calibri"/>
+              </a:rPr>
+              <a:t>0</a:t>
+            </a:r>
+            <a:r>
+              <a:rPr sz="1600" b="0" i="0">
+                <a:solidFill>
+                  <a:srgbClr val="333333"/>
+                </a:solidFill>
+                <a:latin typeface="Calibri"/>
+              </a:rPr>
+              <a:t> y se corrige al final, porque todavia no se sabe. «RETURNING ... INTO» evita ir a buscarlo con otro «SELECT».</a:t>
             </a:r>
           </a:p>
           <a:p>
@@ -9521,7 +8989,7 @@
               </a:spcAft>
             </a:pPr>
             <a:r>
-              <a:rPr sz="2000" b="0" i="0">
+              <a:rPr sz="1600" b="0" i="0">
                 <a:solidFill>
                   <a:srgbClr val="333333"/>
                 </a:solidFill>
@@ -9530,13 +8998,76 @@
               <a:t>–   </a:t>
             </a:r>
             <a:r>
-              <a:rPr sz="2000" b="1" i="0">
+              <a:rPr sz="1600" b="1" i="0">
                 <a:solidFill>
                   <a:srgbClr val="333333"/>
                 </a:solidFill>
                 <a:latin typeface="Calibri"/>
               </a:rPr>
               <a:t>El bucle, y el guardia que es el corazon del dia.</a:t>
+            </a:r>
+            <a:r>
+              <a:rPr sz="1600" b="0" i="0">
+                <a:solidFill>
+                  <a:srgbClr val="333333"/>
+                </a:solidFill>
+                <a:latin typeface="Calibri"/>
+              </a:rPr>
+              <a:t> «FOR i IN 1 .. array_length(p_insumos, 1) LOOP» y dentro: «UPDATE insumo SET stock = stock - p_cantidades[i] WHERE id_insumo = p_insumos[i] AND </a:t>
+            </a:r>
+            <a:r>
+              <a:rPr sz="1600" b="1" i="0">
+                <a:solidFill>
+                  <a:srgbClr val="333333"/>
+                </a:solidFill>
+                <a:latin typeface="Calibri"/>
+              </a:rPr>
+              <a:t>stock &gt;= p_cantidades[i]</a:t>
+            </a:r>
+            <a:r>
+              <a:rPr sz="1600" b="0" i="0">
+                <a:solidFill>
+                  <a:srgbClr val="333333"/>
+                </a:solidFill>
+                <a:latin typeface="Calibri"/>
+              </a:rPr>
+              <a:t>;» — la comprobacion viaja </a:t>
+            </a:r>
+            <a:r>
+              <a:rPr sz="1600" b="1" i="0">
+                <a:solidFill>
+                  <a:srgbClr val="333333"/>
+                </a:solidFill>
+                <a:latin typeface="Calibri"/>
+              </a:rPr>
+              <a:t>dentro del «WHERE»</a:t>
+            </a:r>
+            <a:r>
+              <a:rPr sz="1600" b="0" i="0">
+                <a:solidFill>
+                  <a:srgbClr val="333333"/>
+                </a:solidFill>
+                <a:latin typeface="Calibri"/>
+              </a:rPr>
+              <a:t>: comprobar y escribir son </a:t>
+            </a:r>
+            <a:r>
+              <a:rPr sz="1600" b="1" i="0">
+                <a:solidFill>
+                  <a:srgbClr val="333333"/>
+                </a:solidFill>
+                <a:latin typeface="Calibri"/>
+              </a:rPr>
+              <a:t>una sola sentencia</a:t>
+            </a:r>
+            <a:r>
+              <a:rPr sz="1600" b="0" i="0">
+                <a:solidFill>
+                  <a:srgbClr val="333333"/>
+                </a:solidFill>
+                <a:latin typeface="Calibri"/>
+              </a:rPr>
+              <a:t> y nadie puede colarse entre las dos.</a:t>
             </a:r>
           </a:p>
           <a:p>
@@ -9546,7 +9077,7 @@
               </a:spcAft>
             </a:pPr>
             <a:r>
-              <a:rPr sz="2000" b="0" i="0">
+              <a:rPr sz="1600" b="0" i="0">
                 <a:solidFill>
                   <a:srgbClr val="333333"/>
                 </a:solidFill>
@@ -9555,7 +9086,7 @@
               <a:t>–   </a:t>
             </a:r>
             <a:r>
-              <a:rPr sz="2000" b="1" i="0">
+              <a:rPr sz="1600" b="1" i="0">
                 <a:solidFill>
                   <a:srgbClr val="333333"/>
                 </a:solidFill>
@@ -9564,20 +9095,108 @@
               <a:t>Como se sabe si alcanzo, y como se aborta.</a:t>
             </a:r>
             <a:r>
-              <a:rPr sz="2000" b="0" i="0">
+              <a:rPr sz="1600" b="0" i="0">
                 <a:solidFill>
                   <a:srgbClr val="333333"/>
                 </a:solidFill>
                 <a:latin typeface="Calibri"/>
               </a:rPr>
-              <a:t> «GET DIAGNOSTICS v_filas = ROW_COUNT;» guarda cuantas filas toco el «UPDATE»:</a:t>
-            </a:r>
-          </a:p>
-        </p:txBody>
-      </p:sp>
-      <p:sp>
-        <p:nvSpPr>
-          <p:cNvPr id="10" name="TextBox 9"/>
+              <a:t> «GET DIAGNOSTICS v_filas = ROW_COUNT;» guarda cuantas filas toco el «UPDATE»: «1» alcanzo, «0» no habia stock. Entonces «IF v_filas = 0 THEN RAISE EXCEPTION 'ERROR: stock insuficiente del insumo %', p_insumos[i]; END IF;». </a:t>
+            </a:r>
+            <a:r>
+              <a:rPr sz="1600" b="1" i="0">
+                <a:solidFill>
+                  <a:srgbClr val="333333"/>
+                </a:solidFill>
+                <a:latin typeface="Calibri"/>
+              </a:rPr>
+              <a:t>No es «SQL%ROWCOUNT» ni «RAISE_APPLICATION_ERROR»</a:t>
+            </a:r>
+            <a:r>
+              <a:rPr sz="1600" b="0" i="0">
+                <a:solidFill>
+                  <a:srgbClr val="333333"/>
+                </a:solidFill>
+                <a:latin typeface="Calibri"/>
+              </a:rPr>
+              <a:t>: eso es Oracle y aqui no existe.</a:t>
+            </a:r>
+          </a:p>
+          <a:p>
+            <a:pPr>
+              <a:spcAft>
+                <a:spcPts val="800"/>
+              </a:spcAft>
+            </a:pPr>
+            <a:r>
+              <a:rPr sz="1600" b="0" i="0">
+                <a:solidFill>
+                  <a:srgbClr val="333333"/>
+                </a:solidFill>
+                <a:latin typeface="Calibri"/>
+              </a:rPr>
+              <a:t>–   </a:t>
+            </a:r>
+            <a:r>
+              <a:rPr sz="1600" b="1" i="0">
+                <a:solidFill>
+                  <a:srgbClr val="333333"/>
+                </a:solidFill>
+                <a:latin typeface="Calibri"/>
+              </a:rPr>
+              <a:t>Y el cierre.</a:t>
+            </a:r>
+            <a:r>
+              <a:rPr sz="1600" b="0" i="0">
+                <a:solidFill>
+                  <a:srgbClr val="333333"/>
+                </a:solidFill>
+                <a:latin typeface="Calibri"/>
+              </a:rPr>
+              <a:t> Cada iteracion inserta su linea en «detalle_factura» con el «precio_unit» </a:t>
+            </a:r>
+            <a:r>
+              <a:rPr sz="1600" b="1" i="0">
+                <a:solidFill>
+                  <a:srgbClr val="333333"/>
+                </a:solidFill>
+                <a:latin typeface="Calibri"/>
+              </a:rPr>
+              <a:t>vigente</a:t>
+            </a:r>
+            <a:r>
+              <a:rPr sz="1600" b="0" i="0">
+                <a:solidFill>
+                  <a:srgbClr val="333333"/>
+                </a:solidFill>
+                <a:latin typeface="Calibri"/>
+              </a:rPr>
+              <a:t> y acumula «v_total := v_total + v_precio * p_cantidades[i];». Al salir del bucle, «UPDATE factura SET total = v_total WHERE id_factura = v_id_factura;». El caso de prueba da </a:t>
+            </a:r>
+            <a:r>
+              <a:rPr sz="1600" b="1" i="0">
+                <a:solidFill>
+                  <a:srgbClr val="333333"/>
+                </a:solidFill>
+                <a:latin typeface="Calibri"/>
+              </a:rPr>
+              <a:t>27.400</a:t>
+            </a:r>
+            <a:r>
+              <a:rPr sz="1600" b="0" i="0">
+                <a:solidFill>
+                  <a:srgbClr val="333333"/>
+                </a:solidFill>
+                <a:latin typeface="Calibri"/>
+              </a:rPr>
+              <a:t> y deja los stocks en 11, 58 y 5.</a:t>
+            </a:r>
+          </a:p>
+        </p:txBody>
+      </p:sp>
+      <p:sp>
+        <p:nvSpPr>
+          <p:cNvPr id="7" name="TextBox 6"/>
           <p:cNvSpPr txBox="1"/>
           <p:nvPr/>
         </p:nvSpPr>
@@ -12875,118 +12494,14 @@
       </p:sp>
       <p:sp>
         <p:nvSpPr>
-          <p:cNvPr id="6" name="Rounded Rectangle 5"/>
-          <p:cNvSpPr/>
-          <p:nvPr/>
-        </p:nvSpPr>
-        <p:spPr>
-          <a:xfrm>
-            <a:off x="5797149" y="1678969"/>
-            <a:ext cx="6010497" cy="4057845"/>
-          </a:xfrm>
-          <a:prstGeom prst="roundRect">
-            <a:avLst>
-              <a:gd name="adj" fmla="val 4000"/>
-            </a:avLst>
-          </a:prstGeom>
-          <a:solidFill>
-            <a:srgbClr val="E8EEF4"/>
-          </a:solidFill>
-          <a:ln>
-            <a:noFill/>
-          </a:ln>
-        </p:spPr>
-        <p:style>
-          <a:lnRef idx="1">
-            <a:schemeClr val="accent1"/>
-          </a:lnRef>
-          <a:fillRef idx="3">
-            <a:schemeClr val="accent1"/>
-          </a:fillRef>
-          <a:effectRef idx="2">
-            <a:schemeClr val="accent1"/>
-          </a:effectRef>
-          <a:fontRef idx="minor">
-            <a:schemeClr val="lt1"/>
-          </a:fontRef>
-        </p:style>
-        <p:txBody>
-          <a:bodyPr rtlCol="0" anchor="ctr"/>
-          <a:lstStyle/>
-          <a:p>
-            <a:pPr algn="ctr"/>
-          </a:p>
-        </p:txBody>
-      </p:sp>
-      <p:pic>
-        <p:nvPicPr>
-          <p:cNvPr id="7" name="Picture 6" descr="checkpoint-barrier.jpg"/>
-          <p:cNvPicPr>
-            <a:picLocks noChangeAspect="1"/>
-          </p:cNvPicPr>
-          <p:nvPr/>
-        </p:nvPicPr>
-        <p:blipFill>
-          <a:blip r:embed="rId2"/>
-          <a:stretch>
-            <a:fillRect/>
-          </a:stretch>
-        </p:blipFill>
-        <p:spPr>
-          <a:xfrm>
-            <a:off x="5870301" y="1752121"/>
-            <a:ext cx="5864193" cy="3911541"/>
-          </a:xfrm>
-          <a:prstGeom prst="rect">
-            <a:avLst/>
-          </a:prstGeom>
-        </p:spPr>
-      </p:pic>
-      <p:sp>
-        <p:nvSpPr>
-          <p:cNvPr id="8" name="TextBox 7"/>
+          <p:cNvPr id="6" name="TextBox 5"/>
           <p:cNvSpPr txBox="1"/>
           <p:nvPr/>
         </p:nvSpPr>
         <p:spPr>
           <a:xfrm>
-            <a:off x="5870301" y="5961888"/>
-            <a:ext cx="5864193" cy="320040"/>
-          </a:xfrm>
-          <a:prstGeom prst="rect">
-            <a:avLst/>
-          </a:prstGeom>
-          <a:noFill/>
-        </p:spPr>
-        <p:txBody>
-          <a:bodyPr wrap="square">
-            <a:spAutoFit/>
-          </a:bodyPr>
-          <a:lstStyle/>
-          <a:p>
-            <a:pPr algn="ctr"/>
-            <a:r>
-              <a:rPr sz="1100" b="0" i="1">
-                <a:solidFill>
-                  <a:srgbClr val="666666"/>
-                </a:solidFill>
-                <a:latin typeface="Calibri"/>
-              </a:rPr>
-              <a:t>Foto: Hans Eiskonen · Pexels</a:t>
-            </a:r>
-          </a:p>
-        </p:txBody>
-      </p:sp>
-      <p:sp>
-        <p:nvSpPr>
-          <p:cNvPr id="9" name="TextBox 8"/>
-          <p:cNvSpPr txBox="1"/>
-          <p:nvPr/>
-        </p:nvSpPr>
-        <p:spPr>
-          <a:xfrm>
-            <a:off x="457200" y="1563624"/>
-            <a:ext cx="5093061" cy="4837176"/>
+            <a:off x="457200" y="1380744"/>
+            <a:ext cx="11277295" cy="5020056"/>
           </a:xfrm>
           <a:prstGeom prst="rect">
             <a:avLst/>
@@ -13005,7 +12520,7 @@
               </a:spcAft>
             </a:pPr>
             <a:r>
-              <a:rPr sz="2000" b="0" i="0">
+              <a:rPr sz="1800" b="0" i="0">
                 <a:solidFill>
                   <a:srgbClr val="333333"/>
                 </a:solidFill>
@@ -13014,7 +12529,7 @@
               <a:t>–   </a:t>
             </a:r>
             <a:r>
-              <a:rPr sz="2000" b="1" i="0">
+              <a:rPr sz="1800" b="1" i="0">
                 <a:solidFill>
                   <a:srgbClr val="333333"/>
                 </a:solidFill>
@@ -13023,7 +12538,7 @@
               <a:t>La regla de PostgreSQL.</a:t>
             </a:r>
             <a:r>
-              <a:rPr sz="2000" b="0" i="0">
+              <a:rPr sz="1800" b="0" i="0">
                 <a:solidFill>
                   <a:srgbClr val="333333"/>
                 </a:solidFill>
@@ -13032,7 +12547,7 @@
               <a:t> Un «CALL» escrito por fuera de cualquier «BEGIN» es </a:t>
             </a:r>
             <a:r>
-              <a:rPr sz="2000" b="1" i="0">
+              <a:rPr sz="1800" b="1" i="0">
                 <a:solidFill>
                   <a:srgbClr val="333333"/>
                 </a:solidFill>
@@ -13041,13 +12556,49 @@
               <a:t>su propia transaccion</a:t>
             </a:r>
             <a:r>
-              <a:rPr sz="2000" b="0" i="0">
+              <a:rPr sz="1800" b="0" i="0">
                 <a:solidFill>
                   <a:srgbClr val="333333"/>
                 </a:solidFill>
                 <a:latin typeface="Calibri"/>
               </a:rPr>
-              <a:t>.</a:t>
+              <a:t>. Si la excepcion se propaga hasta afuera del procedimiento, el motor deshace </a:t>
+            </a:r>
+            <a:r>
+              <a:rPr sz="1800" b="1" i="0">
+                <a:solidFill>
+                  <a:srgbClr val="333333"/>
+                </a:solidFill>
+                <a:latin typeface="Calibri"/>
+              </a:rPr>
+              <a:t>todo</a:t>
+            </a:r>
+            <a:r>
+              <a:rPr sz="1800" b="0" i="0">
+                <a:solidFill>
+                  <a:srgbClr val="333333"/>
+                </a:solidFill>
+                <a:latin typeface="Calibri"/>
+              </a:rPr>
+              <a:t> lo que ese «CALL» habia hecho: la cabecera de la factura, el detalle y el descuento del primer insumo. </a:t>
+            </a:r>
+            <a:r>
+              <a:rPr sz="1800" b="1" i="0">
+                <a:solidFill>
+                  <a:srgbClr val="333333"/>
+                </a:solidFill>
+                <a:latin typeface="Calibri"/>
+              </a:rPr>
+              <a:t>Nadie escribio ROLLBACK</a:t>
+            </a:r>
+            <a:r>
+              <a:rPr sz="1800" b="0" i="0">
+                <a:solidFill>
+                  <a:srgbClr val="333333"/>
+                </a:solidFill>
+                <a:latin typeface="Calibri"/>
+              </a:rPr>
+              <a:t> y la base queda intacta.</a:t>
             </a:r>
           </a:p>
           <a:p>
@@ -13057,7 +12608,7 @@
               </a:spcAft>
             </a:pPr>
             <a:r>
-              <a:rPr sz="2000" b="0" i="0">
+              <a:rPr sz="1800" b="0" i="0">
                 <a:solidFill>
                   <a:srgbClr val="333333"/>
                 </a:solidFill>
@@ -13066,13 +12617,58 @@
               <a:t>–   </a:t>
             </a:r>
             <a:r>
-              <a:rPr sz="2000" b="1" i="0">
+              <a:rPr sz="1800" b="1" i="0">
                 <a:solidFill>
                   <a:srgbClr val="333333"/>
                 </a:solidFill>
                 <a:latin typeface="Calibri"/>
               </a:rPr>
               <a:t>Y el savepoint que nadie declara.</a:t>
+            </a:r>
+            <a:r>
+              <a:rPr sz="1800" b="0" i="0">
+                <a:solidFill>
+                  <a:srgbClr val="333333"/>
+                </a:solidFill>
+                <a:latin typeface="Calibri"/>
+              </a:rPr>
+              <a:t> Un bloque «BEGIN ... EXCEPTION WHEN ... END» en PL/pgSQL crea un </a:t>
+            </a:r>
+            <a:r>
+              <a:rPr sz="1800" b="1" i="0">
+                <a:solidFill>
+                  <a:srgbClr val="333333"/>
+                </a:solidFill>
+                <a:latin typeface="Calibri"/>
+              </a:rPr>
+              <a:t>savepoint implicito</a:t>
+            </a:r>
+            <a:r>
+              <a:rPr sz="1800" b="0" i="0">
+                <a:solidFill>
+                  <a:srgbClr val="333333"/>
+                </a:solidFill>
+                <a:latin typeface="Calibri"/>
+              </a:rPr>
+              <a:t> al entrar. Por eso, si tu capturas el error, se revierte solo lo hecho </a:t>
+            </a:r>
+            <a:r>
+              <a:rPr sz="1800" b="1" i="0">
+                <a:solidFill>
+                  <a:srgbClr val="333333"/>
+                </a:solidFill>
+                <a:latin typeface="Calibri"/>
+              </a:rPr>
+              <a:t>dentro de ese bloque</a:t>
+            </a:r>
+            <a:r>
+              <a:rPr sz="1800" b="0" i="0">
+                <a:solidFill>
+                  <a:srgbClr val="333333"/>
+                </a:solidFill>
+                <a:latin typeface="Calibri"/>
+              </a:rPr>
+              <a:t> y el resto sigue vivo. Capturar no es lo mismo que dejar propagar.</a:t>
             </a:r>
           </a:p>
           <a:p>
@@ -13082,7 +12678,7 @@
               </a:spcAft>
             </a:pPr>
             <a:r>
-              <a:rPr sz="2000" b="0" i="0">
+              <a:rPr sz="1800" b="0" i="0">
                 <a:solidFill>
                   <a:srgbClr val="333333"/>
                 </a:solidFill>
@@ -13091,13 +12687,40 @@
               <a:t>–   </a:t>
             </a:r>
             <a:r>
-              <a:rPr sz="2000" b="1" i="0">
+              <a:rPr sz="1800" b="1" i="0">
                 <a:solidFill>
                   <a:srgbClr val="333333"/>
                 </a:solidFill>
                 <a:latin typeface="Calibri"/>
               </a:rPr>
               <a:t>El contraste con Oracle, que es lo que se pregunta.</a:t>
+            </a:r>
+            <a:r>
+              <a:rPr sz="1800" b="0" i="0">
+                <a:solidFill>
+                  <a:srgbClr val="333333"/>
+                </a:solidFill>
+                <a:latin typeface="Calibri"/>
+              </a:rPr>
+              <a:t> En Oracle el procedimiento es parte de la transaccion del llamador y ahi si se escribe «EXCEPTION WHEN OTHERS THEN ROLLBACK; RAISE;». En PostgreSQL ese «ROLLBACK» dentro de un procedimiento invocado por un «CALL» de nivel superior </a:t>
+            </a:r>
+            <a:r>
+              <a:rPr sz="1800" b="1" i="0">
+                <a:solidFill>
+                  <a:srgbClr val="333333"/>
+                </a:solidFill>
+                <a:latin typeface="Calibri"/>
+              </a:rPr>
+              <a:t>ni siquiera esta permitido</a:t>
+            </a:r>
+            <a:r>
+              <a:rPr sz="1800" b="0" i="0">
+                <a:solidFill>
+                  <a:srgbClr val="333333"/>
+                </a:solidFill>
+                <a:latin typeface="Calibri"/>
+              </a:rPr>
+              <a:t>.</a:t>
             </a:r>
           </a:p>
           <a:p>
@@ -13107,7 +12730,7 @@
               </a:spcAft>
             </a:pPr>
             <a:r>
-              <a:rPr sz="2000" b="0" i="0">
+              <a:rPr sz="1800" b="0" i="0">
                 <a:solidFill>
                   <a:srgbClr val="333333"/>
                 </a:solidFill>
@@ -13116,7 +12739,7 @@
               <a:t>–   </a:t>
             </a:r>
             <a:r>
-              <a:rPr sz="2000" b="1" i="0">
+              <a:rPr sz="1800" b="1" i="0">
                 <a:solidFill>
                   <a:srgbClr val="333333"/>
                 </a:solidFill>
@@ -13125,7 +12748,7 @@
               <a:t>La consecuencia practica.</a:t>
             </a:r>
             <a:r>
-              <a:rPr sz="2000" b="0" i="0">
+              <a:rPr sz="1800" b="0" i="0">
                 <a:solidFill>
                   <a:srgbClr val="333333"/>
                 </a:solidFill>
@@ -13134,7 +12757,7 @@
               <a:t> Quien decide el «COMMIT» es </a:t>
             </a:r>
             <a:r>
-              <a:rPr sz="2000" b="1" i="0">
+              <a:rPr sz="1800" b="1" i="0">
                 <a:solidFill>
                   <a:srgbClr val="333333"/>
                 </a:solidFill>
@@ -13143,20 +12766,72 @@
               <a:t>uno solo</a:t>
             </a:r>
             <a:r>
-              <a:rPr sz="2000" b="0" i="0">
+              <a:rPr sz="1800" b="0" i="0">
                 <a:solidFill>
                   <a:srgbClr val="333333"/>
                 </a:solidFill>
                 <a:latin typeface="Calibri"/>
               </a:rPr>
-              <a:t>:</a:t>
-            </a:r>
-          </a:p>
-        </p:txBody>
-      </p:sp>
-      <p:sp>
-        <p:nvSpPr>
-          <p:cNvPr id="10" name="TextBox 9"/>
+              <a:t>: el llamador. Un procedimiento que confirma por su cuenta le quita al llamador la posibilidad de deshacer, y es la fuente numero uno de facturas a medias cuando la Clase 12 conecte la aplicacion.</a:t>
+            </a:r>
+          </a:p>
+          <a:p>
+            <a:pPr>
+              <a:spcAft>
+                <a:spcPts val="800"/>
+              </a:spcAft>
+            </a:pPr>
+            <a:r>
+              <a:rPr sz="1800" b="0" i="0">
+                <a:solidFill>
+                  <a:srgbClr val="333333"/>
+                </a:solidFill>
+                <a:latin typeface="Calibri"/>
+              </a:rPr>
+              <a:t>–   </a:t>
+            </a:r>
+            <a:r>
+              <a:rPr sz="1800" b="1" i="0">
+                <a:solidFill>
+                  <a:srgbClr val="333333"/>
+                </a:solidFill>
+                <a:latin typeface="Calibri"/>
+              </a:rPr>
+              <a:t>El error que no se perdona.</a:t>
+            </a:r>
+            <a:r>
+              <a:rPr sz="1800" b="0" i="0">
+                <a:solidFill>
+                  <a:srgbClr val="333333"/>
+                </a:solidFill>
+                <a:latin typeface="Calibri"/>
+              </a:rPr>
+              <a:t> Capturar la excepcion y no volver a lanzarla. «EXCEPTION WHEN OTHERS THEN NULL;» </a:t>
+            </a:r>
+            <a:r>
+              <a:rPr sz="1800" b="1" i="0">
+                <a:solidFill>
+                  <a:srgbClr val="333333"/>
+                </a:solidFill>
+                <a:latin typeface="Calibri"/>
+              </a:rPr>
+              <a:t>convierte el fallo en silencio</a:t>
+            </a:r>
+            <a:r>
+              <a:rPr sz="1800" b="0" i="0">
+                <a:solidFill>
+                  <a:srgbClr val="333333"/>
+                </a:solidFill>
+                <a:latin typeface="Calibri"/>
+              </a:rPr>
+              <a:t>: la factura queda registrada, el stock no se descuenta y nadie se entera hasta el inventario.</a:t>
+            </a:r>
+          </a:p>
+        </p:txBody>
+      </p:sp>
+      <p:sp>
+        <p:nvSpPr>
+          <p:cNvPr id="7" name="TextBox 6"/>
           <p:cNvSpPr txBox="1"/>
           <p:nvPr/>
         </p:nvSpPr>
@@ -16940,118 +16615,14 @@
       </p:sp>
       <p:sp>
         <p:nvSpPr>
-          <p:cNvPr id="5" name="Rounded Rectangle 4"/>
-          <p:cNvSpPr/>
-          <p:nvPr/>
-        </p:nvSpPr>
-        <p:spPr>
-          <a:xfrm>
-            <a:off x="5797149" y="1573813"/>
-            <a:ext cx="6010497" cy="4057845"/>
-          </a:xfrm>
-          <a:prstGeom prst="roundRect">
-            <a:avLst>
-              <a:gd name="adj" fmla="val 4000"/>
-            </a:avLst>
-          </a:prstGeom>
-          <a:solidFill>
-            <a:srgbClr val="E8EEF4"/>
-          </a:solidFill>
-          <a:ln>
-            <a:noFill/>
-          </a:ln>
-        </p:spPr>
-        <p:style>
-          <a:lnRef idx="1">
-            <a:schemeClr val="accent1"/>
-          </a:lnRef>
-          <a:fillRef idx="3">
-            <a:schemeClr val="accent1"/>
-          </a:fillRef>
-          <a:effectRef idx="2">
-            <a:schemeClr val="accent1"/>
-          </a:effectRef>
-          <a:fontRef idx="minor">
-            <a:schemeClr val="lt1"/>
-          </a:fontRef>
-        </p:style>
-        <p:txBody>
-          <a:bodyPr rtlCol="0" anchor="ctr"/>
-          <a:lstStyle/>
-          <a:p>
-            <a:pPr algn="ctr"/>
-          </a:p>
-        </p:txBody>
-      </p:sp>
-      <p:pic>
-        <p:nvPicPr>
-          <p:cNvPr id="6" name="Picture 5" descr="notebook-planning-desk-coffee.jpg"/>
-          <p:cNvPicPr>
-            <a:picLocks noChangeAspect="1"/>
-          </p:cNvPicPr>
-          <p:nvPr/>
-        </p:nvPicPr>
-        <p:blipFill>
-          <a:blip r:embed="rId2"/>
-          <a:stretch>
-            <a:fillRect/>
-          </a:stretch>
-        </p:blipFill>
-        <p:spPr>
-          <a:xfrm>
-            <a:off x="5870301" y="1646965"/>
-            <a:ext cx="5864193" cy="3911541"/>
-          </a:xfrm>
-          <a:prstGeom prst="rect">
-            <a:avLst/>
-          </a:prstGeom>
-        </p:spPr>
-      </p:pic>
-      <p:sp>
-        <p:nvSpPr>
-          <p:cNvPr id="7" name="TextBox 6"/>
+          <p:cNvPr id="5" name="TextBox 4"/>
           <p:cNvSpPr txBox="1"/>
           <p:nvPr/>
         </p:nvSpPr>
         <p:spPr>
           <a:xfrm>
-            <a:off x="5870301" y="5961888"/>
-            <a:ext cx="5864193" cy="320040"/>
-          </a:xfrm>
-          <a:prstGeom prst="rect">
-            <a:avLst/>
-          </a:prstGeom>
-          <a:noFill/>
-        </p:spPr>
-        <p:txBody>
-          <a:bodyPr wrap="square">
-            <a:spAutoFit/>
-          </a:bodyPr>
-          <a:lstStyle/>
-          <a:p>
-            <a:pPr algn="ctr"/>
-            <a:r>
-              <a:rPr sz="1100" b="0" i="1">
-                <a:solidFill>
-                  <a:srgbClr val="666666"/>
-                </a:solidFill>
-                <a:latin typeface="Calibri"/>
-              </a:rPr>
-              <a:t>Foto: Cup of  Couple · Pexels</a:t>
-            </a:r>
-          </a:p>
-        </p:txBody>
-      </p:sp>
-      <p:sp>
-        <p:nvSpPr>
-          <p:cNvPr id="8" name="TextBox 7"/>
-          <p:cNvSpPr txBox="1"/>
-          <p:nvPr/>
-        </p:nvSpPr>
-        <p:spPr>
-          <a:xfrm>
-            <a:off x="457200" y="1353312"/>
-            <a:ext cx="5093061" cy="5047488"/>
+            <a:off x="457200" y="1170432"/>
+            <a:ext cx="11277295" cy="5230368"/>
           </a:xfrm>
           <a:prstGeom prst="rect">
             <a:avLst/>
@@ -17172,11 +16743,61 @@
               <a:t>–   Recorrido: teoría del tema, una lámina por concepto, y demo del docente sobre la base de la clínica.</a:t>
             </a:r>
           </a:p>
-        </p:txBody>
-      </p:sp>
-      <p:sp>
-        <p:nvSpPr>
-          <p:cNvPr id="9" name="TextBox 8"/>
+          <a:p>
+            <a:pPr>
+              <a:spcAft>
+                <a:spcPts val="800"/>
+              </a:spcAft>
+            </a:pPr>
+            <a:r>
+              <a:rPr sz="2000" b="0" i="0">
+                <a:solidFill>
+                  <a:srgbClr val="333333"/>
+                </a:solidFill>
+                <a:latin typeface="Calibri"/>
+              </a:rPr>
+              <a:t>–   Cada lámina se sostiene sola: sirve para repasar aunque hayas faltado.</a:t>
+            </a:r>
+          </a:p>
+          <a:p>
+            <a:pPr>
+              <a:spcAft>
+                <a:spcPts val="800"/>
+              </a:spcAft>
+            </a:pPr>
+            <a:r>
+              <a:rPr sz="2000" b="0" i="0">
+                <a:solidFill>
+                  <a:srgbClr val="333333"/>
+                </a:solidFill>
+                <a:latin typeface="Calibri"/>
+              </a:rPr>
+              <a:t>–   </a:t>
+            </a:r>
+            <a:r>
+              <a:rPr sz="2000" b="1" i="0">
+                <a:solidFill>
+                  <a:srgbClr val="333333"/>
+                </a:solidFill>
+                <a:latin typeface="Calibri"/>
+              </a:rPr>
+              <a:t>Conceptos de hoy:</a:t>
+            </a:r>
+            <a:r>
+              <a:rPr sz="2000" b="0" i="0">
+                <a:solidFill>
+                  <a:srgbClr val="333333"/>
+                </a:solidFill>
+                <a:latin typeface="Calibri"/>
+              </a:rPr>
+              <a:t> Que es una transaccion, y las dos amenazas de las que protege · Atomicidad · Consistencia · Aislamiento.</a:t>
+            </a:r>
+          </a:p>
+        </p:txBody>
+      </p:sp>
+      <p:sp>
+        <p:nvSpPr>
+          <p:cNvPr id="6" name="TextBox 5"/>
           <p:cNvSpPr txBox="1"/>
           <p:nvPr/>
         </p:nvSpPr>
@@ -17357,118 +16978,14 @@
       </p:sp>
       <p:sp>
         <p:nvSpPr>
-          <p:cNvPr id="5" name="Rounded Rectangle 4"/>
-          <p:cNvSpPr/>
-          <p:nvPr/>
-        </p:nvSpPr>
-        <p:spPr>
-          <a:xfrm>
-            <a:off x="5797149" y="1570693"/>
-            <a:ext cx="6010497" cy="4064084"/>
-          </a:xfrm>
-          <a:prstGeom prst="roundRect">
-            <a:avLst>
-              <a:gd name="adj" fmla="val 4000"/>
-            </a:avLst>
-          </a:prstGeom>
-          <a:solidFill>
-            <a:srgbClr val="E8EEF4"/>
-          </a:solidFill>
-          <a:ln>
-            <a:noFill/>
-          </a:ln>
-        </p:spPr>
-        <p:style>
-          <a:lnRef idx="1">
-            <a:schemeClr val="accent1"/>
-          </a:lnRef>
-          <a:fillRef idx="3">
-            <a:schemeClr val="accent1"/>
-          </a:fillRef>
-          <a:effectRef idx="2">
-            <a:schemeClr val="accent1"/>
-          </a:effectRef>
-          <a:fontRef idx="minor">
-            <a:schemeClr val="lt1"/>
-          </a:fontRef>
-        </p:style>
-        <p:txBody>
-          <a:bodyPr rtlCol="0" anchor="ctr"/>
-          <a:lstStyle/>
-          <a:p>
-            <a:pPr algn="ctr"/>
-          </a:p>
-        </p:txBody>
-      </p:sp>
-      <p:pic>
-        <p:nvPicPr>
-          <p:cNvPr id="6" name="Picture 5" descr="two-paths-comparison.jpg"/>
-          <p:cNvPicPr>
-            <a:picLocks noChangeAspect="1"/>
-          </p:cNvPicPr>
-          <p:nvPr/>
-        </p:nvPicPr>
-        <p:blipFill>
-          <a:blip r:embed="rId2"/>
-          <a:stretch>
-            <a:fillRect/>
-          </a:stretch>
-        </p:blipFill>
-        <p:spPr>
-          <a:xfrm>
-            <a:off x="5870301" y="1643845"/>
-            <a:ext cx="5864193" cy="3917780"/>
-          </a:xfrm>
-          <a:prstGeom prst="rect">
-            <a:avLst/>
-          </a:prstGeom>
-        </p:spPr>
-      </p:pic>
-      <p:sp>
-        <p:nvSpPr>
-          <p:cNvPr id="7" name="TextBox 6"/>
+          <p:cNvPr id="5" name="TextBox 4"/>
           <p:cNvSpPr txBox="1"/>
           <p:nvPr/>
         </p:nvSpPr>
         <p:spPr>
           <a:xfrm>
-            <a:off x="5870301" y="5961888"/>
-            <a:ext cx="5864193" cy="320040"/>
-          </a:xfrm>
-          <a:prstGeom prst="rect">
-            <a:avLst/>
-          </a:prstGeom>
-          <a:noFill/>
-        </p:spPr>
-        <p:txBody>
-          <a:bodyPr wrap="square">
-            <a:spAutoFit/>
-          </a:bodyPr>
-          <a:lstStyle/>
-          <a:p>
-            <a:pPr algn="ctr"/>
-            <a:r>
-              <a:rPr sz="1100" b="0" i="1">
-                <a:solidFill>
-                  <a:srgbClr val="666666"/>
-                </a:solidFill>
-                <a:latin typeface="Calibri"/>
-              </a:rPr>
-              <a:t>Foto: Jan van der Wolf · Pexels</a:t>
-            </a:r>
-          </a:p>
-        </p:txBody>
-      </p:sp>
-      <p:sp>
-        <p:nvSpPr>
-          <p:cNvPr id="8" name="TextBox 7"/>
-          <p:cNvSpPr txBox="1"/>
-          <p:nvPr/>
-        </p:nvSpPr>
-        <p:spPr>
-          <a:xfrm>
-            <a:off x="457200" y="1353312"/>
-            <a:ext cx="5093061" cy="5047488"/>
+            <a:off x="457200" y="1170432"/>
+            <a:ext cx="11277295" cy="5230368"/>
           </a:xfrm>
           <a:prstGeom prst="rect">
             <a:avLst/>
@@ -17532,7 +17049,7 @@
       </p:sp>
       <p:sp>
         <p:nvSpPr>
-          <p:cNvPr id="9" name="TextBox 8"/>
+          <p:cNvPr id="6" name="TextBox 5"/>
           <p:cNvSpPr txBox="1"/>
           <p:nvPr/>
         </p:nvSpPr>
@@ -18303,118 +17820,14 @@
       </p:sp>
       <p:sp>
         <p:nvSpPr>
-          <p:cNvPr id="6" name="Rounded Rectangle 5"/>
-          <p:cNvSpPr/>
-          <p:nvPr/>
-        </p:nvSpPr>
-        <p:spPr>
-          <a:xfrm>
-            <a:off x="5797149" y="1678969"/>
-            <a:ext cx="6010497" cy="4057845"/>
-          </a:xfrm>
-          <a:prstGeom prst="roundRect">
-            <a:avLst>
-              <a:gd name="adj" fmla="val 4000"/>
-            </a:avLst>
-          </a:prstGeom>
-          <a:solidFill>
-            <a:srgbClr val="E8EEF4"/>
-          </a:solidFill>
-          <a:ln>
-            <a:noFill/>
-          </a:ln>
-        </p:spPr>
-        <p:style>
-          <a:lnRef idx="1">
-            <a:schemeClr val="accent1"/>
-          </a:lnRef>
-          <a:fillRef idx="3">
-            <a:schemeClr val="accent1"/>
-          </a:fillRef>
-          <a:effectRef idx="2">
-            <a:schemeClr val="accent1"/>
-          </a:effectRef>
-          <a:fontRef idx="minor">
-            <a:schemeClr val="lt1"/>
-          </a:fontRef>
-        </p:style>
-        <p:txBody>
-          <a:bodyPr rtlCol="0" anchor="ctr"/>
-          <a:lstStyle/>
-          <a:p>
-            <a:pPr algn="ctr"/>
-          </a:p>
-        </p:txBody>
-      </p:sp>
-      <p:pic>
-        <p:nvPicPr>
-          <p:cNvPr id="7" name="Picture 6" descr="warehouse-inventory-shelves.jpg"/>
-          <p:cNvPicPr>
-            <a:picLocks noChangeAspect="1"/>
-          </p:cNvPicPr>
-          <p:nvPr/>
-        </p:nvPicPr>
-        <p:blipFill>
-          <a:blip r:embed="rId2"/>
-          <a:stretch>
-            <a:fillRect/>
-          </a:stretch>
-        </p:blipFill>
-        <p:spPr>
-          <a:xfrm>
-            <a:off x="5870301" y="1752121"/>
-            <a:ext cx="5864193" cy="3911541"/>
-          </a:xfrm>
-          <a:prstGeom prst="rect">
-            <a:avLst/>
-          </a:prstGeom>
-        </p:spPr>
-      </p:pic>
-      <p:sp>
-        <p:nvSpPr>
-          <p:cNvPr id="8" name="TextBox 7"/>
+          <p:cNvPr id="6" name="TextBox 5"/>
           <p:cNvSpPr txBox="1"/>
           <p:nvPr/>
         </p:nvSpPr>
         <p:spPr>
           <a:xfrm>
-            <a:off x="5870301" y="5961888"/>
-            <a:ext cx="5864193" cy="320040"/>
-          </a:xfrm>
-          <a:prstGeom prst="rect">
-            <a:avLst/>
-          </a:prstGeom>
-          <a:noFill/>
-        </p:spPr>
-        <p:txBody>
-          <a:bodyPr wrap="square">
-            <a:spAutoFit/>
-          </a:bodyPr>
-          <a:lstStyle/>
-          <a:p>
-            <a:pPr algn="ctr"/>
-            <a:r>
-              <a:rPr sz="1100" b="0" i="1">
-                <a:solidFill>
-                  <a:srgbClr val="666666"/>
-                </a:solidFill>
-                <a:latin typeface="Calibri"/>
-              </a:rPr>
-              <a:t>Foto: Tiger Lily · Pexels</a:t>
-            </a:r>
-          </a:p>
-        </p:txBody>
-      </p:sp>
-      <p:sp>
-        <p:nvSpPr>
-          <p:cNvPr id="9" name="TextBox 8"/>
-          <p:cNvSpPr txBox="1"/>
-          <p:nvPr/>
-        </p:nvSpPr>
-        <p:spPr>
-          <a:xfrm>
-            <a:off x="457200" y="1563624"/>
-            <a:ext cx="5093061" cy="4837176"/>
+            <a:off x="457200" y="1380744"/>
+            <a:ext cx="11277295" cy="5020056"/>
           </a:xfrm>
           <a:prstGeom prst="rect">
             <a:avLst/>
@@ -18433,7 +17846,7 @@
               </a:spcAft>
             </a:pPr>
             <a:r>
-              <a:rPr sz="2000" b="0" i="0">
+              <a:rPr sz="1900" b="0" i="0">
                 <a:solidFill>
                   <a:srgbClr val="333333"/>
                 </a:solidFill>
@@ -18442,7 +17855,7 @@
               <a:t>–   </a:t>
             </a:r>
             <a:r>
-              <a:rPr sz="2000" b="1" i="0">
+              <a:rPr sz="1900" b="1" i="0">
                 <a:solidFill>
                   <a:srgbClr val="333333"/>
                 </a:solidFill>
@@ -18451,7 +17864,7 @@
               <a:t>La diferencia.</a:t>
             </a:r>
             <a:r>
-              <a:rPr sz="2000" b="0" i="0">
+              <a:rPr sz="1900" b="0" i="0">
                 <a:solidFill>
                   <a:srgbClr val="333333"/>
                 </a:solidFill>
@@ -18460,7 +17873,7 @@
               <a:t> El procedimiento </a:t>
             </a:r>
             <a:r>
-              <a:rPr sz="2000" b="1" i="0">
+              <a:rPr sz="1900" b="1" i="0">
                 <a:solidFill>
                   <a:srgbClr val="333333"/>
                 </a:solidFill>
@@ -18469,13 +17882,31 @@
               <a:t>aborta</a:t>
             </a:r>
             <a:r>
-              <a:rPr sz="2000" b="0" i="0">
+              <a:rPr sz="1900" b="0" i="0">
                 <a:solidFill>
                   <a:srgbClr val="333333"/>
                 </a:solidFill>
                 <a:latin typeface="Calibri"/>
               </a:rPr>
-              <a:t> la factura completa;</a:t>
+              <a:t> la factura completa; la funcion </a:t>
+            </a:r>
+            <a:r>
+              <a:rPr sz="1900" b="1" i="0">
+                <a:solidFill>
+                  <a:srgbClr val="333333"/>
+                </a:solidFill>
+                <a:latin typeface="Calibri"/>
+              </a:rPr>
+              <a:t>informa</a:t>
+            </a:r>
+            <a:r>
+              <a:rPr sz="1900" b="0" i="0">
+                <a:solidFill>
+                  <a:srgbClr val="333333"/>
+                </a:solidFill>
+                <a:latin typeface="Calibri"/>
+              </a:rPr>
+              <a:t> y deja que el llamador decida. La misma regla de negocio, dos contratos distintos, y hay que saber cual se pide.</a:t>
             </a:r>
           </a:p>
           <a:p>
@@ -18485,7 +17916,7 @@
               </a:spcAft>
             </a:pPr>
             <a:r>
-              <a:rPr sz="2000" b="0" i="0">
+              <a:rPr sz="1900" b="0" i="0">
                 <a:solidFill>
                   <a:srgbClr val="333333"/>
                 </a:solidFill>
@@ -18494,13 +17925,58 @@
               <a:t>–   </a:t>
             </a:r>
             <a:r>
-              <a:rPr sz="2000" b="1" i="0">
+              <a:rPr sz="1900" b="1" i="0">
                 <a:solidFill>
                   <a:srgbClr val="333333"/>
                 </a:solidFill>
                 <a:latin typeface="Calibri"/>
               </a:rPr>
               <a:t>La firma, y su palabra clave.</a:t>
+            </a:r>
+            <a:r>
+              <a:rPr sz="1900" b="0" i="0">
+                <a:solidFill>
+                  <a:srgbClr val="333333"/>
+                </a:solidFill>
+                <a:latin typeface="Calibri"/>
+              </a:rPr>
+              <a:t> «CREATE OR REPLACE FUNCTION fn_descontar_stock(p_id_insumo INT, p_cantidad INT) RETURNS BOOLEAN LANGUAGE plpgsql AS $$ ...» — </a:t>
+            </a:r>
+            <a:r>
+              <a:rPr sz="1900" b="1" i="0">
+                <a:solidFill>
+                  <a:srgbClr val="333333"/>
+                </a:solidFill>
+                <a:latin typeface="Calibri"/>
+              </a:rPr>
+              <a:t>«RETURNS BOOLEAN»</a:t>
+            </a:r>
+            <a:r>
+              <a:rPr sz="1900" b="0" i="0">
+                <a:solidFill>
+                  <a:srgbClr val="333333"/>
+                </a:solidFill>
+                <a:latin typeface="Calibri"/>
+              </a:rPr>
+              <a:t>, no «PROCEDURE». Devuelve «TRUE» si desconto y «FALSE» si no habia suficiente, </a:t>
+            </a:r>
+            <a:r>
+              <a:rPr sz="1900" b="1" i="0">
+                <a:solidFill>
+                  <a:srgbClr val="333333"/>
+                </a:solidFill>
+                <a:latin typeface="Calibri"/>
+              </a:rPr>
+              <a:t>sin lanzar excepcion</a:t>
+            </a:r>
+            <a:r>
+              <a:rPr sz="1900" b="0" i="0">
+                <a:solidFill>
+                  <a:srgbClr val="333333"/>
+                </a:solidFill>
+                <a:latin typeface="Calibri"/>
+              </a:rPr>
+              <a:t> en ese segundo caso.</a:t>
             </a:r>
           </a:p>
           <a:p>
@@ -18510,7 +17986,7 @@
               </a:spcAft>
             </a:pPr>
             <a:r>
-              <a:rPr sz="2000" b="0" i="0">
+              <a:rPr sz="1900" b="0" i="0">
                 <a:solidFill>
                   <a:srgbClr val="333333"/>
                 </a:solidFill>
@@ -18519,7 +17995,7 @@
               <a:t>–   </a:t>
             </a:r>
             <a:r>
-              <a:rPr sz="2000" b="1" i="0">
+              <a:rPr sz="1900" b="1" i="0">
                 <a:solidFill>
                   <a:srgbClr val="333333"/>
                 </a:solidFill>
@@ -18528,13 +18004,31 @@
               <a:t>Lo que si es un error.</a:t>
             </a:r>
             <a:r>
-              <a:rPr sz="2000" b="0" i="0">
+              <a:rPr sz="1900" b="0" i="0">
                 <a:solidFill>
                   <a:srgbClr val="333333"/>
                 </a:solidFill>
                 <a:latin typeface="Calibri"/>
               </a:rPr>
-              <a:t> Una cantidad negativa o cero no es «no hay stock», es una llamada mal hecha:</a:t>
+              <a:t> Una cantidad negativa o cero no es «no hay stock», es una llamada mal hecha: eso </a:t>
+            </a:r>
+            <a:r>
+              <a:rPr sz="1900" b="1" i="0">
+                <a:solidFill>
+                  <a:srgbClr val="333333"/>
+                </a:solidFill>
+                <a:latin typeface="Calibri"/>
+              </a:rPr>
+              <a:t>si</a:t>
+            </a:r>
+            <a:r>
+              <a:rPr sz="1900" b="0" i="0">
+                <a:solidFill>
+                  <a:srgbClr val="333333"/>
+                </a:solidFill>
+                <a:latin typeface="Calibri"/>
+              </a:rPr>
+              <a:t> va con «RAISE EXCEPTION». Distinguir el dato invalido del resultado negativo es la mitad de la pregunta.</a:t>
             </a:r>
           </a:p>
           <a:p>
@@ -18544,7 +18038,7 @@
               </a:spcAft>
             </a:pPr>
             <a:r>
-              <a:rPr sz="2000" b="0" i="0">
+              <a:rPr sz="1900" b="0" i="0">
                 <a:solidFill>
                   <a:srgbClr val="333333"/>
                 </a:solidFill>
@@ -18553,7 +18047,7 @@
               <a:t>–   </a:t>
             </a:r>
             <a:r>
-              <a:rPr sz="2000" b="1" i="0">
+              <a:rPr sz="1900" b="1" i="0">
                 <a:solidFill>
                   <a:srgbClr val="333333"/>
                 </a:solidFill>
@@ -18561,12 +18055,145 @@
               </a:rPr>
               <a:t>Se prueba en una sola consulta.</a:t>
             </a:r>
-          </a:p>
-        </p:txBody>
-      </p:sp>
-      <p:sp>
-        <p:nvSpPr>
-          <p:cNvPr id="10" name="TextBox 9"/>
+            <a:r>
+              <a:rPr sz="1900" b="0" i="0">
+                <a:solidFill>
+                  <a:srgbClr val="333333"/>
+                </a:solidFill>
+                <a:latin typeface="Calibri"/>
+              </a:rPr>
+              <a:t> «SELECT fn_descontar_stock(5,3) AS caso_ok, fn_descontar_stock(2,10) AS caso_sin_stock, fn_descontar_stock(2,3) AS caso_limite;» -&gt; </a:t>
+            </a:r>
+            <a:r>
+              <a:rPr sz="1900" b="1" i="0">
+                <a:solidFill>
+                  <a:srgbClr val="333333"/>
+                </a:solidFill>
+                <a:latin typeface="Calibri"/>
+              </a:rPr>
+              <a:t>«true», «false», «true»</a:t>
+            </a:r>
+            <a:r>
+              <a:rPr sz="1900" b="0" i="0">
+                <a:solidFill>
+                  <a:srgbClr val="333333"/>
+                </a:solidFill>
+                <a:latin typeface="Calibri"/>
+              </a:rPr>
+              <a:t>. El tercer caso es el interesante: pide </a:t>
+            </a:r>
+            <a:r>
+              <a:rPr sz="1900" b="1" i="0">
+                <a:solidFill>
+                  <a:srgbClr val="333333"/>
+                </a:solidFill>
+                <a:latin typeface="Calibri"/>
+              </a:rPr>
+              <a:t>exactamente</a:t>
+            </a:r>
+            <a:r>
+              <a:rPr sz="1900" b="0" i="0">
+                <a:solidFill>
+                  <a:srgbClr val="333333"/>
+                </a:solidFill>
+                <a:latin typeface="Calibri"/>
+              </a:rPr>
+              <a:t> el stock que queda, y con «&gt;=» en el guardia tiene que pasar.</a:t>
+            </a:r>
+          </a:p>
+          <a:p>
+            <a:pPr>
+              <a:spcAft>
+                <a:spcPts val="800"/>
+              </a:spcAft>
+            </a:pPr>
+            <a:r>
+              <a:rPr sz="1900" b="0" i="0">
+                <a:solidFill>
+                  <a:srgbClr val="333333"/>
+                </a:solidFill>
+                <a:latin typeface="Calibri"/>
+              </a:rPr>
+              <a:t>–   </a:t>
+            </a:r>
+            <a:r>
+              <a:rPr sz="1900" b="1" i="0">
+                <a:solidFill>
+                  <a:srgbClr val="333333"/>
+                </a:solidFill>
+                <a:latin typeface="Calibri"/>
+              </a:rPr>
+              <a:t>Por que no leer primero.</a:t>
+            </a:r>
+            <a:r>
+              <a:rPr sz="1900" b="0" i="0">
+                <a:solidFill>
+                  <a:srgbClr val="333333"/>
+                </a:solidFill>
+                <a:latin typeface="Calibri"/>
+              </a:rPr>
+              <a:t> «SELECT stock ...; IF stock &gt;= cantidad THEN UPDATE ...» deja una </a:t>
+            </a:r>
+            <a:r>
+              <a:rPr sz="1900" b="1" i="0">
+                <a:solidFill>
+                  <a:srgbClr val="333333"/>
+                </a:solidFill>
+                <a:latin typeface="Calibri"/>
+              </a:rPr>
+              <a:t>ventana</a:t>
+            </a:r>
+            <a:r>
+              <a:rPr sz="1900" b="0" i="0">
+                <a:solidFill>
+                  <a:srgbClr val="333333"/>
+                </a:solidFill>
+                <a:latin typeface="Calibri"/>
+              </a:rPr>
+              <a:t> entre la lectura y la escritura, y con dos recepcionistas facturando el mismo insumo las dos leen 3, las dos deciden que alcanza y el stock termina en </a:t>
+            </a:r>
+            <a:r>
+              <a:rPr sz="1900" b="1" i="0">
+                <a:solidFill>
+                  <a:srgbClr val="333333"/>
+                </a:solidFill>
+                <a:latin typeface="Calibri"/>
+              </a:rPr>
+              <a:t>-2</a:t>
+            </a:r>
+            <a:r>
+              <a:rPr sz="1900" b="0" i="0">
+                <a:solidFill>
+                  <a:srgbClr val="333333"/>
+                </a:solidFill>
+                <a:latin typeface="Calibri"/>
+              </a:rPr>
+              <a:t>. El «UPDATE» con la condicion en el «WHERE» no tiene ventana. Aqui no se puede demostrar —PGlite corre </a:t>
+            </a:r>
+            <a:r>
+              <a:rPr sz="1900" b="1" i="0">
+                <a:solidFill>
+                  <a:srgbClr val="333333"/>
+                </a:solidFill>
+                <a:latin typeface="Calibri"/>
+              </a:rPr>
+              <a:t>una sola sesion</a:t>
+            </a:r>
+            <a:r>
+              <a:rPr sz="1900" b="0" i="0">
+                <a:solidFill>
+                  <a:srgbClr val="333333"/>
+                </a:solidFill>
+                <a:latin typeface="Calibri"/>
+              </a:rPr>
+              <a:t>— y ese es el gap que se declara y que abre la Clase 10.</a:t>
+            </a:r>
+          </a:p>
+        </p:txBody>
+      </p:sp>
+      <p:sp>
+        <p:nvSpPr>
+          <p:cNvPr id="7" name="TextBox 6"/>
           <p:cNvSpPr txBox="1"/>
           <p:nvPr/>
         </p:nvSpPr>
@@ -19287,118 +18914,14 @@
       </p:sp>
       <p:sp>
         <p:nvSpPr>
-          <p:cNvPr id="5" name="Rounded Rectangle 4"/>
-          <p:cNvSpPr/>
-          <p:nvPr/>
-        </p:nvSpPr>
-        <p:spPr>
-          <a:xfrm>
-            <a:off x="5797149" y="1573813"/>
-            <a:ext cx="6010497" cy="4057845"/>
-          </a:xfrm>
-          <a:prstGeom prst="roundRect">
-            <a:avLst>
-              <a:gd name="adj" fmla="val 4000"/>
-            </a:avLst>
-          </a:prstGeom>
-          <a:solidFill>
-            <a:srgbClr val="E8EEF4"/>
-          </a:solidFill>
-          <a:ln>
-            <a:noFill/>
-          </a:ln>
-        </p:spPr>
-        <p:style>
-          <a:lnRef idx="1">
-            <a:schemeClr val="accent1"/>
-          </a:lnRef>
-          <a:fillRef idx="3">
-            <a:schemeClr val="accent1"/>
-          </a:fillRef>
-          <a:effectRef idx="2">
-            <a:schemeClr val="accent1"/>
-          </a:effectRef>
-          <a:fontRef idx="minor">
-            <a:schemeClr val="lt1"/>
-          </a:fontRef>
-        </p:style>
-        <p:txBody>
-          <a:bodyPr rtlCol="0" anchor="ctr"/>
-          <a:lstStyle/>
-          <a:p>
-            <a:pPr algn="ctr"/>
-          </a:p>
-        </p:txBody>
-      </p:sp>
-      <p:pic>
-        <p:nvPicPr>
-          <p:cNvPr id="6" name="Picture 5" descr="laptop-presentation-demo.jpg"/>
-          <p:cNvPicPr>
-            <a:picLocks noChangeAspect="1"/>
-          </p:cNvPicPr>
-          <p:nvPr/>
-        </p:nvPicPr>
-        <p:blipFill>
-          <a:blip r:embed="rId2"/>
-          <a:stretch>
-            <a:fillRect/>
-          </a:stretch>
-        </p:blipFill>
-        <p:spPr>
-          <a:xfrm>
-            <a:off x="5870301" y="1646965"/>
-            <a:ext cx="5864193" cy="3911541"/>
-          </a:xfrm>
-          <a:prstGeom prst="rect">
-            <a:avLst/>
-          </a:prstGeom>
-        </p:spPr>
-      </p:pic>
-      <p:sp>
-        <p:nvSpPr>
-          <p:cNvPr id="7" name="TextBox 6"/>
+          <p:cNvPr id="5" name="TextBox 4"/>
           <p:cNvSpPr txBox="1"/>
           <p:nvPr/>
         </p:nvSpPr>
         <p:spPr>
           <a:xfrm>
-            <a:off x="5870301" y="5961888"/>
-            <a:ext cx="5864193" cy="320040"/>
-          </a:xfrm>
-          <a:prstGeom prst="rect">
-            <a:avLst/>
-          </a:prstGeom>
-          <a:noFill/>
-        </p:spPr>
-        <p:txBody>
-          <a:bodyPr wrap="square">
-            <a:spAutoFit/>
-          </a:bodyPr>
-          <a:lstStyle/>
-          <a:p>
-            <a:pPr algn="ctr"/>
-            <a:r>
-              <a:rPr sz="1100" b="0" i="1">
-                <a:solidFill>
-                  <a:srgbClr val="666666"/>
-                </a:solidFill>
-                <a:latin typeface="Calibri"/>
-              </a:rPr>
-              <a:t>Foto: Matheus Bertelli · Pexels</a:t>
-            </a:r>
-          </a:p>
-        </p:txBody>
-      </p:sp>
-      <p:sp>
-        <p:nvSpPr>
-          <p:cNvPr id="8" name="TextBox 7"/>
-          <p:cNvSpPr txBox="1"/>
-          <p:nvPr/>
-        </p:nvSpPr>
-        <p:spPr>
-          <a:xfrm>
-            <a:off x="457200" y="1353312"/>
-            <a:ext cx="5093061" cy="5047488"/>
+            <a:off x="457200" y="1170432"/>
+            <a:ext cx="11277295" cy="5230368"/>
           </a:xfrm>
           <a:prstGeom prst="rect">
             <a:avLst/>
@@ -19478,7 +19001,7 @@
       </p:sp>
       <p:sp>
         <p:nvSpPr>
-          <p:cNvPr id="9" name="TextBox 8"/>
+          <p:cNvPr id="6" name="TextBox 5"/>
           <p:cNvSpPr txBox="1"/>
           <p:nvPr/>
         </p:nvSpPr>
@@ -19659,118 +19182,14 @@
       </p:sp>
       <p:sp>
         <p:nvSpPr>
-          <p:cNvPr id="5" name="Rounded Rectangle 4"/>
-          <p:cNvSpPr/>
-          <p:nvPr/>
-        </p:nvSpPr>
-        <p:spPr>
-          <a:xfrm>
-            <a:off x="5797149" y="1573813"/>
-            <a:ext cx="6010497" cy="4057845"/>
-          </a:xfrm>
-          <a:prstGeom prst="roundRect">
-            <a:avLst>
-              <a:gd name="adj" fmla="val 4000"/>
-            </a:avLst>
-          </a:prstGeom>
-          <a:solidFill>
-            <a:srgbClr val="E8EEF4"/>
-          </a:solidFill>
-          <a:ln>
-            <a:noFill/>
-          </a:ln>
-        </p:spPr>
-        <p:style>
-          <a:lnRef idx="1">
-            <a:schemeClr val="accent1"/>
-          </a:lnRef>
-          <a:fillRef idx="3">
-            <a:schemeClr val="accent1"/>
-          </a:fillRef>
-          <a:effectRef idx="2">
-            <a:schemeClr val="accent1"/>
-          </a:effectRef>
-          <a:fontRef idx="minor">
-            <a:schemeClr val="lt1"/>
-          </a:fontRef>
-        </p:style>
-        <p:txBody>
-          <a:bodyPr rtlCol="0" anchor="ctr"/>
-          <a:lstStyle/>
-          <a:p>
-            <a:pPr algn="ctr"/>
-          </a:p>
-        </p:txBody>
-      </p:sp>
-      <p:pic>
-        <p:nvPicPr>
-          <p:cNvPr id="6" name="Picture 5" descr="laptop-database-browser.jpg"/>
-          <p:cNvPicPr>
-            <a:picLocks noChangeAspect="1"/>
-          </p:cNvPicPr>
-          <p:nvPr/>
-        </p:nvPicPr>
-        <p:blipFill>
-          <a:blip r:embed="rId2"/>
-          <a:stretch>
-            <a:fillRect/>
-          </a:stretch>
-        </p:blipFill>
-        <p:spPr>
-          <a:xfrm>
-            <a:off x="5870301" y="1646965"/>
-            <a:ext cx="5864193" cy="3911541"/>
-          </a:xfrm>
-          <a:prstGeom prst="rect">
-            <a:avLst/>
-          </a:prstGeom>
-        </p:spPr>
-      </p:pic>
-      <p:sp>
-        <p:nvSpPr>
-          <p:cNvPr id="7" name="TextBox 6"/>
+          <p:cNvPr id="5" name="TextBox 4"/>
           <p:cNvSpPr txBox="1"/>
           <p:nvPr/>
         </p:nvSpPr>
         <p:spPr>
           <a:xfrm>
-            <a:off x="5870301" y="5961888"/>
-            <a:ext cx="5864193" cy="320040"/>
-          </a:xfrm>
-          <a:prstGeom prst="rect">
-            <a:avLst/>
-          </a:prstGeom>
-          <a:noFill/>
-        </p:spPr>
-        <p:txBody>
-          <a:bodyPr wrap="square">
-            <a:spAutoFit/>
-          </a:bodyPr>
-          <a:lstStyle/>
-          <a:p>
-            <a:pPr algn="ctr"/>
-            <a:r>
-              <a:rPr sz="1100" b="0" i="1">
-                <a:solidFill>
-                  <a:srgbClr val="666666"/>
-                </a:solidFill>
-                <a:latin typeface="Calibri"/>
-              </a:rPr>
-              <a:t>Foto: Rafael Minguet Delgado · Pexels</a:t>
-            </a:r>
-          </a:p>
-        </p:txBody>
-      </p:sp>
-      <p:sp>
-        <p:nvSpPr>
-          <p:cNvPr id="8" name="TextBox 7"/>
-          <p:cNvSpPr txBox="1"/>
-          <p:nvPr/>
-        </p:nvSpPr>
-        <p:spPr>
-          <a:xfrm>
-            <a:off x="457200" y="1353312"/>
-            <a:ext cx="5093061" cy="5047488"/>
+            <a:off x="457200" y="1170432"/>
+            <a:ext cx="11277295" cy="5230368"/>
           </a:xfrm>
           <a:prstGeom prst="rect">
             <a:avLst/>
@@ -19834,7 +19253,7 @@
       </p:sp>
       <p:sp>
         <p:nvSpPr>
-          <p:cNvPr id="9" name="TextBox 8"/>
+          <p:cNvPr id="6" name="TextBox 5"/>
           <p:cNvSpPr txBox="1"/>
           <p:nvPr/>
         </p:nvSpPr>
@@ -20015,118 +19434,14 @@
       </p:sp>
       <p:sp>
         <p:nvSpPr>
-          <p:cNvPr id="5" name="Rounded Rectangle 4"/>
-          <p:cNvSpPr/>
-          <p:nvPr/>
-        </p:nvSpPr>
-        <p:spPr>
-          <a:xfrm>
-            <a:off x="5797149" y="1573813"/>
-            <a:ext cx="6010497" cy="4057845"/>
-          </a:xfrm>
-          <a:prstGeom prst="roundRect">
-            <a:avLst>
-              <a:gd name="adj" fmla="val 4000"/>
-            </a:avLst>
-          </a:prstGeom>
-          <a:solidFill>
-            <a:srgbClr val="E8EEF4"/>
-          </a:solidFill>
-          <a:ln>
-            <a:noFill/>
-          </a:ln>
-        </p:spPr>
-        <p:style>
-          <a:lnRef idx="1">
-            <a:schemeClr val="accent1"/>
-          </a:lnRef>
-          <a:fillRef idx="3">
-            <a:schemeClr val="accent1"/>
-          </a:fillRef>
-          <a:effectRef idx="2">
-            <a:schemeClr val="accent1"/>
-          </a:effectRef>
-          <a:fontRef idx="minor">
-            <a:schemeClr val="lt1"/>
-          </a:fontRef>
-        </p:style>
-        <p:txBody>
-          <a:bodyPr rtlCol="0" anchor="ctr"/>
-          <a:lstStyle/>
-          <a:p>
-            <a:pPr algn="ctr"/>
-          </a:p>
-        </p:txBody>
-      </p:sp>
-      <p:pic>
-        <p:nvPicPr>
-          <p:cNvPr id="6" name="Picture 5" descr="laptop-code-live-demo.jpg"/>
-          <p:cNvPicPr>
-            <a:picLocks noChangeAspect="1"/>
-          </p:cNvPicPr>
-          <p:nvPr/>
-        </p:nvPicPr>
-        <p:blipFill>
-          <a:blip r:embed="rId2"/>
-          <a:stretch>
-            <a:fillRect/>
-          </a:stretch>
-        </p:blipFill>
-        <p:spPr>
-          <a:xfrm>
-            <a:off x="5870301" y="1646965"/>
-            <a:ext cx="5864193" cy="3911541"/>
-          </a:xfrm>
-          <a:prstGeom prst="rect">
-            <a:avLst/>
-          </a:prstGeom>
-        </p:spPr>
-      </p:pic>
-      <p:sp>
-        <p:nvSpPr>
-          <p:cNvPr id="7" name="TextBox 6"/>
+          <p:cNvPr id="5" name="TextBox 4"/>
           <p:cNvSpPr txBox="1"/>
           <p:nvPr/>
         </p:nvSpPr>
         <p:spPr>
           <a:xfrm>
-            <a:off x="5870301" y="5961888"/>
-            <a:ext cx="5864193" cy="320040"/>
-          </a:xfrm>
-          <a:prstGeom prst="rect">
-            <a:avLst/>
-          </a:prstGeom>
-          <a:noFill/>
-        </p:spPr>
-        <p:txBody>
-          <a:bodyPr wrap="square">
-            <a:spAutoFit/>
-          </a:bodyPr>
-          <a:lstStyle/>
-          <a:p>
-            <a:pPr algn="ctr"/>
-            <a:r>
-              <a:rPr sz="1100" b="0" i="1">
-                <a:solidFill>
-                  <a:srgbClr val="666666"/>
-                </a:solidFill>
-                <a:latin typeface="Calibri"/>
-              </a:rPr>
-              <a:t>Foto: olia danilevich · Pexels</a:t>
-            </a:r>
-          </a:p>
-        </p:txBody>
-      </p:sp>
-      <p:sp>
-        <p:nvSpPr>
-          <p:cNvPr id="8" name="TextBox 7"/>
-          <p:cNvSpPr txBox="1"/>
-          <p:nvPr/>
-        </p:nvSpPr>
-        <p:spPr>
-          <a:xfrm>
-            <a:off x="457200" y="1353312"/>
-            <a:ext cx="5093061" cy="5047488"/>
+            <a:off x="457200" y="1170432"/>
+            <a:ext cx="11277295" cy="5230368"/>
           </a:xfrm>
           <a:prstGeom prst="rect">
             <a:avLst/>
@@ -20196,6 +19511,15 @@
               </a:rPr>
               <a:t>Demo:</a:t>
             </a:r>
+            <a:r>
+              <a:rPr sz="2000" b="0" i="0">
+                <a:solidFill>
+                  <a:srgbClr val="333333"/>
+                </a:solidFill>
+                <a:latin typeface="Calibri"/>
+              </a:rPr>
+              <a:t> CALL sp_facturar(4, ARRAY[1,6,5], ARRAY[1,2,3]) que factura 27.400, y CALL sp_facturar(4, ARRAY[3,2], ARRAY[2,10]) que falla en la segunda linea: el stock del insumo 3 vuelve a 40 sin ROLLBACK escrito.</a:t>
+            </a:r>
           </a:p>
           <a:p>
             <a:pPr>
@@ -20251,7 +19575,7 @@
       </p:sp>
       <p:sp>
         <p:nvSpPr>
-          <p:cNvPr id="9" name="TextBox 8"/>
+          <p:cNvPr id="6" name="TextBox 5"/>
           <p:cNvSpPr txBox="1"/>
           <p:nvPr/>
         </p:nvSpPr>
